--- a/promo/dl/brochure/bookie-complete-5p-edit.pptx
+++ b/promo/dl/brochure/bookie-complete-5p-edit.pptx
@@ -2396,7 +2396,7 @@
                   <a:srgbClr val="101D42"/>
                 </a:solidFill>
                 <a:latin typeface="Noto Serif KR Black" pitchFamily="34" charset="0"/>
-                <a:ea typeface="Noto Serif KR Black" pitchFamily="34" charset="-122"/>
+                <a:ea typeface="Noto Serif KR Black" pitchFamily="34" charset="-127"/>
                 <a:cs typeface="Noto Serif KR Black" pitchFamily="34" charset="-120"/>
               </a:rPr>
               <a:t>AI 시대,</a:t>
@@ -2438,7 +2438,7 @@
                   <a:srgbClr val="101D42"/>
                 </a:solidFill>
                 <a:latin typeface="Noto Serif KR Black" pitchFamily="34" charset="0"/>
-                <a:ea typeface="Noto Serif KR Black" pitchFamily="34" charset="-122"/>
+                <a:ea typeface="Noto Serif KR Black" pitchFamily="34" charset="-127"/>
                 <a:cs typeface="Noto Serif KR Black" pitchFamily="34" charset="-120"/>
               </a:rPr>
               <a:t>독서는 모든 학습의</a:t>
@@ -2480,7 +2480,7 @@
                   <a:srgbClr val="15543C"/>
                 </a:solidFill>
                 <a:latin typeface="Noto Serif KR Black" pitchFamily="34" charset="0"/>
-                <a:ea typeface="Noto Serif KR Black" pitchFamily="34" charset="-122"/>
+                <a:ea typeface="Noto Serif KR Black" pitchFamily="34" charset="-127"/>
                 <a:cs typeface="Noto Serif KR Black" pitchFamily="34" charset="-120"/>
               </a:rPr>
               <a:t>기본</a:t>
@@ -2497,7 +2497,7 @@
                   <a:srgbClr val="101D42"/>
                 </a:solidFill>
                 <a:latin typeface="Noto Serif KR Black" pitchFamily="34" charset="0"/>
-                <a:ea typeface="Noto Serif KR Black" pitchFamily="34" charset="-122"/>
+                <a:ea typeface="Noto Serif KR Black" pitchFamily="34" charset="-127"/>
                 <a:cs typeface="Noto Serif KR Black" pitchFamily="34" charset="-120"/>
               </a:rPr>
               <a:t>입니다.</a:t>
@@ -2539,7 +2539,7 @@
                   <a:srgbClr val="101D42"/>
                 </a:solidFill>
                 <a:latin typeface="Noto Sans KR" pitchFamily="34" charset="0"/>
-                <a:ea typeface="Noto Sans KR" pitchFamily="34" charset="-122"/>
+                <a:ea typeface="Noto Sans KR" pitchFamily="34" charset="-127"/>
                 <a:cs typeface="Noto Sans KR" pitchFamily="34" charset="-120"/>
               </a:rPr>
               <a:t>AI가 답을 내놓아도,</a:t>
@@ -2562,7 +2562,7 @@
                   <a:srgbClr val="FFF0AD"/>
                 </a:highlight>
                 <a:latin typeface="Noto Sans KR" pitchFamily="34" charset="0"/>
-                <a:ea typeface="Noto Sans KR" pitchFamily="34" charset="-122"/>
+                <a:ea typeface="Noto Sans KR" pitchFamily="34" charset="-127"/>
                 <a:cs typeface="Noto Sans KR" pitchFamily="34" charset="-120"/>
               </a:rPr>
               <a:t>읽고 이해하고 판단하는 힘</a:t>
@@ -2579,7 +2579,7 @@
                   <a:srgbClr val="101D42"/>
                 </a:solidFill>
                 <a:latin typeface="Noto Sans KR" pitchFamily="34" charset="0"/>
-                <a:ea typeface="Noto Sans KR" pitchFamily="34" charset="-122"/>
+                <a:ea typeface="Noto Sans KR" pitchFamily="34" charset="-127"/>
                 <a:cs typeface="Noto Sans KR" pitchFamily="34" charset="-120"/>
               </a:rPr>
               <a:t>은 학생 안에 있어야 합니다.</a:t>
@@ -2621,7 +2621,7 @@
                   <a:srgbClr val="15543C"/>
                 </a:solidFill>
                 <a:latin typeface="Noto Serif KR Black" pitchFamily="34" charset="0"/>
-                <a:ea typeface="Noto Serif KR Black" pitchFamily="34" charset="-122"/>
+                <a:ea typeface="Noto Serif KR Black" pitchFamily="34" charset="-127"/>
                 <a:cs typeface="Noto Serif KR Black" pitchFamily="34" charset="-120"/>
               </a:rPr>
               <a:t>학습의 기본</a:t>
@@ -2663,7 +2663,7 @@
                   <a:srgbClr val="15543C"/>
                 </a:solidFill>
                 <a:latin typeface="Noto Serif KR Black" pitchFamily="34" charset="0"/>
-                <a:ea typeface="Noto Serif KR Black" pitchFamily="34" charset="-122"/>
+                <a:ea typeface="Noto Serif KR Black" pitchFamily="34" charset="-127"/>
                 <a:cs typeface="Noto Serif KR Black" pitchFamily="34" charset="-120"/>
               </a:rPr>
               <a:t>사고의 기본</a:t>
@@ -2705,7 +2705,7 @@
                   <a:srgbClr val="15543C"/>
                 </a:solidFill>
                 <a:latin typeface="Noto Serif KR Black" pitchFamily="34" charset="0"/>
-                <a:ea typeface="Noto Serif KR Black" pitchFamily="34" charset="-122"/>
+                <a:ea typeface="Noto Serif KR Black" pitchFamily="34" charset="-127"/>
                 <a:cs typeface="Noto Serif KR Black" pitchFamily="34" charset="-120"/>
               </a:rPr>
               <a:t>삶의 기본</a:t>
@@ -2747,7 +2747,7 @@
                   <a:srgbClr val="101D42"/>
                 </a:solidFill>
                 <a:latin typeface="Noto Sans KR" pitchFamily="34" charset="0"/>
-                <a:ea typeface="Noto Sans KR" pitchFamily="34" charset="-122"/>
+                <a:ea typeface="Noto Sans KR" pitchFamily="34" charset="-127"/>
                 <a:cs typeface="Noto Sans KR" pitchFamily="34" charset="-120"/>
               </a:rPr>
               <a:t>낱말과 문장의 뜻을 이해하고</a:t>
@@ -2770,7 +2770,7 @@
                   <a:srgbClr val="FFF0AD"/>
                 </a:highlight>
                 <a:latin typeface="Noto Sans KR" pitchFamily="34" charset="0"/>
-                <a:ea typeface="Noto Sans KR" pitchFamily="34" charset="-122"/>
+                <a:ea typeface="Noto Sans KR" pitchFamily="34" charset="-127"/>
                 <a:cs typeface="Noto Sans KR" pitchFamily="34" charset="-120"/>
               </a:rPr>
               <a:t>모든 교과의 학습</a:t>
@@ -2787,7 +2787,7 @@
                   <a:srgbClr val="101D42"/>
                 </a:solidFill>
                 <a:latin typeface="Noto Sans KR" pitchFamily="34" charset="0"/>
-                <a:ea typeface="Noto Sans KR" pitchFamily="34" charset="-122"/>
+                <a:ea typeface="Noto Sans KR" pitchFamily="34" charset="-127"/>
                 <a:cs typeface="Noto Sans KR" pitchFamily="34" charset="-120"/>
               </a:rPr>
               <a:t>을 이어 가는 힘</a:t>
@@ -2829,7 +2829,7 @@
                   <a:srgbClr val="101D42"/>
                 </a:solidFill>
                 <a:latin typeface="Noto Sans KR" pitchFamily="34" charset="0"/>
-                <a:ea typeface="Noto Sans KR" pitchFamily="34" charset="-122"/>
+                <a:ea typeface="Noto Sans KR" pitchFamily="34" charset="-127"/>
                 <a:cs typeface="Noto Sans KR" pitchFamily="34" charset="-120"/>
               </a:rPr>
               <a:t>근거를 찾고 질문하며</a:t>
@@ -2849,7 +2849,7 @@
                   <a:srgbClr val="101D42"/>
                 </a:solidFill>
                 <a:latin typeface="Noto Sans KR" pitchFamily="34" charset="0"/>
-                <a:ea typeface="Noto Sans KR" pitchFamily="34" charset="-122"/>
+                <a:ea typeface="Noto Sans KR" pitchFamily="34" charset="-127"/>
                 <a:cs typeface="Noto Sans KR" pitchFamily="34" charset="-120"/>
               </a:rPr>
               <a:t>자기 생각을 세우는 힘</a:t>
@@ -2891,7 +2891,7 @@
                   <a:srgbClr val="101D42"/>
                 </a:solidFill>
                 <a:latin typeface="Noto Sans KR" pitchFamily="34" charset="0"/>
-                <a:ea typeface="Noto Sans KR" pitchFamily="34" charset="-122"/>
+                <a:ea typeface="Noto Sans KR" pitchFamily="34" charset="-127"/>
                 <a:cs typeface="Noto Sans KR" pitchFamily="34" charset="-120"/>
               </a:rPr>
               <a:t>책 속의 다른 삶을 만나</a:t>
@@ -2911,7 +2911,7 @@
                   <a:srgbClr val="101D42"/>
                 </a:solidFill>
                 <a:latin typeface="Noto Sans KR" pitchFamily="34" charset="0"/>
-                <a:ea typeface="Noto Sans KR" pitchFamily="34" charset="-122"/>
+                <a:ea typeface="Noto Sans KR" pitchFamily="34" charset="-127"/>
                 <a:cs typeface="Noto Sans KR" pitchFamily="34" charset="-120"/>
               </a:rPr>
               <a:t>나와 타인을 이해하는 힘</a:t>
@@ -2953,7 +2953,7 @@
                   <a:srgbClr val="101D42"/>
                 </a:solidFill>
                 <a:latin typeface="Noto Sans KR" pitchFamily="34" charset="0"/>
-                <a:ea typeface="Noto Sans KR" pitchFamily="34" charset="-122"/>
+                <a:ea typeface="Noto Sans KR" pitchFamily="34" charset="-127"/>
                 <a:cs typeface="Noto Sans KR" pitchFamily="34" charset="-120"/>
               </a:rPr>
               <a:t>이야기 이해 과정에서는 전전두엽을 포함한 여러 뇌 영역이 함께 활동합니다.*</a:t>
@@ -2995,7 +2995,7 @@
                   <a:srgbClr val="101D42"/>
                 </a:solidFill>
                 <a:latin typeface="Noto Serif KR Black" pitchFamily="34" charset="0"/>
-                <a:ea typeface="Noto Serif KR Black" pitchFamily="34" charset="-122"/>
+                <a:ea typeface="Noto Serif KR Black" pitchFamily="34" charset="-127"/>
                 <a:cs typeface="Noto Serif KR Black" pitchFamily="34" charset="-120"/>
               </a:rPr>
               <a:t>기본이 쌓일 시간이 필요합니다</a:t>
@@ -3037,7 +3037,7 @@
                   <a:srgbClr val="101D42"/>
                 </a:solidFill>
                 <a:latin typeface="Noto Sans KR" pitchFamily="34" charset="0"/>
-                <a:ea typeface="Noto Sans KR" pitchFamily="34" charset="-122"/>
+                <a:ea typeface="Noto Sans KR" pitchFamily="34" charset="-127"/>
                 <a:cs typeface="Noto Sans KR" pitchFamily="34" charset="-120"/>
               </a:rPr>
               <a:t>학교에서 마주한 현실은, 아이들이 </a:t>
@@ -3057,7 +3057,7 @@
                   <a:srgbClr val="FFF0AD"/>
                 </a:highlight>
                 <a:latin typeface="Noto Sans KR" pitchFamily="34" charset="0"/>
-                <a:ea typeface="Noto Sans KR" pitchFamily="34" charset="-122"/>
+                <a:ea typeface="Noto Sans KR" pitchFamily="34" charset="-127"/>
                 <a:cs typeface="Noto Sans KR" pitchFamily="34" charset="-120"/>
               </a:rPr>
               <a:t>책을 충분히 읽지 않는다는</a:t>
@@ -3074,7 +3074,7 @@
                   <a:srgbClr val="101D42"/>
                 </a:solidFill>
                 <a:latin typeface="Noto Sans KR" pitchFamily="34" charset="0"/>
-                <a:ea typeface="Noto Sans KR" pitchFamily="34" charset="-122"/>
+                <a:ea typeface="Noto Sans KR" pitchFamily="34" charset="-127"/>
                 <a:cs typeface="Noto Sans KR" pitchFamily="34" charset="-120"/>
               </a:rPr>
               <a:t> 것이었습니다. </a:t>
@@ -3094,7 +3094,7 @@
                   <a:srgbClr val="FFF0AD"/>
                 </a:highlight>
                 <a:latin typeface="Noto Sans KR" pitchFamily="34" charset="0"/>
-                <a:ea typeface="Noto Sans KR" pitchFamily="34" charset="-122"/>
+                <a:ea typeface="Noto Sans KR" pitchFamily="34" charset="-127"/>
                 <a:cs typeface="Noto Sans KR" pitchFamily="34" charset="-120"/>
               </a:rPr>
               <a:t>낱말 · 언어의 장벽</a:t>
@@ -3111,7 +3111,7 @@
                   <a:srgbClr val="101D42"/>
                 </a:solidFill>
                 <a:latin typeface="Noto Sans KR" pitchFamily="34" charset="0"/>
-                <a:ea typeface="Noto Sans KR" pitchFamily="34" charset="-122"/>
+                <a:ea typeface="Noto Sans KR" pitchFamily="34" charset="-127"/>
                 <a:cs typeface="Noto Sans KR" pitchFamily="34" charset="-120"/>
               </a:rPr>
               <a:t>과 읽기</a:t>
@@ -3131,7 +3131,7 @@
                   <a:srgbClr val="101D42"/>
                 </a:solidFill>
                 <a:latin typeface="Noto Sans KR" pitchFamily="34" charset="0"/>
-                <a:ea typeface="Noto Sans KR" pitchFamily="34" charset="-122"/>
+                <a:ea typeface="Noto Sans KR" pitchFamily="34" charset="-127"/>
                 <a:cs typeface="Noto Sans KR" pitchFamily="34" charset="-120"/>
               </a:rPr>
               <a:t>수준 차이, </a:t>
@@ -3151,7 +3151,7 @@
                   <a:srgbClr val="FFF0AD"/>
                 </a:highlight>
                 <a:latin typeface="Noto Sans KR" pitchFamily="34" charset="0"/>
-                <a:ea typeface="Noto Sans KR" pitchFamily="34" charset="-122"/>
+                <a:ea typeface="Noto Sans KR" pitchFamily="34" charset="-127"/>
                 <a:cs typeface="Noto Sans KR" pitchFamily="34" charset="-120"/>
               </a:rPr>
               <a:t>개별 지도와 수업 준비</a:t>
@@ -3168,7 +3168,7 @@
                   <a:srgbClr val="101D42"/>
                 </a:solidFill>
                 <a:latin typeface="Noto Sans KR" pitchFamily="34" charset="0"/>
-                <a:ea typeface="Noto Sans KR" pitchFamily="34" charset="-122"/>
+                <a:ea typeface="Noto Sans KR" pitchFamily="34" charset="-127"/>
                 <a:cs typeface="Noto Sans KR" pitchFamily="34" charset="-120"/>
               </a:rPr>
               <a:t>의 부담이 있습니다.</a:t>
@@ -3210,7 +3210,7 @@
                   <a:srgbClr val="D59B32"/>
                 </a:solidFill>
                 <a:latin typeface="Noto Sans KR" pitchFamily="34" charset="0"/>
-                <a:ea typeface="Noto Sans KR" pitchFamily="34" charset="-122"/>
+                <a:ea typeface="Noto Sans KR" pitchFamily="34" charset="-127"/>
                 <a:cs typeface="Noto Sans KR" pitchFamily="34" charset="-120"/>
               </a:rPr>
               <a:t>→</a:t>
@@ -3252,7 +3252,7 @@
                   <a:srgbClr val="D59B32"/>
                 </a:solidFill>
                 <a:latin typeface="Noto Sans KR" pitchFamily="34" charset="0"/>
-                <a:ea typeface="Noto Sans KR" pitchFamily="34" charset="-122"/>
+                <a:ea typeface="Noto Sans KR" pitchFamily="34" charset="-127"/>
                 <a:cs typeface="Noto Sans KR" pitchFamily="34" charset="-120"/>
               </a:rPr>
               <a:t>→</a:t>
@@ -3294,7 +3294,7 @@
                   <a:srgbClr val="101D42"/>
                 </a:solidFill>
                 <a:latin typeface="Noto Sans KR" pitchFamily="34" charset="0"/>
-                <a:ea typeface="Noto Sans KR" pitchFamily="34" charset="-122"/>
+                <a:ea typeface="Noto Sans KR" pitchFamily="34" charset="-127"/>
                 <a:cs typeface="Noto Sans KR" pitchFamily="34" charset="-120"/>
               </a:rPr>
               <a:t>모르는 낱말</a:t>
@@ -3336,7 +3336,7 @@
                   <a:srgbClr val="101D42"/>
                 </a:solidFill>
                 <a:latin typeface="Noto Sans KR" pitchFamily="34" charset="0"/>
-                <a:ea typeface="Noto Sans KR" pitchFamily="34" charset="-122"/>
+                <a:ea typeface="Noto Sans KR" pitchFamily="34" charset="-127"/>
                 <a:cs typeface="Noto Sans KR" pitchFamily="34" charset="-120"/>
               </a:rPr>
               <a:t>이해의 중단</a:t>
@@ -3378,7 +3378,7 @@
                   <a:srgbClr val="101D42"/>
                 </a:solidFill>
                 <a:latin typeface="Noto Sans KR" pitchFamily="34" charset="0"/>
-                <a:ea typeface="Noto Sans KR" pitchFamily="34" charset="-122"/>
+                <a:ea typeface="Noto Sans KR" pitchFamily="34" charset="-127"/>
                 <a:cs typeface="Noto Sans KR" pitchFamily="34" charset="-120"/>
               </a:rPr>
               <a:t>읽기의 포기</a:t>
@@ -3420,7 +3420,7 @@
                   <a:srgbClr val="15543C"/>
                 </a:solidFill>
                 <a:latin typeface="Noto Serif KR Black" pitchFamily="34" charset="0"/>
-                <a:ea typeface="Noto Serif KR Black" pitchFamily="34" charset="-122"/>
+                <a:ea typeface="Noto Serif KR Black" pitchFamily="34" charset="-127"/>
                 <a:cs typeface="Noto Serif KR Black" pitchFamily="34" charset="-120"/>
               </a:rPr>
               <a:t>초등교사들이 뜻을 모아 만들었습니다</a:t>
@@ -3462,7 +3462,7 @@
                   <a:srgbClr val="101D42"/>
                 </a:solidFill>
                 <a:latin typeface="Noto Sans KR" pitchFamily="34" charset="0"/>
-                <a:ea typeface="Noto Sans KR" pitchFamily="34" charset="-122"/>
+                <a:ea typeface="Noto Sans KR" pitchFamily="34" charset="-127"/>
                 <a:cs typeface="Noto Sans KR" pitchFamily="34" charset="-120"/>
               </a:rPr>
               <a:t>부기는 </a:t>
@@ -3482,7 +3482,7 @@
                   <a:srgbClr val="FFF0AD"/>
                 </a:highlight>
                 <a:latin typeface="Noto Sans KR" pitchFamily="34" charset="0"/>
-                <a:ea typeface="Noto Sans KR" pitchFamily="34" charset="-122"/>
+                <a:ea typeface="Noto Sans KR" pitchFamily="34" charset="-127"/>
                 <a:cs typeface="Noto Sans KR" pitchFamily="34" charset="-120"/>
               </a:rPr>
               <a:t>정답 대신 질문</a:t>
@@ -3499,7 +3499,7 @@
                   <a:srgbClr val="101D42"/>
                 </a:solidFill>
                 <a:latin typeface="Noto Sans KR" pitchFamily="34" charset="0"/>
-                <a:ea typeface="Noto Sans KR" pitchFamily="34" charset="-122"/>
+                <a:ea typeface="Noto Sans KR" pitchFamily="34" charset="-127"/>
                 <a:cs typeface="Noto Sans KR" pitchFamily="34" charset="-120"/>
               </a:rPr>
               <a:t>을 건넵니다.</a:t>
@@ -3541,7 +3541,7 @@
                   <a:srgbClr val="101D42"/>
                 </a:solidFill>
                 <a:latin typeface="Noto Sans KR" pitchFamily="34" charset="0"/>
-                <a:ea typeface="Noto Sans KR" pitchFamily="34" charset="-122"/>
+                <a:ea typeface="Noto Sans KR" pitchFamily="34" charset="-127"/>
                 <a:cs typeface="Noto Sans KR" pitchFamily="34" charset="-120"/>
               </a:rPr>
               <a:t>학교에서 시범 사용을 통해 </a:t>
@@ -3561,7 +3561,7 @@
                   <a:srgbClr val="FFF0AD"/>
                 </a:highlight>
                 <a:latin typeface="Noto Sans KR" pitchFamily="34" charset="0"/>
-                <a:ea typeface="Noto Sans KR" pitchFamily="34" charset="-122"/>
+                <a:ea typeface="Noto Sans KR" pitchFamily="34" charset="-127"/>
                 <a:cs typeface="Noto Sans KR" pitchFamily="34" charset="-120"/>
               </a:rPr>
               <a:t>계속 개선하고 발전</a:t>
@@ -3578,7 +3578,7 @@
                   <a:srgbClr val="101D42"/>
                 </a:solidFill>
                 <a:latin typeface="Noto Sans KR" pitchFamily="34" charset="0"/>
-                <a:ea typeface="Noto Sans KR" pitchFamily="34" charset="-122"/>
+                <a:ea typeface="Noto Sans KR" pitchFamily="34" charset="-127"/>
                 <a:cs typeface="Noto Sans KR" pitchFamily="34" charset="-120"/>
               </a:rPr>
               <a:t>시켜 나가고 있습니다.</a:t>
@@ -3620,7 +3620,7 @@
                   <a:srgbClr val="15543C"/>
                 </a:solidFill>
                 <a:latin typeface="Noto Serif KR Black" pitchFamily="34" charset="0"/>
-                <a:ea typeface="Noto Serif KR Black" pitchFamily="34" charset="-122"/>
+                <a:ea typeface="Noto Serif KR Black" pitchFamily="34" charset="-127"/>
                 <a:cs typeface="Noto Serif KR Black" pitchFamily="34" charset="-120"/>
               </a:rPr>
               <a:t>읽기</a:t>
@@ -3662,7 +3662,7 @@
                   <a:srgbClr val="15543C"/>
                 </a:solidFill>
                 <a:latin typeface="Noto Serif KR Black" pitchFamily="34" charset="0"/>
-                <a:ea typeface="Noto Serif KR Black" pitchFamily="34" charset="-122"/>
+                <a:ea typeface="Noto Serif KR Black" pitchFamily="34" charset="-127"/>
                 <a:cs typeface="Noto Serif KR Black" pitchFamily="34" charset="-120"/>
               </a:rPr>
               <a:t>묻기</a:t>
@@ -3704,7 +3704,7 @@
                   <a:srgbClr val="15543C"/>
                 </a:solidFill>
                 <a:latin typeface="Noto Serif KR Black" pitchFamily="34" charset="0"/>
-                <a:ea typeface="Noto Serif KR Black" pitchFamily="34" charset="-122"/>
+                <a:ea typeface="Noto Serif KR Black" pitchFamily="34" charset="-127"/>
                 <a:cs typeface="Noto Serif KR Black" pitchFamily="34" charset="-120"/>
               </a:rPr>
               <a:t>표현하기</a:t>
@@ -3746,7 +3746,7 @@
                   <a:srgbClr val="15543C"/>
                 </a:solidFill>
                 <a:latin typeface="Noto Serif KR Black" pitchFamily="34" charset="0"/>
-                <a:ea typeface="Noto Serif KR Black" pitchFamily="34" charset="-122"/>
+                <a:ea typeface="Noto Serif KR Black" pitchFamily="34" charset="-127"/>
                 <a:cs typeface="Noto Serif KR Black" pitchFamily="34" charset="-120"/>
               </a:rPr>
               <a:t>모으기</a:t>
@@ -3788,7 +3788,7 @@
                   <a:srgbClr val="101D42"/>
                 </a:solidFill>
                 <a:latin typeface="Noto Sans KR" pitchFamily="34" charset="0"/>
-                <a:ea typeface="Noto Sans KR" pitchFamily="34" charset="-122"/>
+                <a:ea typeface="Noto Sans KR" pitchFamily="34" charset="-127"/>
                 <a:cs typeface="Noto Sans KR" pitchFamily="34" charset="-120"/>
               </a:rPr>
               <a:t>능동적 그림 읽기</a:t>
@@ -3808,7 +3808,7 @@
                   <a:srgbClr val="101D42"/>
                 </a:solidFill>
                 <a:latin typeface="Noto Sans KR" pitchFamily="34" charset="0"/>
-                <a:ea typeface="Noto Sans KR" pitchFamily="34" charset="-122"/>
+                <a:ea typeface="Noto Sans KR" pitchFamily="34" charset="-127"/>
                 <a:cs typeface="Noto Sans KR" pitchFamily="34" charset="-120"/>
               </a:rPr>
               <a:t>낱말 · 다국어 지원</a:t>
@@ -3850,7 +3850,7 @@
                   <a:srgbClr val="101D42"/>
                 </a:solidFill>
                 <a:latin typeface="Noto Sans KR" pitchFamily="34" charset="0"/>
-                <a:ea typeface="Noto Sans KR" pitchFamily="34" charset="-122"/>
+                <a:ea typeface="Noto Sans KR" pitchFamily="34" charset="-127"/>
                 <a:cs typeface="Noto Sans KR" pitchFamily="34" charset="-120"/>
               </a:rPr>
               <a:t>캐릭터와의 대화</a:t>
@@ -3870,7 +3870,7 @@
                   <a:srgbClr val="101D42"/>
                 </a:solidFill>
                 <a:latin typeface="Noto Sans KR" pitchFamily="34" charset="0"/>
-                <a:ea typeface="Noto Sans KR" pitchFamily="34" charset="-122"/>
+                <a:ea typeface="Noto Sans KR" pitchFamily="34" charset="-127"/>
                 <a:cs typeface="Noto Sans KR" pitchFamily="34" charset="-120"/>
               </a:rPr>
               <a:t>생각한 까닭을 묻는 질문</a:t>
@@ -3912,7 +3912,7 @@
                   <a:srgbClr val="101D42"/>
                 </a:solidFill>
                 <a:latin typeface="Noto Sans KR" pitchFamily="34" charset="0"/>
-                <a:ea typeface="Noto Sans KR" pitchFamily="34" charset="-122"/>
+                <a:ea typeface="Noto Sans KR" pitchFamily="34" charset="-127"/>
                 <a:cs typeface="Noto Sans KR" pitchFamily="34" charset="-120"/>
               </a:rPr>
               <a:t>다양한 독후활동</a:t>
@@ -3932,7 +3932,7 @@
                   <a:srgbClr val="101D42"/>
                 </a:solidFill>
                 <a:latin typeface="Noto Sans KR" pitchFamily="34" charset="0"/>
-                <a:ea typeface="Noto Sans KR" pitchFamily="34" charset="-122"/>
+                <a:ea typeface="Noto Sans KR" pitchFamily="34" charset="-127"/>
                 <a:cs typeface="Noto Sans KR" pitchFamily="34" charset="-120"/>
               </a:rPr>
               <a:t>글 · 그림 · 편지로 내 생각 표현</a:t>
@@ -3974,7 +3974,7 @@
                   <a:srgbClr val="101D42"/>
                 </a:solidFill>
                 <a:latin typeface="Noto Sans KR" pitchFamily="34" charset="0"/>
-                <a:ea typeface="Noto Sans KR" pitchFamily="34" charset="-122"/>
+                <a:ea typeface="Noto Sans KR" pitchFamily="34" charset="-127"/>
                 <a:cs typeface="Noto Sans KR" pitchFamily="34" charset="-120"/>
               </a:rPr>
               <a:t>독서 기록 자산</a:t>
@@ -3994,7 +3994,7 @@
                   <a:srgbClr val="101D42"/>
                 </a:solidFill>
                 <a:latin typeface="Noto Sans KR" pitchFamily="34" charset="0"/>
-                <a:ea typeface="Noto Sans KR" pitchFamily="34" charset="-122"/>
+                <a:ea typeface="Noto Sans KR" pitchFamily="34" charset="-127"/>
                 <a:cs typeface="Noto Sans KR" pitchFamily="34" charset="-120"/>
               </a:rPr>
               <a:t>무엇을 느끼고 달라졌는지 기록</a:t>
@@ -4036,7 +4036,7 @@
                   <a:srgbClr val="15543C"/>
                 </a:solidFill>
                 <a:latin typeface="Noto Sans KR" pitchFamily="34" charset="0"/>
-                <a:ea typeface="Noto Sans KR" pitchFamily="34" charset="-122"/>
+                <a:ea typeface="Noto Sans KR" pitchFamily="34" charset="-127"/>
                 <a:cs typeface="Noto Sans KR" pitchFamily="34" charset="-120"/>
               </a:rPr>
               <a:t>72학급</a:t>
@@ -4078,7 +4078,7 @@
                   <a:srgbClr val="15543C"/>
                 </a:solidFill>
                 <a:latin typeface="Noto Sans KR" pitchFamily="34" charset="0"/>
-                <a:ea typeface="Noto Sans KR" pitchFamily="34" charset="-122"/>
+                <a:ea typeface="Noto Sans KR" pitchFamily="34" charset="-127"/>
                 <a:cs typeface="Noto Sans KR" pitchFamily="34" charset="-120"/>
               </a:rPr>
               <a:t>1,196명</a:t>
@@ -4120,7 +4120,7 @@
                   <a:srgbClr val="15543C"/>
                 </a:solidFill>
                 <a:latin typeface="Noto Sans KR" pitchFamily="34" charset="0"/>
-                <a:ea typeface="Noto Sans KR" pitchFamily="34" charset="-122"/>
+                <a:ea typeface="Noto Sans KR" pitchFamily="34" charset="-127"/>
                 <a:cs typeface="Noto Sans KR" pitchFamily="34" charset="-120"/>
               </a:rPr>
               <a:t>26,924건</a:t>
@@ -4162,7 +4162,7 @@
                   <a:srgbClr val="15543C"/>
                 </a:solidFill>
                 <a:latin typeface="Noto Sans KR" pitchFamily="34" charset="0"/>
-                <a:ea typeface="Noto Sans KR" pitchFamily="34" charset="-122"/>
+                <a:ea typeface="Noto Sans KR" pitchFamily="34" charset="-127"/>
                 <a:cs typeface="Noto Sans KR" pitchFamily="34" charset="-120"/>
               </a:rPr>
               <a:t>1,816건</a:t>
@@ -4204,7 +4204,7 @@
                   <a:srgbClr val="101D42"/>
                 </a:solidFill>
                 <a:latin typeface="Noto Sans KR" pitchFamily="34" charset="0"/>
-                <a:ea typeface="Noto Sans KR" pitchFamily="34" charset="-122"/>
+                <a:ea typeface="Noto Sans KR" pitchFamily="34" charset="-127"/>
                 <a:cs typeface="Noto Sans KR" pitchFamily="34" charset="-120"/>
               </a:rPr>
               <a:t>운영 학급</a:t>
@@ -4246,7 +4246,7 @@
                   <a:srgbClr val="101D42"/>
                 </a:solidFill>
                 <a:latin typeface="Noto Sans KR" pitchFamily="34" charset="0"/>
-                <a:ea typeface="Noto Sans KR" pitchFamily="34" charset="-122"/>
+                <a:ea typeface="Noto Sans KR" pitchFamily="34" charset="-127"/>
                 <a:cs typeface="Noto Sans KR" pitchFamily="34" charset="-120"/>
               </a:rPr>
               <a:t>실제 사용 학생</a:t>
@@ -4288,7 +4288,7 @@
                   <a:srgbClr val="101D42"/>
                 </a:solidFill>
                 <a:latin typeface="Noto Sans KR" pitchFamily="34" charset="0"/>
-                <a:ea typeface="Noto Sans KR" pitchFamily="34" charset="-122"/>
+                <a:ea typeface="Noto Sans KR" pitchFamily="34" charset="-127"/>
                 <a:cs typeface="Noto Sans KR" pitchFamily="34" charset="-120"/>
               </a:rPr>
               <a:t>완독 기록</a:t>
@@ -4330,7 +4330,7 @@
                   <a:srgbClr val="101D42"/>
                 </a:solidFill>
                 <a:latin typeface="Noto Sans KR" pitchFamily="34" charset="0"/>
-                <a:ea typeface="Noto Sans KR" pitchFamily="34" charset="-122"/>
+                <a:ea typeface="Noto Sans KR" pitchFamily="34" charset="-127"/>
                 <a:cs typeface="Noto Sans KR" pitchFamily="34" charset="-120"/>
               </a:rPr>
               <a:t>독후활동 제출</a:t>
@@ -4372,7 +4372,7 @@
                   <a:srgbClr val="101D42"/>
                 </a:solidFill>
                 <a:latin typeface="Noto Sans KR" pitchFamily="34" charset="0"/>
-                <a:ea typeface="Noto Sans KR" pitchFamily="34" charset="-122"/>
+                <a:ea typeface="Noto Sans KR" pitchFamily="34" charset="-127"/>
                 <a:cs typeface="Noto Sans KR" pitchFamily="34" charset="-120"/>
               </a:rPr>
               <a:t>2026년 9월 20일부터 10월 21일까지 한 달 시범 사용 결과</a:t>
@@ -4414,7 +4414,7 @@
                   <a:srgbClr val="101D42"/>
                 </a:solidFill>
                 <a:latin typeface="Noto Serif KR Black" pitchFamily="34" charset="0"/>
-                <a:ea typeface="Noto Serif KR Black" pitchFamily="34" charset="-122"/>
+                <a:ea typeface="Noto Serif KR Black" pitchFamily="34" charset="-127"/>
                 <a:cs typeface="Noto Serif KR Black" pitchFamily="34" charset="-120"/>
               </a:rPr>
               <a:t>경남의 모든 학생이 읽고 생각하는 기본을 갖추도록,</a:t>
@@ -4434,7 +4434,7 @@
                   <a:srgbClr val="15543C"/>
                 </a:solidFill>
                 <a:latin typeface="Noto Serif KR Black" pitchFamily="34" charset="0"/>
-                <a:ea typeface="Noto Serif KR Black" pitchFamily="34" charset="-122"/>
+                <a:ea typeface="Noto Serif KR Black" pitchFamily="34" charset="-127"/>
                 <a:cs typeface="Noto Serif KR Black" pitchFamily="34" charset="-120"/>
               </a:rPr>
               <a:t>학교 독서교육의 지속적인 운영을 지원해 주십시오.</a:t>
@@ -4476,7 +4476,7 @@
                   <a:srgbClr val="43516A"/>
                 </a:solidFill>
                 <a:latin typeface="Noto Sans KR" pitchFamily="34" charset="0"/>
-                <a:ea typeface="Noto Sans KR" pitchFamily="34" charset="-122"/>
+                <a:ea typeface="Noto Sans KR" pitchFamily="34" charset="-127"/>
                 <a:cs typeface="Noto Sans KR" pitchFamily="34" charset="-120"/>
               </a:rPr>
               <a:t>* 출처: Yarkoni et al. (2008). NeuroImage, 41(4), 1408-1425.</a:t>
@@ -5053,7 +5053,7 @@
                   <a:srgbClr val="101D42"/>
                 </a:solidFill>
                 <a:latin typeface="Noto Serif KR Black" pitchFamily="34" charset="0"/>
-                <a:ea typeface="Noto Serif KR Black" pitchFamily="34" charset="-122"/>
+                <a:ea typeface="Noto Serif KR Black" pitchFamily="34" charset="-127"/>
                 <a:cs typeface="Noto Serif KR Black" pitchFamily="34" charset="-120"/>
               </a:rPr>
               <a:t>현장 초등교사가 드리는 제안</a:t>
@@ -5095,7 +5095,7 @@
                   <a:srgbClr val="101D42"/>
                 </a:solidFill>
                 <a:latin typeface="Noto Serif KR Black" pitchFamily="34" charset="0"/>
-                <a:ea typeface="Noto Serif KR Black" pitchFamily="34" charset="-122"/>
+                <a:ea typeface="Noto Serif KR Black" pitchFamily="34" charset="-127"/>
                 <a:cs typeface="Noto Serif KR Black" pitchFamily="34" charset="-120"/>
               </a:rPr>
               <a:t>스스로 생각할 기회를</a:t>
@@ -5115,7 +5115,7 @@
                   <a:srgbClr val="15543C"/>
                 </a:solidFill>
                 <a:latin typeface="Noto Serif KR Black" pitchFamily="34" charset="0"/>
-                <a:ea typeface="Noto Serif KR Black" pitchFamily="34" charset="-122"/>
+                <a:ea typeface="Noto Serif KR Black" pitchFamily="34" charset="-127"/>
                 <a:cs typeface="Noto Serif KR Black" pitchFamily="34" charset="-120"/>
               </a:rPr>
               <a:t>잃을까 두렵습니다.</a:t>
@@ -5157,7 +5157,7 @@
                   <a:srgbClr val="15543C"/>
                 </a:solidFill>
                 <a:latin typeface="Noto Serif KR Black" pitchFamily="34" charset="0"/>
-                <a:ea typeface="Noto Serif KR Black" pitchFamily="34" charset="-122"/>
+                <a:ea typeface="Noto Serif KR Black" pitchFamily="34" charset="-127"/>
                 <a:cs typeface="Noto Serif KR Black" pitchFamily="34" charset="-120"/>
               </a:rPr>
               <a:t>교실에서 마주한 걱정</a:t>
@@ -5199,7 +5199,7 @@
                   <a:srgbClr val="101D42"/>
                 </a:solidFill>
                 <a:latin typeface="Noto Sans KR" pitchFamily="34" charset="0"/>
-                <a:ea typeface="Noto Sans KR" pitchFamily="34" charset="-122"/>
+                <a:ea typeface="Noto Sans KR" pitchFamily="34" charset="-127"/>
                 <a:cs typeface="Noto Sans KR" pitchFamily="34" charset="-120"/>
               </a:rPr>
               <a:t>학교 현장에서 아이들이 </a:t>
@@ -5219,7 +5219,7 @@
                   <a:srgbClr val="FFF0AD"/>
                 </a:highlight>
                 <a:latin typeface="Noto Sans KR" pitchFamily="34" charset="0"/>
-                <a:ea typeface="Noto Sans KR" pitchFamily="34" charset="-122"/>
+                <a:ea typeface="Noto Sans KR" pitchFamily="34" charset="-127"/>
                 <a:cs typeface="Noto Sans KR" pitchFamily="34" charset="-120"/>
               </a:rPr>
               <a:t>책을 충분히 읽지 않는 현실</a:t>
@@ -5236,7 +5236,7 @@
                   <a:srgbClr val="101D42"/>
                 </a:solidFill>
                 <a:latin typeface="Noto Sans KR" pitchFamily="34" charset="0"/>
-                <a:ea typeface="Noto Sans KR" pitchFamily="34" charset="-122"/>
+                <a:ea typeface="Noto Sans KR" pitchFamily="34" charset="-127"/>
                 <a:cs typeface="Noto Sans KR" pitchFamily="34" charset="-120"/>
               </a:rPr>
               <a:t>을 마주했습니다.</a:t>
@@ -5256,7 +5256,7 @@
                   <a:srgbClr val="101D42"/>
                 </a:solidFill>
                 <a:latin typeface="Noto Sans KR" pitchFamily="34" charset="0"/>
-                <a:ea typeface="Noto Sans KR" pitchFamily="34" charset="-122"/>
+                <a:ea typeface="Noto Sans KR" pitchFamily="34" charset="-127"/>
                 <a:cs typeface="Noto Sans KR" pitchFamily="34" charset="-120"/>
               </a:rPr>
               <a:t>다른 사람의 생각을 차분히 따라 읽고, </a:t>
@@ -5276,7 +5276,7 @@
                   <a:srgbClr val="FFF0AD"/>
                 </a:highlight>
                 <a:latin typeface="Noto Sans KR" pitchFamily="34" charset="0"/>
-                <a:ea typeface="Noto Sans KR" pitchFamily="34" charset="-122"/>
+                <a:ea typeface="Noto Sans KR" pitchFamily="34" charset="-127"/>
                 <a:cs typeface="Noto Sans KR" pitchFamily="34" charset="-120"/>
               </a:rPr>
               <a:t>자기 생각을 만들어 볼 기회</a:t>
@@ -5293,7 +5293,7 @@
                   <a:srgbClr val="101D42"/>
                 </a:solidFill>
                 <a:latin typeface="Noto Sans KR" pitchFamily="34" charset="0"/>
-                <a:ea typeface="Noto Sans KR" pitchFamily="34" charset="-122"/>
+                <a:ea typeface="Noto Sans KR" pitchFamily="34" charset="-127"/>
                 <a:cs typeface="Noto Sans KR" pitchFamily="34" charset="-120"/>
               </a:rPr>
               <a:t>마저</a:t>
@@ -5313,7 +5313,7 @@
                   <a:srgbClr val="101D42"/>
                 </a:solidFill>
                 <a:latin typeface="Noto Sans KR" pitchFamily="34" charset="0"/>
-                <a:ea typeface="Noto Sans KR" pitchFamily="34" charset="-122"/>
+                <a:ea typeface="Noto Sans KR" pitchFamily="34" charset="-127"/>
                 <a:cs typeface="Noto Sans KR" pitchFamily="34" charset="-120"/>
               </a:rPr>
               <a:t>잃은 채 자랄까 두렵습니다.</a:t>
@@ -5355,7 +5355,7 @@
                   <a:srgbClr val="15543C"/>
                 </a:solidFill>
                 <a:latin typeface="Noto Serif KR Black" pitchFamily="34" charset="0"/>
-                <a:ea typeface="Noto Serif KR Black" pitchFamily="34" charset="-122"/>
+                <a:ea typeface="Noto Serif KR Black" pitchFamily="34" charset="-127"/>
                 <a:cs typeface="Noto Serif KR Black" pitchFamily="34" charset="-120"/>
               </a:rPr>
               <a:t>정보가 많아도, 깊은 이해는 저절로 생기지 않습니다</a:t>
@@ -5400,7 +5400,7 @@
                   <a:srgbClr val="FFF0AD"/>
                 </a:highlight>
                 <a:latin typeface="Noto Sans KR" pitchFamily="34" charset="0"/>
-                <a:ea typeface="Noto Sans KR" pitchFamily="34" charset="-122"/>
+                <a:ea typeface="Noto Sans KR" pitchFamily="34" charset="-127"/>
                 <a:cs typeface="Noto Sans KR" pitchFamily="34" charset="-120"/>
               </a:rPr>
               <a:t>문장의 뜻</a:t>
@@ -5417,7 +5417,7 @@
                   <a:srgbClr val="101D42"/>
                 </a:solidFill>
                 <a:latin typeface="Noto Sans KR" pitchFamily="34" charset="0"/>
-                <a:ea typeface="Noto Sans KR" pitchFamily="34" charset="-122"/>
+                <a:ea typeface="Noto Sans KR" pitchFamily="34" charset="-127"/>
                 <a:cs typeface="Noto Sans KR" pitchFamily="34" charset="-120"/>
               </a:rPr>
               <a:t>을 헤아리고, </a:t>
@@ -5437,7 +5437,7 @@
                   <a:srgbClr val="FFF0AD"/>
                 </a:highlight>
                 <a:latin typeface="Noto Sans KR" pitchFamily="34" charset="0"/>
-                <a:ea typeface="Noto Sans KR" pitchFamily="34" charset="-122"/>
+                <a:ea typeface="Noto Sans KR" pitchFamily="34" charset="-127"/>
                 <a:cs typeface="Noto Sans KR" pitchFamily="34" charset="-120"/>
               </a:rPr>
               <a:t>앞뒤 내용을 연결</a:t>
@@ -5454,7 +5454,7 @@
                   <a:srgbClr val="101D42"/>
                 </a:solidFill>
                 <a:latin typeface="Noto Sans KR" pitchFamily="34" charset="0"/>
-                <a:ea typeface="Noto Sans KR" pitchFamily="34" charset="-122"/>
+                <a:ea typeface="Noto Sans KR" pitchFamily="34" charset="-127"/>
                 <a:cs typeface="Noto Sans KR" pitchFamily="34" charset="-120"/>
               </a:rPr>
               <a:t>하고, </a:t>
@@ -5474,7 +5474,7 @@
                   <a:srgbClr val="FFF0AD"/>
                 </a:highlight>
                 <a:latin typeface="Noto Sans KR" pitchFamily="34" charset="0"/>
-                <a:ea typeface="Noto Sans KR" pitchFamily="34" charset="-122"/>
+                <a:ea typeface="Noto Sans KR" pitchFamily="34" charset="-127"/>
                 <a:cs typeface="Noto Sans KR" pitchFamily="34" charset="-120"/>
               </a:rPr>
               <a:t>오래 생각하는 시간</a:t>
@@ -5491,7 +5491,7 @@
                   <a:srgbClr val="101D42"/>
                 </a:solidFill>
                 <a:latin typeface="Noto Sans KR" pitchFamily="34" charset="0"/>
-                <a:ea typeface="Noto Sans KR" pitchFamily="34" charset="-122"/>
+                <a:ea typeface="Noto Sans KR" pitchFamily="34" charset="-127"/>
                 <a:cs typeface="Noto Sans KR" pitchFamily="34" charset="-120"/>
               </a:rPr>
               <a:t>은 따로</a:t>
@@ -5511,7 +5511,7 @@
                   <a:srgbClr val="101D42"/>
                 </a:solidFill>
                 <a:latin typeface="Noto Sans KR" pitchFamily="34" charset="0"/>
-                <a:ea typeface="Noto Sans KR" pitchFamily="34" charset="-122"/>
+                <a:ea typeface="Noto Sans KR" pitchFamily="34" charset="-127"/>
                 <a:cs typeface="Noto Sans KR" pitchFamily="34" charset="-120"/>
               </a:rPr>
               <a:t>필요합니다. 짧은 영상과 빠른 답에 익숙해지는 동안, 학생 안에 무엇이</a:t>
@@ -5531,7 +5531,7 @@
                   <a:srgbClr val="101D42"/>
                 </a:solidFill>
                 <a:latin typeface="Noto Sans KR" pitchFamily="34" charset="0"/>
-                <a:ea typeface="Noto Sans KR" pitchFamily="34" charset="-122"/>
+                <a:ea typeface="Noto Sans KR" pitchFamily="34" charset="-127"/>
                 <a:cs typeface="Noto Sans KR" pitchFamily="34" charset="-120"/>
               </a:rPr>
               <a:t>남고 있는지 묻고 싶습니다.</a:t>
@@ -5573,7 +5573,7 @@
                   <a:srgbClr val="15543C"/>
                 </a:solidFill>
                 <a:latin typeface="Noto Serif KR Black" pitchFamily="34" charset="0"/>
-                <a:ea typeface="Noto Serif KR Black" pitchFamily="34" charset="-122"/>
+                <a:ea typeface="Noto Serif KR Black" pitchFamily="34" charset="-127"/>
                 <a:cs typeface="Noto Serif KR Black" pitchFamily="34" charset="-120"/>
               </a:rPr>
               <a:t>학교가 먼저 고민해야 할 질문</a:t>
@@ -5615,7 +5615,7 @@
                   <a:srgbClr val="101D42"/>
                 </a:solidFill>
                 <a:latin typeface="Noto Sans KR" pitchFamily="34" charset="0"/>
-                <a:ea typeface="Noto Sans KR" pitchFamily="34" charset="-122"/>
+                <a:ea typeface="Noto Sans KR" pitchFamily="34" charset="-127"/>
                 <a:cs typeface="Noto Sans KR" pitchFamily="34" charset="-120"/>
               </a:rPr>
               <a:t>학생은 </a:t>
@@ -5635,7 +5635,7 @@
                   <a:srgbClr val="FFF0AD"/>
                 </a:highlight>
                 <a:latin typeface="Noto Sans KR" pitchFamily="34" charset="0"/>
-                <a:ea typeface="Noto Sans KR" pitchFamily="34" charset="-122"/>
+                <a:ea typeface="Noto Sans KR" pitchFamily="34" charset="-127"/>
                 <a:cs typeface="Noto Sans KR" pitchFamily="34" charset="-120"/>
               </a:rPr>
               <a:t>무엇을 알고</a:t>
@@ -5652,7 +5652,7 @@
                   <a:srgbClr val="101D42"/>
                 </a:solidFill>
                 <a:latin typeface="Noto Sans KR" pitchFamily="34" charset="0"/>
-                <a:ea typeface="Noto Sans KR" pitchFamily="34" charset="-122"/>
+                <a:ea typeface="Noto Sans KR" pitchFamily="34" charset="-127"/>
                 <a:cs typeface="Noto Sans KR" pitchFamily="34" charset="-120"/>
               </a:rPr>
               <a:t>, </a:t>
@@ -5672,7 +5672,7 @@
                   <a:srgbClr val="FFF0AD"/>
                 </a:highlight>
                 <a:latin typeface="Noto Sans KR" pitchFamily="34" charset="0"/>
-                <a:ea typeface="Noto Sans KR" pitchFamily="34" charset="-122"/>
+                <a:ea typeface="Noto Sans KR" pitchFamily="34" charset="-127"/>
                 <a:cs typeface="Noto Sans KR" pitchFamily="34" charset="-120"/>
               </a:rPr>
               <a:t>어떤 경험을 쌓고</a:t>
@@ -5689,7 +5689,7 @@
                   <a:srgbClr val="101D42"/>
                 </a:solidFill>
                 <a:latin typeface="Noto Sans KR" pitchFamily="34" charset="0"/>
-                <a:ea typeface="Noto Sans KR" pitchFamily="34" charset="-122"/>
+                <a:ea typeface="Noto Sans KR" pitchFamily="34" charset="-127"/>
                 <a:cs typeface="Noto Sans KR" pitchFamily="34" charset="-120"/>
               </a:rPr>
               <a:t>, </a:t>
@@ -5709,7 +5709,7 @@
                   <a:srgbClr val="FFF0AD"/>
                 </a:highlight>
                 <a:latin typeface="Noto Sans KR" pitchFamily="34" charset="0"/>
-                <a:ea typeface="Noto Sans KR" pitchFamily="34" charset="-122"/>
+                <a:ea typeface="Noto Sans KR" pitchFamily="34" charset="-127"/>
                 <a:cs typeface="Noto Sans KR" pitchFamily="34" charset="-120"/>
               </a:rPr>
               <a:t>어떻게 생각하는 사람</a:t>
@@ -5726,7 +5726,7 @@
                   <a:srgbClr val="101D42"/>
                 </a:solidFill>
                 <a:latin typeface="Noto Sans KR" pitchFamily="34" charset="0"/>
-                <a:ea typeface="Noto Sans KR" pitchFamily="34" charset="-122"/>
+                <a:ea typeface="Noto Sans KR" pitchFamily="34" charset="-127"/>
                 <a:cs typeface="Noto Sans KR" pitchFamily="34" charset="-120"/>
               </a:rPr>
               <a:t>으로 자라야</a:t>
@@ -5746,7 +5746,7 @@
                   <a:srgbClr val="101D42"/>
                 </a:solidFill>
                 <a:latin typeface="Noto Sans KR" pitchFamily="34" charset="0"/>
-                <a:ea typeface="Noto Sans KR" pitchFamily="34" charset="-122"/>
+                <a:ea typeface="Noto Sans KR" pitchFamily="34" charset="-127"/>
                 <a:cs typeface="Noto Sans KR" pitchFamily="34" charset="-120"/>
               </a:rPr>
               <a:t>할까요. 디지털 도구를 도입하는 일에도 이 질문이 먼저 놓여야 합니다.</a:t>
@@ -5791,7 +5791,7 @@
                   <a:srgbClr val="FFF0AD"/>
                 </a:highlight>
                 <a:latin typeface="Noto Sans KR" pitchFamily="34" charset="0"/>
-                <a:ea typeface="Noto Sans KR" pitchFamily="34" charset="-122"/>
+                <a:ea typeface="Noto Sans KR" pitchFamily="34" charset="-127"/>
                 <a:cs typeface="Noto Sans KR" pitchFamily="34" charset="-120"/>
               </a:rPr>
               <a:t>스스로 읽고 이해하며</a:t>
@@ -5808,7 +5808,7 @@
                   <a:srgbClr val="101D42"/>
                 </a:solidFill>
                 <a:latin typeface="Noto Sans KR" pitchFamily="34" charset="0"/>
-                <a:ea typeface="Noto Sans KR" pitchFamily="34" charset="-122"/>
+                <a:ea typeface="Noto Sans KR" pitchFamily="34" charset="-127"/>
                 <a:cs typeface="Noto Sans KR" pitchFamily="34" charset="-120"/>
               </a:rPr>
               <a:t>, </a:t>
@@ -5828,7 +5828,7 @@
                   <a:srgbClr val="FFF0AD"/>
                 </a:highlight>
                 <a:latin typeface="Noto Sans KR" pitchFamily="34" charset="0"/>
-                <a:ea typeface="Noto Sans KR" pitchFamily="34" charset="-122"/>
+                <a:ea typeface="Noto Sans KR" pitchFamily="34" charset="-127"/>
                 <a:cs typeface="Noto Sans KR" pitchFamily="34" charset="-120"/>
               </a:rPr>
               <a:t>근거를 들어 말하는 힘</a:t>
@@ -5845,7 +5845,7 @@
                   <a:srgbClr val="101D42"/>
                 </a:solidFill>
                 <a:latin typeface="Noto Sans KR" pitchFamily="34" charset="0"/>
-                <a:ea typeface="Noto Sans KR" pitchFamily="34" charset="-122"/>
+                <a:ea typeface="Noto Sans KR" pitchFamily="34" charset="-127"/>
                 <a:cs typeface="Noto Sans KR" pitchFamily="34" charset="-120"/>
               </a:rPr>
               <a:t>을 꾸준히 길러 주어야</a:t>
@@ -5865,7 +5865,7 @@
                   <a:srgbClr val="101D42"/>
                 </a:solidFill>
                 <a:latin typeface="Noto Sans KR" pitchFamily="34" charset="0"/>
-                <a:ea typeface="Noto Sans KR" pitchFamily="34" charset="-122"/>
+                <a:ea typeface="Noto Sans KR" pitchFamily="34" charset="-127"/>
                 <a:cs typeface="Noto Sans KR" pitchFamily="34" charset="-120"/>
               </a:rPr>
               <a:t>합니다. 이 절실함에서 부기가 시작됐습니다.</a:t>
@@ -5907,7 +5907,7 @@
                   <a:srgbClr val="101D42"/>
                 </a:solidFill>
                 <a:latin typeface="Noto Serif KR Black" pitchFamily="34" charset="0"/>
-                <a:ea typeface="Noto Serif KR Black" pitchFamily="34" charset="-122"/>
+                <a:ea typeface="Noto Serif KR Black" pitchFamily="34" charset="-127"/>
                 <a:cs typeface="Noto Serif KR Black" pitchFamily="34" charset="-120"/>
               </a:rPr>
               <a:t>스마트폰 속 세상에 빠져 있는 아이들이</a:t>
@@ -5927,7 +5927,7 @@
                   <a:srgbClr val="15543C"/>
                 </a:solidFill>
                 <a:latin typeface="Noto Serif KR Black" pitchFamily="34" charset="0"/>
-                <a:ea typeface="Noto Serif KR Black" pitchFamily="34" charset="-122"/>
+                <a:ea typeface="Noto Serif KR Black" pitchFamily="34" charset="-127"/>
                 <a:cs typeface="Noto Serif KR Black" pitchFamily="34" charset="-120"/>
               </a:rPr>
               <a:t>세상을 깊이있게 이해하는 아이로 자라고 있을까요?</a:t>
@@ -5969,7 +5969,7 @@
                   <a:srgbClr val="101D42"/>
                 </a:solidFill>
                 <a:latin typeface="Noto Sans KR" pitchFamily="34" charset="0"/>
-                <a:ea typeface="Noto Sans KR" pitchFamily="34" charset="-122"/>
+                <a:ea typeface="Noto Sans KR" pitchFamily="34" charset="-127"/>
                 <a:cs typeface="Noto Sans KR" pitchFamily="34" charset="-120"/>
               </a:rPr>
               <a:t>1 / 4</a:t>
@@ -6864,7 +6864,7 @@
                   <a:srgbClr val="101D42"/>
                 </a:solidFill>
                 <a:latin typeface="Noto Serif KR Black" pitchFamily="34" charset="0"/>
-                <a:ea typeface="Noto Serif KR Black" pitchFamily="34" charset="-122"/>
+                <a:ea typeface="Noto Serif KR Black" pitchFamily="34" charset="-127"/>
                 <a:cs typeface="Noto Serif KR Black" pitchFamily="34" charset="-120"/>
               </a:rPr>
               <a:t>독서가 만드는 이해의 바탕</a:t>
@@ -6906,7 +6906,7 @@
                   <a:srgbClr val="101D42"/>
                 </a:solidFill>
                 <a:latin typeface="Noto Serif KR Black" pitchFamily="34" charset="0"/>
-                <a:ea typeface="Noto Serif KR Black" pitchFamily="34" charset="-122"/>
+                <a:ea typeface="Noto Serif KR Black" pitchFamily="34" charset="-127"/>
                 <a:cs typeface="Noto Serif KR Black" pitchFamily="34" charset="-120"/>
               </a:rPr>
               <a:t>아는 것이 쌓여야,</a:t>
@@ -6926,7 +6926,7 @@
                   <a:srgbClr val="15543C"/>
                 </a:solidFill>
                 <a:latin typeface="Noto Serif KR Black" pitchFamily="34" charset="0"/>
-                <a:ea typeface="Noto Serif KR Black" pitchFamily="34" charset="-122"/>
+                <a:ea typeface="Noto Serif KR Black" pitchFamily="34" charset="-127"/>
                 <a:cs typeface="Noto Serif KR Black" pitchFamily="34" charset="-120"/>
               </a:rPr>
               <a:t>새 지식이 연결됩니다.</a:t>
@@ -6968,7 +6968,7 @@
                   <a:srgbClr val="15543C"/>
                 </a:solidFill>
                 <a:latin typeface="Noto Serif KR Black" pitchFamily="34" charset="0"/>
-                <a:ea typeface="Noto Serif KR Black" pitchFamily="34" charset="-122"/>
+                <a:ea typeface="Noto Serif KR Black" pitchFamily="34" charset="-127"/>
                 <a:cs typeface="Noto Serif KR Black" pitchFamily="34" charset="-120"/>
               </a:rPr>
               <a:t>어휘와 간접 경험이 이해의 바탕을 넓힙니다</a:t>
@@ -7010,7 +7010,7 @@
                   <a:srgbClr val="101D42"/>
                 </a:solidFill>
                 <a:latin typeface="Noto Sans KR" pitchFamily="34" charset="0"/>
-                <a:ea typeface="Noto Sans KR" pitchFamily="34" charset="-122"/>
+                <a:ea typeface="Noto Sans KR" pitchFamily="34" charset="-127"/>
                 <a:cs typeface="Noto Sans KR" pitchFamily="34" charset="-120"/>
               </a:rPr>
               <a:t>이야기에서는 </a:t>
@@ -7030,7 +7030,7 @@
                   <a:srgbClr val="FFF0AD"/>
                 </a:highlight>
                 <a:latin typeface="Noto Sans KR" pitchFamily="34" charset="0"/>
-                <a:ea typeface="Noto Sans KR" pitchFamily="34" charset="-122"/>
+                <a:ea typeface="Noto Sans KR" pitchFamily="34" charset="-127"/>
                 <a:cs typeface="Noto Sans KR" pitchFamily="34" charset="-120"/>
               </a:rPr>
               <a:t>다른 삶과 선택</a:t>
@@ -7047,7 +7047,7 @@
                   <a:srgbClr val="101D42"/>
                 </a:solidFill>
                 <a:latin typeface="Noto Sans KR" pitchFamily="34" charset="0"/>
-                <a:ea typeface="Noto Sans KR" pitchFamily="34" charset="-122"/>
+                <a:ea typeface="Noto Sans KR" pitchFamily="34" charset="-127"/>
                 <a:cs typeface="Noto Sans KR" pitchFamily="34" charset="-120"/>
               </a:rPr>
               <a:t>을, 설명하는 글에서는 세상의 원리를,</a:t>
@@ -7067,7 +7067,7 @@
                   <a:srgbClr val="101D42"/>
                 </a:solidFill>
                 <a:latin typeface="Noto Sans KR" pitchFamily="34" charset="0"/>
-                <a:ea typeface="Noto Sans KR" pitchFamily="34" charset="-122"/>
+                <a:ea typeface="Noto Sans KR" pitchFamily="34" charset="-127"/>
                 <a:cs typeface="Noto Sans KR" pitchFamily="34" charset="-120"/>
               </a:rPr>
               <a:t>에세이에서는 </a:t>
@@ -7087,7 +7087,7 @@
                   <a:srgbClr val="FFF0AD"/>
                 </a:highlight>
                 <a:latin typeface="Noto Sans KR" pitchFamily="34" charset="0"/>
-                <a:ea typeface="Noto Sans KR" pitchFamily="34" charset="-122"/>
+                <a:ea typeface="Noto Sans KR" pitchFamily="34" charset="-127"/>
                 <a:cs typeface="Noto Sans KR" pitchFamily="34" charset="-120"/>
               </a:rPr>
               <a:t>다른 사람의 생각</a:t>
@@ -7104,7 +7104,7 @@
                   <a:srgbClr val="101D42"/>
                 </a:solidFill>
                 <a:latin typeface="Noto Sans KR" pitchFamily="34" charset="0"/>
-                <a:ea typeface="Noto Sans KR" pitchFamily="34" charset="-122"/>
+                <a:ea typeface="Noto Sans KR" pitchFamily="34" charset="-127"/>
                 <a:cs typeface="Noto Sans KR" pitchFamily="34" charset="-120"/>
               </a:rPr>
               <a:t>을 만납니다. 문맥 속에서 </a:t>
@@ -7124,7 +7124,7 @@
                   <a:srgbClr val="FFF0AD"/>
                 </a:highlight>
                 <a:latin typeface="Noto Sans KR" pitchFamily="34" charset="0"/>
-                <a:ea typeface="Noto Sans KR" pitchFamily="34" charset="-122"/>
+                <a:ea typeface="Noto Sans KR" pitchFamily="34" charset="-127"/>
                 <a:cs typeface="Noto Sans KR" pitchFamily="34" charset="-120"/>
               </a:rPr>
               <a:t>낱말</a:t>
@@ -7141,7 +7141,7 @@
                   <a:srgbClr val="101D42"/>
                 </a:solidFill>
                 <a:latin typeface="Noto Sans KR" pitchFamily="34" charset="0"/>
-                <a:ea typeface="Noto Sans KR" pitchFamily="34" charset="-122"/>
+                <a:ea typeface="Noto Sans KR" pitchFamily="34" charset="-127"/>
                 <a:cs typeface="Noto Sans KR" pitchFamily="34" charset="-120"/>
               </a:rPr>
               <a:t>을 익히고,</a:t>
@@ -7161,7 +7161,7 @@
                   <a:srgbClr val="101D42"/>
                 </a:solidFill>
                 <a:latin typeface="Noto Sans KR" pitchFamily="34" charset="0"/>
-                <a:ea typeface="Noto Sans KR" pitchFamily="34" charset="-122"/>
+                <a:ea typeface="Noto Sans KR" pitchFamily="34" charset="-127"/>
                 <a:cs typeface="Noto Sans KR" pitchFamily="34" charset="-120"/>
               </a:rPr>
               <a:t>다른 생각을 따라 읽으며 </a:t>
@@ -7181,7 +7181,7 @@
                   <a:srgbClr val="FFF0AD"/>
                 </a:highlight>
                 <a:latin typeface="Noto Sans KR" pitchFamily="34" charset="0"/>
-                <a:ea typeface="Noto Sans KR" pitchFamily="34" charset="-122"/>
+                <a:ea typeface="Noto Sans KR" pitchFamily="34" charset="-127"/>
                 <a:cs typeface="Noto Sans KR" pitchFamily="34" charset="-120"/>
               </a:rPr>
               <a:t>자기 경험</a:t>
@@ -7198,7 +7198,7 @@
                   <a:srgbClr val="101D42"/>
                 </a:solidFill>
                 <a:latin typeface="Noto Sans KR" pitchFamily="34" charset="0"/>
-                <a:ea typeface="Noto Sans KR" pitchFamily="34" charset="-122"/>
+                <a:ea typeface="Noto Sans KR" pitchFamily="34" charset="-127"/>
                 <a:cs typeface="Noto Sans KR" pitchFamily="34" charset="-120"/>
               </a:rPr>
               <a:t>과 비교합니다.</a:t>
@@ -7240,7 +7240,7 @@
                   <a:srgbClr val="15543C"/>
                 </a:solidFill>
                 <a:latin typeface="Noto Serif KR Black" pitchFamily="34" charset="0"/>
-                <a:ea typeface="Noto Serif KR Black" pitchFamily="34" charset="-122"/>
+                <a:ea typeface="Noto Serif KR Black" pitchFamily="34" charset="-127"/>
                 <a:cs typeface="Noto Serif KR Black" pitchFamily="34" charset="-120"/>
               </a:rPr>
               <a:t>스키마는 경험과 지식이 조직된 ‘이해의 틀’입니다</a:t>
@@ -7282,7 +7282,7 @@
                   <a:srgbClr val="101D42"/>
                 </a:solidFill>
                 <a:latin typeface="Noto Sans KR" pitchFamily="34" charset="0"/>
-                <a:ea typeface="Noto Sans KR" pitchFamily="34" charset="-122"/>
+                <a:ea typeface="Noto Sans KR" pitchFamily="34" charset="-127"/>
                 <a:cs typeface="Noto Sans KR" pitchFamily="34" charset="-120"/>
               </a:rPr>
               <a:t>새로운 내용은 </a:t>
@@ -7302,7 +7302,7 @@
                   <a:srgbClr val="FFF0AD"/>
                 </a:highlight>
                 <a:latin typeface="Noto Sans KR" pitchFamily="34" charset="0"/>
-                <a:ea typeface="Noto Sans KR" pitchFamily="34" charset="-122"/>
+                <a:ea typeface="Noto Sans KR" pitchFamily="34" charset="-127"/>
                 <a:cs typeface="Noto Sans KR" pitchFamily="34" charset="-120"/>
               </a:rPr>
               <a:t>이미 알고 있는 개념과 경험</a:t>
@@ -7319,7 +7319,7 @@
                   <a:srgbClr val="101D42"/>
                 </a:solidFill>
                 <a:latin typeface="Noto Sans KR" pitchFamily="34" charset="0"/>
-                <a:ea typeface="Noto Sans KR" pitchFamily="34" charset="-122"/>
+                <a:ea typeface="Noto Sans KR" pitchFamily="34" charset="-127"/>
                 <a:cs typeface="Noto Sans KR" pitchFamily="34" charset="-120"/>
               </a:rPr>
               <a:t>에 연결될 때 더 잘 이해할 수</a:t>
@@ -7339,7 +7339,7 @@
                   <a:srgbClr val="101D42"/>
                 </a:solidFill>
                 <a:latin typeface="Noto Sans KR" pitchFamily="34" charset="0"/>
-                <a:ea typeface="Noto Sans KR" pitchFamily="34" charset="-122"/>
+                <a:ea typeface="Noto Sans KR" pitchFamily="34" charset="-127"/>
                 <a:cs typeface="Noto Sans KR" pitchFamily="34" charset="-120"/>
               </a:rPr>
               <a:t>있습니다. </a:t>
@@ -7359,7 +7359,7 @@
                   <a:srgbClr val="FFF0AD"/>
                 </a:highlight>
                 <a:latin typeface="Noto Sans KR" pitchFamily="34" charset="0"/>
-                <a:ea typeface="Noto Sans KR" pitchFamily="34" charset="-122"/>
+                <a:ea typeface="Noto Sans KR" pitchFamily="34" charset="-127"/>
                 <a:cs typeface="Noto Sans KR" pitchFamily="34" charset="-120"/>
               </a:rPr>
               <a:t>관련 어휘와 배경지식</a:t>
@@ -7376,7 +7376,7 @@
                   <a:srgbClr val="101D42"/>
                 </a:solidFill>
                 <a:latin typeface="Noto Sans KR" pitchFamily="34" charset="0"/>
-                <a:ea typeface="Noto Sans KR" pitchFamily="34" charset="-122"/>
+                <a:ea typeface="Noto Sans KR" pitchFamily="34" charset="-127"/>
                 <a:cs typeface="Noto Sans KR" pitchFamily="34" charset="-120"/>
               </a:rPr>
               <a:t>이 부족하면 글자를 읽어도 </a:t>
@@ -7396,7 +7396,7 @@
                   <a:srgbClr val="FFF0AD"/>
                 </a:highlight>
                 <a:latin typeface="Noto Sans KR" pitchFamily="34" charset="0"/>
-                <a:ea typeface="Noto Sans KR" pitchFamily="34" charset="-122"/>
+                <a:ea typeface="Noto Sans KR" pitchFamily="34" charset="-127"/>
                 <a:cs typeface="Noto Sans KR" pitchFamily="34" charset="-120"/>
               </a:rPr>
               <a:t>맥락과 의미</a:t>
@@ -7413,7 +7413,7 @@
                   <a:srgbClr val="101D42"/>
                 </a:solidFill>
                 <a:latin typeface="Noto Sans KR" pitchFamily="34" charset="0"/>
-                <a:ea typeface="Noto Sans KR" pitchFamily="34" charset="-122"/>
+                <a:ea typeface="Noto Sans KR" pitchFamily="34" charset="-127"/>
                 <a:cs typeface="Noto Sans KR" pitchFamily="34" charset="-120"/>
               </a:rPr>
               <a:t>를</a:t>
@@ -7433,7 +7433,7 @@
                   <a:srgbClr val="101D42"/>
                 </a:solidFill>
                 <a:latin typeface="Noto Sans KR" pitchFamily="34" charset="0"/>
-                <a:ea typeface="Noto Sans KR" pitchFamily="34" charset="-122"/>
+                <a:ea typeface="Noto Sans KR" pitchFamily="34" charset="-127"/>
                 <a:cs typeface="Noto Sans KR" pitchFamily="34" charset="-120"/>
               </a:rPr>
               <a:t>연결하기 어렵습니다.</a:t>
@@ -7475,7 +7475,7 @@
                   <a:srgbClr val="101D42"/>
                 </a:solidFill>
                 <a:latin typeface="Noto Sans KR" pitchFamily="34" charset="0"/>
-                <a:ea typeface="Noto Sans KR" pitchFamily="34" charset="-122"/>
+                <a:ea typeface="Noto Sans KR" pitchFamily="34" charset="-127"/>
                 <a:cs typeface="Noto Sans KR" pitchFamily="34" charset="-120"/>
               </a:rPr>
               <a:t>그래서 읽기 전 필요한 </a:t>
@@ -7495,7 +7495,7 @@
                   <a:srgbClr val="FFF0AD"/>
                 </a:highlight>
                 <a:latin typeface="Noto Sans KR" pitchFamily="34" charset="0"/>
-                <a:ea typeface="Noto Sans KR" pitchFamily="34" charset="-122"/>
+                <a:ea typeface="Noto Sans KR" pitchFamily="34" charset="-127"/>
                 <a:cs typeface="Noto Sans KR" pitchFamily="34" charset="-120"/>
               </a:rPr>
               <a:t>배경을 짚고</a:t>
@@ -7512,7 +7512,7 @@
                   <a:srgbClr val="101D42"/>
                 </a:solidFill>
                 <a:latin typeface="Noto Sans KR" pitchFamily="34" charset="0"/>
-                <a:ea typeface="Noto Sans KR" pitchFamily="34" charset="-122"/>
+                <a:ea typeface="Noto Sans KR" pitchFamily="34" charset="-127"/>
                 <a:cs typeface="Noto Sans KR" pitchFamily="34" charset="-120"/>
               </a:rPr>
               <a:t>, 읽으며 </a:t>
@@ -7532,7 +7532,7 @@
                   <a:srgbClr val="FFF0AD"/>
                 </a:highlight>
                 <a:latin typeface="Noto Sans KR" pitchFamily="34" charset="0"/>
-                <a:ea typeface="Noto Sans KR" pitchFamily="34" charset="-122"/>
+                <a:ea typeface="Noto Sans KR" pitchFamily="34" charset="-127"/>
                 <a:cs typeface="Noto Sans KR" pitchFamily="34" charset="-120"/>
               </a:rPr>
               <a:t>어휘를 익히고</a:t>
@@ -7549,7 +7549,7 @@
                   <a:srgbClr val="101D42"/>
                 </a:solidFill>
                 <a:latin typeface="Noto Sans KR" pitchFamily="34" charset="0"/>
-                <a:ea typeface="Noto Sans KR" pitchFamily="34" charset="-122"/>
+                <a:ea typeface="Noto Sans KR" pitchFamily="34" charset="-127"/>
                 <a:cs typeface="Noto Sans KR" pitchFamily="34" charset="-120"/>
               </a:rPr>
               <a:t>, 새 내용으로</a:t>
@@ -7572,7 +7572,7 @@
                   <a:srgbClr val="FFF0AD"/>
                 </a:highlight>
                 <a:latin typeface="Noto Sans KR" pitchFamily="34" charset="0"/>
-                <a:ea typeface="Noto Sans KR" pitchFamily="34" charset="-122"/>
+                <a:ea typeface="Noto Sans KR" pitchFamily="34" charset="-127"/>
                 <a:cs typeface="Noto Sans KR" pitchFamily="34" charset="-120"/>
               </a:rPr>
               <a:t>기존 생각을 넓히거나 고치는</a:t>
@@ -7589,7 +7589,7 @@
                   <a:srgbClr val="101D42"/>
                 </a:solidFill>
                 <a:latin typeface="Noto Sans KR" pitchFamily="34" charset="0"/>
-                <a:ea typeface="Noto Sans KR" pitchFamily="34" charset="-122"/>
+                <a:ea typeface="Noto Sans KR" pitchFamily="34" charset="-127"/>
                 <a:cs typeface="Noto Sans KR" pitchFamily="34" charset="-120"/>
               </a:rPr>
               <a:t> 과정이 필요합니다.</a:t>
@@ -7631,7 +7631,7 @@
                   <a:srgbClr val="15543C"/>
                 </a:solidFill>
                 <a:latin typeface="Noto Sans KR" pitchFamily="34" charset="0"/>
-                <a:ea typeface="Noto Sans KR" pitchFamily="34" charset="-122"/>
+                <a:ea typeface="Noto Sans KR" pitchFamily="34" charset="-127"/>
                 <a:cs typeface="Noto Sans KR" pitchFamily="34" charset="-120"/>
               </a:rPr>
               <a:t>어휘 · 간접 경험</a:t>
@@ -7673,7 +7673,7 @@
                   <a:srgbClr val="15543C"/>
                 </a:solidFill>
                 <a:latin typeface="Noto Sans KR" pitchFamily="34" charset="0"/>
-                <a:ea typeface="Noto Sans KR" pitchFamily="34" charset="-122"/>
+                <a:ea typeface="Noto Sans KR" pitchFamily="34" charset="-127"/>
                 <a:cs typeface="Noto Sans KR" pitchFamily="34" charset="-120"/>
               </a:rPr>
               <a:t>배경지식 · 스키마</a:t>
@@ -7715,7 +7715,7 @@
                   <a:srgbClr val="15543C"/>
                 </a:solidFill>
                 <a:latin typeface="Noto Sans KR" pitchFamily="34" charset="0"/>
-                <a:ea typeface="Noto Sans KR" pitchFamily="34" charset="-122"/>
+                <a:ea typeface="Noto Sans KR" pitchFamily="34" charset="-127"/>
                 <a:cs typeface="Noto Sans KR" pitchFamily="34" charset="-120"/>
               </a:rPr>
               <a:t>이해 · 추론 · 연결</a:t>
@@ -7757,7 +7757,7 @@
                   <a:srgbClr val="D59B32"/>
                 </a:solidFill>
                 <a:latin typeface="Noto Sans KR" pitchFamily="34" charset="0"/>
-                <a:ea typeface="Noto Sans KR" pitchFamily="34" charset="-122"/>
+                <a:ea typeface="Noto Sans KR" pitchFamily="34" charset="-127"/>
                 <a:cs typeface="Noto Sans KR" pitchFamily="34" charset="-120"/>
               </a:rPr>
               <a:t>→</a:t>
@@ -7799,7 +7799,7 @@
                   <a:srgbClr val="D59B32"/>
                 </a:solidFill>
                 <a:latin typeface="Noto Sans KR" pitchFamily="34" charset="0"/>
-                <a:ea typeface="Noto Sans KR" pitchFamily="34" charset="-122"/>
+                <a:ea typeface="Noto Sans KR" pitchFamily="34" charset="-127"/>
                 <a:cs typeface="Noto Sans KR" pitchFamily="34" charset="-120"/>
               </a:rPr>
               <a:t>→</a:t>
@@ -7841,7 +7841,7 @@
                   <a:srgbClr val="101D42"/>
                 </a:solidFill>
                 <a:latin typeface="Noto Serif KR Black" pitchFamily="34" charset="0"/>
-                <a:ea typeface="Noto Serif KR Black" pitchFamily="34" charset="-122"/>
+                <a:ea typeface="Noto Serif KR Black" pitchFamily="34" charset="-127"/>
                 <a:cs typeface="Noto Serif KR Black" pitchFamily="34" charset="-120"/>
               </a:rPr>
               <a:t>읽고 받아들이는 경험이 쌓여,</a:t>
@@ -7861,7 +7861,7 @@
                   <a:srgbClr val="15543C"/>
                 </a:solidFill>
                 <a:latin typeface="Noto Serif KR Black" pitchFamily="34" charset="0"/>
-                <a:ea typeface="Noto Serif KR Black" pitchFamily="34" charset="-122"/>
+                <a:ea typeface="Noto Serif KR Black" pitchFamily="34" charset="-127"/>
                 <a:cs typeface="Noto Serif KR Black" pitchFamily="34" charset="-120"/>
               </a:rPr>
               <a:t>세상을 이해하는 생각의 바탕이 됩니다.</a:t>
@@ -7903,7 +7903,7 @@
                   <a:srgbClr val="43516A"/>
                 </a:solidFill>
                 <a:latin typeface="Noto Sans KR" pitchFamily="34" charset="0"/>
-                <a:ea typeface="Noto Sans KR" pitchFamily="34" charset="-122"/>
+                <a:ea typeface="Noto Sans KR" pitchFamily="34" charset="-127"/>
                 <a:cs typeface="Noto Sans KR" pitchFamily="34" charset="-120"/>
               </a:rPr>
               <a:t>배경지식의 영향은 지식의 정확성 · 글의 특성 등에 따라 달라집니다.</a:t>
@@ -7923,7 +7923,7 @@
                   <a:srgbClr val="43516A"/>
                 </a:solidFill>
                 <a:latin typeface="Noto Sans KR" pitchFamily="34" charset="0"/>
-                <a:ea typeface="Noto Sans KR" pitchFamily="34" charset="-122"/>
+                <a:ea typeface="Noto Sans KR" pitchFamily="34" charset="-127"/>
                 <a:cs typeface="Noto Sans KR" pitchFamily="34" charset="-120"/>
               </a:rPr>
               <a:t>출처: Smith et al. (2021) · Hattan et al. (2024)</a:t>
@@ -7965,7 +7965,7 @@
                   <a:srgbClr val="101D42"/>
                 </a:solidFill>
                 <a:latin typeface="Noto Sans KR" pitchFamily="34" charset="0"/>
-                <a:ea typeface="Noto Sans KR" pitchFamily="34" charset="-122"/>
+                <a:ea typeface="Noto Sans KR" pitchFamily="34" charset="-127"/>
                 <a:cs typeface="Noto Sans KR" pitchFamily="34" charset="-120"/>
               </a:rPr>
               <a:t>2 / 4</a:t>
@@ -8695,7 +8695,7 @@
                   <a:srgbClr val="101D42"/>
                 </a:solidFill>
                 <a:latin typeface="Noto Serif KR Black" pitchFamily="34" charset="0"/>
-                <a:ea typeface="Noto Serif KR Black" pitchFamily="34" charset="-122"/>
+                <a:ea typeface="Noto Serif KR Black" pitchFamily="34" charset="-127"/>
                 <a:cs typeface="Noto Serif KR Black" pitchFamily="34" charset="-120"/>
               </a:rPr>
               <a:t>단편적인 정보에서 깊이 있는 이해로</a:t>
@@ -8737,7 +8737,7 @@
                   <a:srgbClr val="101D42"/>
                 </a:solidFill>
                 <a:latin typeface="Noto Serif KR Black" pitchFamily="34" charset="0"/>
-                <a:ea typeface="Noto Serif KR Black" pitchFamily="34" charset="-122"/>
+                <a:ea typeface="Noto Serif KR Black" pitchFamily="34" charset="-127"/>
                 <a:cs typeface="Noto Serif KR Black" pitchFamily="34" charset="-120"/>
               </a:rPr>
               <a:t>‘본 적 있다’는 익숙함이</a:t>
@@ -8779,7 +8779,7 @@
                   <a:srgbClr val="15543C"/>
                 </a:solidFill>
                 <a:latin typeface="Noto Serif KR Black" pitchFamily="34" charset="0"/>
-                <a:ea typeface="Noto Serif KR Black" pitchFamily="34" charset="-122"/>
+                <a:ea typeface="Noto Serif KR Black" pitchFamily="34" charset="-127"/>
                 <a:cs typeface="Noto Serif KR Black" pitchFamily="34" charset="-120"/>
               </a:rPr>
               <a:t>‘안다’는 이해는 아닙니다.</a:t>
@@ -8821,7 +8821,7 @@
                   <a:srgbClr val="15543C"/>
                 </a:solidFill>
                 <a:latin typeface="Noto Serif KR Black" pitchFamily="34" charset="0"/>
-                <a:ea typeface="Noto Serif KR Black" pitchFamily="34" charset="-122"/>
+                <a:ea typeface="Noto Serif KR Black" pitchFamily="34" charset="-127"/>
                 <a:cs typeface="Noto Serif KR Black" pitchFamily="34" charset="-120"/>
               </a:rPr>
               <a:t>단편적인 정보가 생각의 전부가 될까 걱정됩니다</a:t>
@@ -8863,7 +8863,7 @@
                   <a:srgbClr val="101D42"/>
                 </a:solidFill>
                 <a:latin typeface="Noto Sans KR" pitchFamily="34" charset="0"/>
-                <a:ea typeface="Noto Sans KR" pitchFamily="34" charset="-122"/>
+                <a:ea typeface="Noto Sans KR" pitchFamily="34" charset="-127"/>
                 <a:cs typeface="Noto Sans KR" pitchFamily="34" charset="-120"/>
               </a:rPr>
               <a:t>SNS와 짧은 영상은 정보를 빠르게 접하게 합니다. 그러나 이런 접촉만</a:t>
@@ -8883,7 +8883,7 @@
                   <a:srgbClr val="101D42"/>
                 </a:solidFill>
                 <a:latin typeface="Noto Sans KR" pitchFamily="34" charset="0"/>
-                <a:ea typeface="Noto Sans KR" pitchFamily="34" charset="-122"/>
+                <a:ea typeface="Noto Sans KR" pitchFamily="34" charset="-127"/>
                 <a:cs typeface="Noto Sans KR" pitchFamily="34" charset="-120"/>
               </a:rPr>
               <a:t>이어지면 </a:t>
@@ -8903,7 +8903,7 @@
                   <a:srgbClr val="FFF0AD"/>
                 </a:highlight>
                 <a:latin typeface="Noto Sans KR" pitchFamily="34" charset="0"/>
-                <a:ea typeface="Noto Sans KR" pitchFamily="34" charset="-122"/>
+                <a:ea typeface="Noto Sans KR" pitchFamily="34" charset="-127"/>
                 <a:cs typeface="Noto Sans KR" pitchFamily="34" charset="-120"/>
               </a:rPr>
               <a:t>원인과 맥락</a:t>
@@ -8920,7 +8920,7 @@
                   <a:srgbClr val="101D42"/>
                 </a:solidFill>
                 <a:latin typeface="Noto Sans KR" pitchFamily="34" charset="0"/>
-                <a:ea typeface="Noto Sans KR" pitchFamily="34" charset="-122"/>
+                <a:ea typeface="Noto Sans KR" pitchFamily="34" charset="-127"/>
                 <a:cs typeface="Noto Sans KR" pitchFamily="34" charset="-120"/>
               </a:rPr>
               <a:t>, </a:t>
@@ -8940,7 +8940,7 @@
                   <a:srgbClr val="FFF0AD"/>
                 </a:highlight>
                 <a:latin typeface="Noto Sans KR" pitchFamily="34" charset="0"/>
-                <a:ea typeface="Noto Sans KR" pitchFamily="34" charset="-122"/>
+                <a:ea typeface="Noto Sans KR" pitchFamily="34" charset="-127"/>
                 <a:cs typeface="Noto Sans KR" pitchFamily="34" charset="-120"/>
               </a:rPr>
               <a:t>다른 관점과 반대 근거</a:t>
@@ -8957,7 +8957,7 @@
                   <a:srgbClr val="101D42"/>
                 </a:solidFill>
                 <a:latin typeface="Noto Sans KR" pitchFamily="34" charset="0"/>
-                <a:ea typeface="Noto Sans KR" pitchFamily="34" charset="-122"/>
+                <a:ea typeface="Noto Sans KR" pitchFamily="34" charset="-127"/>
                 <a:cs typeface="Noto Sans KR" pitchFamily="34" charset="-120"/>
               </a:rPr>
               <a:t>를 따져 볼 시간은 부족해질</a:t>
@@ -8977,7 +8977,7 @@
                   <a:srgbClr val="101D42"/>
                 </a:solidFill>
                 <a:latin typeface="Noto Sans KR" pitchFamily="34" charset="0"/>
-                <a:ea typeface="Noto Sans KR" pitchFamily="34" charset="-122"/>
+                <a:ea typeface="Noto Sans KR" pitchFamily="34" charset="-127"/>
                 <a:cs typeface="Noto Sans KR" pitchFamily="34" charset="-120"/>
               </a:rPr>
               <a:t>수 있습니다.</a:t>
@@ -9019,7 +9019,7 @@
                   <a:srgbClr val="15543C"/>
                 </a:solidFill>
                 <a:latin typeface="Noto Serif KR Black" pitchFamily="34" charset="0"/>
-                <a:ea typeface="Noto Serif KR Black" pitchFamily="34" charset="-122"/>
+                <a:ea typeface="Noto Serif KR Black" pitchFamily="34" charset="-127"/>
                 <a:cs typeface="Noto Serif KR Black" pitchFamily="34" charset="-120"/>
               </a:rPr>
               <a:t>‘안다는 착각’을 넘어서는 연습이 필요합니다</a:t>
@@ -9061,7 +9061,7 @@
                   <a:srgbClr val="101D42"/>
                 </a:solidFill>
                 <a:latin typeface="Noto Sans KR" pitchFamily="34" charset="0"/>
-                <a:ea typeface="Noto Sans KR" pitchFamily="34" charset="-122"/>
+                <a:ea typeface="Noto Sans KR" pitchFamily="34" charset="-127"/>
                 <a:cs typeface="Noto Sans KR" pitchFamily="34" charset="-120"/>
               </a:rPr>
               <a:t>인터넷 검색 실험에서는 찾은 정보를 </a:t>
@@ -9081,7 +9081,7 @@
                   <a:srgbClr val="FFF0AD"/>
                 </a:highlight>
                 <a:latin typeface="Noto Sans KR" pitchFamily="34" charset="0"/>
-                <a:ea typeface="Noto Sans KR" pitchFamily="34" charset="-122"/>
+                <a:ea typeface="Noto Sans KR" pitchFamily="34" charset="-127"/>
                 <a:cs typeface="Noto Sans KR" pitchFamily="34" charset="-120"/>
               </a:rPr>
               <a:t>자신의 지식으로 혼동</a:t>
@@ -9098,7 +9098,7 @@
                   <a:srgbClr val="101D42"/>
                 </a:solidFill>
                 <a:latin typeface="Noto Sans KR" pitchFamily="34" charset="0"/>
-                <a:ea typeface="Noto Sans KR" pitchFamily="34" charset="-122"/>
+                <a:ea typeface="Noto Sans KR" pitchFamily="34" charset="-127"/>
                 <a:cs typeface="Noto Sans KR" pitchFamily="34" charset="-120"/>
               </a:rPr>
               <a:t>하고, 아는</a:t>
@@ -9118,7 +9118,7 @@
                   <a:srgbClr val="101D42"/>
                 </a:solidFill>
                 <a:latin typeface="Noto Sans KR" pitchFamily="34" charset="0"/>
-                <a:ea typeface="Noto Sans KR" pitchFamily="34" charset="-122"/>
+                <a:ea typeface="Noto Sans KR" pitchFamily="34" charset="-127"/>
                 <a:cs typeface="Noto Sans KR" pitchFamily="34" charset="-120"/>
               </a:rPr>
               <a:t>정도를 </a:t>
@@ -9138,7 +9138,7 @@
                   <a:srgbClr val="FFF0AD"/>
                 </a:highlight>
                 <a:latin typeface="Noto Sans KR" pitchFamily="34" charset="0"/>
-                <a:ea typeface="Noto Sans KR" pitchFamily="34" charset="-122"/>
+                <a:ea typeface="Noto Sans KR" pitchFamily="34" charset="-127"/>
                 <a:cs typeface="Noto Sans KR" pitchFamily="34" charset="-120"/>
               </a:rPr>
               <a:t>과대평가</a:t>
@@ -9155,7 +9155,7 @@
                   <a:srgbClr val="101D42"/>
                 </a:solidFill>
                 <a:latin typeface="Noto Sans KR" pitchFamily="34" charset="0"/>
-                <a:ea typeface="Noto Sans KR" pitchFamily="34" charset="-122"/>
+                <a:ea typeface="Noto Sans KR" pitchFamily="34" charset="-127"/>
                 <a:cs typeface="Noto Sans KR" pitchFamily="34" charset="-120"/>
               </a:rPr>
               <a:t>하는 현상이 관찰됐습니다.</a:t>
@@ -9197,7 +9197,7 @@
                   <a:srgbClr val="101D42"/>
                 </a:solidFill>
                 <a:latin typeface="Noto Sans KR" pitchFamily="34" charset="0"/>
-                <a:ea typeface="Noto Sans KR" pitchFamily="34" charset="-122"/>
+                <a:ea typeface="Noto Sans KR" pitchFamily="34" charset="-127"/>
                 <a:cs typeface="Noto Sans KR" pitchFamily="34" charset="-120"/>
               </a:rPr>
               <a:t>학생이 </a:t>
@@ -9217,7 +9217,7 @@
                   <a:srgbClr val="FFF0AD"/>
                 </a:highlight>
                 <a:latin typeface="Noto Sans KR" pitchFamily="34" charset="0"/>
-                <a:ea typeface="Noto Sans KR" pitchFamily="34" charset="-122"/>
+                <a:ea typeface="Noto Sans KR" pitchFamily="34" charset="-127"/>
                 <a:cs typeface="Noto Sans KR" pitchFamily="34" charset="-120"/>
               </a:rPr>
               <a:t>자기 말로 설명</a:t>
@@ -9234,7 +9234,7 @@
                   <a:srgbClr val="101D42"/>
                 </a:solidFill>
                 <a:latin typeface="Noto Sans KR" pitchFamily="34" charset="0"/>
-                <a:ea typeface="Noto Sans KR" pitchFamily="34" charset="-122"/>
+                <a:ea typeface="Noto Sans KR" pitchFamily="34" charset="-127"/>
                 <a:cs typeface="Noto Sans KR" pitchFamily="34" charset="-120"/>
               </a:rPr>
               <a:t>하고, </a:t>
@@ -9254,7 +9254,7 @@
                   <a:srgbClr val="FFF0AD"/>
                 </a:highlight>
                 <a:latin typeface="Noto Sans KR" pitchFamily="34" charset="0"/>
-                <a:ea typeface="Noto Sans KR" pitchFamily="34" charset="-122"/>
+                <a:ea typeface="Noto Sans KR" pitchFamily="34" charset="-127"/>
                 <a:cs typeface="Noto Sans KR" pitchFamily="34" charset="-120"/>
               </a:rPr>
               <a:t>책에서 근거를 찾고</a:t>
@@ -9271,7 +9271,7 @@
                   <a:srgbClr val="101D42"/>
                 </a:solidFill>
                 <a:latin typeface="Noto Sans KR" pitchFamily="34" charset="0"/>
-                <a:ea typeface="Noto Sans KR" pitchFamily="34" charset="-122"/>
+                <a:ea typeface="Noto Sans KR" pitchFamily="34" charset="-127"/>
                 <a:cs typeface="Noto Sans KR" pitchFamily="34" charset="-120"/>
               </a:rPr>
               <a:t>, </a:t>
@@ -9291,7 +9291,7 @@
                   <a:srgbClr val="FFF0AD"/>
                 </a:highlight>
                 <a:latin typeface="Noto Sans KR" pitchFamily="34" charset="0"/>
-                <a:ea typeface="Noto Sans KR" pitchFamily="34" charset="-122"/>
+                <a:ea typeface="Noto Sans KR" pitchFamily="34" charset="-127"/>
                 <a:cs typeface="Noto Sans KR" pitchFamily="34" charset="-120"/>
               </a:rPr>
               <a:t>다른 상황에 적용</a:t>
@@ -9308,7 +9308,7 @@
                   <a:srgbClr val="101D42"/>
                 </a:solidFill>
                 <a:latin typeface="Noto Sans KR" pitchFamily="34" charset="0"/>
-                <a:ea typeface="Noto Sans KR" pitchFamily="34" charset="-122"/>
+                <a:ea typeface="Noto Sans KR" pitchFamily="34" charset="-127"/>
                 <a:cs typeface="Noto Sans KR" pitchFamily="34" charset="-120"/>
               </a:rPr>
               <a:t>해 보는</a:t>
@@ -9328,7 +9328,7 @@
                   <a:srgbClr val="101D42"/>
                 </a:solidFill>
                 <a:latin typeface="Noto Sans KR" pitchFamily="34" charset="0"/>
-                <a:ea typeface="Noto Sans KR" pitchFamily="34" charset="-122"/>
+                <a:ea typeface="Noto Sans KR" pitchFamily="34" charset="-127"/>
                 <a:cs typeface="Noto Sans KR" pitchFamily="34" charset="-120"/>
               </a:rPr>
               <a:t>활동이 필요합니다.</a:t>
@@ -9370,7 +9370,7 @@
                   <a:srgbClr val="15543C"/>
                 </a:solidFill>
                 <a:latin typeface="Noto Serif KR Black" pitchFamily="34" charset="0"/>
-                <a:ea typeface="Noto Serif KR Black" pitchFamily="34" charset="-122"/>
+                <a:ea typeface="Noto Serif KR Black" pitchFamily="34" charset="-127"/>
                 <a:cs typeface="Noto Serif KR Black" pitchFamily="34" charset="-120"/>
               </a:rPr>
               <a:t>디지털 교육의 중심에도 학생의 사고가 있어야 합니다</a:t>
@@ -9412,7 +9412,7 @@
                   <a:srgbClr val="101D42"/>
                 </a:solidFill>
                 <a:latin typeface="Noto Sans KR" pitchFamily="34" charset="0"/>
-                <a:ea typeface="Noto Sans KR" pitchFamily="34" charset="-122"/>
+                <a:ea typeface="Noto Sans KR" pitchFamily="34" charset="-127"/>
                 <a:cs typeface="Noto Sans KR" pitchFamily="34" charset="-120"/>
               </a:rPr>
               <a:t>AI가 빠르게 답을 제시해도, 그 </a:t>
@@ -9432,7 +9432,7 @@
                   <a:srgbClr val="FFF0AD"/>
                 </a:highlight>
                 <a:latin typeface="Noto Sans KR" pitchFamily="34" charset="0"/>
-                <a:ea typeface="Noto Sans KR" pitchFamily="34" charset="-122"/>
+                <a:ea typeface="Noto Sans KR" pitchFamily="34" charset="-127"/>
                 <a:cs typeface="Noto Sans KR" pitchFamily="34" charset="-120"/>
               </a:rPr>
               <a:t>뜻과 근거를 판단하는 힘</a:t>
@@ -9449,7 +9449,7 @@
                   <a:srgbClr val="101D42"/>
                 </a:solidFill>
                 <a:latin typeface="Noto Sans KR" pitchFamily="34" charset="0"/>
-                <a:ea typeface="Noto Sans KR" pitchFamily="34" charset="-122"/>
+                <a:ea typeface="Noto Sans KR" pitchFamily="34" charset="-127"/>
                 <a:cs typeface="Noto Sans KR" pitchFamily="34" charset="-120"/>
               </a:rPr>
               <a:t>은 학생 안에 있어야</a:t>
@@ -9469,7 +9469,7 @@
                   <a:srgbClr val="101D42"/>
                 </a:solidFill>
                 <a:latin typeface="Noto Sans KR" pitchFamily="34" charset="0"/>
-                <a:ea typeface="Noto Sans KR" pitchFamily="34" charset="-122"/>
+                <a:ea typeface="Noto Sans KR" pitchFamily="34" charset="-127"/>
                 <a:cs typeface="Noto Sans KR" pitchFamily="34" charset="-120"/>
               </a:rPr>
               <a:t>합니다. 기술은 읽기와 표현을 돕고, 학생에게 </a:t>
@@ -9489,7 +9489,7 @@
                   <a:srgbClr val="FFF0AD"/>
                 </a:highlight>
                 <a:latin typeface="Noto Sans KR" pitchFamily="34" charset="0"/>
-                <a:ea typeface="Noto Sans KR" pitchFamily="34" charset="-122"/>
+                <a:ea typeface="Noto Sans KR" pitchFamily="34" charset="-127"/>
                 <a:cs typeface="Noto Sans KR" pitchFamily="34" charset="-120"/>
               </a:rPr>
               <a:t>충분히 생각할 시간</a:t>
@@ -9506,7 +9506,7 @@
                   <a:srgbClr val="101D42"/>
                 </a:solidFill>
                 <a:latin typeface="Noto Sans KR" pitchFamily="34" charset="0"/>
-                <a:ea typeface="Noto Sans KR" pitchFamily="34" charset="-122"/>
+                <a:ea typeface="Noto Sans KR" pitchFamily="34" charset="-127"/>
                 <a:cs typeface="Noto Sans KR" pitchFamily="34" charset="-120"/>
               </a:rPr>
               <a:t>을 주는</a:t>
@@ -9526,7 +9526,7 @@
                   <a:srgbClr val="101D42"/>
                 </a:solidFill>
                 <a:latin typeface="Noto Sans KR" pitchFamily="34" charset="0"/>
-                <a:ea typeface="Noto Sans KR" pitchFamily="34" charset="-122"/>
+                <a:ea typeface="Noto Sans KR" pitchFamily="34" charset="-127"/>
                 <a:cs typeface="Noto Sans KR" pitchFamily="34" charset="-120"/>
               </a:rPr>
               <a:t>방향으로 써야 합니다.</a:t>
@@ -9568,7 +9568,7 @@
                   <a:srgbClr val="FFFFFF"/>
                 </a:solidFill>
                 <a:latin typeface="Noto Sans KR" pitchFamily="34" charset="0"/>
-                <a:ea typeface="Noto Sans KR" pitchFamily="34" charset="-122"/>
+                <a:ea typeface="Noto Sans KR" pitchFamily="34" charset="-127"/>
                 <a:cs typeface="Noto Sans KR" pitchFamily="34" charset="-120"/>
               </a:rPr>
               <a:t>?</a:t>
@@ -9610,7 +9610,7 @@
                   <a:srgbClr val="15543C"/>
                 </a:solidFill>
                 <a:latin typeface="Noto Sans KR" pitchFamily="34" charset="0"/>
-                <a:ea typeface="Noto Sans KR" pitchFamily="34" charset="-122"/>
+                <a:ea typeface="Noto Sans KR" pitchFamily="34" charset="-127"/>
                 <a:cs typeface="Noto Sans KR" pitchFamily="34" charset="-120"/>
               </a:rPr>
               <a:t>내 말로 설명할 수 있는가?</a:t>
@@ -9630,7 +9630,7 @@
                   <a:srgbClr val="15543C"/>
                 </a:solidFill>
                 <a:latin typeface="Noto Sans KR" pitchFamily="34" charset="0"/>
-                <a:ea typeface="Noto Sans KR" pitchFamily="34" charset="-122"/>
+                <a:ea typeface="Noto Sans KR" pitchFamily="34" charset="-127"/>
                 <a:cs typeface="Noto Sans KR" pitchFamily="34" charset="-120"/>
               </a:rPr>
               <a:t>그렇게 생각한 근거는 무엇인가?</a:t>
@@ -9650,7 +9650,7 @@
                   <a:srgbClr val="15543C"/>
                 </a:solidFill>
                 <a:latin typeface="Noto Sans KR" pitchFamily="34" charset="0"/>
-                <a:ea typeface="Noto Sans KR" pitchFamily="34" charset="-122"/>
+                <a:ea typeface="Noto Sans KR" pitchFamily="34" charset="-127"/>
                 <a:cs typeface="Noto Sans KR" pitchFamily="34" charset="-120"/>
               </a:rPr>
               <a:t>다른 상황에도 적용할 수 있는가?</a:t>
@@ -9692,7 +9692,7 @@
                   <a:srgbClr val="FFFFFF"/>
                 </a:solidFill>
                 <a:latin typeface="Noto Sans KR" pitchFamily="34" charset="0"/>
-                <a:ea typeface="Noto Sans KR" pitchFamily="34" charset="-122"/>
+                <a:ea typeface="Noto Sans KR" pitchFamily="34" charset="-127"/>
                 <a:cs typeface="Noto Sans KR" pitchFamily="34" charset="-120"/>
               </a:rPr>
               <a:t>?</a:t>
@@ -9734,7 +9734,7 @@
                   <a:srgbClr val="FFFFFF"/>
                 </a:solidFill>
                 <a:latin typeface="Noto Sans KR" pitchFamily="34" charset="0"/>
-                <a:ea typeface="Noto Sans KR" pitchFamily="34" charset="-122"/>
+                <a:ea typeface="Noto Sans KR" pitchFamily="34" charset="-127"/>
                 <a:cs typeface="Noto Sans KR" pitchFamily="34" charset="-120"/>
               </a:rPr>
               <a:t>?</a:t>
@@ -9776,7 +9776,7 @@
                   <a:srgbClr val="43516A"/>
                 </a:solidFill>
                 <a:latin typeface="Noto Sans KR" pitchFamily="34" charset="0"/>
-                <a:ea typeface="Noto Sans KR" pitchFamily="34" charset="-122"/>
+                <a:ea typeface="Noto Sans KR" pitchFamily="34" charset="-127"/>
                 <a:cs typeface="Noto Sans KR" pitchFamily="34" charset="-120"/>
               </a:rPr>
               <a:t>연구는 성인의 인터넷 검색 실험이며, 초등학생의 SNS 효과를 직접 검증한 결과는 아닙니다.</a:t>
@@ -9796,7 +9796,7 @@
                   <a:srgbClr val="43516A"/>
                 </a:solidFill>
                 <a:latin typeface="Noto Sans KR" pitchFamily="34" charset="0"/>
-                <a:ea typeface="Noto Sans KR" pitchFamily="34" charset="-122"/>
+                <a:ea typeface="Noto Sans KR" pitchFamily="34" charset="-127"/>
                 <a:cs typeface="Noto Sans KR" pitchFamily="34" charset="-120"/>
               </a:rPr>
               <a:t>출처: Fisher et al. (2015) · Ward (2021)</a:t>
@@ -9838,7 +9838,7 @@
                   <a:srgbClr val="101D42"/>
                 </a:solidFill>
                 <a:latin typeface="Noto Sans KR" pitchFamily="34" charset="0"/>
-                <a:ea typeface="Noto Sans KR" pitchFamily="34" charset="-122"/>
+                <a:ea typeface="Noto Sans KR" pitchFamily="34" charset="-127"/>
                 <a:cs typeface="Noto Sans KR" pitchFamily="34" charset="-120"/>
               </a:rPr>
               <a:t>3 / 4</a:t>
@@ -10970,7 +10970,7 @@
                   <a:srgbClr val="101D42"/>
                 </a:solidFill>
                 <a:latin typeface="Noto Serif KR Black" pitchFamily="34" charset="0"/>
-                <a:ea typeface="Noto Serif KR Black" pitchFamily="34" charset="-122"/>
+                <a:ea typeface="Noto Serif KR Black" pitchFamily="34" charset="-127"/>
                 <a:cs typeface="Noto Serif KR Black" pitchFamily="34" charset="-120"/>
               </a:rPr>
               <a:t>교실의 문제에서 출발한 부기</a:t>
@@ -11012,7 +11012,7 @@
                   <a:srgbClr val="101D42"/>
                 </a:solidFill>
                 <a:latin typeface="Noto Serif KR Black" pitchFamily="34" charset="0"/>
-                <a:ea typeface="Noto Serif KR Black" pitchFamily="34" charset="-122"/>
+                <a:ea typeface="Noto Serif KR Black" pitchFamily="34" charset="-127"/>
                 <a:cs typeface="Noto Serif KR Black" pitchFamily="34" charset="-120"/>
               </a:rPr>
               <a:t>지금 학교 현장에는</a:t>
@@ -11032,7 +11032,7 @@
                   <a:srgbClr val="15543C"/>
                 </a:solidFill>
                 <a:latin typeface="Noto Serif KR Black" pitchFamily="34" charset="0"/>
-                <a:ea typeface="Noto Serif KR Black" pitchFamily="34" charset="-122"/>
+                <a:ea typeface="Noto Serif KR Black" pitchFamily="34" charset="-127"/>
                 <a:cs typeface="Noto Serif KR Black" pitchFamily="34" charset="-120"/>
               </a:rPr>
               <a:t>독서가 절실합니다.</a:t>
@@ -11074,7 +11074,7 @@
                   <a:srgbClr val="15543C"/>
                 </a:solidFill>
                 <a:latin typeface="Noto Serif KR Black" pitchFamily="34" charset="0"/>
-                <a:ea typeface="Noto Serif KR Black" pitchFamily="34" charset="-122"/>
+                <a:ea typeface="Noto Serif KR Black" pitchFamily="34" charset="-127"/>
                 <a:cs typeface="Noto Serif KR Black" pitchFamily="34" charset="-120"/>
               </a:rPr>
               <a:t>고전의 지혜에서 시작하고자 합니다</a:t>
@@ -11116,7 +11116,7 @@
                   <a:srgbClr val="101D42"/>
                 </a:solidFill>
                 <a:latin typeface="Noto Sans KR" pitchFamily="34" charset="0"/>
-                <a:ea typeface="Noto Sans KR" pitchFamily="34" charset="-122"/>
+                <a:ea typeface="Noto Sans KR" pitchFamily="34" charset="-127"/>
                 <a:cs typeface="Noto Sans KR" pitchFamily="34" charset="-120"/>
               </a:rPr>
               <a:t>사람과 세상을 이해하고 </a:t>
@@ -11136,7 +11136,7 @@
                   <a:srgbClr val="FFF0AD"/>
                 </a:highlight>
                 <a:latin typeface="Noto Sans KR" pitchFamily="34" charset="0"/>
-                <a:ea typeface="Noto Sans KR" pitchFamily="34" charset="-122"/>
+                <a:ea typeface="Noto Sans KR" pitchFamily="34" charset="-127"/>
                 <a:cs typeface="Noto Sans KR" pitchFamily="34" charset="-120"/>
               </a:rPr>
               <a:t>스스로 생각할 힘</a:t>
@@ -11153,7 +11153,7 @@
                   <a:srgbClr val="101D42"/>
                 </a:solidFill>
                 <a:latin typeface="Noto Sans KR" pitchFamily="34" charset="0"/>
-                <a:ea typeface="Noto Sans KR" pitchFamily="34" charset="-122"/>
+                <a:ea typeface="Noto Sans KR" pitchFamily="34" charset="-127"/>
                 <a:cs typeface="Noto Sans KR" pitchFamily="34" charset="-120"/>
               </a:rPr>
               <a:t>을 기르기 위해, </a:t>
@@ -11173,7 +11173,7 @@
                   <a:srgbClr val="FFF0AD"/>
                 </a:highlight>
                 <a:latin typeface="Noto Sans KR" pitchFamily="34" charset="0"/>
-                <a:ea typeface="Noto Sans KR" pitchFamily="34" charset="-122"/>
+                <a:ea typeface="Noto Sans KR" pitchFamily="34" charset="-127"/>
                 <a:cs typeface="Noto Sans KR" pitchFamily="34" charset="-120"/>
               </a:rPr>
               <a:t>고전의 지혜</a:t>
@@ -11190,7 +11190,7 @@
                   <a:srgbClr val="101D42"/>
                 </a:solidFill>
                 <a:latin typeface="Noto Sans KR" pitchFamily="34" charset="0"/>
-                <a:ea typeface="Noto Sans KR" pitchFamily="34" charset="-122"/>
+                <a:ea typeface="Noto Sans KR" pitchFamily="34" charset="-127"/>
                 <a:cs typeface="Noto Sans KR" pitchFamily="34" charset="-120"/>
               </a:rPr>
               <a:t>를</a:t>
@@ -11210,7 +11210,7 @@
                   <a:srgbClr val="101D42"/>
                 </a:solidFill>
                 <a:latin typeface="Noto Sans KR" pitchFamily="34" charset="0"/>
-                <a:ea typeface="Noto Sans KR" pitchFamily="34" charset="-122"/>
+                <a:ea typeface="Noto Sans KR" pitchFamily="34" charset="-127"/>
                 <a:cs typeface="Noto Sans KR" pitchFamily="34" charset="-120"/>
               </a:rPr>
               <a:t>빌리고자 했습니다. </a:t>
@@ -11230,7 +11230,7 @@
                   <a:srgbClr val="FFF0AD"/>
                 </a:highlight>
                 <a:latin typeface="Noto Sans KR" pitchFamily="34" charset="0"/>
-                <a:ea typeface="Noto Sans KR" pitchFamily="34" charset="-122"/>
+                <a:ea typeface="Noto Sans KR" pitchFamily="34" charset="-127"/>
                 <a:cs typeface="Noto Sans KR" pitchFamily="34" charset="-120"/>
               </a:rPr>
               <a:t>우정과 책임</a:t>
@@ -11247,7 +11247,7 @@
                   <a:srgbClr val="101D42"/>
                 </a:solidFill>
                 <a:latin typeface="Noto Sans KR" pitchFamily="34" charset="0"/>
-                <a:ea typeface="Noto Sans KR" pitchFamily="34" charset="-122"/>
+                <a:ea typeface="Noto Sans KR" pitchFamily="34" charset="-127"/>
                 <a:cs typeface="Noto Sans KR" pitchFamily="34" charset="-120"/>
               </a:rPr>
               <a:t>, </a:t>
@@ -11267,7 +11267,7 @@
                   <a:srgbClr val="FFF0AD"/>
                 </a:highlight>
                 <a:latin typeface="Noto Sans KR" pitchFamily="34" charset="0"/>
-                <a:ea typeface="Noto Sans KR" pitchFamily="34" charset="-122"/>
+                <a:ea typeface="Noto Sans KR" pitchFamily="34" charset="-127"/>
                 <a:cs typeface="Noto Sans KR" pitchFamily="34" charset="-120"/>
               </a:rPr>
               <a:t>공정과 나눔</a:t>
@@ -11284,7 +11284,7 @@
                   <a:srgbClr val="101D42"/>
                 </a:solidFill>
                 <a:latin typeface="Noto Sans KR" pitchFamily="34" charset="0"/>
-                <a:ea typeface="Noto Sans KR" pitchFamily="34" charset="-122"/>
+                <a:ea typeface="Noto Sans KR" pitchFamily="34" charset="-127"/>
                 <a:cs typeface="Noto Sans KR" pitchFamily="34" charset="-120"/>
               </a:rPr>
               <a:t>을 읽으며 ‘왜 그런 선택을 했을까’,</a:t>
@@ -11304,7 +11304,7 @@
                   <a:srgbClr val="101D42"/>
                 </a:solidFill>
                 <a:latin typeface="Noto Sans KR" pitchFamily="34" charset="0"/>
-                <a:ea typeface="Noto Sans KR" pitchFamily="34" charset="-122"/>
+                <a:ea typeface="Noto Sans KR" pitchFamily="34" charset="-127"/>
                 <a:cs typeface="Noto Sans KR" pitchFamily="34" charset="-120"/>
               </a:rPr>
               <a:t>‘나라면 어떻게 했을까’를 함께 묻습니다.</a:t>
@@ -11346,7 +11346,7 @@
                   <a:srgbClr val="15543C"/>
                 </a:solidFill>
                 <a:latin typeface="Noto Serif KR Black" pitchFamily="34" charset="0"/>
-                <a:ea typeface="Noto Serif KR Black" pitchFamily="34" charset="-122"/>
+                <a:ea typeface="Noto Serif KR Black" pitchFamily="34" charset="-127"/>
                 <a:cs typeface="Noto Serif KR Black" pitchFamily="34" charset="-120"/>
               </a:rPr>
               <a:t>초등교사들이 뜻을 모아 만들었습니다</a:t>
@@ -11388,7 +11388,7 @@
                   <a:srgbClr val="101D42"/>
                 </a:solidFill>
                 <a:latin typeface="Noto Sans KR" pitchFamily="34" charset="0"/>
-                <a:ea typeface="Noto Sans KR" pitchFamily="34" charset="-122"/>
+                <a:ea typeface="Noto Sans KR" pitchFamily="34" charset="-127"/>
                 <a:cs typeface="Noto Sans KR" pitchFamily="34" charset="-120"/>
               </a:rPr>
               <a:t>교실의 읽기 어려움을 풀고자 </a:t>
@@ -11408,7 +11408,7 @@
                   <a:srgbClr val="FFF0AD"/>
                 </a:highlight>
                 <a:latin typeface="Noto Sans KR" pitchFamily="34" charset="0"/>
-                <a:ea typeface="Noto Sans KR" pitchFamily="34" charset="-122"/>
+                <a:ea typeface="Noto Sans KR" pitchFamily="34" charset="-127"/>
                 <a:cs typeface="Noto Sans KR" pitchFamily="34" charset="-120"/>
               </a:rPr>
               <a:t>교사들이 기획</a:t>
@@ -11425,7 +11425,7 @@
                   <a:srgbClr val="101D42"/>
                 </a:solidFill>
                 <a:latin typeface="Noto Sans KR" pitchFamily="34" charset="0"/>
-                <a:ea typeface="Noto Sans KR" pitchFamily="34" charset="-122"/>
+                <a:ea typeface="Noto Sans KR" pitchFamily="34" charset="-127"/>
                 <a:cs typeface="Noto Sans KR" pitchFamily="34" charset="-120"/>
               </a:rPr>
               <a:t>하고, </a:t>
@@ -11445,7 +11445,7 @@
                   <a:srgbClr val="FFF0AD"/>
                 </a:highlight>
                 <a:latin typeface="Noto Sans KR" pitchFamily="34" charset="0"/>
-                <a:ea typeface="Noto Sans KR" pitchFamily="34" charset="-122"/>
+                <a:ea typeface="Noto Sans KR" pitchFamily="34" charset="-127"/>
                 <a:cs typeface="Noto Sans KR" pitchFamily="34" charset="-120"/>
               </a:rPr>
               <a:t>기업의 지원</a:t>
@@ -11462,7 +11462,7 @@
                   <a:srgbClr val="101D42"/>
                 </a:solidFill>
                 <a:latin typeface="Noto Sans KR" pitchFamily="34" charset="0"/>
-                <a:ea typeface="Noto Sans KR" pitchFamily="34" charset="-122"/>
+                <a:ea typeface="Noto Sans KR" pitchFamily="34" charset="-127"/>
                 <a:cs typeface="Noto Sans KR" pitchFamily="34" charset="-120"/>
               </a:rPr>
               <a:t>을 더해 학교에</a:t>
@@ -11482,7 +11482,7 @@
                   <a:srgbClr val="101D42"/>
                 </a:solidFill>
                 <a:latin typeface="Noto Sans KR" pitchFamily="34" charset="0"/>
-                <a:ea typeface="Noto Sans KR" pitchFamily="34" charset="-122"/>
+                <a:ea typeface="Noto Sans KR" pitchFamily="34" charset="-127"/>
                 <a:cs typeface="Noto Sans KR" pitchFamily="34" charset="-120"/>
               </a:rPr>
               <a:t>적용했습니다. 학교에서 </a:t>
@@ -11502,7 +11502,7 @@
                   <a:srgbClr val="FFF0AD"/>
                 </a:highlight>
                 <a:latin typeface="Noto Sans KR" pitchFamily="34" charset="0"/>
-                <a:ea typeface="Noto Sans KR" pitchFamily="34" charset="-122"/>
+                <a:ea typeface="Noto Sans KR" pitchFamily="34" charset="-127"/>
                 <a:cs typeface="Noto Sans KR" pitchFamily="34" charset="-120"/>
               </a:rPr>
               <a:t>시범 사용</a:t>
@@ -11519,7 +11519,7 @@
                   <a:srgbClr val="101D42"/>
                 </a:solidFill>
                 <a:latin typeface="Noto Sans KR" pitchFamily="34" charset="0"/>
-                <a:ea typeface="Noto Sans KR" pitchFamily="34" charset="-122"/>
+                <a:ea typeface="Noto Sans KR" pitchFamily="34" charset="-127"/>
                 <a:cs typeface="Noto Sans KR" pitchFamily="34" charset="-120"/>
               </a:rPr>
               <a:t>을 통해 </a:t>
@@ -11539,7 +11539,7 @@
                   <a:srgbClr val="FFF0AD"/>
                 </a:highlight>
                 <a:latin typeface="Noto Sans KR" pitchFamily="34" charset="0"/>
-                <a:ea typeface="Noto Sans KR" pitchFamily="34" charset="-122"/>
+                <a:ea typeface="Noto Sans KR" pitchFamily="34" charset="-127"/>
                 <a:cs typeface="Noto Sans KR" pitchFamily="34" charset="-120"/>
               </a:rPr>
               <a:t>계속 개선하고 발전</a:t>
@@ -11556,7 +11556,7 @@
                   <a:srgbClr val="101D42"/>
                 </a:solidFill>
                 <a:latin typeface="Noto Sans KR" pitchFamily="34" charset="0"/>
-                <a:ea typeface="Noto Sans KR" pitchFamily="34" charset="-122"/>
+                <a:ea typeface="Noto Sans KR" pitchFamily="34" charset="-127"/>
                 <a:cs typeface="Noto Sans KR" pitchFamily="34" charset="-120"/>
               </a:rPr>
               <a:t>시켜 나가고</a:t>
@@ -11576,7 +11576,7 @@
                   <a:srgbClr val="101D42"/>
                 </a:solidFill>
                 <a:latin typeface="Noto Sans KR" pitchFamily="34" charset="0"/>
-                <a:ea typeface="Noto Sans KR" pitchFamily="34" charset="-122"/>
+                <a:ea typeface="Noto Sans KR" pitchFamily="34" charset="-127"/>
                 <a:cs typeface="Noto Sans KR" pitchFamily="34" charset="-120"/>
               </a:rPr>
               <a:t>있습니다.</a:t>
@@ -11618,7 +11618,7 @@
                   <a:srgbClr val="101D42"/>
                 </a:solidFill>
                 <a:latin typeface="Noto Sans KR" pitchFamily="34" charset="0"/>
-                <a:ea typeface="Noto Sans KR" pitchFamily="34" charset="-122"/>
+                <a:ea typeface="Noto Sans KR" pitchFamily="34" charset="-127"/>
                 <a:cs typeface="Noto Sans KR" pitchFamily="34" charset="-120"/>
               </a:rPr>
               <a:t>낱말 뜻 · 능동적 그림 읽기 · 다국어 지원</a:t>
@@ -11660,7 +11660,7 @@
                   <a:srgbClr val="15543C"/>
                 </a:solidFill>
                 <a:latin typeface="Noto Serif KR Black" pitchFamily="34" charset="0"/>
-                <a:ea typeface="Noto Serif KR Black" pitchFamily="34" charset="-122"/>
+                <a:ea typeface="Noto Serif KR Black" pitchFamily="34" charset="-127"/>
                 <a:cs typeface="Noto Serif KR Black" pitchFamily="34" charset="-120"/>
               </a:rPr>
               <a:t>읽기 지원</a:t>
@@ -11702,7 +11702,7 @@
                   <a:srgbClr val="101D42"/>
                 </a:solidFill>
                 <a:latin typeface="Noto Sans KR" pitchFamily="34" charset="0"/>
-                <a:ea typeface="Noto Sans KR" pitchFamily="34" charset="-122"/>
+                <a:ea typeface="Noto Sans KR" pitchFamily="34" charset="-127"/>
                 <a:cs typeface="Noto Sans KR" pitchFamily="34" charset="-120"/>
               </a:rPr>
               <a:t>캐릭터와의 대화 · 다양한 독후활동</a:t>
@@ -11744,7 +11744,7 @@
                   <a:srgbClr val="15543C"/>
                 </a:solidFill>
                 <a:latin typeface="Noto Serif KR Black" pitchFamily="34" charset="0"/>
-                <a:ea typeface="Noto Serif KR Black" pitchFamily="34" charset="-122"/>
+                <a:ea typeface="Noto Serif KR Black" pitchFamily="34" charset="-127"/>
                 <a:cs typeface="Noto Serif KR Black" pitchFamily="34" charset="-120"/>
               </a:rPr>
               <a:t>생각과 표현</a:t>
@@ -11786,7 +11786,7 @@
                   <a:srgbClr val="101D42"/>
                 </a:solidFill>
                 <a:latin typeface="Noto Sans KR" pitchFamily="34" charset="0"/>
-                <a:ea typeface="Noto Sans KR" pitchFamily="34" charset="-122"/>
+                <a:ea typeface="Noto Sans KR" pitchFamily="34" charset="-127"/>
                 <a:cs typeface="Noto Sans KR" pitchFamily="34" charset="-120"/>
               </a:rPr>
               <a:t>독서 기록 자산 · 수업 자료 · 학생 기록</a:t>
@@ -11828,7 +11828,7 @@
                   <a:srgbClr val="15543C"/>
                 </a:solidFill>
                 <a:latin typeface="Noto Serif KR Black" pitchFamily="34" charset="0"/>
-                <a:ea typeface="Noto Serif KR Black" pitchFamily="34" charset="-122"/>
+                <a:ea typeface="Noto Serif KR Black" pitchFamily="34" charset="-127"/>
                 <a:cs typeface="Noto Serif KR Black" pitchFamily="34" charset="-120"/>
               </a:rPr>
               <a:t>기록과 지도</a:t>
@@ -11870,7 +11870,7 @@
                   <a:srgbClr val="15543C"/>
                 </a:solidFill>
                 <a:latin typeface="Noto Serif KR Black" pitchFamily="34" charset="0"/>
-                <a:ea typeface="Noto Serif KR Black" pitchFamily="34" charset="-122"/>
+                <a:ea typeface="Noto Serif KR Black" pitchFamily="34" charset="-127"/>
                 <a:cs typeface="Noto Serif KR Black" pitchFamily="34" charset="-120"/>
               </a:rPr>
               <a:t>모두가 차별 없이 함께 읽을 수 있도록</a:t>
@@ -11912,7 +11912,7 @@
                   <a:srgbClr val="101D42"/>
                 </a:solidFill>
                 <a:latin typeface="Noto Sans KR" pitchFamily="34" charset="0"/>
-                <a:ea typeface="Noto Sans KR" pitchFamily="34" charset="-122"/>
+                <a:ea typeface="Noto Sans KR" pitchFamily="34" charset="-127"/>
                 <a:cs typeface="Noto Sans KR" pitchFamily="34" charset="-120"/>
               </a:rPr>
               <a:t>어려운 어휘는 </a:t>
@@ -11932,7 +11932,7 @@
                   <a:srgbClr val="FFF0AD"/>
                 </a:highlight>
                 <a:latin typeface="Noto Sans KR" pitchFamily="34" charset="0"/>
-                <a:ea typeface="Noto Sans KR" pitchFamily="34" charset="-122"/>
+                <a:ea typeface="Noto Sans KR" pitchFamily="34" charset="-127"/>
                 <a:cs typeface="Noto Sans KR" pitchFamily="34" charset="-120"/>
               </a:rPr>
               <a:t>디지털 도움</a:t>
@@ -11949,7 +11949,7 @@
                   <a:srgbClr val="101D42"/>
                 </a:solidFill>
                 <a:latin typeface="Noto Sans KR" pitchFamily="34" charset="0"/>
-                <a:ea typeface="Noto Sans KR" pitchFamily="34" charset="-122"/>
+                <a:ea typeface="Noto Sans KR" pitchFamily="34" charset="-127"/>
                 <a:cs typeface="Noto Sans KR" pitchFamily="34" charset="-120"/>
               </a:rPr>
               <a:t>으로, 언어의 차이는 </a:t>
@@ -11969,7 +11969,7 @@
                   <a:srgbClr val="FFF0AD"/>
                 </a:highlight>
                 <a:latin typeface="Noto Sans KR" pitchFamily="34" charset="0"/>
-                <a:ea typeface="Noto Sans KR" pitchFamily="34" charset="-122"/>
+                <a:ea typeface="Noto Sans KR" pitchFamily="34" charset="-127"/>
                 <a:cs typeface="Noto Sans KR" pitchFamily="34" charset="-120"/>
               </a:rPr>
               <a:t>다국어 번역</a:t>
@@ -11986,7 +11986,7 @@
                   <a:srgbClr val="101D42"/>
                 </a:solidFill>
                 <a:latin typeface="Noto Sans KR" pitchFamily="34" charset="0"/>
-                <a:ea typeface="Noto Sans KR" pitchFamily="34" charset="-122"/>
+                <a:ea typeface="Noto Sans KR" pitchFamily="34" charset="-127"/>
                 <a:cs typeface="Noto Sans KR" pitchFamily="34" charset="-120"/>
               </a:rPr>
               <a:t>으로 지원합니다. </a:t>
@@ -12006,7 +12006,7 @@
                   <a:srgbClr val="FFF0AD"/>
                 </a:highlight>
                 <a:latin typeface="Noto Sans KR" pitchFamily="34" charset="0"/>
-                <a:ea typeface="Noto Sans KR" pitchFamily="34" charset="-122"/>
+                <a:ea typeface="Noto Sans KR" pitchFamily="34" charset="-127"/>
                 <a:cs typeface="Noto Sans KR" pitchFamily="34" charset="-120"/>
               </a:rPr>
               <a:t>다문화</a:t>
@@ -12029,7 +12029,7 @@
                   <a:srgbClr val="FFF0AD"/>
                 </a:highlight>
                 <a:latin typeface="Noto Sans KR" pitchFamily="34" charset="0"/>
-                <a:ea typeface="Noto Sans KR" pitchFamily="34" charset="-122"/>
+                <a:ea typeface="Noto Sans KR" pitchFamily="34" charset="-127"/>
                 <a:cs typeface="Noto Sans KR" pitchFamily="34" charset="-120"/>
               </a:rPr>
               <a:t>학생</a:t>
@@ -12046,7 +12046,7 @@
                   <a:srgbClr val="101D42"/>
                 </a:solidFill>
                 <a:latin typeface="Noto Sans KR" pitchFamily="34" charset="0"/>
-                <a:ea typeface="Noto Sans KR" pitchFamily="34" charset="-122"/>
+                <a:ea typeface="Noto Sans KR" pitchFamily="34" charset="-127"/>
                 <a:cs typeface="Noto Sans KR" pitchFamily="34" charset="-120"/>
               </a:rPr>
               <a:t>을 포함한 </a:t>
@@ -12066,7 +12066,7 @@
                   <a:srgbClr val="FFF0AD"/>
                 </a:highlight>
                 <a:latin typeface="Noto Sans KR" pitchFamily="34" charset="0"/>
-                <a:ea typeface="Noto Sans KR" pitchFamily="34" charset="-122"/>
+                <a:ea typeface="Noto Sans KR" pitchFamily="34" charset="-127"/>
                 <a:cs typeface="Noto Sans KR" pitchFamily="34" charset="-120"/>
               </a:rPr>
               <a:t>모두가 차별 없이 함께 읽는 가치</a:t>
@@ -12083,7 +12083,7 @@
                   <a:srgbClr val="101D42"/>
                 </a:solidFill>
                 <a:latin typeface="Noto Sans KR" pitchFamily="34" charset="0"/>
-                <a:ea typeface="Noto Sans KR" pitchFamily="34" charset="-122"/>
+                <a:ea typeface="Noto Sans KR" pitchFamily="34" charset="-127"/>
                 <a:cs typeface="Noto Sans KR" pitchFamily="34" charset="-120"/>
               </a:rPr>
               <a:t>를 확산하고자 합니다.</a:t>
@@ -12125,7 +12125,7 @@
                   <a:srgbClr val="101D42"/>
                 </a:solidFill>
                 <a:latin typeface="Noto Sans KR" pitchFamily="34" charset="0"/>
-                <a:ea typeface="Noto Sans KR" pitchFamily="34" charset="-122"/>
+                <a:ea typeface="Noto Sans KR" pitchFamily="34" charset="-127"/>
                 <a:cs typeface="Noto Sans KR" pitchFamily="34" charset="-120"/>
               </a:rPr>
               <a:t>학생에게는 </a:t>
@@ -12145,7 +12145,7 @@
                   <a:srgbClr val="FFF0AD"/>
                 </a:highlight>
                 <a:latin typeface="Noto Sans KR" pitchFamily="34" charset="0"/>
-                <a:ea typeface="Noto Sans KR" pitchFamily="34" charset="-122"/>
+                <a:ea typeface="Noto Sans KR" pitchFamily="34" charset="-127"/>
                 <a:cs typeface="Noto Sans KR" pitchFamily="34" charset="-120"/>
               </a:rPr>
               <a:t>충분히 읽고 생각할 시간</a:t>
@@ -12162,7 +12162,7 @@
                   <a:srgbClr val="101D42"/>
                 </a:solidFill>
                 <a:latin typeface="Noto Sans KR" pitchFamily="34" charset="0"/>
-                <a:ea typeface="Noto Sans KR" pitchFamily="34" charset="-122"/>
+                <a:ea typeface="Noto Sans KR" pitchFamily="34" charset="-127"/>
                 <a:cs typeface="Noto Sans KR" pitchFamily="34" charset="-120"/>
               </a:rPr>
               <a:t>을, 교사에게는 </a:t>
@@ -12182,7 +12182,7 @@
                   <a:srgbClr val="FFF0AD"/>
                 </a:highlight>
                 <a:latin typeface="Noto Sans KR" pitchFamily="34" charset="0"/>
-                <a:ea typeface="Noto Sans KR" pitchFamily="34" charset="-122"/>
+                <a:ea typeface="Noto Sans KR" pitchFamily="34" charset="-127"/>
                 <a:cs typeface="Noto Sans KR" pitchFamily="34" charset="-120"/>
               </a:rPr>
               <a:t>수업 준비와 개별 지도</a:t>
@@ -12199,7 +12199,7 @@
                   <a:srgbClr val="101D42"/>
                 </a:solidFill>
                 <a:latin typeface="Noto Sans KR" pitchFamily="34" charset="0"/>
-                <a:ea typeface="Noto Sans KR" pitchFamily="34" charset="-122"/>
+                <a:ea typeface="Noto Sans KR" pitchFamily="34" charset="-127"/>
                 <a:cs typeface="Noto Sans KR" pitchFamily="34" charset="-120"/>
               </a:rPr>
               <a:t>를 위한</a:t>
@@ -12219,7 +12219,7 @@
                   <a:srgbClr val="101D42"/>
                 </a:solidFill>
                 <a:latin typeface="Noto Sans KR" pitchFamily="34" charset="0"/>
-                <a:ea typeface="Noto Sans KR" pitchFamily="34" charset="-122"/>
+                <a:ea typeface="Noto Sans KR" pitchFamily="34" charset="-127"/>
                 <a:cs typeface="Noto Sans KR" pitchFamily="34" charset="-120"/>
               </a:rPr>
               <a:t>지원을 요청드립니다.</a:t>
@@ -12261,7 +12261,7 @@
                   <a:srgbClr val="101D42"/>
                 </a:solidFill>
                 <a:latin typeface="Noto Serif KR Black" pitchFamily="34" charset="0"/>
-                <a:ea typeface="Noto Serif KR Black" pitchFamily="34" charset="-122"/>
+                <a:ea typeface="Noto Serif KR Black" pitchFamily="34" charset="-127"/>
                 <a:cs typeface="Noto Serif KR Black" pitchFamily="34" charset="-120"/>
               </a:rPr>
               <a:t>경남의 아이들이 스스로 이해하고 판단하는 사람으로 자라도록,</a:t>
@@ -12281,7 +12281,7 @@
                   <a:srgbClr val="15543C"/>
                 </a:solidFill>
                 <a:latin typeface="Noto Serif KR Black" pitchFamily="34" charset="0"/>
-                <a:ea typeface="Noto Serif KR Black" pitchFamily="34" charset="-122"/>
+                <a:ea typeface="Noto Serif KR Black" pitchFamily="34" charset="-127"/>
                 <a:cs typeface="Noto Serif KR Black" pitchFamily="34" charset="-120"/>
               </a:rPr>
               <a:t>기본 독서교육을 함께 지켜 주십시오.</a:t>
@@ -12323,7 +12323,7 @@
                   <a:srgbClr val="101D42"/>
                 </a:solidFill>
                 <a:latin typeface="Noto Sans KR" pitchFamily="34" charset="0"/>
-                <a:ea typeface="Noto Sans KR" pitchFamily="34" charset="-122"/>
+                <a:ea typeface="Noto Sans KR" pitchFamily="34" charset="-127"/>
                 <a:cs typeface="Noto Sans KR" pitchFamily="34" charset="-120"/>
               </a:rPr>
               <a:t>4 / 4</a:t>

--- a/promo/dl/brochure/bookie-complete-5p-edit.pptx
+++ b/promo/dl/brochure/bookie-complete-5p-edit.pptx
@@ -1,114 +1,114 @@
 
 <file path=ppt/presentation.xml><?xml version="1.0" encoding="utf-8"?>
-<p:presentation xmlns:a="http://schemas.openxmlformats.org/drawingml/2006/main" xmlns:r="http://schemas.openxmlformats.org/officeDocument/2006/relationships" xmlns:p="http://schemas.openxmlformats.org/presentationml/2006/main" saveSubsetFonts="1" autoCompressPictures="0">
-  <p:sldMasterIdLst>
-    <p:sldMasterId id="2147483648" r:id="rId1"/>
-  </p:sldMasterIdLst>
-  <p:sldIdLst>
-    <p:sldId id="256" r:id="rId2"/>
-    <p:sldId id="257" r:id="rId3"/>
-    <p:sldId id="258" r:id="rId4"/>
-    <p:sldId id="259" r:id="rId5"/>
-    <p:sldId id="260" r:id="rId6"/>
-  </p:sldIdLst>
-  <p:notesMasterIdLst>
-    <p:notesMasterId r:id="rId7"/>
-  </p:notesMasterIdLst>
-  <p:sldSz cx="7560005" cy="10692003"/>
-  <p:notesSz cx="10692003" cy="7560005"/>
-  <p:defaultTextStyle>
-    <a:lvl1pPr marL="0" algn="l" defTabSz="914400" rtl="0" eaLnBrk="1" latinLnBrk="0" hangingPunct="1">
-      <a:defRPr sz="1800" kern="1200">
-        <a:solidFill>
-          <a:schemeClr val="tx1"/>
-        </a:solidFill>
-        <a:latin typeface="+mn-lt"/>
-        <a:ea typeface="+mn-ea"/>
-        <a:cs typeface="+mn-cs"/>
-      </a:defRPr>
-    </a:lvl1pPr>
-    <a:lvl2pPr marL="457200" algn="l" defTabSz="914400" rtl="0" eaLnBrk="1" latinLnBrk="0" hangingPunct="1">
-      <a:defRPr sz="1800" kern="1200">
-        <a:solidFill>
-          <a:schemeClr val="tx1"/>
-        </a:solidFill>
-        <a:latin typeface="+mn-lt"/>
-        <a:ea typeface="+mn-ea"/>
-        <a:cs typeface="+mn-cs"/>
-      </a:defRPr>
-    </a:lvl2pPr>
-    <a:lvl3pPr marL="914400" algn="l" defTabSz="914400" rtl="0" eaLnBrk="1" latinLnBrk="0" hangingPunct="1">
-      <a:defRPr sz="1800" kern="1200">
-        <a:solidFill>
-          <a:schemeClr val="tx1"/>
-        </a:solidFill>
-        <a:latin typeface="+mn-lt"/>
-        <a:ea typeface="+mn-ea"/>
-        <a:cs typeface="+mn-cs"/>
-      </a:defRPr>
-    </a:lvl3pPr>
-    <a:lvl4pPr marL="1371600" algn="l" defTabSz="914400" rtl="0" eaLnBrk="1" latinLnBrk="0" hangingPunct="1">
-      <a:defRPr sz="1800" kern="1200">
-        <a:solidFill>
-          <a:schemeClr val="tx1"/>
-        </a:solidFill>
-        <a:latin typeface="+mn-lt"/>
-        <a:ea typeface="+mn-ea"/>
-        <a:cs typeface="+mn-cs"/>
-      </a:defRPr>
-    </a:lvl4pPr>
-    <a:lvl5pPr marL="1828800" algn="l" defTabSz="914400" rtl="0" eaLnBrk="1" latinLnBrk="0" hangingPunct="1">
-      <a:defRPr sz="1800" kern="1200">
-        <a:solidFill>
-          <a:schemeClr val="tx1"/>
-        </a:solidFill>
-        <a:latin typeface="+mn-lt"/>
-        <a:ea typeface="+mn-ea"/>
-        <a:cs typeface="+mn-cs"/>
-      </a:defRPr>
-    </a:lvl5pPr>
-    <a:lvl6pPr marL="2286000" algn="l" defTabSz="914400" rtl="0" eaLnBrk="1" latinLnBrk="0" hangingPunct="1">
-      <a:defRPr sz="1800" kern="1200">
-        <a:solidFill>
-          <a:schemeClr val="tx1"/>
-        </a:solidFill>
-        <a:latin typeface="+mn-lt"/>
-        <a:ea typeface="+mn-ea"/>
-        <a:cs typeface="+mn-cs"/>
-      </a:defRPr>
-    </a:lvl6pPr>
-    <a:lvl7pPr marL="2743200" algn="l" defTabSz="914400" rtl="0" eaLnBrk="1" latinLnBrk="0" hangingPunct="1">
-      <a:defRPr sz="1800" kern="1200">
-        <a:solidFill>
-          <a:schemeClr val="tx1"/>
-        </a:solidFill>
-        <a:latin typeface="+mn-lt"/>
-        <a:ea typeface="+mn-ea"/>
-        <a:cs typeface="+mn-cs"/>
-      </a:defRPr>
-    </a:lvl7pPr>
-    <a:lvl8pPr marL="3200400" algn="l" defTabSz="914400" rtl="0" eaLnBrk="1" latinLnBrk="0" hangingPunct="1">
-      <a:defRPr sz="1800" kern="1200">
-        <a:solidFill>
-          <a:schemeClr val="tx1"/>
-        </a:solidFill>
-        <a:latin typeface="+mn-lt"/>
-        <a:ea typeface="+mn-ea"/>
-        <a:cs typeface="+mn-cs"/>
-      </a:defRPr>
-    </a:lvl8pPr>
-    <a:lvl9pPr marL="3657600" algn="l" defTabSz="914400" rtl="0" eaLnBrk="1" latinLnBrk="0" hangingPunct="1">
-      <a:defRPr sz="1800" kern="1200">
-        <a:solidFill>
-          <a:schemeClr val="tx1"/>
-        </a:solidFill>
-        <a:latin typeface="+mn-lt"/>
-        <a:ea typeface="+mn-ea"/>
-        <a:cs typeface="+mn-cs"/>
-      </a:defRPr>
-    </a:lvl9pPr>
-  </p:defaultTextStyle>
-</p:presentation>
+<ns0:presentation xmlns:ns0="http://schemas.openxmlformats.org/presentationml/2006/main" xmlns:ns1="http://schemas.openxmlformats.org/officeDocument/2006/relationships" xmlns:ns2="http://schemas.openxmlformats.org/drawingml/2006/main" saveSubsetFonts="1" autoCompressPictures="0">
+  <ns0:sldMasterIdLst>
+    <ns0:sldMasterId id="2147483648" ns1:id="rId1"/>
+  </ns0:sldMasterIdLst>
+  <ns0:sldIdLst>
+    <ns0:sldId id="256" ns1:id="rId2"/>
+    <ns0:sldId id="257" ns1:id="rId3"/>
+    <ns0:sldId id="258" ns1:id="rId4"/>
+    <ns0:sldId id="259" ns1:id="rId5"/>
+    <ns0:sldId id="260" ns1:id="rId6"/>
+  </ns0:sldIdLst>
+  <ns0:notesMasterIdLst>
+    <ns0:notesMasterId ns1:id="rId7"/>
+  </ns0:notesMasterIdLst>
+  <ns0:sldSz cx="7560005" cy="10692003"/>
+  <ns0:notesSz cx="10692003" cy="7560005"/>
+  <ns0:defaultTextStyle>
+    <ns2:lvl1pPr marL="0" algn="l" defTabSz="914400" rtl="0" eaLnBrk="1" latinLnBrk="0" hangingPunct="1">
+      <ns2:defRPr sz="1800" kern="1200">
+        <ns2:solidFill>
+          <ns2:schemeClr val="tx1"/>
+        </ns2:solidFill>
+        <ns2:latin typeface="+mn-lt"/>
+        <ns2:ea typeface="+mn-ea"/>
+        <ns2:cs typeface="+mn-cs"/>
+      </ns2:defRPr>
+    </ns2:lvl1pPr>
+    <ns2:lvl2pPr marL="457200" algn="l" defTabSz="914400" rtl="0" eaLnBrk="1" latinLnBrk="0" hangingPunct="1">
+      <ns2:defRPr sz="1800" kern="1200">
+        <ns2:solidFill>
+          <ns2:schemeClr val="tx1"/>
+        </ns2:solidFill>
+        <ns2:latin typeface="+mn-lt"/>
+        <ns2:ea typeface="+mn-ea"/>
+        <ns2:cs typeface="+mn-cs"/>
+      </ns2:defRPr>
+    </ns2:lvl2pPr>
+    <ns2:lvl3pPr marL="914400" algn="l" defTabSz="914400" rtl="0" eaLnBrk="1" latinLnBrk="0" hangingPunct="1">
+      <ns2:defRPr sz="1800" kern="1200">
+        <ns2:solidFill>
+          <ns2:schemeClr val="tx1"/>
+        </ns2:solidFill>
+        <ns2:latin typeface="+mn-lt"/>
+        <ns2:ea typeface="+mn-ea"/>
+        <ns2:cs typeface="+mn-cs"/>
+      </ns2:defRPr>
+    </ns2:lvl3pPr>
+    <ns2:lvl4pPr marL="1371600" algn="l" defTabSz="914400" rtl="0" eaLnBrk="1" latinLnBrk="0" hangingPunct="1">
+      <ns2:defRPr sz="1800" kern="1200">
+        <ns2:solidFill>
+          <ns2:schemeClr val="tx1"/>
+        </ns2:solidFill>
+        <ns2:latin typeface="+mn-lt"/>
+        <ns2:ea typeface="+mn-ea"/>
+        <ns2:cs typeface="+mn-cs"/>
+      </ns2:defRPr>
+    </ns2:lvl4pPr>
+    <ns2:lvl5pPr marL="1828800" algn="l" defTabSz="914400" rtl="0" eaLnBrk="1" latinLnBrk="0" hangingPunct="1">
+      <ns2:defRPr sz="1800" kern="1200">
+        <ns2:solidFill>
+          <ns2:schemeClr val="tx1"/>
+        </ns2:solidFill>
+        <ns2:latin typeface="+mn-lt"/>
+        <ns2:ea typeface="+mn-ea"/>
+        <ns2:cs typeface="+mn-cs"/>
+      </ns2:defRPr>
+    </ns2:lvl5pPr>
+    <ns2:lvl6pPr marL="2286000" algn="l" defTabSz="914400" rtl="0" eaLnBrk="1" latinLnBrk="0" hangingPunct="1">
+      <ns2:defRPr sz="1800" kern="1200">
+        <ns2:solidFill>
+          <ns2:schemeClr val="tx1"/>
+        </ns2:solidFill>
+        <ns2:latin typeface="+mn-lt"/>
+        <ns2:ea typeface="+mn-ea"/>
+        <ns2:cs typeface="+mn-cs"/>
+      </ns2:defRPr>
+    </ns2:lvl6pPr>
+    <ns2:lvl7pPr marL="2743200" algn="l" defTabSz="914400" rtl="0" eaLnBrk="1" latinLnBrk="0" hangingPunct="1">
+      <ns2:defRPr sz="1800" kern="1200">
+        <ns2:solidFill>
+          <ns2:schemeClr val="tx1"/>
+        </ns2:solidFill>
+        <ns2:latin typeface="+mn-lt"/>
+        <ns2:ea typeface="+mn-ea"/>
+        <ns2:cs typeface="+mn-cs"/>
+      </ns2:defRPr>
+    </ns2:lvl7pPr>
+    <ns2:lvl8pPr marL="3200400" algn="l" defTabSz="914400" rtl="0" eaLnBrk="1" latinLnBrk="0" hangingPunct="1">
+      <ns2:defRPr sz="1800" kern="1200">
+        <ns2:solidFill>
+          <ns2:schemeClr val="tx1"/>
+        </ns2:solidFill>
+        <ns2:latin typeface="+mn-lt"/>
+        <ns2:ea typeface="+mn-ea"/>
+        <ns2:cs typeface="+mn-cs"/>
+      </ns2:defRPr>
+    </ns2:lvl8pPr>
+    <ns2:lvl9pPr marL="3657600" algn="l" defTabSz="914400" rtl="0" eaLnBrk="1" latinLnBrk="0" hangingPunct="1">
+      <ns2:defRPr sz="1800" kern="1200">
+        <ns2:solidFill>
+          <ns2:schemeClr val="tx1"/>
+        </ns2:solidFill>
+        <ns2:latin typeface="+mn-lt"/>
+        <ns2:ea typeface="+mn-ea"/>
+        <ns2:cs typeface="+mn-cs"/>
+      </ns2:defRPr>
+    </ns2:lvl9pPr>
+  </ns0:defaultTextStyle>
+</ns0:presentation>
 </file>
 
 <file path=ppt/notesMasters/notesMaster1.xml><?xml version="1.0" encoding="utf-8"?>
@@ -2396,7 +2396,7 @@
                   <a:srgbClr val="101D42"/>
                 </a:solidFill>
                 <a:latin typeface="Noto Serif KR Black" pitchFamily="34" charset="0"/>
-                <a:ea typeface="Noto Serif KR Black" pitchFamily="34" charset="-127"/>
+                <a:ea typeface="Noto Serif KR Black" pitchFamily="34" charset="-122"/>
                 <a:cs typeface="Noto Serif KR Black" pitchFamily="34" charset="-120"/>
               </a:rPr>
               <a:t>AI 시대,</a:t>
@@ -2438,7 +2438,7 @@
                   <a:srgbClr val="101D42"/>
                 </a:solidFill>
                 <a:latin typeface="Noto Serif KR Black" pitchFamily="34" charset="0"/>
-                <a:ea typeface="Noto Serif KR Black" pitchFamily="34" charset="-127"/>
+                <a:ea typeface="Noto Serif KR Black" pitchFamily="34" charset="-122"/>
                 <a:cs typeface="Noto Serif KR Black" pitchFamily="34" charset="-120"/>
               </a:rPr>
               <a:t>독서는 모든 학습의</a:t>
@@ -2480,7 +2480,7 @@
                   <a:srgbClr val="15543C"/>
                 </a:solidFill>
                 <a:latin typeface="Noto Serif KR Black" pitchFamily="34" charset="0"/>
-                <a:ea typeface="Noto Serif KR Black" pitchFamily="34" charset="-127"/>
+                <a:ea typeface="Noto Serif KR Black" pitchFamily="34" charset="-122"/>
                 <a:cs typeface="Noto Serif KR Black" pitchFamily="34" charset="-120"/>
               </a:rPr>
               <a:t>기본</a:t>
@@ -2497,7 +2497,7 @@
                   <a:srgbClr val="101D42"/>
                 </a:solidFill>
                 <a:latin typeface="Noto Serif KR Black" pitchFamily="34" charset="0"/>
-                <a:ea typeface="Noto Serif KR Black" pitchFamily="34" charset="-127"/>
+                <a:ea typeface="Noto Serif KR Black" pitchFamily="34" charset="-122"/>
                 <a:cs typeface="Noto Serif KR Black" pitchFamily="34" charset="-120"/>
               </a:rPr>
               <a:t>입니다.</a:t>
@@ -2539,7 +2539,7 @@
                   <a:srgbClr val="101D42"/>
                 </a:solidFill>
                 <a:latin typeface="Noto Sans KR" pitchFamily="34" charset="0"/>
-                <a:ea typeface="Noto Sans KR" pitchFamily="34" charset="-127"/>
+                <a:ea typeface="Noto Sans KR" pitchFamily="34" charset="-122"/>
                 <a:cs typeface="Noto Sans KR" pitchFamily="34" charset="-120"/>
               </a:rPr>
               <a:t>AI가 답을 내놓아도,</a:t>
@@ -2562,7 +2562,7 @@
                   <a:srgbClr val="FFF0AD"/>
                 </a:highlight>
                 <a:latin typeface="Noto Sans KR" pitchFamily="34" charset="0"/>
-                <a:ea typeface="Noto Sans KR" pitchFamily="34" charset="-127"/>
+                <a:ea typeface="Noto Sans KR" pitchFamily="34" charset="-122"/>
                 <a:cs typeface="Noto Sans KR" pitchFamily="34" charset="-120"/>
               </a:rPr>
               <a:t>읽고 이해하고 판단하는 힘</a:t>
@@ -2579,7 +2579,7 @@
                   <a:srgbClr val="101D42"/>
                 </a:solidFill>
                 <a:latin typeface="Noto Sans KR" pitchFamily="34" charset="0"/>
-                <a:ea typeface="Noto Sans KR" pitchFamily="34" charset="-127"/>
+                <a:ea typeface="Noto Sans KR" pitchFamily="34" charset="-122"/>
                 <a:cs typeface="Noto Sans KR" pitchFamily="34" charset="-120"/>
               </a:rPr>
               <a:t>은 학생 안에 있어야 합니다.</a:t>
@@ -2621,7 +2621,7 @@
                   <a:srgbClr val="15543C"/>
                 </a:solidFill>
                 <a:latin typeface="Noto Serif KR Black" pitchFamily="34" charset="0"/>
-                <a:ea typeface="Noto Serif KR Black" pitchFamily="34" charset="-127"/>
+                <a:ea typeface="Noto Serif KR Black" pitchFamily="34" charset="-122"/>
                 <a:cs typeface="Noto Serif KR Black" pitchFamily="34" charset="-120"/>
               </a:rPr>
               <a:t>학습의 기본</a:t>
@@ -2663,7 +2663,7 @@
                   <a:srgbClr val="15543C"/>
                 </a:solidFill>
                 <a:latin typeface="Noto Serif KR Black" pitchFamily="34" charset="0"/>
-                <a:ea typeface="Noto Serif KR Black" pitchFamily="34" charset="-127"/>
+                <a:ea typeface="Noto Serif KR Black" pitchFamily="34" charset="-122"/>
                 <a:cs typeface="Noto Serif KR Black" pitchFamily="34" charset="-120"/>
               </a:rPr>
               <a:t>사고의 기본</a:t>
@@ -2705,7 +2705,7 @@
                   <a:srgbClr val="15543C"/>
                 </a:solidFill>
                 <a:latin typeface="Noto Serif KR Black" pitchFamily="34" charset="0"/>
-                <a:ea typeface="Noto Serif KR Black" pitchFamily="34" charset="-127"/>
+                <a:ea typeface="Noto Serif KR Black" pitchFamily="34" charset="-122"/>
                 <a:cs typeface="Noto Serif KR Black" pitchFamily="34" charset="-120"/>
               </a:rPr>
               <a:t>삶의 기본</a:t>
@@ -2747,7 +2747,7 @@
                   <a:srgbClr val="101D42"/>
                 </a:solidFill>
                 <a:latin typeface="Noto Sans KR" pitchFamily="34" charset="0"/>
-                <a:ea typeface="Noto Sans KR" pitchFamily="34" charset="-127"/>
+                <a:ea typeface="Noto Sans KR" pitchFamily="34" charset="-122"/>
                 <a:cs typeface="Noto Sans KR" pitchFamily="34" charset="-120"/>
               </a:rPr>
               <a:t>낱말과 문장의 뜻을 이해하고</a:t>
@@ -2770,7 +2770,7 @@
                   <a:srgbClr val="FFF0AD"/>
                 </a:highlight>
                 <a:latin typeface="Noto Sans KR" pitchFamily="34" charset="0"/>
-                <a:ea typeface="Noto Sans KR" pitchFamily="34" charset="-127"/>
+                <a:ea typeface="Noto Sans KR" pitchFamily="34" charset="-122"/>
                 <a:cs typeface="Noto Sans KR" pitchFamily="34" charset="-120"/>
               </a:rPr>
               <a:t>모든 교과의 학습</a:t>
@@ -2787,7 +2787,7 @@
                   <a:srgbClr val="101D42"/>
                 </a:solidFill>
                 <a:latin typeface="Noto Sans KR" pitchFamily="34" charset="0"/>
-                <a:ea typeface="Noto Sans KR" pitchFamily="34" charset="-127"/>
+                <a:ea typeface="Noto Sans KR" pitchFamily="34" charset="-122"/>
                 <a:cs typeface="Noto Sans KR" pitchFamily="34" charset="-120"/>
               </a:rPr>
               <a:t>을 이어 가는 힘</a:t>
@@ -2829,7 +2829,7 @@
                   <a:srgbClr val="101D42"/>
                 </a:solidFill>
                 <a:latin typeface="Noto Sans KR" pitchFamily="34" charset="0"/>
-                <a:ea typeface="Noto Sans KR" pitchFamily="34" charset="-127"/>
+                <a:ea typeface="Noto Sans KR" pitchFamily="34" charset="-122"/>
                 <a:cs typeface="Noto Sans KR" pitchFamily="34" charset="-120"/>
               </a:rPr>
               <a:t>근거를 찾고 질문하며</a:t>
@@ -2849,7 +2849,7 @@
                   <a:srgbClr val="101D42"/>
                 </a:solidFill>
                 <a:latin typeface="Noto Sans KR" pitchFamily="34" charset="0"/>
-                <a:ea typeface="Noto Sans KR" pitchFamily="34" charset="-127"/>
+                <a:ea typeface="Noto Sans KR" pitchFamily="34" charset="-122"/>
                 <a:cs typeface="Noto Sans KR" pitchFamily="34" charset="-120"/>
               </a:rPr>
               <a:t>자기 생각을 세우는 힘</a:t>
@@ -2891,7 +2891,7 @@
                   <a:srgbClr val="101D42"/>
                 </a:solidFill>
                 <a:latin typeface="Noto Sans KR" pitchFamily="34" charset="0"/>
-                <a:ea typeface="Noto Sans KR" pitchFamily="34" charset="-127"/>
+                <a:ea typeface="Noto Sans KR" pitchFamily="34" charset="-122"/>
                 <a:cs typeface="Noto Sans KR" pitchFamily="34" charset="-120"/>
               </a:rPr>
               <a:t>책 속의 다른 삶을 만나</a:t>
@@ -2911,7 +2911,7 @@
                   <a:srgbClr val="101D42"/>
                 </a:solidFill>
                 <a:latin typeface="Noto Sans KR" pitchFamily="34" charset="0"/>
-                <a:ea typeface="Noto Sans KR" pitchFamily="34" charset="-127"/>
+                <a:ea typeface="Noto Sans KR" pitchFamily="34" charset="-122"/>
                 <a:cs typeface="Noto Sans KR" pitchFamily="34" charset="-120"/>
               </a:rPr>
               <a:t>나와 타인을 이해하는 힘</a:t>
@@ -2953,10 +2953,10 @@
                   <a:srgbClr val="101D42"/>
                 </a:solidFill>
                 <a:latin typeface="Noto Sans KR" pitchFamily="34" charset="0"/>
-                <a:ea typeface="Noto Sans KR" pitchFamily="34" charset="-127"/>
-                <a:cs typeface="Noto Sans KR" pitchFamily="34" charset="-120"/>
-              </a:rPr>
-              <a:t>이야기 이해 과정에서는 전전두엽을 포함한 여러 뇌 영역이 함께 활동합니다.*</a:t>
+                <a:ea typeface="Noto Sans KR" pitchFamily="34" charset="-122"/>
+                <a:cs typeface="Noto Sans KR" pitchFamily="34" charset="-120"/>
+              </a:rPr>
+              <a:t>직접 읽고 근거를 찾는 연습이 AI의 답을 판단할 바탕이 됩니다.*</a:t>
             </a:r>
             <a:endParaRPr lang="en-US" sz="1000" dirty="0"/>
           </a:p>
@@ -2995,7 +2995,7 @@
                   <a:srgbClr val="101D42"/>
                 </a:solidFill>
                 <a:latin typeface="Noto Serif KR Black" pitchFamily="34" charset="0"/>
-                <a:ea typeface="Noto Serif KR Black" pitchFamily="34" charset="-127"/>
+                <a:ea typeface="Noto Serif KR Black" pitchFamily="34" charset="-122"/>
                 <a:cs typeface="Noto Serif KR Black" pitchFamily="34" charset="-120"/>
               </a:rPr>
               <a:t>기본이 쌓일 시간이 필요합니다</a:t>
@@ -3037,11 +3037,14 @@
                   <a:srgbClr val="101D42"/>
                 </a:solidFill>
                 <a:latin typeface="Noto Sans KR" pitchFamily="34" charset="0"/>
-                <a:ea typeface="Noto Sans KR" pitchFamily="34" charset="-127"/>
-                <a:cs typeface="Noto Sans KR" pitchFamily="34" charset="-120"/>
-              </a:rPr>
-              <a:t>학교에서 마주한 현실은, 아이들이 </a:t>
-            </a:r>
+                <a:ea typeface="Noto Sans KR" pitchFamily="34" charset="-122"/>
+                <a:cs typeface="Noto Sans KR" pitchFamily="34" charset="-120"/>
+              </a:rPr>
+              <a:t>전자도서관과 책이 있어도 낯선 어휘에서 막히면 이해와 재미가 끊깁니다.</a:t>
+            </a:r>
+            <a:endParaRPr lang="en-US" sz="1210" dirty="0"/>
+          </a:p>
+          <a:p>
             <a:pPr algn="l" indent="0" marL="0">
               <a:lnSpc>
                 <a:spcPts val="1850"/>
@@ -3049,7 +3052,318 @@
               <a:buNone/>
             </a:pPr>
             <a:r>
-              <a:rPr lang="ko-KR" altLang="en-US" sz="1210" b="1" dirty="0">
+              <a:rPr lang="ko-KR" altLang="en-US" sz="1210" dirty="0">
+                <a:solidFill>
+                  <a:srgbClr val="101D42"/>
+                </a:solidFill>
+                <a:latin typeface="Noto Sans KR" pitchFamily="34" charset="0"/>
+                <a:ea typeface="Noto Sans KR" pitchFamily="34" charset="-122"/>
+                <a:cs typeface="Noto Sans KR" pitchFamily="34" charset="-120"/>
+              </a:rPr>
+              <a:t>읽는 중의 도움과 교사의 질문을 연결해 한 권 읽는 경험을 돕습니다.</a:t>
+            </a:r>
+            <a:endParaRPr lang="en-US" sz="1210" dirty="0"/>
+          </a:p>
+        </p:txBody>
+      </p:sp>
+      <p:sp>
+        <p:nvSpPr>
+          <p:cNvPr id="53" name="txt-1-13"/>
+          <p:cNvSpPr txBox="1"/>
+          <p:nvPr/>
+        </p:nvSpPr>
+        <p:spPr>
+          <a:xfrm>
+            <a:off x="2679319" y="5862955"/>
+            <a:ext cx="334010" cy="279019"/>
+          </a:xfrm>
+          <a:prstGeom prst="rect">
+            <a:avLst/>
+          </a:prstGeom>
+          <a:noFill/>
+          <a:ln/>
+        </p:spPr>
+        <p:txBody>
+          <a:bodyPr wrap="square" lIns="0" tIns="0" rIns="0" bIns="0" rtlCol="0" anchor="t"/>
+          <a:lstStyle/>
+          <a:p>
+            <a:pPr algn="l" indent="0" marL="0">
+              <a:lnSpc>
+                <a:spcPts val="1690"/>
+              </a:lnSpc>
+              <a:buNone/>
+            </a:pPr>
+            <a:r>
+              <a:rPr lang="ko-KR" altLang="en-US" sz="1300" dirty="0">
+                <a:solidFill>
+                  <a:srgbClr val="D59B32"/>
+                </a:solidFill>
+                <a:latin typeface="Noto Sans KR" pitchFamily="34" charset="0"/>
+                <a:ea typeface="Noto Sans KR" pitchFamily="34" charset="-122"/>
+                <a:cs typeface="Noto Sans KR" pitchFamily="34" charset="-120"/>
+              </a:rPr>
+              <a:t>→</a:t>
+            </a:r>
+            <a:endParaRPr lang="en-US" sz="1300" dirty="0"/>
+          </a:p>
+        </p:txBody>
+      </p:sp>
+      <p:sp>
+        <p:nvSpPr>
+          <p:cNvPr id="54" name="txt-1-14"/>
+          <p:cNvSpPr txBox="1"/>
+          <p:nvPr/>
+        </p:nvSpPr>
+        <p:spPr>
+          <a:xfrm>
+            <a:off x="4749038" y="5862955"/>
+            <a:ext cx="334010" cy="279019"/>
+          </a:xfrm>
+          <a:prstGeom prst="rect">
+            <a:avLst/>
+          </a:prstGeom>
+          <a:noFill/>
+          <a:ln/>
+        </p:spPr>
+        <p:txBody>
+          <a:bodyPr wrap="square" lIns="0" tIns="0" rIns="0" bIns="0" rtlCol="0" anchor="t"/>
+          <a:lstStyle/>
+          <a:p>
+            <a:pPr algn="l" indent="0" marL="0">
+              <a:lnSpc>
+                <a:spcPts val="1690"/>
+              </a:lnSpc>
+              <a:buNone/>
+            </a:pPr>
+            <a:r>
+              <a:rPr lang="ko-KR" altLang="en-US" sz="1300" dirty="0">
+                <a:solidFill>
+                  <a:srgbClr val="D59B32"/>
+                </a:solidFill>
+                <a:latin typeface="Noto Sans KR" pitchFamily="34" charset="0"/>
+                <a:ea typeface="Noto Sans KR" pitchFamily="34" charset="-122"/>
+                <a:cs typeface="Noto Sans KR" pitchFamily="34" charset="-120"/>
+              </a:rPr>
+              <a:t>→</a:t>
+            </a:r>
+            <a:endParaRPr lang="en-US" sz="1300" dirty="0"/>
+          </a:p>
+        </p:txBody>
+      </p:sp>
+      <p:sp>
+        <p:nvSpPr>
+          <p:cNvPr id="55" name="txt-1-15"/>
+          <p:cNvSpPr txBox="1"/>
+          <p:nvPr/>
+        </p:nvSpPr>
+        <p:spPr>
+          <a:xfrm>
+            <a:off x="1261364" y="5897499"/>
+            <a:ext cx="907161" cy="236093"/>
+          </a:xfrm>
+          <a:prstGeom prst="rect">
+            <a:avLst/>
+          </a:prstGeom>
+          <a:noFill/>
+          <a:ln/>
+        </p:spPr>
+        <p:txBody>
+          <a:bodyPr wrap="square" lIns="0" tIns="0" rIns="0" bIns="0" rtlCol="0" anchor="t"/>
+          <a:lstStyle/>
+          <a:p>
+            <a:pPr algn="ctr" indent="0" marL="0">
+              <a:lnSpc>
+                <a:spcPts val="1430"/>
+              </a:lnSpc>
+              <a:buNone/>
+            </a:pPr>
+            <a:r>
+              <a:rPr lang="ko-KR" altLang="en-US" sz="1100" dirty="0">
+                <a:solidFill>
+                  <a:srgbClr val="101D42"/>
+                </a:solidFill>
+                <a:latin typeface="Noto Sans KR" pitchFamily="34" charset="0"/>
+                <a:ea typeface="Noto Sans KR" pitchFamily="34" charset="-122"/>
+                <a:cs typeface="Noto Sans KR" pitchFamily="34" charset="-120"/>
+              </a:rPr>
+              <a:t>모르는 낱말</a:t>
+            </a:r>
+            <a:endParaRPr lang="en-US" sz="1100" dirty="0"/>
+          </a:p>
+        </p:txBody>
+      </p:sp>
+      <p:sp>
+        <p:nvSpPr>
+          <p:cNvPr id="56" name="txt-1-16"/>
+          <p:cNvSpPr txBox="1"/>
+          <p:nvPr/>
+        </p:nvSpPr>
+        <p:spPr>
+          <a:xfrm>
+            <a:off x="3331083" y="5897499"/>
+            <a:ext cx="907161" cy="236093"/>
+          </a:xfrm>
+          <a:prstGeom prst="rect">
+            <a:avLst/>
+          </a:prstGeom>
+          <a:noFill/>
+          <a:ln/>
+        </p:spPr>
+        <p:txBody>
+          <a:bodyPr wrap="square" lIns="0" tIns="0" rIns="0" bIns="0" rtlCol="0" anchor="t"/>
+          <a:lstStyle/>
+          <a:p>
+            <a:pPr algn="ctr" indent="0" marL="0">
+              <a:lnSpc>
+                <a:spcPts val="1430"/>
+              </a:lnSpc>
+              <a:buNone/>
+            </a:pPr>
+            <a:r>
+              <a:rPr lang="ko-KR" altLang="en-US" sz="1100" dirty="0">
+                <a:solidFill>
+                  <a:srgbClr val="101D42"/>
+                </a:solidFill>
+                <a:latin typeface="Noto Sans KR" pitchFamily="34" charset="0"/>
+                <a:ea typeface="Noto Sans KR" pitchFamily="34" charset="-122"/>
+                <a:cs typeface="Noto Sans KR" pitchFamily="34" charset="-120"/>
+              </a:rPr>
+              <a:t>이해의 중단</a:t>
+            </a:r>
+            <a:endParaRPr lang="en-US" sz="1100" dirty="0"/>
+          </a:p>
+        </p:txBody>
+      </p:sp>
+      <p:sp>
+        <p:nvSpPr>
+          <p:cNvPr id="57" name="txt-1-17"/>
+          <p:cNvSpPr txBox="1"/>
+          <p:nvPr/>
+        </p:nvSpPr>
+        <p:spPr>
+          <a:xfrm>
+            <a:off x="5400802" y="5897499"/>
+            <a:ext cx="907161" cy="236093"/>
+          </a:xfrm>
+          <a:prstGeom prst="rect">
+            <a:avLst/>
+          </a:prstGeom>
+          <a:noFill/>
+          <a:ln/>
+        </p:spPr>
+        <p:txBody>
+          <a:bodyPr wrap="square" lIns="0" tIns="0" rIns="0" bIns="0" rtlCol="0" anchor="t"/>
+          <a:lstStyle/>
+          <a:p>
+            <a:pPr algn="ctr" indent="0" marL="0">
+              <a:lnSpc>
+                <a:spcPts val="1430"/>
+              </a:lnSpc>
+              <a:buNone/>
+            </a:pPr>
+            <a:r>
+              <a:rPr lang="ko-KR" altLang="en-US" sz="1100" dirty="0">
+                <a:solidFill>
+                  <a:srgbClr val="101D42"/>
+                </a:solidFill>
+                <a:latin typeface="Noto Sans KR" pitchFamily="34" charset="0"/>
+                <a:ea typeface="Noto Sans KR" pitchFamily="34" charset="-122"/>
+                <a:cs typeface="Noto Sans KR" pitchFamily="34" charset="-120"/>
+              </a:rPr>
+              <a:t>읽기의 포기</a:t>
+            </a:r>
+            <a:endParaRPr lang="en-US" sz="1100" dirty="0"/>
+          </a:p>
+        </p:txBody>
+      </p:sp>
+      <p:sp>
+        <p:nvSpPr>
+          <p:cNvPr id="58" name="txt-1-18"/>
+          <p:cNvSpPr txBox="1"/>
+          <p:nvPr/>
+        </p:nvSpPr>
+        <p:spPr>
+          <a:xfrm>
+            <a:off x="381000" y="6415151"/>
+            <a:ext cx="4904105" cy="450723"/>
+          </a:xfrm>
+          <a:prstGeom prst="rect">
+            <a:avLst/>
+          </a:prstGeom>
+          <a:noFill/>
+          <a:ln/>
+        </p:spPr>
+        <p:txBody>
+          <a:bodyPr wrap="square" lIns="0" tIns="0" rIns="0" bIns="0" rtlCol="0" anchor="t"/>
+          <a:lstStyle/>
+          <a:p>
+            <a:pPr algn="l" indent="0" marL="0">
+              <a:lnSpc>
+                <a:spcPts val="2730"/>
+              </a:lnSpc>
+              <a:buNone/>
+            </a:pPr>
+            <a:r>
+              <a:rPr lang="ko-KR" altLang="en-US" sz="2100" dirty="0">
+                <a:solidFill>
+                  <a:srgbClr val="15543C"/>
+                </a:solidFill>
+                <a:latin typeface="Noto Serif KR Black" pitchFamily="34" charset="0"/>
+                <a:ea typeface="Noto Serif KR Black" pitchFamily="34" charset="-122"/>
+                <a:cs typeface="Noto Serif KR Black" pitchFamily="34" charset="-120"/>
+              </a:rPr>
+              <a:t>초등교사들이 뜻을 모아 만들었습니다</a:t>
+            </a:r>
+            <a:endParaRPr lang="en-US" sz="2100" dirty="0"/>
+          </a:p>
+        </p:txBody>
+      </p:sp>
+      <p:sp>
+        <p:nvSpPr>
+          <p:cNvPr id="59" name="txt-1-19"/>
+          <p:cNvSpPr txBox="1"/>
+          <p:nvPr/>
+        </p:nvSpPr>
+        <p:spPr>
+          <a:xfrm>
+            <a:off x="381000" y="6811899"/>
+            <a:ext cx="4670044" cy="493649"/>
+          </a:xfrm>
+          <a:prstGeom prst="rect">
+            <a:avLst/>
+          </a:prstGeom>
+          <a:noFill/>
+          <a:ln/>
+        </p:spPr>
+        <p:txBody>
+          <a:bodyPr wrap="square" lIns="0" tIns="0" rIns="0" bIns="0" rtlCol="0" anchor="t"/>
+          <a:lstStyle/>
+          <a:p>
+            <a:pPr algn="l" indent="0" marL="0">
+              <a:lnSpc>
+                <a:spcPts val="2990"/>
+              </a:lnSpc>
+              <a:buNone/>
+            </a:pPr>
+            <a:r>
+              <a:rPr lang="ko-KR" altLang="en-US" sz="2300" dirty="0">
+                <a:solidFill>
+                  <a:srgbClr val="101D42"/>
+                </a:solidFill>
+                <a:latin typeface="Noto Sans KR" pitchFamily="34" charset="0"/>
+                <a:ea typeface="Noto Sans KR" pitchFamily="34" charset="-122"/>
+                <a:cs typeface="Noto Sans KR" pitchFamily="34" charset="-120"/>
+              </a:rPr>
+              <a:t>부기는 </a:t>
+            </a:r>
+            <a:pPr algn="l" indent="0" marL="0">
+              <a:lnSpc>
+                <a:spcPts val="2990"/>
+              </a:lnSpc>
+              <a:buNone/>
+            </a:pPr>
+            <a:r>
+              <a:rPr lang="ko-KR" altLang="en-US" sz="2300" b="1" dirty="0">
                 <a:solidFill>
                   <a:srgbClr val="101D42"/>
                 </a:solidFill>
@@ -3057,136 +3371,42 @@
                   <a:srgbClr val="FFF0AD"/>
                 </a:highlight>
                 <a:latin typeface="Noto Sans KR" pitchFamily="34" charset="0"/>
-                <a:ea typeface="Noto Sans KR" pitchFamily="34" charset="-127"/>
-                <a:cs typeface="Noto Sans KR" pitchFamily="34" charset="-120"/>
-              </a:rPr>
-              <a:t>책을 충분히 읽지 않는다는</a:t>
-            </a:r>
-            <a:pPr algn="l" indent="0" marL="0">
-              <a:lnSpc>
-                <a:spcPts val="1850"/>
-              </a:lnSpc>
-              <a:buNone/>
-            </a:pPr>
-            <a:r>
-              <a:rPr lang="ko-KR" altLang="en-US" sz="1210" dirty="0">
-                <a:solidFill>
-                  <a:srgbClr val="101D42"/>
-                </a:solidFill>
-                <a:latin typeface="Noto Sans KR" pitchFamily="34" charset="0"/>
-                <a:ea typeface="Noto Sans KR" pitchFamily="34" charset="-127"/>
-                <a:cs typeface="Noto Sans KR" pitchFamily="34" charset="-120"/>
-              </a:rPr>
-              <a:t> 것이었습니다. </a:t>
-            </a:r>
-            <a:pPr algn="l" indent="0" marL="0">
-              <a:lnSpc>
-                <a:spcPts val="1850"/>
-              </a:lnSpc>
-              <a:buNone/>
-            </a:pPr>
-            <a:r>
-              <a:rPr lang="ko-KR" altLang="en-US" sz="1210" b="1" dirty="0">
-                <a:solidFill>
-                  <a:srgbClr val="101D42"/>
-                </a:solidFill>
-                <a:highlight>
-                  <a:srgbClr val="FFF0AD"/>
-                </a:highlight>
-                <a:latin typeface="Noto Sans KR" pitchFamily="34" charset="0"/>
-                <a:ea typeface="Noto Sans KR" pitchFamily="34" charset="-127"/>
-                <a:cs typeface="Noto Sans KR" pitchFamily="34" charset="-120"/>
-              </a:rPr>
-              <a:t>낱말 · 언어의 장벽</a:t>
-            </a:r>
-            <a:pPr algn="l" indent="0" marL="0">
-              <a:lnSpc>
-                <a:spcPts val="1850"/>
-              </a:lnSpc>
-              <a:buNone/>
-            </a:pPr>
-            <a:r>
-              <a:rPr lang="ko-KR" altLang="en-US" sz="1210" dirty="0">
-                <a:solidFill>
-                  <a:srgbClr val="101D42"/>
-                </a:solidFill>
-                <a:latin typeface="Noto Sans KR" pitchFamily="34" charset="0"/>
-                <a:ea typeface="Noto Sans KR" pitchFamily="34" charset="-127"/>
-                <a:cs typeface="Noto Sans KR" pitchFamily="34" charset="-120"/>
-              </a:rPr>
-              <a:t>과 읽기</a:t>
-            </a:r>
-            <a:endParaRPr lang="en-US" sz="1210" dirty="0"/>
-          </a:p>
-          <a:p>
-            <a:pPr algn="l" indent="0" marL="0">
-              <a:lnSpc>
-                <a:spcPts val="1850"/>
-              </a:lnSpc>
-              <a:buNone/>
-            </a:pPr>
-            <a:r>
-              <a:rPr lang="ko-KR" altLang="en-US" sz="1210" dirty="0">
-                <a:solidFill>
-                  <a:srgbClr val="101D42"/>
-                </a:solidFill>
-                <a:latin typeface="Noto Sans KR" pitchFamily="34" charset="0"/>
-                <a:ea typeface="Noto Sans KR" pitchFamily="34" charset="-127"/>
-                <a:cs typeface="Noto Sans KR" pitchFamily="34" charset="-120"/>
-              </a:rPr>
-              <a:t>수준 차이, </a:t>
-            </a:r>
-            <a:pPr algn="l" indent="0" marL="0">
-              <a:lnSpc>
-                <a:spcPts val="1850"/>
-              </a:lnSpc>
-              <a:buNone/>
-            </a:pPr>
-            <a:r>
-              <a:rPr lang="ko-KR" altLang="en-US" sz="1210" b="1" dirty="0">
-                <a:solidFill>
-                  <a:srgbClr val="101D42"/>
-                </a:solidFill>
-                <a:highlight>
-                  <a:srgbClr val="FFF0AD"/>
-                </a:highlight>
-                <a:latin typeface="Noto Sans KR" pitchFamily="34" charset="0"/>
-                <a:ea typeface="Noto Sans KR" pitchFamily="34" charset="-127"/>
-                <a:cs typeface="Noto Sans KR" pitchFamily="34" charset="-120"/>
-              </a:rPr>
-              <a:t>개별 지도와 수업 준비</a:t>
-            </a:r>
-            <a:pPr algn="l" indent="0" marL="0">
-              <a:lnSpc>
-                <a:spcPts val="1850"/>
-              </a:lnSpc>
-              <a:buNone/>
-            </a:pPr>
-            <a:r>
-              <a:rPr lang="ko-KR" altLang="en-US" sz="1210" dirty="0">
-                <a:solidFill>
-                  <a:srgbClr val="101D42"/>
-                </a:solidFill>
-                <a:latin typeface="Noto Sans KR" pitchFamily="34" charset="0"/>
-                <a:ea typeface="Noto Sans KR" pitchFamily="34" charset="-127"/>
-                <a:cs typeface="Noto Sans KR" pitchFamily="34" charset="-120"/>
-              </a:rPr>
-              <a:t>의 부담이 있습니다.</a:t>
-            </a:r>
-            <a:endParaRPr lang="en-US" sz="1210" dirty="0"/>
+                <a:ea typeface="Noto Sans KR" pitchFamily="34" charset="-122"/>
+                <a:cs typeface="Noto Sans KR" pitchFamily="34" charset="-120"/>
+              </a:rPr>
+              <a:t>정답 대신 질문</a:t>
+            </a:r>
+            <a:pPr algn="l" indent="0" marL="0">
+              <a:lnSpc>
+                <a:spcPts val="2990"/>
+              </a:lnSpc>
+              <a:buNone/>
+            </a:pPr>
+            <a:r>
+              <a:rPr lang="ko-KR" altLang="en-US" sz="2300" dirty="0">
+                <a:solidFill>
+                  <a:srgbClr val="101D42"/>
+                </a:solidFill>
+                <a:latin typeface="Noto Sans KR" pitchFamily="34" charset="0"/>
+                <a:ea typeface="Noto Sans KR" pitchFamily="34" charset="-122"/>
+                <a:cs typeface="Noto Sans KR" pitchFamily="34" charset="-120"/>
+              </a:rPr>
+              <a:t>을 건넵니다.</a:t>
+            </a:r>
+            <a:endParaRPr lang="en-US" sz="2300" dirty="0"/>
           </a:p>
         </p:txBody>
       </p:sp>
       <p:sp>
         <p:nvSpPr>
-          <p:cNvPr id="53" name="txt-1-13"/>
+          <p:cNvPr id="60" name="txt-1-20"/>
           <p:cNvSpPr txBox="1"/>
           <p:nvPr/>
         </p:nvSpPr>
         <p:spPr>
           <a:xfrm>
-            <a:off x="2679319" y="5862955"/>
-            <a:ext cx="334010" cy="279019"/>
+            <a:off x="381000" y="7313422"/>
+            <a:ext cx="4235577" cy="225425"/>
           </a:xfrm>
           <a:prstGeom prst="rect">
             <a:avLst/>
@@ -3200,35 +3420,35 @@
           <a:p>
             <a:pPr algn="l" indent="0" marL="0">
               <a:lnSpc>
-                <a:spcPts val="1690"/>
-              </a:lnSpc>
-              <a:buNone/>
-            </a:pPr>
-            <a:r>
-              <a:rPr lang="ko-KR" altLang="en-US" sz="1300" dirty="0">
-                <a:solidFill>
-                  <a:srgbClr val="D59B32"/>
-                </a:solidFill>
-                <a:latin typeface="Noto Sans KR" pitchFamily="34" charset="0"/>
-                <a:ea typeface="Noto Sans KR" pitchFamily="34" charset="-127"/>
-                <a:cs typeface="Noto Sans KR" pitchFamily="34" charset="-120"/>
-              </a:rPr>
-              <a:t>→</a:t>
-            </a:r>
-            <a:endParaRPr lang="en-US" sz="1300" dirty="0"/>
+                <a:spcPts val="1365"/>
+              </a:lnSpc>
+              <a:buNone/>
+            </a:pPr>
+            <a:r>
+              <a:rPr lang="ko-KR" altLang="en-US" sz="1050" dirty="0">
+                <a:solidFill>
+                  <a:srgbClr val="101D42"/>
+                </a:solidFill>
+                <a:latin typeface="Noto Sans KR" pitchFamily="34" charset="0"/>
+                <a:ea typeface="Noto Sans KR" pitchFamily="34" charset="-122"/>
+                <a:cs typeface="Noto Sans KR" pitchFamily="34" charset="-120"/>
+              </a:rPr>
+              <a:t>온라인과 인쇄 활동지로 같은 책과 질문을 함께 읽습니다.</a:t>
+            </a:r>
+            <a:endParaRPr lang="en-US" sz="1050" dirty="0"/>
           </a:p>
         </p:txBody>
       </p:sp>
       <p:sp>
         <p:nvSpPr>
-          <p:cNvPr id="54" name="txt-1-14"/>
+          <p:cNvPr id="61" name="txt-1-21"/>
           <p:cNvSpPr txBox="1"/>
           <p:nvPr/>
         </p:nvSpPr>
         <p:spPr>
           <a:xfrm>
-            <a:off x="4749038" y="5862955"/>
-            <a:ext cx="334010" cy="279019"/>
+            <a:off x="825246" y="7737856"/>
+            <a:ext cx="584200" cy="343408"/>
           </a:xfrm>
           <a:prstGeom prst="rect">
             <a:avLst/>
@@ -3242,35 +3462,35 @@
           <a:p>
             <a:pPr algn="l" indent="0" marL="0">
               <a:lnSpc>
-                <a:spcPts val="1690"/>
-              </a:lnSpc>
-              <a:buNone/>
-            </a:pPr>
-            <a:r>
-              <a:rPr lang="ko-KR" altLang="en-US" sz="1300" dirty="0">
-                <a:solidFill>
-                  <a:srgbClr val="D59B32"/>
-                </a:solidFill>
-                <a:latin typeface="Noto Sans KR" pitchFamily="34" charset="0"/>
-                <a:ea typeface="Noto Sans KR" pitchFamily="34" charset="-127"/>
-                <a:cs typeface="Noto Sans KR" pitchFamily="34" charset="-120"/>
-              </a:rPr>
-              <a:t>→</a:t>
-            </a:r>
-            <a:endParaRPr lang="en-US" sz="1300" dirty="0"/>
+                <a:spcPts val="2080"/>
+              </a:lnSpc>
+              <a:buNone/>
+            </a:pPr>
+            <a:r>
+              <a:rPr lang="ko-KR" altLang="en-US" sz="1600" dirty="0">
+                <a:solidFill>
+                  <a:srgbClr val="15543C"/>
+                </a:solidFill>
+                <a:latin typeface="Noto Serif KR Black" pitchFamily="34" charset="0"/>
+                <a:ea typeface="Noto Serif KR Black" pitchFamily="34" charset="-122"/>
+                <a:cs typeface="Noto Serif KR Black" pitchFamily="34" charset="-120"/>
+              </a:rPr>
+              <a:t>읽기</a:t>
+            </a:r>
+            <a:endParaRPr lang="en-US" sz="1600" dirty="0"/>
           </a:p>
         </p:txBody>
       </p:sp>
       <p:sp>
         <p:nvSpPr>
-          <p:cNvPr id="55" name="txt-1-15"/>
+          <p:cNvPr id="62" name="txt-1-22"/>
           <p:cNvSpPr txBox="1"/>
           <p:nvPr/>
         </p:nvSpPr>
         <p:spPr>
           <a:xfrm>
-            <a:off x="1261364" y="5897499"/>
-            <a:ext cx="907161" cy="236093"/>
+            <a:off x="2571242" y="7737856"/>
+            <a:ext cx="584200" cy="343408"/>
           </a:xfrm>
           <a:prstGeom prst="rect">
             <a:avLst/>
@@ -3282,37 +3502,37 @@
           <a:bodyPr wrap="square" lIns="0" tIns="0" rIns="0" bIns="0" rtlCol="0" anchor="t"/>
           <a:lstStyle/>
           <a:p>
-            <a:pPr algn="ctr" indent="0" marL="0">
-              <a:lnSpc>
-                <a:spcPts val="1430"/>
-              </a:lnSpc>
-              <a:buNone/>
-            </a:pPr>
-            <a:r>
-              <a:rPr lang="ko-KR" altLang="en-US" sz="1100" dirty="0">
-                <a:solidFill>
-                  <a:srgbClr val="101D42"/>
-                </a:solidFill>
-                <a:latin typeface="Noto Sans KR" pitchFamily="34" charset="0"/>
-                <a:ea typeface="Noto Sans KR" pitchFamily="34" charset="-127"/>
-                <a:cs typeface="Noto Sans KR" pitchFamily="34" charset="-120"/>
-              </a:rPr>
-              <a:t>모르는 낱말</a:t>
-            </a:r>
-            <a:endParaRPr lang="en-US" sz="1100" dirty="0"/>
+            <a:pPr algn="l" indent="0" marL="0">
+              <a:lnSpc>
+                <a:spcPts val="2080"/>
+              </a:lnSpc>
+              <a:buNone/>
+            </a:pPr>
+            <a:r>
+              <a:rPr lang="ko-KR" altLang="en-US" sz="1600" dirty="0">
+                <a:solidFill>
+                  <a:srgbClr val="15543C"/>
+                </a:solidFill>
+                <a:latin typeface="Noto Serif KR Black" pitchFamily="34" charset="0"/>
+                <a:ea typeface="Noto Serif KR Black" pitchFamily="34" charset="-122"/>
+                <a:cs typeface="Noto Serif KR Black" pitchFamily="34" charset="-120"/>
+              </a:rPr>
+              <a:t>묻기</a:t>
+            </a:r>
+            <a:endParaRPr lang="en-US" sz="1600" dirty="0"/>
           </a:p>
         </p:txBody>
       </p:sp>
       <p:sp>
         <p:nvSpPr>
-          <p:cNvPr id="56" name="txt-1-16"/>
+          <p:cNvPr id="63" name="txt-1-23"/>
           <p:cNvSpPr txBox="1"/>
           <p:nvPr/>
         </p:nvSpPr>
         <p:spPr>
           <a:xfrm>
-            <a:off x="3331083" y="5897499"/>
-            <a:ext cx="907161" cy="236093"/>
+            <a:off x="4317238" y="7737856"/>
+            <a:ext cx="1016127" cy="343408"/>
           </a:xfrm>
           <a:prstGeom prst="rect">
             <a:avLst/>
@@ -3324,37 +3544,37 @@
           <a:bodyPr wrap="square" lIns="0" tIns="0" rIns="0" bIns="0" rtlCol="0" anchor="t"/>
           <a:lstStyle/>
           <a:p>
-            <a:pPr algn="ctr" indent="0" marL="0">
-              <a:lnSpc>
-                <a:spcPts val="1430"/>
-              </a:lnSpc>
-              <a:buNone/>
-            </a:pPr>
-            <a:r>
-              <a:rPr lang="ko-KR" altLang="en-US" sz="1100" dirty="0">
-                <a:solidFill>
-                  <a:srgbClr val="101D42"/>
-                </a:solidFill>
-                <a:latin typeface="Noto Sans KR" pitchFamily="34" charset="0"/>
-                <a:ea typeface="Noto Sans KR" pitchFamily="34" charset="-127"/>
-                <a:cs typeface="Noto Sans KR" pitchFamily="34" charset="-120"/>
-              </a:rPr>
-              <a:t>이해의 중단</a:t>
-            </a:r>
-            <a:endParaRPr lang="en-US" sz="1100" dirty="0"/>
+            <a:pPr algn="l" indent="0" marL="0">
+              <a:lnSpc>
+                <a:spcPts val="2080"/>
+              </a:lnSpc>
+              <a:buNone/>
+            </a:pPr>
+            <a:r>
+              <a:rPr lang="ko-KR" altLang="en-US" sz="1600" dirty="0">
+                <a:solidFill>
+                  <a:srgbClr val="15543C"/>
+                </a:solidFill>
+                <a:latin typeface="Noto Serif KR Black" pitchFamily="34" charset="0"/>
+                <a:ea typeface="Noto Serif KR Black" pitchFamily="34" charset="-122"/>
+                <a:cs typeface="Noto Serif KR Black" pitchFamily="34" charset="-120"/>
+              </a:rPr>
+              <a:t>표현하기</a:t>
+            </a:r>
+            <a:endParaRPr lang="en-US" sz="1600" dirty="0"/>
           </a:p>
         </p:txBody>
       </p:sp>
       <p:sp>
         <p:nvSpPr>
-          <p:cNvPr id="57" name="txt-1-17"/>
+          <p:cNvPr id="64" name="txt-1-24"/>
           <p:cNvSpPr txBox="1"/>
           <p:nvPr/>
         </p:nvSpPr>
         <p:spPr>
           <a:xfrm>
-            <a:off x="5400802" y="5897499"/>
-            <a:ext cx="907161" cy="236093"/>
+            <a:off x="5951220" y="7737856"/>
+            <a:ext cx="811911" cy="343408"/>
           </a:xfrm>
           <a:prstGeom prst="rect">
             <a:avLst/>
@@ -3368,35 +3588,35 @@
           <a:p>
             <a:pPr algn="ctr" indent="0" marL="0">
               <a:lnSpc>
-                <a:spcPts val="1430"/>
-              </a:lnSpc>
-              <a:buNone/>
-            </a:pPr>
-            <a:r>
-              <a:rPr lang="ko-KR" altLang="en-US" sz="1100" dirty="0">
-                <a:solidFill>
-                  <a:srgbClr val="101D42"/>
-                </a:solidFill>
-                <a:latin typeface="Noto Sans KR" pitchFamily="34" charset="0"/>
-                <a:ea typeface="Noto Sans KR" pitchFamily="34" charset="-127"/>
-                <a:cs typeface="Noto Sans KR" pitchFamily="34" charset="-120"/>
-              </a:rPr>
-              <a:t>읽기의 포기</a:t>
-            </a:r>
-            <a:endParaRPr lang="en-US" sz="1100" dirty="0"/>
+                <a:spcPts val="2080"/>
+              </a:lnSpc>
+              <a:buNone/>
+            </a:pPr>
+            <a:r>
+              <a:rPr lang="ko-KR" altLang="en-US" sz="1600" dirty="0">
+                <a:solidFill>
+                  <a:srgbClr val="15543C"/>
+                </a:solidFill>
+                <a:latin typeface="Noto Serif KR Black" pitchFamily="34" charset="0"/>
+                <a:ea typeface="Noto Serif KR Black" pitchFamily="34" charset="-122"/>
+                <a:cs typeface="Noto Serif KR Black" pitchFamily="34" charset="-120"/>
+              </a:rPr>
+              <a:t>모으기</a:t>
+            </a:r>
+            <a:endParaRPr lang="en-US" sz="1600" dirty="0"/>
           </a:p>
         </p:txBody>
       </p:sp>
       <p:sp>
         <p:nvSpPr>
-          <p:cNvPr id="58" name="txt-1-18"/>
+          <p:cNvPr id="65" name="txt-1-25"/>
           <p:cNvSpPr txBox="1"/>
           <p:nvPr/>
         </p:nvSpPr>
         <p:spPr>
           <a:xfrm>
-            <a:off x="381000" y="6415151"/>
-            <a:ext cx="4904105" cy="450723"/>
+            <a:off x="616077" y="8082280"/>
+            <a:ext cx="1080135" cy="350520"/>
           </a:xfrm>
           <a:prstGeom prst="rect">
             <a:avLst/>
@@ -3408,37 +3628,57 @@
           <a:bodyPr wrap="square" lIns="0" tIns="0" rIns="0" bIns="0" rtlCol="0" anchor="t"/>
           <a:lstStyle/>
           <a:p>
-            <a:pPr algn="l" indent="0" marL="0">
-              <a:lnSpc>
-                <a:spcPts val="2730"/>
-              </a:lnSpc>
-              <a:buNone/>
-            </a:pPr>
-            <a:r>
-              <a:rPr lang="ko-KR" altLang="en-US" sz="2100" dirty="0">
-                <a:solidFill>
-                  <a:srgbClr val="15543C"/>
-                </a:solidFill>
-                <a:latin typeface="Noto Serif KR Black" pitchFamily="34" charset="0"/>
-                <a:ea typeface="Noto Serif KR Black" pitchFamily="34" charset="-127"/>
-                <a:cs typeface="Noto Serif KR Black" pitchFamily="34" charset="-120"/>
-              </a:rPr>
-              <a:t>초등교사들이 뜻을 모아 만들었습니다</a:t>
-            </a:r>
-            <a:endParaRPr lang="en-US" sz="2100" dirty="0"/>
+            <a:pPr algn="ctr" indent="0" marL="0">
+              <a:lnSpc>
+                <a:spcPts val="1200"/>
+              </a:lnSpc>
+              <a:buNone/>
+            </a:pPr>
+            <a:r>
+              <a:rPr lang="ko-KR" altLang="en-US" sz="850" dirty="0">
+                <a:solidFill>
+                  <a:srgbClr val="101D42"/>
+                </a:solidFill>
+                <a:latin typeface="Noto Sans KR" pitchFamily="34" charset="0"/>
+                <a:ea typeface="Noto Sans KR" pitchFamily="34" charset="-122"/>
+                <a:cs typeface="Noto Sans KR" pitchFamily="34" charset="-120"/>
+              </a:rPr>
+              <a:t>능동적 그림 읽기</a:t>
+            </a:r>
+            <a:endParaRPr lang="en-US" sz="850" dirty="0"/>
+          </a:p>
+          <a:p>
+            <a:pPr algn="ctr" indent="0" marL="0">
+              <a:lnSpc>
+                <a:spcPts val="1200"/>
+              </a:lnSpc>
+              <a:buNone/>
+            </a:pPr>
+            <a:r>
+              <a:rPr lang="ko-KR" altLang="en-US" sz="850" dirty="0">
+                <a:solidFill>
+                  <a:srgbClr val="101D42"/>
+                </a:solidFill>
+                <a:latin typeface="Noto Sans KR" pitchFamily="34" charset="0"/>
+                <a:ea typeface="Noto Sans KR" pitchFamily="34" charset="-122"/>
+                <a:cs typeface="Noto Sans KR" pitchFamily="34" charset="-120"/>
+              </a:rPr>
+              <a:t>낱말 · 다국어 지원</a:t>
+            </a:r>
+            <a:endParaRPr lang="en-US" sz="850" dirty="0"/>
           </a:p>
         </p:txBody>
       </p:sp>
       <p:sp>
         <p:nvSpPr>
-          <p:cNvPr id="59" name="txt-1-19"/>
+          <p:cNvPr id="66" name="txt-1-26"/>
           <p:cNvSpPr txBox="1"/>
           <p:nvPr/>
         </p:nvSpPr>
         <p:spPr>
           <a:xfrm>
-            <a:off x="381000" y="6811899"/>
-            <a:ext cx="4670044" cy="493649"/>
+            <a:off x="2228342" y="8082280"/>
+            <a:ext cx="1345946" cy="350520"/>
           </a:xfrm>
           <a:prstGeom prst="rect">
             <a:avLst/>
@@ -3450,74 +3690,57 @@
           <a:bodyPr wrap="square" lIns="0" tIns="0" rIns="0" bIns="0" rtlCol="0" anchor="t"/>
           <a:lstStyle/>
           <a:p>
-            <a:pPr algn="l" indent="0" marL="0">
-              <a:lnSpc>
-                <a:spcPts val="2990"/>
-              </a:lnSpc>
-              <a:buNone/>
-            </a:pPr>
-            <a:r>
-              <a:rPr lang="ko-KR" altLang="en-US" sz="2300" dirty="0">
-                <a:solidFill>
-                  <a:srgbClr val="101D42"/>
-                </a:solidFill>
-                <a:latin typeface="Noto Sans KR" pitchFamily="34" charset="0"/>
-                <a:ea typeface="Noto Sans KR" pitchFamily="34" charset="-127"/>
-                <a:cs typeface="Noto Sans KR" pitchFamily="34" charset="-120"/>
-              </a:rPr>
-              <a:t>부기는 </a:t>
-            </a:r>
-            <a:pPr algn="l" indent="0" marL="0">
-              <a:lnSpc>
-                <a:spcPts val="2990"/>
-              </a:lnSpc>
-              <a:buNone/>
-            </a:pPr>
-            <a:r>
-              <a:rPr lang="ko-KR" altLang="en-US" sz="2300" b="1" dirty="0">
-                <a:solidFill>
-                  <a:srgbClr val="101D42"/>
-                </a:solidFill>
-                <a:highlight>
-                  <a:srgbClr val="FFF0AD"/>
-                </a:highlight>
-                <a:latin typeface="Noto Sans KR" pitchFamily="34" charset="0"/>
-                <a:ea typeface="Noto Sans KR" pitchFamily="34" charset="-127"/>
-                <a:cs typeface="Noto Sans KR" pitchFamily="34" charset="-120"/>
-              </a:rPr>
-              <a:t>정답 대신 질문</a:t>
-            </a:r>
-            <a:pPr algn="l" indent="0" marL="0">
-              <a:lnSpc>
-                <a:spcPts val="2990"/>
-              </a:lnSpc>
-              <a:buNone/>
-            </a:pPr>
-            <a:r>
-              <a:rPr lang="ko-KR" altLang="en-US" sz="2300" dirty="0">
-                <a:solidFill>
-                  <a:srgbClr val="101D42"/>
-                </a:solidFill>
-                <a:latin typeface="Noto Sans KR" pitchFamily="34" charset="0"/>
-                <a:ea typeface="Noto Sans KR" pitchFamily="34" charset="-127"/>
-                <a:cs typeface="Noto Sans KR" pitchFamily="34" charset="-120"/>
-              </a:rPr>
-              <a:t>을 건넵니다.</a:t>
-            </a:r>
-            <a:endParaRPr lang="en-US" sz="2300" dirty="0"/>
+            <a:pPr algn="ctr" indent="0" marL="0">
+              <a:lnSpc>
+                <a:spcPts val="1200"/>
+              </a:lnSpc>
+              <a:buNone/>
+            </a:pPr>
+            <a:r>
+              <a:rPr lang="ko-KR" altLang="en-US" sz="850" dirty="0">
+                <a:solidFill>
+                  <a:srgbClr val="101D42"/>
+                </a:solidFill>
+                <a:latin typeface="Noto Sans KR" pitchFamily="34" charset="0"/>
+                <a:ea typeface="Noto Sans KR" pitchFamily="34" charset="-122"/>
+                <a:cs typeface="Noto Sans KR" pitchFamily="34" charset="-120"/>
+              </a:rPr>
+              <a:t>캐릭터와의 대화</a:t>
+            </a:r>
+            <a:endParaRPr lang="en-US" sz="850" dirty="0"/>
+          </a:p>
+          <a:p>
+            <a:pPr algn="ctr" indent="0" marL="0">
+              <a:lnSpc>
+                <a:spcPts val="1200"/>
+              </a:lnSpc>
+              <a:buNone/>
+            </a:pPr>
+            <a:r>
+              <a:rPr lang="ko-KR" altLang="en-US" sz="850" dirty="0">
+                <a:solidFill>
+                  <a:srgbClr val="101D42"/>
+                </a:solidFill>
+                <a:latin typeface="Noto Sans KR" pitchFamily="34" charset="0"/>
+                <a:ea typeface="Noto Sans KR" pitchFamily="34" charset="-122"/>
+                <a:cs typeface="Noto Sans KR" pitchFamily="34" charset="-120"/>
+              </a:rPr>
+              <a:t>생각한 까닭을 묻는 질문</a:t>
+            </a:r>
+            <a:endParaRPr lang="en-US" sz="850" dirty="0"/>
           </a:p>
         </p:txBody>
       </p:sp>
       <p:sp>
         <p:nvSpPr>
-          <p:cNvPr id="60" name="txt-1-20"/>
+          <p:cNvPr id="67" name="txt-1-27"/>
           <p:cNvSpPr txBox="1"/>
           <p:nvPr/>
         </p:nvSpPr>
         <p:spPr>
           <a:xfrm>
-            <a:off x="381000" y="7313422"/>
-            <a:ext cx="4235577" cy="225425"/>
+            <a:off x="3796030" y="8082280"/>
+            <a:ext cx="1701165" cy="350520"/>
           </a:xfrm>
           <a:prstGeom prst="rect">
             <a:avLst/>
@@ -3529,74 +3752,57 @@
           <a:bodyPr wrap="square" lIns="0" tIns="0" rIns="0" bIns="0" rtlCol="0" anchor="t"/>
           <a:lstStyle/>
           <a:p>
-            <a:pPr algn="l" indent="0" marL="0">
-              <a:lnSpc>
-                <a:spcPts val="1365"/>
-              </a:lnSpc>
-              <a:buNone/>
-            </a:pPr>
-            <a:r>
-              <a:rPr lang="ko-KR" altLang="en-US" sz="1050" dirty="0">
-                <a:solidFill>
-                  <a:srgbClr val="101D42"/>
-                </a:solidFill>
-                <a:latin typeface="Noto Sans KR" pitchFamily="34" charset="0"/>
-                <a:ea typeface="Noto Sans KR" pitchFamily="34" charset="-127"/>
-                <a:cs typeface="Noto Sans KR" pitchFamily="34" charset="-120"/>
-              </a:rPr>
-              <a:t>학교에서 시범 사용을 통해 </a:t>
-            </a:r>
-            <a:pPr algn="l" indent="0" marL="0">
-              <a:lnSpc>
-                <a:spcPts val="1365"/>
-              </a:lnSpc>
-              <a:buNone/>
-            </a:pPr>
-            <a:r>
-              <a:rPr lang="ko-KR" altLang="en-US" sz="1050" b="1" dirty="0">
-                <a:solidFill>
-                  <a:srgbClr val="101D42"/>
-                </a:solidFill>
-                <a:highlight>
-                  <a:srgbClr val="FFF0AD"/>
-                </a:highlight>
-                <a:latin typeface="Noto Sans KR" pitchFamily="34" charset="0"/>
-                <a:ea typeface="Noto Sans KR" pitchFamily="34" charset="-127"/>
-                <a:cs typeface="Noto Sans KR" pitchFamily="34" charset="-120"/>
-              </a:rPr>
-              <a:t>계속 개선하고 발전</a:t>
-            </a:r>
-            <a:pPr algn="l" indent="0" marL="0">
-              <a:lnSpc>
-                <a:spcPts val="1365"/>
-              </a:lnSpc>
-              <a:buNone/>
-            </a:pPr>
-            <a:r>
-              <a:rPr lang="ko-KR" altLang="en-US" sz="1050" dirty="0">
-                <a:solidFill>
-                  <a:srgbClr val="101D42"/>
-                </a:solidFill>
-                <a:latin typeface="Noto Sans KR" pitchFamily="34" charset="0"/>
-                <a:ea typeface="Noto Sans KR" pitchFamily="34" charset="-127"/>
-                <a:cs typeface="Noto Sans KR" pitchFamily="34" charset="-120"/>
-              </a:rPr>
-              <a:t>시켜 나가고 있습니다.</a:t>
-            </a:r>
-            <a:endParaRPr lang="en-US" sz="1050" dirty="0"/>
+            <a:pPr algn="ctr" indent="0" marL="0">
+              <a:lnSpc>
+                <a:spcPts val="1200"/>
+              </a:lnSpc>
+              <a:buNone/>
+            </a:pPr>
+            <a:r>
+              <a:rPr lang="ko-KR" altLang="en-US" sz="850" dirty="0">
+                <a:solidFill>
+                  <a:srgbClr val="101D42"/>
+                </a:solidFill>
+                <a:latin typeface="Noto Sans KR" pitchFamily="34" charset="0"/>
+                <a:ea typeface="Noto Sans KR" pitchFamily="34" charset="-122"/>
+                <a:cs typeface="Noto Sans KR" pitchFamily="34" charset="-120"/>
+              </a:rPr>
+              <a:t>글, 그림, 편지 쓰기</a:t>
+            </a:r>
+            <a:endParaRPr lang="en-US" sz="850" dirty="0"/>
+          </a:p>
+          <a:p>
+            <a:pPr algn="ctr" indent="0" marL="0">
+              <a:lnSpc>
+                <a:spcPts val="1200"/>
+              </a:lnSpc>
+              <a:buNone/>
+            </a:pPr>
+            <a:r>
+              <a:rPr lang="ko-KR" altLang="en-US" sz="850" dirty="0">
+                <a:solidFill>
+                  <a:srgbClr val="101D42"/>
+                </a:solidFill>
+                <a:latin typeface="Noto Sans KR" pitchFamily="34" charset="0"/>
+                <a:ea typeface="Noto Sans KR" pitchFamily="34" charset="-122"/>
+                <a:cs typeface="Noto Sans KR" pitchFamily="34" charset="-120"/>
+              </a:rPr>
+              <a:t>화면과 인쇄 활동지로 참여</a:t>
+            </a:r>
+            <a:endParaRPr lang="en-US" sz="850" dirty="0"/>
           </a:p>
         </p:txBody>
       </p:sp>
       <p:sp>
         <p:nvSpPr>
-          <p:cNvPr id="61" name="txt-1-21"/>
+          <p:cNvPr id="68" name="txt-1-28"/>
           <p:cNvSpPr txBox="1"/>
           <p:nvPr/>
         </p:nvSpPr>
         <p:spPr>
           <a:xfrm>
-            <a:off x="825246" y="7737856"/>
-            <a:ext cx="584200" cy="343408"/>
+            <a:off x="5553202" y="8082280"/>
+            <a:ext cx="1679702" cy="350520"/>
           </a:xfrm>
           <a:prstGeom prst="rect">
             <a:avLst/>
@@ -3608,37 +3814,57 @@
           <a:bodyPr wrap="square" lIns="0" tIns="0" rIns="0" bIns="0" rtlCol="0" anchor="t"/>
           <a:lstStyle/>
           <a:p>
-            <a:pPr algn="l" indent="0" marL="0">
-              <a:lnSpc>
-                <a:spcPts val="2080"/>
-              </a:lnSpc>
-              <a:buNone/>
-            </a:pPr>
-            <a:r>
-              <a:rPr lang="ko-KR" altLang="en-US" sz="1600" dirty="0">
-                <a:solidFill>
-                  <a:srgbClr val="15543C"/>
-                </a:solidFill>
-                <a:latin typeface="Noto Serif KR Black" pitchFamily="34" charset="0"/>
-                <a:ea typeface="Noto Serif KR Black" pitchFamily="34" charset="-127"/>
-                <a:cs typeface="Noto Serif KR Black" pitchFamily="34" charset="-120"/>
-              </a:rPr>
-              <a:t>읽기</a:t>
-            </a:r>
-            <a:endParaRPr lang="en-US" sz="1600" dirty="0"/>
+            <a:pPr algn="ctr" indent="0" marL="0">
+              <a:lnSpc>
+                <a:spcPts val="1200"/>
+              </a:lnSpc>
+              <a:buNone/>
+            </a:pPr>
+            <a:r>
+              <a:rPr lang="ko-KR" altLang="en-US" sz="850" dirty="0">
+                <a:solidFill>
+                  <a:srgbClr val="101D42"/>
+                </a:solidFill>
+                <a:latin typeface="Noto Sans KR" pitchFamily="34" charset="0"/>
+                <a:ea typeface="Noto Sans KR" pitchFamily="34" charset="-122"/>
+                <a:cs typeface="Noto Sans KR" pitchFamily="34" charset="-120"/>
+              </a:rPr>
+              <a:t>독서 기록 자산</a:t>
+            </a:r>
+            <a:endParaRPr lang="en-US" sz="850" dirty="0"/>
+          </a:p>
+          <a:p>
+            <a:pPr algn="ctr" indent="0" marL="0">
+              <a:lnSpc>
+                <a:spcPts val="1200"/>
+              </a:lnSpc>
+              <a:buNone/>
+            </a:pPr>
+            <a:r>
+              <a:rPr lang="ko-KR" altLang="en-US" sz="850" dirty="0">
+                <a:solidFill>
+                  <a:srgbClr val="101D42"/>
+                </a:solidFill>
+                <a:latin typeface="Noto Sans KR" pitchFamily="34" charset="0"/>
+                <a:ea typeface="Noto Sans KR" pitchFamily="34" charset="-122"/>
+                <a:cs typeface="Noto Sans KR" pitchFamily="34" charset="-120"/>
+              </a:rPr>
+              <a:t>무엇을 느끼고 달라졌는지 기록</a:t>
+            </a:r>
+            <a:endParaRPr lang="en-US" sz="850" dirty="0"/>
           </a:p>
         </p:txBody>
       </p:sp>
       <p:sp>
         <p:nvSpPr>
-          <p:cNvPr id="62" name="txt-1-22"/>
+          <p:cNvPr id="69" name="txt-1-29"/>
           <p:cNvSpPr txBox="1"/>
           <p:nvPr/>
         </p:nvSpPr>
         <p:spPr>
           <a:xfrm>
-            <a:off x="2571242" y="7737856"/>
-            <a:ext cx="584200" cy="343408"/>
+            <a:off x="756666" y="8758047"/>
+            <a:ext cx="1141476" cy="515112"/>
           </a:xfrm>
           <a:prstGeom prst="rect">
             <a:avLst/>
@@ -3652,35 +3878,35 @@
           <a:p>
             <a:pPr algn="l" indent="0" marL="0">
               <a:lnSpc>
-                <a:spcPts val="2080"/>
-              </a:lnSpc>
-              <a:buNone/>
-            </a:pPr>
-            <a:r>
-              <a:rPr lang="ko-KR" altLang="en-US" sz="1600" dirty="0">
+                <a:spcPts val="3120"/>
+              </a:lnSpc>
+              <a:buNone/>
+            </a:pPr>
+            <a:r>
+              <a:rPr lang="ko-KR" altLang="en-US" sz="2400" dirty="0">
                 <a:solidFill>
                   <a:srgbClr val="15543C"/>
                 </a:solidFill>
-                <a:latin typeface="Noto Serif KR Black" pitchFamily="34" charset="0"/>
-                <a:ea typeface="Noto Serif KR Black" pitchFamily="34" charset="-127"/>
-                <a:cs typeface="Noto Serif KR Black" pitchFamily="34" charset="-120"/>
-              </a:rPr>
-              <a:t>묻기</a:t>
-            </a:r>
-            <a:endParaRPr lang="en-US" sz="1600" dirty="0"/>
+                <a:latin typeface="Noto Sans KR" pitchFamily="34" charset="0"/>
+                <a:ea typeface="Noto Sans KR" pitchFamily="34" charset="-122"/>
+                <a:cs typeface="Noto Sans KR" pitchFamily="34" charset="-120"/>
+              </a:rPr>
+              <a:t>72학급</a:t>
+            </a:r>
+            <a:endParaRPr lang="en-US" sz="2400" dirty="0"/>
           </a:p>
         </p:txBody>
       </p:sp>
       <p:sp>
         <p:nvSpPr>
-          <p:cNvPr id="63" name="txt-1-23"/>
+          <p:cNvPr id="70" name="txt-1-30"/>
           <p:cNvSpPr txBox="1"/>
           <p:nvPr/>
         </p:nvSpPr>
         <p:spPr>
           <a:xfrm>
-            <a:off x="4317238" y="7737856"/>
-            <a:ext cx="1016127" cy="343408"/>
+            <a:off x="2399538" y="8758047"/>
+            <a:ext cx="1298448" cy="515112"/>
           </a:xfrm>
           <a:prstGeom prst="rect">
             <a:avLst/>
@@ -3694,35 +3920,35 @@
           <a:p>
             <a:pPr algn="l" indent="0" marL="0">
               <a:lnSpc>
-                <a:spcPts val="2080"/>
-              </a:lnSpc>
-              <a:buNone/>
-            </a:pPr>
-            <a:r>
-              <a:rPr lang="ko-KR" altLang="en-US" sz="1600" dirty="0">
+                <a:spcPts val="3120"/>
+              </a:lnSpc>
+              <a:buNone/>
+            </a:pPr>
+            <a:r>
+              <a:rPr lang="ko-KR" altLang="en-US" sz="2400" dirty="0">
                 <a:solidFill>
                   <a:srgbClr val="15543C"/>
                 </a:solidFill>
-                <a:latin typeface="Noto Serif KR Black" pitchFamily="34" charset="0"/>
-                <a:ea typeface="Noto Serif KR Black" pitchFamily="34" charset="-127"/>
-                <a:cs typeface="Noto Serif KR Black" pitchFamily="34" charset="-120"/>
-              </a:rPr>
-              <a:t>표현하기</a:t>
-            </a:r>
-            <a:endParaRPr lang="en-US" sz="1600" dirty="0"/>
+                <a:latin typeface="Noto Sans KR" pitchFamily="34" charset="0"/>
+                <a:ea typeface="Noto Sans KR" pitchFamily="34" charset="-122"/>
+                <a:cs typeface="Noto Sans KR" pitchFamily="34" charset="-120"/>
+              </a:rPr>
+              <a:t>1,196명</a:t>
+            </a:r>
+            <a:endParaRPr lang="en-US" sz="2400" dirty="0"/>
           </a:p>
         </p:txBody>
       </p:sp>
       <p:sp>
         <p:nvSpPr>
-          <p:cNvPr id="64" name="txt-1-24"/>
+          <p:cNvPr id="71" name="txt-1-31"/>
           <p:cNvSpPr txBox="1"/>
           <p:nvPr/>
         </p:nvSpPr>
         <p:spPr>
           <a:xfrm>
-            <a:off x="5951220" y="7737856"/>
-            <a:ext cx="811911" cy="343408"/>
+            <a:off x="4029202" y="8758047"/>
+            <a:ext cx="1484503" cy="515112"/>
           </a:xfrm>
           <a:prstGeom prst="rect">
             <a:avLst/>
@@ -3734,37 +3960,37 @@
           <a:bodyPr wrap="square" lIns="0" tIns="0" rIns="0" bIns="0" rtlCol="0" anchor="t"/>
           <a:lstStyle/>
           <a:p>
-            <a:pPr algn="ctr" indent="0" marL="0">
-              <a:lnSpc>
-                <a:spcPts val="2080"/>
-              </a:lnSpc>
-              <a:buNone/>
-            </a:pPr>
-            <a:r>
-              <a:rPr lang="ko-KR" altLang="en-US" sz="1600" dirty="0">
+            <a:pPr algn="l" indent="0" marL="0">
+              <a:lnSpc>
+                <a:spcPts val="3120"/>
+              </a:lnSpc>
+              <a:buNone/>
+            </a:pPr>
+            <a:r>
+              <a:rPr lang="ko-KR" altLang="en-US" sz="2400" dirty="0">
                 <a:solidFill>
                   <a:srgbClr val="15543C"/>
                 </a:solidFill>
-                <a:latin typeface="Noto Serif KR Black" pitchFamily="34" charset="0"/>
-                <a:ea typeface="Noto Serif KR Black" pitchFamily="34" charset="-127"/>
-                <a:cs typeface="Noto Serif KR Black" pitchFamily="34" charset="-120"/>
-              </a:rPr>
-              <a:t>모으기</a:t>
-            </a:r>
-            <a:endParaRPr lang="en-US" sz="1600" dirty="0"/>
+                <a:latin typeface="Noto Sans KR" pitchFamily="34" charset="0"/>
+                <a:ea typeface="Noto Sans KR" pitchFamily="34" charset="-122"/>
+                <a:cs typeface="Noto Sans KR" pitchFamily="34" charset="-120"/>
+              </a:rPr>
+              <a:t>26,924건</a:t>
+            </a:r>
+            <a:endParaRPr lang="en-US" sz="2400" dirty="0"/>
           </a:p>
         </p:txBody>
       </p:sp>
       <p:sp>
         <p:nvSpPr>
-          <p:cNvPr id="65" name="txt-1-25"/>
+          <p:cNvPr id="72" name="txt-1-32"/>
           <p:cNvSpPr txBox="1"/>
           <p:nvPr/>
         </p:nvSpPr>
         <p:spPr>
           <a:xfrm>
-            <a:off x="616077" y="8082280"/>
-            <a:ext cx="1080135" cy="350520"/>
+            <a:off x="5827903" y="8758047"/>
+            <a:ext cx="1298448" cy="515112"/>
           </a:xfrm>
           <a:prstGeom prst="rect">
             <a:avLst/>
@@ -3776,57 +4002,37 @@
           <a:bodyPr wrap="square" lIns="0" tIns="0" rIns="0" bIns="0" rtlCol="0" anchor="t"/>
           <a:lstStyle/>
           <a:p>
-            <a:pPr algn="ctr" indent="0" marL="0">
-              <a:lnSpc>
-                <a:spcPts val="1200"/>
-              </a:lnSpc>
-              <a:buNone/>
-            </a:pPr>
-            <a:r>
-              <a:rPr lang="ko-KR" altLang="en-US" sz="850" dirty="0">
-                <a:solidFill>
-                  <a:srgbClr val="101D42"/>
-                </a:solidFill>
-                <a:latin typeface="Noto Sans KR" pitchFamily="34" charset="0"/>
-                <a:ea typeface="Noto Sans KR" pitchFamily="34" charset="-127"/>
-                <a:cs typeface="Noto Sans KR" pitchFamily="34" charset="-120"/>
-              </a:rPr>
-              <a:t>능동적 그림 읽기</a:t>
-            </a:r>
-            <a:endParaRPr lang="en-US" sz="850" dirty="0"/>
-          </a:p>
-          <a:p>
-            <a:pPr algn="ctr" indent="0" marL="0">
-              <a:lnSpc>
-                <a:spcPts val="1200"/>
-              </a:lnSpc>
-              <a:buNone/>
-            </a:pPr>
-            <a:r>
-              <a:rPr lang="ko-KR" altLang="en-US" sz="850" dirty="0">
-                <a:solidFill>
-                  <a:srgbClr val="101D42"/>
-                </a:solidFill>
-                <a:latin typeface="Noto Sans KR" pitchFamily="34" charset="0"/>
-                <a:ea typeface="Noto Sans KR" pitchFamily="34" charset="-127"/>
-                <a:cs typeface="Noto Sans KR" pitchFamily="34" charset="-120"/>
-              </a:rPr>
-              <a:t>낱말 · 다국어 지원</a:t>
-            </a:r>
-            <a:endParaRPr lang="en-US" sz="850" dirty="0"/>
+            <a:pPr algn="l" indent="0" marL="0">
+              <a:lnSpc>
+                <a:spcPts val="3120"/>
+              </a:lnSpc>
+              <a:buNone/>
+            </a:pPr>
+            <a:r>
+              <a:rPr lang="ko-KR" altLang="en-US" sz="2400" dirty="0">
+                <a:solidFill>
+                  <a:srgbClr val="15543C"/>
+                </a:solidFill>
+                <a:latin typeface="Noto Sans KR" pitchFamily="34" charset="0"/>
+                <a:ea typeface="Noto Sans KR" pitchFamily="34" charset="-122"/>
+                <a:cs typeface="Noto Sans KR" pitchFamily="34" charset="-120"/>
+              </a:rPr>
+              <a:t>1,816건</a:t>
+            </a:r>
+            <a:endParaRPr lang="en-US" sz="2400" dirty="0"/>
           </a:p>
         </p:txBody>
       </p:sp>
       <p:sp>
         <p:nvSpPr>
-          <p:cNvPr id="66" name="txt-1-26"/>
+          <p:cNvPr id="73" name="txt-1-33"/>
           <p:cNvSpPr txBox="1"/>
           <p:nvPr/>
         </p:nvSpPr>
         <p:spPr>
           <a:xfrm>
-            <a:off x="2228342" y="8082280"/>
-            <a:ext cx="1345946" cy="350520"/>
+            <a:off x="945896" y="9116314"/>
+            <a:ext cx="725043" cy="225425"/>
           </a:xfrm>
           <a:prstGeom prst="rect">
             <a:avLst/>
@@ -3838,57 +4044,37 @@
           <a:bodyPr wrap="square" lIns="0" tIns="0" rIns="0" bIns="0" rtlCol="0" anchor="t"/>
           <a:lstStyle/>
           <a:p>
-            <a:pPr algn="ctr" indent="0" marL="0">
-              <a:lnSpc>
-                <a:spcPts val="1200"/>
-              </a:lnSpc>
-              <a:buNone/>
-            </a:pPr>
-            <a:r>
-              <a:rPr lang="ko-KR" altLang="en-US" sz="850" dirty="0">
-                <a:solidFill>
-                  <a:srgbClr val="101D42"/>
-                </a:solidFill>
-                <a:latin typeface="Noto Sans KR" pitchFamily="34" charset="0"/>
-                <a:ea typeface="Noto Sans KR" pitchFamily="34" charset="-127"/>
-                <a:cs typeface="Noto Sans KR" pitchFamily="34" charset="-120"/>
-              </a:rPr>
-              <a:t>캐릭터와의 대화</a:t>
-            </a:r>
-            <a:endParaRPr lang="en-US" sz="850" dirty="0"/>
-          </a:p>
-          <a:p>
-            <a:pPr algn="ctr" indent="0" marL="0">
-              <a:lnSpc>
-                <a:spcPts val="1200"/>
-              </a:lnSpc>
-              <a:buNone/>
-            </a:pPr>
-            <a:r>
-              <a:rPr lang="ko-KR" altLang="en-US" sz="850" dirty="0">
-                <a:solidFill>
-                  <a:srgbClr val="101D42"/>
-                </a:solidFill>
-                <a:latin typeface="Noto Sans KR" pitchFamily="34" charset="0"/>
-                <a:ea typeface="Noto Sans KR" pitchFamily="34" charset="-127"/>
-                <a:cs typeface="Noto Sans KR" pitchFamily="34" charset="-120"/>
-              </a:rPr>
-              <a:t>생각한 까닭을 묻는 질문</a:t>
-            </a:r>
-            <a:endParaRPr lang="en-US" sz="850" dirty="0"/>
+            <a:pPr algn="l" indent="0" marL="0">
+              <a:lnSpc>
+                <a:spcPts val="1365"/>
+              </a:lnSpc>
+              <a:buNone/>
+            </a:pPr>
+            <a:r>
+              <a:rPr lang="ko-KR" altLang="en-US" sz="1050" dirty="0">
+                <a:solidFill>
+                  <a:srgbClr val="101D42"/>
+                </a:solidFill>
+                <a:latin typeface="Noto Sans KR" pitchFamily="34" charset="0"/>
+                <a:ea typeface="Noto Sans KR" pitchFamily="34" charset="-122"/>
+                <a:cs typeface="Noto Sans KR" pitchFamily="34" charset="-120"/>
+              </a:rPr>
+              <a:t>운영 학급</a:t>
+            </a:r>
+            <a:endParaRPr lang="en-US" sz="1050" dirty="0"/>
           </a:p>
         </p:txBody>
       </p:sp>
       <p:sp>
         <p:nvSpPr>
-          <p:cNvPr id="67" name="txt-1-27"/>
+          <p:cNvPr id="74" name="txt-1-34"/>
           <p:cNvSpPr txBox="1"/>
           <p:nvPr/>
         </p:nvSpPr>
         <p:spPr>
           <a:xfrm>
-            <a:off x="3796030" y="8082280"/>
-            <a:ext cx="1701165" cy="350520"/>
+            <a:off x="2522474" y="9116314"/>
+            <a:ext cx="1027811" cy="225425"/>
           </a:xfrm>
           <a:prstGeom prst="rect">
             <a:avLst/>
@@ -3900,57 +4086,37 @@
           <a:bodyPr wrap="square" lIns="0" tIns="0" rIns="0" bIns="0" rtlCol="0" anchor="t"/>
           <a:lstStyle/>
           <a:p>
-            <a:pPr algn="ctr" indent="0" marL="0">
-              <a:lnSpc>
-                <a:spcPts val="1200"/>
-              </a:lnSpc>
-              <a:buNone/>
-            </a:pPr>
-            <a:r>
-              <a:rPr lang="ko-KR" altLang="en-US" sz="850" dirty="0">
-                <a:solidFill>
-                  <a:srgbClr val="101D42"/>
-                </a:solidFill>
-                <a:latin typeface="Noto Sans KR" pitchFamily="34" charset="0"/>
-                <a:ea typeface="Noto Sans KR" pitchFamily="34" charset="-127"/>
-                <a:cs typeface="Noto Sans KR" pitchFamily="34" charset="-120"/>
-              </a:rPr>
-              <a:t>다양한 독후활동</a:t>
-            </a:r>
-            <a:endParaRPr lang="en-US" sz="850" dirty="0"/>
-          </a:p>
-          <a:p>
-            <a:pPr algn="ctr" indent="0" marL="0">
-              <a:lnSpc>
-                <a:spcPts val="1200"/>
-              </a:lnSpc>
-              <a:buNone/>
-            </a:pPr>
-            <a:r>
-              <a:rPr lang="ko-KR" altLang="en-US" sz="850" dirty="0">
-                <a:solidFill>
-                  <a:srgbClr val="101D42"/>
-                </a:solidFill>
-                <a:latin typeface="Noto Sans KR" pitchFamily="34" charset="0"/>
-                <a:ea typeface="Noto Sans KR" pitchFamily="34" charset="-127"/>
-                <a:cs typeface="Noto Sans KR" pitchFamily="34" charset="-120"/>
-              </a:rPr>
-              <a:t>글 · 그림 · 편지로 내 생각 표현</a:t>
-            </a:r>
-            <a:endParaRPr lang="en-US" sz="850" dirty="0"/>
+            <a:pPr algn="l" indent="0" marL="0">
+              <a:lnSpc>
+                <a:spcPts val="1365"/>
+              </a:lnSpc>
+              <a:buNone/>
+            </a:pPr>
+            <a:r>
+              <a:rPr lang="ko-KR" altLang="en-US" sz="1050" dirty="0">
+                <a:solidFill>
+                  <a:srgbClr val="101D42"/>
+                </a:solidFill>
+                <a:latin typeface="Noto Sans KR" pitchFamily="34" charset="0"/>
+                <a:ea typeface="Noto Sans KR" pitchFamily="34" charset="-122"/>
+                <a:cs typeface="Noto Sans KR" pitchFamily="34" charset="-120"/>
+              </a:rPr>
+              <a:t>실제 사용 학생</a:t>
+            </a:r>
+            <a:endParaRPr lang="en-US" sz="1050" dirty="0"/>
           </a:p>
         </p:txBody>
       </p:sp>
       <p:sp>
         <p:nvSpPr>
-          <p:cNvPr id="68" name="txt-1-28"/>
+          <p:cNvPr id="75" name="txt-1-35"/>
           <p:cNvSpPr txBox="1"/>
           <p:nvPr/>
         </p:nvSpPr>
         <p:spPr>
           <a:xfrm>
-            <a:off x="5553202" y="8082280"/>
-            <a:ext cx="1679702" cy="350520"/>
+            <a:off x="4374261" y="9116314"/>
+            <a:ext cx="725043" cy="225425"/>
           </a:xfrm>
           <a:prstGeom prst="rect">
             <a:avLst/>
@@ -3962,57 +4128,37 @@
           <a:bodyPr wrap="square" lIns="0" tIns="0" rIns="0" bIns="0" rtlCol="0" anchor="t"/>
           <a:lstStyle/>
           <a:p>
-            <a:pPr algn="ctr" indent="0" marL="0">
-              <a:lnSpc>
-                <a:spcPts val="1200"/>
-              </a:lnSpc>
-              <a:buNone/>
-            </a:pPr>
-            <a:r>
-              <a:rPr lang="ko-KR" altLang="en-US" sz="850" dirty="0">
-                <a:solidFill>
-                  <a:srgbClr val="101D42"/>
-                </a:solidFill>
-                <a:latin typeface="Noto Sans KR" pitchFamily="34" charset="0"/>
-                <a:ea typeface="Noto Sans KR" pitchFamily="34" charset="-127"/>
-                <a:cs typeface="Noto Sans KR" pitchFamily="34" charset="-120"/>
-              </a:rPr>
-              <a:t>독서 기록 자산</a:t>
-            </a:r>
-            <a:endParaRPr lang="en-US" sz="850" dirty="0"/>
-          </a:p>
-          <a:p>
-            <a:pPr algn="ctr" indent="0" marL="0">
-              <a:lnSpc>
-                <a:spcPts val="1200"/>
-              </a:lnSpc>
-              <a:buNone/>
-            </a:pPr>
-            <a:r>
-              <a:rPr lang="ko-KR" altLang="en-US" sz="850" dirty="0">
-                <a:solidFill>
-                  <a:srgbClr val="101D42"/>
-                </a:solidFill>
-                <a:latin typeface="Noto Sans KR" pitchFamily="34" charset="0"/>
-                <a:ea typeface="Noto Sans KR" pitchFamily="34" charset="-127"/>
-                <a:cs typeface="Noto Sans KR" pitchFamily="34" charset="-120"/>
-              </a:rPr>
-              <a:t>무엇을 느끼고 달라졌는지 기록</a:t>
-            </a:r>
-            <a:endParaRPr lang="en-US" sz="850" dirty="0"/>
+            <a:pPr algn="l" indent="0" marL="0">
+              <a:lnSpc>
+                <a:spcPts val="1365"/>
+              </a:lnSpc>
+              <a:buNone/>
+            </a:pPr>
+            <a:r>
+              <a:rPr lang="ko-KR" altLang="en-US" sz="1050" dirty="0">
+                <a:solidFill>
+                  <a:srgbClr val="101D42"/>
+                </a:solidFill>
+                <a:latin typeface="Noto Sans KR" pitchFamily="34" charset="0"/>
+                <a:ea typeface="Noto Sans KR" pitchFamily="34" charset="-122"/>
+                <a:cs typeface="Noto Sans KR" pitchFamily="34" charset="-120"/>
+              </a:rPr>
+              <a:t>완독 기록</a:t>
+            </a:r>
+            <a:endParaRPr lang="en-US" sz="1050" dirty="0"/>
           </a:p>
         </p:txBody>
       </p:sp>
       <p:sp>
         <p:nvSpPr>
-          <p:cNvPr id="69" name="txt-1-29"/>
+          <p:cNvPr id="76" name="txt-1-36"/>
           <p:cNvSpPr txBox="1"/>
           <p:nvPr/>
         </p:nvSpPr>
         <p:spPr>
           <a:xfrm>
-            <a:off x="756666" y="8758047"/>
-            <a:ext cx="1141476" cy="515112"/>
+            <a:off x="5965952" y="9116314"/>
+            <a:ext cx="994918" cy="225425"/>
           </a:xfrm>
           <a:prstGeom prst="rect">
             <a:avLst/>
@@ -4026,35 +4172,35 @@
           <a:p>
             <a:pPr algn="l" indent="0" marL="0">
               <a:lnSpc>
-                <a:spcPts val="3120"/>
-              </a:lnSpc>
-              <a:buNone/>
-            </a:pPr>
-            <a:r>
-              <a:rPr lang="ko-KR" altLang="en-US" sz="2400" dirty="0">
-                <a:solidFill>
-                  <a:srgbClr val="15543C"/>
-                </a:solidFill>
-                <a:latin typeface="Noto Sans KR" pitchFamily="34" charset="0"/>
-                <a:ea typeface="Noto Sans KR" pitchFamily="34" charset="-127"/>
-                <a:cs typeface="Noto Sans KR" pitchFamily="34" charset="-120"/>
-              </a:rPr>
-              <a:t>72학급</a:t>
-            </a:r>
-            <a:endParaRPr lang="en-US" sz="2400" dirty="0"/>
+                <a:spcPts val="1365"/>
+              </a:lnSpc>
+              <a:buNone/>
+            </a:pPr>
+            <a:r>
+              <a:rPr lang="ko-KR" altLang="en-US" sz="1050" dirty="0">
+                <a:solidFill>
+                  <a:srgbClr val="101D42"/>
+                </a:solidFill>
+                <a:latin typeface="Noto Sans KR" pitchFamily="34" charset="0"/>
+                <a:ea typeface="Noto Sans KR" pitchFamily="34" charset="-122"/>
+                <a:cs typeface="Noto Sans KR" pitchFamily="34" charset="-120"/>
+              </a:rPr>
+              <a:t>독후활동 제출</a:t>
+            </a:r>
+            <a:endParaRPr lang="en-US" sz="1050" dirty="0"/>
           </a:p>
         </p:txBody>
       </p:sp>
       <p:sp>
         <p:nvSpPr>
-          <p:cNvPr id="70" name="txt-1-30"/>
+          <p:cNvPr id="77" name="txt-1-37"/>
           <p:cNvSpPr txBox="1"/>
           <p:nvPr/>
         </p:nvSpPr>
         <p:spPr>
           <a:xfrm>
-            <a:off x="2399538" y="8758047"/>
-            <a:ext cx="1298448" cy="515112"/>
+            <a:off x="2012823" y="9514586"/>
+            <a:ext cx="3532124" cy="214630"/>
           </a:xfrm>
           <a:prstGeom prst="rect">
             <a:avLst/>
@@ -4066,37 +4212,37 @@
           <a:bodyPr wrap="square" lIns="0" tIns="0" rIns="0" bIns="0" rtlCol="0" anchor="t"/>
           <a:lstStyle/>
           <a:p>
-            <a:pPr algn="l" indent="0" marL="0">
-              <a:lnSpc>
-                <a:spcPts val="3120"/>
-              </a:lnSpc>
-              <a:buNone/>
-            </a:pPr>
-            <a:r>
-              <a:rPr lang="ko-KR" altLang="en-US" sz="2400" dirty="0">
-                <a:solidFill>
-                  <a:srgbClr val="15543C"/>
-                </a:solidFill>
-                <a:latin typeface="Noto Sans KR" pitchFamily="34" charset="0"/>
-                <a:ea typeface="Noto Sans KR" pitchFamily="34" charset="-127"/>
-                <a:cs typeface="Noto Sans KR" pitchFamily="34" charset="-120"/>
-              </a:rPr>
-              <a:t>1,196명</a:t>
-            </a:r>
-            <a:endParaRPr lang="en-US" sz="2400" dirty="0"/>
+            <a:pPr algn="ctr" indent="0" marL="0">
+              <a:lnSpc>
+                <a:spcPts val="1300"/>
+              </a:lnSpc>
+              <a:buNone/>
+            </a:pPr>
+            <a:r>
+              <a:rPr lang="ko-KR" altLang="en-US" sz="1000" dirty="0">
+                <a:solidFill>
+                  <a:srgbClr val="101D42"/>
+                </a:solidFill>
+                <a:latin typeface="Noto Sans KR" pitchFamily="34" charset="0"/>
+                <a:ea typeface="Noto Sans KR" pitchFamily="34" charset="-122"/>
+                <a:cs typeface="Noto Sans KR" pitchFamily="34" charset="-120"/>
+              </a:rPr>
+              <a:t>2026. 9. 20.~10. 21. 선도교사단 온오프라인 운영 종합</a:t>
+            </a:r>
+            <a:endParaRPr lang="en-US" sz="1000" dirty="0"/>
           </a:p>
         </p:txBody>
       </p:sp>
       <p:sp>
         <p:nvSpPr>
-          <p:cNvPr id="71" name="txt-1-31"/>
+          <p:cNvPr id="78" name="txt-1-38"/>
           <p:cNvSpPr txBox="1"/>
           <p:nvPr/>
         </p:nvSpPr>
         <p:spPr>
           <a:xfrm>
-            <a:off x="4029202" y="8758047"/>
-            <a:ext cx="1484503" cy="515112"/>
+            <a:off x="1502410" y="9843897"/>
+            <a:ext cx="4554855" cy="572516"/>
           </a:xfrm>
           <a:prstGeom prst="rect">
             <a:avLst/>
@@ -4108,37 +4254,57 @@
           <a:bodyPr wrap="square" lIns="0" tIns="0" rIns="0" bIns="0" rtlCol="0" anchor="t"/>
           <a:lstStyle/>
           <a:p>
-            <a:pPr algn="l" indent="0" marL="0">
-              <a:lnSpc>
-                <a:spcPts val="3120"/>
-              </a:lnSpc>
-              <a:buNone/>
-            </a:pPr>
-            <a:r>
-              <a:rPr lang="ko-KR" altLang="en-US" sz="2400" dirty="0">
+            <a:pPr algn="ctr" indent="0" marL="0">
+              <a:lnSpc>
+                <a:spcPts val="1960"/>
+              </a:lnSpc>
+              <a:buNone/>
+            </a:pPr>
+            <a:r>
+              <a:rPr lang="ko-KR" altLang="en-US" sz="1400" dirty="0">
+                <a:solidFill>
+                  <a:srgbClr val="101D42"/>
+                </a:solidFill>
+                <a:latin typeface="Noto Serif KR Black" pitchFamily="34" charset="0"/>
+                <a:ea typeface="Noto Serif KR Black" pitchFamily="34" charset="-122"/>
+                <a:cs typeface="Noto Serif KR Black" pitchFamily="34" charset="-120"/>
+              </a:rPr>
+              <a:t>경남의 모든 학생이 읽고 생각하는 기본을 갖추도록,</a:t>
+            </a:r>
+            <a:endParaRPr lang="en-US" sz="1400" dirty="0"/>
+          </a:p>
+          <a:p>
+            <a:pPr algn="ctr" indent="0" marL="0">
+              <a:lnSpc>
+                <a:spcPts val="1960"/>
+              </a:lnSpc>
+              <a:buNone/>
+            </a:pPr>
+            <a:r>
+              <a:rPr lang="ko-KR" altLang="en-US" sz="1400" dirty="0">
                 <a:solidFill>
                   <a:srgbClr val="15543C"/>
                 </a:solidFill>
-                <a:latin typeface="Noto Sans KR" pitchFamily="34" charset="0"/>
-                <a:ea typeface="Noto Sans KR" pitchFamily="34" charset="-127"/>
-                <a:cs typeface="Noto Sans KR" pitchFamily="34" charset="-120"/>
-              </a:rPr>
-              <a:t>26,924건</a:t>
-            </a:r>
-            <a:endParaRPr lang="en-US" sz="2400" dirty="0"/>
+                <a:latin typeface="Noto Serif KR Black" pitchFamily="34" charset="0"/>
+                <a:ea typeface="Noto Serif KR Black" pitchFamily="34" charset="-122"/>
+                <a:cs typeface="Noto Serif KR Black" pitchFamily="34" charset="-120"/>
+              </a:rPr>
+              <a:t>학교 독서교육의 지속적인 운영을 지원해 주십시오.</a:t>
+            </a:r>
+            <a:endParaRPr lang="en-US" sz="1400" dirty="0"/>
           </a:p>
         </p:txBody>
       </p:sp>
       <p:sp>
         <p:nvSpPr>
-          <p:cNvPr id="72" name="txt-1-32"/>
+          <p:cNvPr id="79" name="txt-1-39"/>
           <p:cNvSpPr txBox="1"/>
           <p:nvPr/>
         </p:nvSpPr>
         <p:spPr>
           <a:xfrm>
-            <a:off x="5827903" y="8758047"/>
-            <a:ext cx="1298448" cy="515112"/>
+            <a:off x="304800" y="10510393"/>
+            <a:ext cx="6350000" cy="139446"/>
           </a:xfrm>
           <a:prstGeom prst="rect">
             <a:avLst/>
@@ -4152,320 +4318,6 @@
           <a:p>
             <a:pPr algn="l" indent="0" marL="0">
               <a:lnSpc>
-                <a:spcPts val="3120"/>
-              </a:lnSpc>
-              <a:buNone/>
-            </a:pPr>
-            <a:r>
-              <a:rPr lang="ko-KR" altLang="en-US" sz="2400" dirty="0">
-                <a:solidFill>
-                  <a:srgbClr val="15543C"/>
-                </a:solidFill>
-                <a:latin typeface="Noto Sans KR" pitchFamily="34" charset="0"/>
-                <a:ea typeface="Noto Sans KR" pitchFamily="34" charset="-127"/>
-                <a:cs typeface="Noto Sans KR" pitchFamily="34" charset="-120"/>
-              </a:rPr>
-              <a:t>1,816건</a:t>
-            </a:r>
-            <a:endParaRPr lang="en-US" sz="2400" dirty="0"/>
-          </a:p>
-        </p:txBody>
-      </p:sp>
-      <p:sp>
-        <p:nvSpPr>
-          <p:cNvPr id="73" name="txt-1-33"/>
-          <p:cNvSpPr txBox="1"/>
-          <p:nvPr/>
-        </p:nvSpPr>
-        <p:spPr>
-          <a:xfrm>
-            <a:off x="945896" y="9116314"/>
-            <a:ext cx="725043" cy="225425"/>
-          </a:xfrm>
-          <a:prstGeom prst="rect">
-            <a:avLst/>
-          </a:prstGeom>
-          <a:noFill/>
-          <a:ln/>
-        </p:spPr>
-        <p:txBody>
-          <a:bodyPr wrap="square" lIns="0" tIns="0" rIns="0" bIns="0" rtlCol="0" anchor="t"/>
-          <a:lstStyle/>
-          <a:p>
-            <a:pPr algn="l" indent="0" marL="0">
-              <a:lnSpc>
-                <a:spcPts val="1365"/>
-              </a:lnSpc>
-              <a:buNone/>
-            </a:pPr>
-            <a:r>
-              <a:rPr lang="ko-KR" altLang="en-US" sz="1050" dirty="0">
-                <a:solidFill>
-                  <a:srgbClr val="101D42"/>
-                </a:solidFill>
-                <a:latin typeface="Noto Sans KR" pitchFamily="34" charset="0"/>
-                <a:ea typeface="Noto Sans KR" pitchFamily="34" charset="-127"/>
-                <a:cs typeface="Noto Sans KR" pitchFamily="34" charset="-120"/>
-              </a:rPr>
-              <a:t>운영 학급</a:t>
-            </a:r>
-            <a:endParaRPr lang="en-US" sz="1050" dirty="0"/>
-          </a:p>
-        </p:txBody>
-      </p:sp>
-      <p:sp>
-        <p:nvSpPr>
-          <p:cNvPr id="74" name="txt-1-34"/>
-          <p:cNvSpPr txBox="1"/>
-          <p:nvPr/>
-        </p:nvSpPr>
-        <p:spPr>
-          <a:xfrm>
-            <a:off x="2522474" y="9116314"/>
-            <a:ext cx="1027811" cy="225425"/>
-          </a:xfrm>
-          <a:prstGeom prst="rect">
-            <a:avLst/>
-          </a:prstGeom>
-          <a:noFill/>
-          <a:ln/>
-        </p:spPr>
-        <p:txBody>
-          <a:bodyPr wrap="square" lIns="0" tIns="0" rIns="0" bIns="0" rtlCol="0" anchor="t"/>
-          <a:lstStyle/>
-          <a:p>
-            <a:pPr algn="l" indent="0" marL="0">
-              <a:lnSpc>
-                <a:spcPts val="1365"/>
-              </a:lnSpc>
-              <a:buNone/>
-            </a:pPr>
-            <a:r>
-              <a:rPr lang="ko-KR" altLang="en-US" sz="1050" dirty="0">
-                <a:solidFill>
-                  <a:srgbClr val="101D42"/>
-                </a:solidFill>
-                <a:latin typeface="Noto Sans KR" pitchFamily="34" charset="0"/>
-                <a:ea typeface="Noto Sans KR" pitchFamily="34" charset="-127"/>
-                <a:cs typeface="Noto Sans KR" pitchFamily="34" charset="-120"/>
-              </a:rPr>
-              <a:t>실제 사용 학생</a:t>
-            </a:r>
-            <a:endParaRPr lang="en-US" sz="1050" dirty="0"/>
-          </a:p>
-        </p:txBody>
-      </p:sp>
-      <p:sp>
-        <p:nvSpPr>
-          <p:cNvPr id="75" name="txt-1-35"/>
-          <p:cNvSpPr txBox="1"/>
-          <p:nvPr/>
-        </p:nvSpPr>
-        <p:spPr>
-          <a:xfrm>
-            <a:off x="4374261" y="9116314"/>
-            <a:ext cx="725043" cy="225425"/>
-          </a:xfrm>
-          <a:prstGeom prst="rect">
-            <a:avLst/>
-          </a:prstGeom>
-          <a:noFill/>
-          <a:ln/>
-        </p:spPr>
-        <p:txBody>
-          <a:bodyPr wrap="square" lIns="0" tIns="0" rIns="0" bIns="0" rtlCol="0" anchor="t"/>
-          <a:lstStyle/>
-          <a:p>
-            <a:pPr algn="l" indent="0" marL="0">
-              <a:lnSpc>
-                <a:spcPts val="1365"/>
-              </a:lnSpc>
-              <a:buNone/>
-            </a:pPr>
-            <a:r>
-              <a:rPr lang="ko-KR" altLang="en-US" sz="1050" dirty="0">
-                <a:solidFill>
-                  <a:srgbClr val="101D42"/>
-                </a:solidFill>
-                <a:latin typeface="Noto Sans KR" pitchFamily="34" charset="0"/>
-                <a:ea typeface="Noto Sans KR" pitchFamily="34" charset="-127"/>
-                <a:cs typeface="Noto Sans KR" pitchFamily="34" charset="-120"/>
-              </a:rPr>
-              <a:t>완독 기록</a:t>
-            </a:r>
-            <a:endParaRPr lang="en-US" sz="1050" dirty="0"/>
-          </a:p>
-        </p:txBody>
-      </p:sp>
-      <p:sp>
-        <p:nvSpPr>
-          <p:cNvPr id="76" name="txt-1-36"/>
-          <p:cNvSpPr txBox="1"/>
-          <p:nvPr/>
-        </p:nvSpPr>
-        <p:spPr>
-          <a:xfrm>
-            <a:off x="5965952" y="9116314"/>
-            <a:ext cx="994918" cy="225425"/>
-          </a:xfrm>
-          <a:prstGeom prst="rect">
-            <a:avLst/>
-          </a:prstGeom>
-          <a:noFill/>
-          <a:ln/>
-        </p:spPr>
-        <p:txBody>
-          <a:bodyPr wrap="square" lIns="0" tIns="0" rIns="0" bIns="0" rtlCol="0" anchor="t"/>
-          <a:lstStyle/>
-          <a:p>
-            <a:pPr algn="l" indent="0" marL="0">
-              <a:lnSpc>
-                <a:spcPts val="1365"/>
-              </a:lnSpc>
-              <a:buNone/>
-            </a:pPr>
-            <a:r>
-              <a:rPr lang="ko-KR" altLang="en-US" sz="1050" dirty="0">
-                <a:solidFill>
-                  <a:srgbClr val="101D42"/>
-                </a:solidFill>
-                <a:latin typeface="Noto Sans KR" pitchFamily="34" charset="0"/>
-                <a:ea typeface="Noto Sans KR" pitchFamily="34" charset="-127"/>
-                <a:cs typeface="Noto Sans KR" pitchFamily="34" charset="-120"/>
-              </a:rPr>
-              <a:t>독후활동 제출</a:t>
-            </a:r>
-            <a:endParaRPr lang="en-US" sz="1050" dirty="0"/>
-          </a:p>
-        </p:txBody>
-      </p:sp>
-      <p:sp>
-        <p:nvSpPr>
-          <p:cNvPr id="77" name="txt-1-37"/>
-          <p:cNvSpPr txBox="1"/>
-          <p:nvPr/>
-        </p:nvSpPr>
-        <p:spPr>
-          <a:xfrm>
-            <a:off x="2012823" y="9514586"/>
-            <a:ext cx="3532124" cy="214630"/>
-          </a:xfrm>
-          <a:prstGeom prst="rect">
-            <a:avLst/>
-          </a:prstGeom>
-          <a:noFill/>
-          <a:ln/>
-        </p:spPr>
-        <p:txBody>
-          <a:bodyPr wrap="square" lIns="0" tIns="0" rIns="0" bIns="0" rtlCol="0" anchor="t"/>
-          <a:lstStyle/>
-          <a:p>
-            <a:pPr algn="ctr" indent="0" marL="0">
-              <a:lnSpc>
-                <a:spcPts val="1300"/>
-              </a:lnSpc>
-              <a:buNone/>
-            </a:pPr>
-            <a:r>
-              <a:rPr lang="ko-KR" altLang="en-US" sz="1000" dirty="0">
-                <a:solidFill>
-                  <a:srgbClr val="101D42"/>
-                </a:solidFill>
-                <a:latin typeface="Noto Sans KR" pitchFamily="34" charset="0"/>
-                <a:ea typeface="Noto Sans KR" pitchFamily="34" charset="-127"/>
-                <a:cs typeface="Noto Sans KR" pitchFamily="34" charset="-120"/>
-              </a:rPr>
-              <a:t>2026년 9월 20일부터 10월 21일까지 한 달 시범 사용 결과</a:t>
-            </a:r>
-            <a:endParaRPr lang="en-US" sz="1000" dirty="0"/>
-          </a:p>
-        </p:txBody>
-      </p:sp>
-      <p:sp>
-        <p:nvSpPr>
-          <p:cNvPr id="78" name="txt-1-38"/>
-          <p:cNvSpPr txBox="1"/>
-          <p:nvPr/>
-        </p:nvSpPr>
-        <p:spPr>
-          <a:xfrm>
-            <a:off x="1502410" y="9843897"/>
-            <a:ext cx="4554855" cy="572516"/>
-          </a:xfrm>
-          <a:prstGeom prst="rect">
-            <a:avLst/>
-          </a:prstGeom>
-          <a:noFill/>
-          <a:ln/>
-        </p:spPr>
-        <p:txBody>
-          <a:bodyPr wrap="square" lIns="0" tIns="0" rIns="0" bIns="0" rtlCol="0" anchor="t"/>
-          <a:lstStyle/>
-          <a:p>
-            <a:pPr algn="ctr" indent="0" marL="0">
-              <a:lnSpc>
-                <a:spcPts val="1960"/>
-              </a:lnSpc>
-              <a:buNone/>
-            </a:pPr>
-            <a:r>
-              <a:rPr lang="ko-KR" altLang="en-US" sz="1400" dirty="0">
-                <a:solidFill>
-                  <a:srgbClr val="101D42"/>
-                </a:solidFill>
-                <a:latin typeface="Noto Serif KR Black" pitchFamily="34" charset="0"/>
-                <a:ea typeface="Noto Serif KR Black" pitchFamily="34" charset="-127"/>
-                <a:cs typeface="Noto Serif KR Black" pitchFamily="34" charset="-120"/>
-              </a:rPr>
-              <a:t>경남의 모든 학생이 읽고 생각하는 기본을 갖추도록,</a:t>
-            </a:r>
-            <a:endParaRPr lang="en-US" sz="1400" dirty="0"/>
-          </a:p>
-          <a:p>
-            <a:pPr algn="ctr" indent="0" marL="0">
-              <a:lnSpc>
-                <a:spcPts val="1960"/>
-              </a:lnSpc>
-              <a:buNone/>
-            </a:pPr>
-            <a:r>
-              <a:rPr lang="ko-KR" altLang="en-US" sz="1400" dirty="0">
-                <a:solidFill>
-                  <a:srgbClr val="15543C"/>
-                </a:solidFill>
-                <a:latin typeface="Noto Serif KR Black" pitchFamily="34" charset="0"/>
-                <a:ea typeface="Noto Serif KR Black" pitchFamily="34" charset="-127"/>
-                <a:cs typeface="Noto Serif KR Black" pitchFamily="34" charset="-120"/>
-              </a:rPr>
-              <a:t>학교 독서교육의 지속적인 운영을 지원해 주십시오.</a:t>
-            </a:r>
-            <a:endParaRPr lang="en-US" sz="1400" dirty="0"/>
-          </a:p>
-        </p:txBody>
-      </p:sp>
-      <p:sp>
-        <p:nvSpPr>
-          <p:cNvPr id="79" name="txt-1-39"/>
-          <p:cNvSpPr txBox="1"/>
-          <p:nvPr/>
-        </p:nvSpPr>
-        <p:spPr>
-          <a:xfrm>
-            <a:off x="304800" y="10510393"/>
-            <a:ext cx="2592451" cy="139446"/>
-          </a:xfrm>
-          <a:prstGeom prst="rect">
-            <a:avLst/>
-          </a:prstGeom>
-          <a:noFill/>
-          <a:ln/>
-        </p:spPr>
-        <p:txBody>
-          <a:bodyPr wrap="square" lIns="0" tIns="0" rIns="0" bIns="0" rtlCol="0" anchor="t"/>
-          <a:lstStyle/>
-          <a:p>
-            <a:pPr algn="l" indent="0" marL="0">
-              <a:lnSpc>
                 <a:spcPts val="845"/>
               </a:lnSpc>
               <a:buNone/>
@@ -4476,10 +4328,10 @@
                   <a:srgbClr val="43516A"/>
                 </a:solidFill>
                 <a:latin typeface="Noto Sans KR" pitchFamily="34" charset="0"/>
-                <a:ea typeface="Noto Sans KR" pitchFamily="34" charset="-127"/>
-                <a:cs typeface="Noto Sans KR" pitchFamily="34" charset="-120"/>
-              </a:rPr>
-              <a:t>* 출처: Yarkoni et al. (2008). NeuroImage, 41(4), 1408-1425.</a:t>
+                <a:ea typeface="Noto Sans KR" pitchFamily="34" charset="-122"/>
+                <a:cs typeface="Noto Sans KR" pitchFamily="34" charset="-120"/>
+              </a:rPr>
+              <a:t>* Kreijkes 외(2026), Computers &amp; Education 243, 105514. 중등학생 연구.</a:t>
             </a:r>
             <a:endParaRPr lang="en-US" sz="650" dirty="0"/>
           </a:p>
@@ -5053,7 +4905,7 @@
                   <a:srgbClr val="101D42"/>
                 </a:solidFill>
                 <a:latin typeface="Noto Serif KR Black" pitchFamily="34" charset="0"/>
-                <a:ea typeface="Noto Serif KR Black" pitchFamily="34" charset="-127"/>
+                <a:ea typeface="Noto Serif KR Black" pitchFamily="34" charset="-122"/>
                 <a:cs typeface="Noto Serif KR Black" pitchFamily="34" charset="-120"/>
               </a:rPr>
               <a:t>현장 초등교사가 드리는 제안</a:t>
@@ -5095,7 +4947,7 @@
                   <a:srgbClr val="101D42"/>
                 </a:solidFill>
                 <a:latin typeface="Noto Serif KR Black" pitchFamily="34" charset="0"/>
-                <a:ea typeface="Noto Serif KR Black" pitchFamily="34" charset="-127"/>
+                <a:ea typeface="Noto Serif KR Black" pitchFamily="34" charset="-122"/>
                 <a:cs typeface="Noto Serif KR Black" pitchFamily="34" charset="-120"/>
               </a:rPr>
               <a:t>스스로 생각할 기회를</a:t>
@@ -5115,7 +4967,7 @@
                   <a:srgbClr val="15543C"/>
                 </a:solidFill>
                 <a:latin typeface="Noto Serif KR Black" pitchFamily="34" charset="0"/>
-                <a:ea typeface="Noto Serif KR Black" pitchFamily="34" charset="-127"/>
+                <a:ea typeface="Noto Serif KR Black" pitchFamily="34" charset="-122"/>
                 <a:cs typeface="Noto Serif KR Black" pitchFamily="34" charset="-120"/>
               </a:rPr>
               <a:t>잃을까 두렵습니다.</a:t>
@@ -5157,7 +5009,7 @@
                   <a:srgbClr val="15543C"/>
                 </a:solidFill>
                 <a:latin typeface="Noto Serif KR Black" pitchFamily="34" charset="0"/>
-                <a:ea typeface="Noto Serif KR Black" pitchFamily="34" charset="-127"/>
+                <a:ea typeface="Noto Serif KR Black" pitchFamily="34" charset="-122"/>
                 <a:cs typeface="Noto Serif KR Black" pitchFamily="34" charset="-120"/>
               </a:rPr>
               <a:t>교실에서 마주한 걱정</a:t>
@@ -5199,10 +5051,258 @@
                   <a:srgbClr val="101D42"/>
                 </a:solidFill>
                 <a:latin typeface="Noto Sans KR" pitchFamily="34" charset="0"/>
-                <a:ea typeface="Noto Sans KR" pitchFamily="34" charset="-127"/>
-                <a:cs typeface="Noto Sans KR" pitchFamily="34" charset="-120"/>
-              </a:rPr>
-              <a:t>학교 현장에서 아이들이 </a:t>
+                <a:ea typeface="Noto Sans KR" pitchFamily="34" charset="-122"/>
+                <a:cs typeface="Noto Sans KR" pitchFamily="34" charset="-120"/>
+              </a:rPr>
+              <a:t>GPT가 요약과 답안을 대신 만드는 동안 학생은 무엇을 직접 읽고 생각할까요.</a:t>
+            </a:r>
+            <a:endParaRPr lang="en-US" sz="1800" dirty="0"/>
+          </a:p>
+          <a:p>
+            <a:pPr algn="l" indent="0" marL="0">
+              <a:lnSpc>
+                <a:spcPts val="2600"/>
+              </a:lnSpc>
+              <a:buNone/>
+            </a:pPr>
+            <a:r>
+              <a:rPr lang="ko-KR" altLang="en-US" sz="1800" dirty="0">
+                <a:solidFill>
+                  <a:srgbClr val="101D42"/>
+                </a:solidFill>
+                <a:latin typeface="Noto Sans KR" pitchFamily="34" charset="0"/>
+                <a:ea typeface="Noto Sans KR" pitchFamily="34" charset="-122"/>
+                <a:cs typeface="Noto Sans KR" pitchFamily="34" charset="-120"/>
+              </a:rPr>
+              <a:t>글을 따라 읽고, 근거를 찾고, 자기 말로 정리하는 시간을</a:t>
+            </a:r>
+            <a:endParaRPr lang="en-US" sz="1800" dirty="0"/>
+          </a:p>
+          <a:p>
+            <a:pPr algn="l" indent="0" marL="0">
+              <a:lnSpc>
+                <a:spcPts val="2600"/>
+              </a:lnSpc>
+              <a:buNone/>
+            </a:pPr>
+            <a:r>
+              <a:rPr lang="ko-KR" altLang="en-US" sz="1800" dirty="0">
+                <a:solidFill>
+                  <a:srgbClr val="101D42"/>
+                </a:solidFill>
+                <a:latin typeface="Noto Sans KR" pitchFamily="34" charset="0"/>
+                <a:ea typeface="Noto Sans KR" pitchFamily="34" charset="-122"/>
+                <a:cs typeface="Noto Sans KR" pitchFamily="34" charset="-120"/>
+              </a:rPr>
+              <a:t>교실에서 지키려는 고민으로 부기를 만들었습니다.</a:t>
+            </a:r>
+            <a:endParaRPr lang="en-US" sz="1800" dirty="0"/>
+          </a:p>
+        </p:txBody>
+      </p:sp>
+      <p:sp>
+        <p:nvSpPr>
+          <p:cNvPr id="24" name="txt-2-4"/>
+          <p:cNvSpPr txBox="1"/>
+          <p:nvPr/>
+        </p:nvSpPr>
+        <p:spPr>
+          <a:xfrm>
+            <a:off x="863346" y="4424426"/>
+            <a:ext cx="6174994" cy="418465"/>
+          </a:xfrm>
+          <a:prstGeom prst="rect">
+            <a:avLst/>
+          </a:prstGeom>
+          <a:noFill/>
+          <a:ln/>
+        </p:spPr>
+        <p:txBody>
+          <a:bodyPr wrap="square" lIns="0" tIns="0" rIns="0" bIns="0" rtlCol="0" anchor="t"/>
+          <a:lstStyle/>
+          <a:p>
+            <a:pPr algn="l" indent="0" marL="0">
+              <a:lnSpc>
+                <a:spcPts val="2535"/>
+              </a:lnSpc>
+              <a:buNone/>
+            </a:pPr>
+            <a:r>
+              <a:rPr lang="ko-KR" altLang="en-US" sz="1950" dirty="0">
+                <a:solidFill>
+                  <a:srgbClr val="15543C"/>
+                </a:solidFill>
+                <a:latin typeface="Noto Serif KR Black" pitchFamily="34" charset="0"/>
+                <a:ea typeface="Noto Serif KR Black" pitchFamily="34" charset="-122"/>
+                <a:cs typeface="Noto Serif KR Black" pitchFamily="34" charset="-120"/>
+              </a:rPr>
+              <a:t>정보가 많아도, 깊은 이해는 저절로 생기지 않습니다</a:t>
+            </a:r>
+            <a:endParaRPr lang="en-US" sz="1950" dirty="0"/>
+          </a:p>
+        </p:txBody>
+      </p:sp>
+      <p:sp>
+        <p:nvSpPr>
+          <p:cNvPr id="25" name="txt-2-5"/>
+          <p:cNvSpPr txBox="1"/>
+          <p:nvPr/>
+        </p:nvSpPr>
+        <p:spPr>
+          <a:xfrm>
+            <a:off x="381000" y="4945253"/>
+            <a:ext cx="7140956" cy="1089660"/>
+          </a:xfrm>
+          <a:prstGeom prst="rect">
+            <a:avLst/>
+          </a:prstGeom>
+          <a:noFill/>
+          <a:ln/>
+        </p:spPr>
+        <p:txBody>
+          <a:bodyPr wrap="square" lIns="0" tIns="0" rIns="0" bIns="0" rtlCol="0" anchor="t"/>
+          <a:lstStyle/>
+          <a:p>
+            <a:pPr algn="l" indent="0" marL="0">
+              <a:lnSpc>
+                <a:spcPts val="2600"/>
+              </a:lnSpc>
+              <a:buNone/>
+            </a:pPr>
+            <a:r>
+              <a:rPr lang="ko-KR" altLang="en-US" sz="1800" b="1" dirty="0">
+                <a:solidFill>
+                  <a:srgbClr val="101D42"/>
+                </a:solidFill>
+                <a:latin typeface="Noto Sans KR" pitchFamily="34" charset="0"/>
+                <a:ea typeface="Noto Sans KR" pitchFamily="34" charset="-122"/>
+                <a:cs typeface="Noto Sans KR" pitchFamily="34" charset="-120"/>
+              </a:rPr>
+              <a:t>생각할 일을 바깥 도구에 맡기는 현상을 인지 외주화라고 부릅니다.</a:t>
+            </a:r>
+            <a:endParaRPr lang="en-US" sz="1800" dirty="0"/>
+          </a:p>
+          <a:p>
+            <a:pPr algn="l" indent="0" marL="0">
+              <a:lnSpc>
+                <a:spcPts val="2600"/>
+              </a:lnSpc>
+              <a:buNone/>
+            </a:pPr>
+            <a:r>
+              <a:rPr lang="ko-KR" altLang="en-US" sz="1800" b="1" dirty="0">
+                <a:solidFill>
+                  <a:srgbClr val="101D42"/>
+                </a:solidFill>
+                <a:latin typeface="Noto Sans KR" pitchFamily="34" charset="0"/>
+                <a:ea typeface="Noto Sans KR" pitchFamily="34" charset="-122"/>
+                <a:cs typeface="Noto Sans KR" pitchFamily="34" charset="-120"/>
+              </a:rPr>
+              <a:t>AI의 답을 이해하고 검토하려면 학생 안에 낱말과 배경지식이</a:t>
+            </a:r>
+            <a:endParaRPr lang="en-US" sz="1800" dirty="0"/>
+          </a:p>
+          <a:p>
+            <a:pPr algn="l" indent="0" marL="0">
+              <a:lnSpc>
+                <a:spcPts val="2600"/>
+              </a:lnSpc>
+              <a:buNone/>
+            </a:pPr>
+            <a:r>
+              <a:rPr lang="ko-KR" altLang="en-US" sz="1800" b="1" dirty="0">
+                <a:solidFill>
+                  <a:srgbClr val="101D42"/>
+                </a:solidFill>
+                <a:latin typeface="Noto Sans KR" pitchFamily="34" charset="0"/>
+                <a:ea typeface="Noto Sans KR" pitchFamily="34" charset="-122"/>
+                <a:cs typeface="Noto Sans KR" pitchFamily="34" charset="-120"/>
+              </a:rPr>
+              <a:t>쌓여 있어야 합니다. 독서수업은 그 바탕을 마련하는 시간입니다.</a:t>
+            </a:r>
+            <a:endParaRPr lang="en-US" sz="1800" dirty="0"/>
+          </a:p>
+        </p:txBody>
+      </p:sp>
+      <p:sp>
+        <p:nvSpPr>
+          <p:cNvPr id="26" name="txt-2-6"/>
+          <p:cNvSpPr txBox="1"/>
+          <p:nvPr/>
+        </p:nvSpPr>
+        <p:spPr>
+          <a:xfrm>
+            <a:off x="863346" y="6341999"/>
+            <a:ext cx="3579368" cy="418465"/>
+          </a:xfrm>
+          <a:prstGeom prst="rect">
+            <a:avLst/>
+          </a:prstGeom>
+          <a:noFill/>
+          <a:ln/>
+        </p:spPr>
+        <p:txBody>
+          <a:bodyPr wrap="square" lIns="0" tIns="0" rIns="0" bIns="0" rtlCol="0" anchor="t"/>
+          <a:lstStyle/>
+          <a:p>
+            <a:pPr algn="l" indent="0" marL="0">
+              <a:lnSpc>
+                <a:spcPts val="2535"/>
+              </a:lnSpc>
+              <a:buNone/>
+            </a:pPr>
+            <a:r>
+              <a:rPr lang="ko-KR" altLang="en-US" sz="1950" dirty="0">
+                <a:solidFill>
+                  <a:srgbClr val="15543C"/>
+                </a:solidFill>
+                <a:latin typeface="Noto Serif KR Black" pitchFamily="34" charset="0"/>
+                <a:ea typeface="Noto Serif KR Black" pitchFamily="34" charset="-122"/>
+                <a:cs typeface="Noto Serif KR Black" pitchFamily="34" charset="-120"/>
+              </a:rPr>
+              <a:t>학교가 먼저 고민해야 할 질문</a:t>
+            </a:r>
+            <a:endParaRPr lang="en-US" sz="1950" dirty="0"/>
+          </a:p>
+        </p:txBody>
+      </p:sp>
+      <p:sp>
+        <p:nvSpPr>
+          <p:cNvPr id="27" name="txt-2-7"/>
+          <p:cNvSpPr txBox="1"/>
+          <p:nvPr/>
+        </p:nvSpPr>
+        <p:spPr>
+          <a:xfrm>
+            <a:off x="381000" y="6837045"/>
+            <a:ext cx="7140956" cy="759460"/>
+          </a:xfrm>
+          <a:prstGeom prst="rect">
+            <a:avLst/>
+          </a:prstGeom>
+          <a:noFill/>
+          <a:ln/>
+        </p:spPr>
+        <p:txBody>
+          <a:bodyPr wrap="square" lIns="0" tIns="0" rIns="0" bIns="0" rtlCol="0" anchor="t"/>
+          <a:lstStyle/>
+          <a:p>
+            <a:pPr algn="l" indent="0" marL="0">
+              <a:lnSpc>
+                <a:spcPts val="2600"/>
+              </a:lnSpc>
+              <a:buNone/>
+            </a:pPr>
+            <a:r>
+              <a:rPr lang="ko-KR" altLang="en-US" sz="1800" dirty="0">
+                <a:solidFill>
+                  <a:srgbClr val="101D42"/>
+                </a:solidFill>
+                <a:latin typeface="Noto Sans KR" pitchFamily="34" charset="0"/>
+                <a:ea typeface="Noto Sans KR" pitchFamily="34" charset="-122"/>
+                <a:cs typeface="Noto Sans KR" pitchFamily="34" charset="-120"/>
+              </a:rPr>
+              <a:t>학생은 </a:t>
             </a:r>
             <a:pPr algn="l" indent="0" marL="0">
               <a:lnSpc>
@@ -5219,10 +5319,10 @@
                   <a:srgbClr val="FFF0AD"/>
                 </a:highlight>
                 <a:latin typeface="Noto Sans KR" pitchFamily="34" charset="0"/>
-                <a:ea typeface="Noto Sans KR" pitchFamily="34" charset="-127"/>
-                <a:cs typeface="Noto Sans KR" pitchFamily="34" charset="-120"/>
-              </a:rPr>
-              <a:t>책을 충분히 읽지 않는 현실</a:t>
+                <a:ea typeface="Noto Sans KR" pitchFamily="34" charset="-122"/>
+                <a:cs typeface="Noto Sans KR" pitchFamily="34" charset="-120"/>
+              </a:rPr>
+              <a:t>무엇을 알고</a:t>
             </a:r>
             <a:pPr algn="l" indent="0" marL="0">
               <a:lnSpc>
@@ -5236,30 +5336,10 @@
                   <a:srgbClr val="101D42"/>
                 </a:solidFill>
                 <a:latin typeface="Noto Sans KR" pitchFamily="34" charset="0"/>
-                <a:ea typeface="Noto Sans KR" pitchFamily="34" charset="-127"/>
-                <a:cs typeface="Noto Sans KR" pitchFamily="34" charset="-120"/>
-              </a:rPr>
-              <a:t>을 마주했습니다.</a:t>
-            </a:r>
-            <a:endParaRPr lang="en-US" sz="1800" dirty="0"/>
-          </a:p>
-          <a:p>
-            <a:pPr algn="l" indent="0" marL="0">
-              <a:lnSpc>
-                <a:spcPts val="2600"/>
-              </a:lnSpc>
-              <a:buNone/>
-            </a:pPr>
-            <a:r>
-              <a:rPr lang="ko-KR" altLang="en-US" sz="1800" dirty="0">
-                <a:solidFill>
-                  <a:srgbClr val="101D42"/>
-                </a:solidFill>
-                <a:latin typeface="Noto Sans KR" pitchFamily="34" charset="0"/>
-                <a:ea typeface="Noto Sans KR" pitchFamily="34" charset="-127"/>
-                <a:cs typeface="Noto Sans KR" pitchFamily="34" charset="-120"/>
-              </a:rPr>
-              <a:t>다른 사람의 생각을 차분히 따라 읽고, </a:t>
+                <a:ea typeface="Noto Sans KR" pitchFamily="34" charset="-122"/>
+                <a:cs typeface="Noto Sans KR" pitchFamily="34" charset="-120"/>
+              </a:rPr>
+              <a:t>, </a:t>
             </a:r>
             <a:pPr algn="l" indent="0" marL="0">
               <a:lnSpc>
@@ -5276,10 +5356,10 @@
                   <a:srgbClr val="FFF0AD"/>
                 </a:highlight>
                 <a:latin typeface="Noto Sans KR" pitchFamily="34" charset="0"/>
-                <a:ea typeface="Noto Sans KR" pitchFamily="34" charset="-127"/>
-                <a:cs typeface="Noto Sans KR" pitchFamily="34" charset="-120"/>
-              </a:rPr>
-              <a:t>자기 생각을 만들어 볼 기회</a:t>
+                <a:ea typeface="Noto Sans KR" pitchFamily="34" charset="-122"/>
+                <a:cs typeface="Noto Sans KR" pitchFamily="34" charset="-120"/>
+              </a:rPr>
+              <a:t>어떤 경험을 쌓고</a:t>
             </a:r>
             <a:pPr algn="l" indent="0" marL="0">
               <a:lnSpc>
@@ -5293,10 +5373,47 @@
                   <a:srgbClr val="101D42"/>
                 </a:solidFill>
                 <a:latin typeface="Noto Sans KR" pitchFamily="34" charset="0"/>
-                <a:ea typeface="Noto Sans KR" pitchFamily="34" charset="-127"/>
-                <a:cs typeface="Noto Sans KR" pitchFamily="34" charset="-120"/>
-              </a:rPr>
-              <a:t>마저</a:t>
+                <a:ea typeface="Noto Sans KR" pitchFamily="34" charset="-122"/>
+                <a:cs typeface="Noto Sans KR" pitchFamily="34" charset="-120"/>
+              </a:rPr>
+              <a:t>, </a:t>
+            </a:r>
+            <a:pPr algn="l" indent="0" marL="0">
+              <a:lnSpc>
+                <a:spcPts val="2600"/>
+              </a:lnSpc>
+              <a:buNone/>
+            </a:pPr>
+            <a:r>
+              <a:rPr lang="ko-KR" altLang="en-US" sz="1800" b="1" dirty="0">
+                <a:solidFill>
+                  <a:srgbClr val="101D42"/>
+                </a:solidFill>
+                <a:highlight>
+                  <a:srgbClr val="FFF0AD"/>
+                </a:highlight>
+                <a:latin typeface="Noto Sans KR" pitchFamily="34" charset="0"/>
+                <a:ea typeface="Noto Sans KR" pitchFamily="34" charset="-122"/>
+                <a:cs typeface="Noto Sans KR" pitchFamily="34" charset="-120"/>
+              </a:rPr>
+              <a:t>어떻게 생각하는 사람</a:t>
+            </a:r>
+            <a:pPr algn="l" indent="0" marL="0">
+              <a:lnSpc>
+                <a:spcPts val="2600"/>
+              </a:lnSpc>
+              <a:buNone/>
+            </a:pPr>
+            <a:r>
+              <a:rPr lang="ko-KR" altLang="en-US" sz="1800" dirty="0">
+                <a:solidFill>
+                  <a:srgbClr val="101D42"/>
+                </a:solidFill>
+                <a:latin typeface="Noto Sans KR" pitchFamily="34" charset="0"/>
+                <a:ea typeface="Noto Sans KR" pitchFamily="34" charset="-122"/>
+                <a:cs typeface="Noto Sans KR" pitchFamily="34" charset="-120"/>
+              </a:rPr>
+              <a:t>으로 자라야</a:t>
             </a:r>
             <a:endParaRPr lang="en-US" sz="1800" dirty="0"/>
           </a:p>
@@ -5313,10 +5430,10 @@
                   <a:srgbClr val="101D42"/>
                 </a:solidFill>
                 <a:latin typeface="Noto Sans KR" pitchFamily="34" charset="0"/>
-                <a:ea typeface="Noto Sans KR" pitchFamily="34" charset="-127"/>
-                <a:cs typeface="Noto Sans KR" pitchFamily="34" charset="-120"/>
-              </a:rPr>
-              <a:t>잃은 채 자랄까 두렵습니다.</a:t>
+                <a:ea typeface="Noto Sans KR" pitchFamily="34" charset="-122"/>
+                <a:cs typeface="Noto Sans KR" pitchFamily="34" charset="-120"/>
+              </a:rPr>
+              <a:t>할까요. 디지털 도구를 도입하는 일에도 이 질문이 먼저 놓여야 합니다.</a:t>
             </a:r>
             <a:endParaRPr lang="en-US" sz="1800" dirty="0"/>
           </a:p>
@@ -5324,14 +5441,14 @@
       </p:sp>
       <p:sp>
         <p:nvSpPr>
-          <p:cNvPr id="24" name="txt-2-4"/>
+          <p:cNvPr id="28" name="txt-2-8"/>
           <p:cNvSpPr txBox="1"/>
           <p:nvPr/>
         </p:nvSpPr>
         <p:spPr>
           <a:xfrm>
-            <a:off x="863346" y="4424426"/>
-            <a:ext cx="6174994" cy="418465"/>
+            <a:off x="381000" y="7637145"/>
+            <a:ext cx="6979285" cy="759460"/>
           </a:xfrm>
           <a:prstGeom prst="rect">
             <a:avLst/>
@@ -5345,35 +5462,112 @@
           <a:p>
             <a:pPr algn="l" indent="0" marL="0">
               <a:lnSpc>
-                <a:spcPts val="2535"/>
-              </a:lnSpc>
-              <a:buNone/>
-            </a:pPr>
-            <a:r>
-              <a:rPr lang="ko-KR" altLang="en-US" sz="1950" dirty="0">
-                <a:solidFill>
-                  <a:srgbClr val="15543C"/>
-                </a:solidFill>
-                <a:latin typeface="Noto Serif KR Black" pitchFamily="34" charset="0"/>
-                <a:ea typeface="Noto Serif KR Black" pitchFamily="34" charset="-127"/>
-                <a:cs typeface="Noto Serif KR Black" pitchFamily="34" charset="-120"/>
-              </a:rPr>
-              <a:t>정보가 많아도, 깊은 이해는 저절로 생기지 않습니다</a:t>
-            </a:r>
-            <a:endParaRPr lang="en-US" sz="1950" dirty="0"/>
+                <a:spcPts val="2600"/>
+              </a:lnSpc>
+              <a:buNone/>
+            </a:pPr>
+            <a:r>
+              <a:rPr lang="ko-KR" altLang="en-US" sz="1800" b="1" dirty="0">
+                <a:solidFill>
+                  <a:srgbClr val="101D42"/>
+                </a:solidFill>
+                <a:highlight>
+                  <a:srgbClr val="FFF0AD"/>
+                </a:highlight>
+                <a:latin typeface="Noto Sans KR" pitchFamily="34" charset="0"/>
+                <a:ea typeface="Noto Sans KR" pitchFamily="34" charset="-122"/>
+                <a:cs typeface="Noto Sans KR" pitchFamily="34" charset="-120"/>
+              </a:rPr>
+              <a:t>스스로 읽고 이해하며</a:t>
+            </a:r>
+            <a:pPr algn="l" indent="0" marL="0">
+              <a:lnSpc>
+                <a:spcPts val="2600"/>
+              </a:lnSpc>
+              <a:buNone/>
+            </a:pPr>
+            <a:r>
+              <a:rPr lang="ko-KR" altLang="en-US" sz="1800" dirty="0">
+                <a:solidFill>
+                  <a:srgbClr val="101D42"/>
+                </a:solidFill>
+                <a:latin typeface="Noto Sans KR" pitchFamily="34" charset="0"/>
+                <a:ea typeface="Noto Sans KR" pitchFamily="34" charset="-122"/>
+                <a:cs typeface="Noto Sans KR" pitchFamily="34" charset="-120"/>
+              </a:rPr>
+              <a:t>, </a:t>
+            </a:r>
+            <a:pPr algn="l" indent="0" marL="0">
+              <a:lnSpc>
+                <a:spcPts val="2600"/>
+              </a:lnSpc>
+              <a:buNone/>
+            </a:pPr>
+            <a:r>
+              <a:rPr lang="ko-KR" altLang="en-US" sz="1800" b="1" dirty="0">
+                <a:solidFill>
+                  <a:srgbClr val="101D42"/>
+                </a:solidFill>
+                <a:highlight>
+                  <a:srgbClr val="FFF0AD"/>
+                </a:highlight>
+                <a:latin typeface="Noto Sans KR" pitchFamily="34" charset="0"/>
+                <a:ea typeface="Noto Sans KR" pitchFamily="34" charset="-122"/>
+                <a:cs typeface="Noto Sans KR" pitchFamily="34" charset="-120"/>
+              </a:rPr>
+              <a:t>근거를 들어 말하는 힘</a:t>
+            </a:r>
+            <a:pPr algn="l" indent="0" marL="0">
+              <a:lnSpc>
+                <a:spcPts val="2600"/>
+              </a:lnSpc>
+              <a:buNone/>
+            </a:pPr>
+            <a:r>
+              <a:rPr lang="ko-KR" altLang="en-US" sz="1800" dirty="0">
+                <a:solidFill>
+                  <a:srgbClr val="101D42"/>
+                </a:solidFill>
+                <a:latin typeface="Noto Sans KR" pitchFamily="34" charset="0"/>
+                <a:ea typeface="Noto Sans KR" pitchFamily="34" charset="-122"/>
+                <a:cs typeface="Noto Sans KR" pitchFamily="34" charset="-120"/>
+              </a:rPr>
+              <a:t>을 꾸준히 길러 주어야</a:t>
+            </a:r>
+            <a:endParaRPr lang="en-US" sz="1800" dirty="0"/>
+          </a:p>
+          <a:p>
+            <a:pPr algn="l" indent="0" marL="0">
+              <a:lnSpc>
+                <a:spcPts val="2600"/>
+              </a:lnSpc>
+              <a:buNone/>
+            </a:pPr>
+            <a:r>
+              <a:rPr lang="ko-KR" altLang="en-US" sz="1800" dirty="0">
+                <a:solidFill>
+                  <a:srgbClr val="101D42"/>
+                </a:solidFill>
+                <a:latin typeface="Noto Sans KR" pitchFamily="34" charset="0"/>
+                <a:ea typeface="Noto Sans KR" pitchFamily="34" charset="-122"/>
+                <a:cs typeface="Noto Sans KR" pitchFamily="34" charset="-120"/>
+              </a:rPr>
+              <a:t>합니다. 이 절실함에서 부기가 시작됐습니다.</a:t>
+            </a:r>
+            <a:endParaRPr lang="en-US" sz="1800" dirty="0"/>
           </a:p>
         </p:txBody>
       </p:sp>
       <p:sp>
         <p:nvSpPr>
-          <p:cNvPr id="25" name="txt-2-5"/>
+          <p:cNvPr id="29" name="txt-2-9"/>
           <p:cNvSpPr txBox="1"/>
           <p:nvPr/>
         </p:nvSpPr>
         <p:spPr>
           <a:xfrm>
-            <a:off x="381000" y="4945253"/>
-            <a:ext cx="7140956" cy="1089660"/>
+            <a:off x="963295" y="9322562"/>
+            <a:ext cx="5632323" cy="715645"/>
           </a:xfrm>
           <a:prstGeom prst="rect">
             <a:avLst/>
@@ -5385,171 +5579,57 @@
           <a:bodyPr wrap="square" lIns="0" tIns="0" rIns="0" bIns="0" rtlCol="0" anchor="t"/>
           <a:lstStyle/>
           <a:p>
-            <a:pPr algn="l" indent="0" marL="0">
-              <a:lnSpc>
-                <a:spcPts val="2600"/>
-              </a:lnSpc>
-              <a:buNone/>
-            </a:pPr>
-            <a:r>
-              <a:rPr lang="ko-KR" altLang="en-US" sz="1800" b="1" dirty="0">
-                <a:solidFill>
-                  <a:srgbClr val="101D42"/>
-                </a:solidFill>
-                <a:highlight>
-                  <a:srgbClr val="FFF0AD"/>
-                </a:highlight>
-                <a:latin typeface="Noto Sans KR" pitchFamily="34" charset="0"/>
-                <a:ea typeface="Noto Sans KR" pitchFamily="34" charset="-127"/>
-                <a:cs typeface="Noto Sans KR" pitchFamily="34" charset="-120"/>
-              </a:rPr>
-              <a:t>문장의 뜻</a:t>
-            </a:r>
-            <a:pPr algn="l" indent="0" marL="0">
-              <a:lnSpc>
-                <a:spcPts val="2600"/>
-              </a:lnSpc>
-              <a:buNone/>
-            </a:pPr>
-            <a:r>
-              <a:rPr lang="ko-KR" altLang="en-US" sz="1800" dirty="0">
-                <a:solidFill>
-                  <a:srgbClr val="101D42"/>
-                </a:solidFill>
-                <a:latin typeface="Noto Sans KR" pitchFamily="34" charset="0"/>
-                <a:ea typeface="Noto Sans KR" pitchFamily="34" charset="-127"/>
-                <a:cs typeface="Noto Sans KR" pitchFamily="34" charset="-120"/>
-              </a:rPr>
-              <a:t>을 헤아리고, </a:t>
-            </a:r>
-            <a:pPr algn="l" indent="0" marL="0">
-              <a:lnSpc>
-                <a:spcPts val="2600"/>
-              </a:lnSpc>
-              <a:buNone/>
-            </a:pPr>
-            <a:r>
-              <a:rPr lang="ko-KR" altLang="en-US" sz="1800" b="1" dirty="0">
-                <a:solidFill>
-                  <a:srgbClr val="101D42"/>
-                </a:solidFill>
-                <a:highlight>
-                  <a:srgbClr val="FFF0AD"/>
-                </a:highlight>
-                <a:latin typeface="Noto Sans KR" pitchFamily="34" charset="0"/>
-                <a:ea typeface="Noto Sans KR" pitchFamily="34" charset="-127"/>
-                <a:cs typeface="Noto Sans KR" pitchFamily="34" charset="-120"/>
-              </a:rPr>
-              <a:t>앞뒤 내용을 연결</a:t>
-            </a:r>
-            <a:pPr algn="l" indent="0" marL="0">
-              <a:lnSpc>
-                <a:spcPts val="2600"/>
-              </a:lnSpc>
-              <a:buNone/>
-            </a:pPr>
-            <a:r>
-              <a:rPr lang="ko-KR" altLang="en-US" sz="1800" dirty="0">
-                <a:solidFill>
-                  <a:srgbClr val="101D42"/>
-                </a:solidFill>
-                <a:latin typeface="Noto Sans KR" pitchFamily="34" charset="0"/>
-                <a:ea typeface="Noto Sans KR" pitchFamily="34" charset="-127"/>
-                <a:cs typeface="Noto Sans KR" pitchFamily="34" charset="-120"/>
-              </a:rPr>
-              <a:t>하고, </a:t>
-            </a:r>
-            <a:pPr algn="l" indent="0" marL="0">
-              <a:lnSpc>
-                <a:spcPts val="2600"/>
-              </a:lnSpc>
-              <a:buNone/>
-            </a:pPr>
-            <a:r>
-              <a:rPr lang="ko-KR" altLang="en-US" sz="1800" b="1" dirty="0">
-                <a:solidFill>
-                  <a:srgbClr val="101D42"/>
-                </a:solidFill>
-                <a:highlight>
-                  <a:srgbClr val="FFF0AD"/>
-                </a:highlight>
-                <a:latin typeface="Noto Sans KR" pitchFamily="34" charset="0"/>
-                <a:ea typeface="Noto Sans KR" pitchFamily="34" charset="-127"/>
-                <a:cs typeface="Noto Sans KR" pitchFamily="34" charset="-120"/>
-              </a:rPr>
-              <a:t>오래 생각하는 시간</a:t>
-            </a:r>
-            <a:pPr algn="l" indent="0" marL="0">
-              <a:lnSpc>
-                <a:spcPts val="2600"/>
-              </a:lnSpc>
-              <a:buNone/>
-            </a:pPr>
-            <a:r>
-              <a:rPr lang="ko-KR" altLang="en-US" sz="1800" dirty="0">
-                <a:solidFill>
-                  <a:srgbClr val="101D42"/>
-                </a:solidFill>
-                <a:latin typeface="Noto Sans KR" pitchFamily="34" charset="0"/>
-                <a:ea typeface="Noto Sans KR" pitchFamily="34" charset="-127"/>
-                <a:cs typeface="Noto Sans KR" pitchFamily="34" charset="-120"/>
-              </a:rPr>
-              <a:t>은 따로</a:t>
-            </a:r>
-            <a:endParaRPr lang="en-US" sz="1800" dirty="0"/>
-          </a:p>
-          <a:p>
-            <a:pPr algn="l" indent="0" marL="0">
-              <a:lnSpc>
-                <a:spcPts val="2600"/>
-              </a:lnSpc>
-              <a:buNone/>
-            </a:pPr>
-            <a:r>
-              <a:rPr lang="ko-KR" altLang="en-US" sz="1800" dirty="0">
-                <a:solidFill>
-                  <a:srgbClr val="101D42"/>
-                </a:solidFill>
-                <a:latin typeface="Noto Sans KR" pitchFamily="34" charset="0"/>
-                <a:ea typeface="Noto Sans KR" pitchFamily="34" charset="-127"/>
-                <a:cs typeface="Noto Sans KR" pitchFamily="34" charset="-120"/>
-              </a:rPr>
-              <a:t>필요합니다. 짧은 영상과 빠른 답에 익숙해지는 동안, 학생 안에 무엇이</a:t>
-            </a:r>
-            <a:endParaRPr lang="en-US" sz="1800" dirty="0"/>
-          </a:p>
-          <a:p>
-            <a:pPr algn="l" indent="0" marL="0">
-              <a:lnSpc>
-                <a:spcPts val="2600"/>
-              </a:lnSpc>
-              <a:buNone/>
-            </a:pPr>
-            <a:r>
-              <a:rPr lang="ko-KR" altLang="en-US" sz="1800" dirty="0">
-                <a:solidFill>
-                  <a:srgbClr val="101D42"/>
-                </a:solidFill>
-                <a:latin typeface="Noto Sans KR" pitchFamily="34" charset="0"/>
-                <a:ea typeface="Noto Sans KR" pitchFamily="34" charset="-127"/>
-                <a:cs typeface="Noto Sans KR" pitchFamily="34" charset="-120"/>
-              </a:rPr>
-              <a:t>남고 있는지 묻고 싶습니다.</a:t>
-            </a:r>
-            <a:endParaRPr lang="en-US" sz="1800" dirty="0"/>
+            <a:pPr algn="ctr" indent="0" marL="0">
+              <a:lnSpc>
+                <a:spcPts val="2450"/>
+              </a:lnSpc>
+              <a:buNone/>
+            </a:pPr>
+            <a:r>
+              <a:rPr lang="ko-KR" altLang="en-US" sz="1750" dirty="0">
+                <a:solidFill>
+                  <a:srgbClr val="101D42"/>
+                </a:solidFill>
+                <a:latin typeface="Noto Serif KR Black" pitchFamily="34" charset="0"/>
+                <a:ea typeface="Noto Serif KR Black" pitchFamily="34" charset="-122"/>
+                <a:cs typeface="Noto Serif KR Black" pitchFamily="34" charset="-120"/>
+              </a:rPr>
+              <a:t>학생이 직접 읽고 묻고 정리한 생각은</a:t>
+            </a:r>
+            <a:endParaRPr lang="en-US" sz="1750" dirty="0"/>
+          </a:p>
+          <a:p>
+            <a:pPr algn="ctr" indent="0" marL="0">
+              <a:lnSpc>
+                <a:spcPts val="2450"/>
+              </a:lnSpc>
+              <a:buNone/>
+            </a:pPr>
+            <a:r>
+              <a:rPr lang="ko-KR" altLang="en-US" sz="1750" dirty="0">
+                <a:solidFill>
+                  <a:srgbClr val="101D42"/>
+                </a:solidFill>
+                <a:latin typeface="Noto Serif KR Black" pitchFamily="34" charset="0"/>
+                <a:ea typeface="Noto Serif KR Black" pitchFamily="34" charset="-122"/>
+                <a:cs typeface="Noto Serif KR Black" pitchFamily="34" charset="-120"/>
+              </a:rPr>
+              <a:t>다음 글을 이해하고 판단할 바탕이 됩니다.</a:t>
+            </a:r>
+            <a:endParaRPr lang="en-US" sz="1750" dirty="0"/>
           </a:p>
         </p:txBody>
       </p:sp>
       <p:sp>
         <p:nvSpPr>
-          <p:cNvPr id="26" name="txt-2-6"/>
+          <p:cNvPr id="30" name="txt-2-10"/>
           <p:cNvSpPr txBox="1"/>
           <p:nvPr/>
         </p:nvSpPr>
         <p:spPr>
           <a:xfrm>
-            <a:off x="863346" y="6341999"/>
-            <a:ext cx="3579368" cy="418465"/>
+            <a:off x="3504565" y="10362692"/>
+            <a:ext cx="424815" cy="214630"/>
           </a:xfrm>
           <a:prstGeom prst="rect">
             <a:avLst/>
@@ -5563,402 +5643,6 @@
           <a:p>
             <a:pPr algn="l" indent="0" marL="0">
               <a:lnSpc>
-                <a:spcPts val="2535"/>
-              </a:lnSpc>
-              <a:buNone/>
-            </a:pPr>
-            <a:r>
-              <a:rPr lang="ko-KR" altLang="en-US" sz="1950" dirty="0">
-                <a:solidFill>
-                  <a:srgbClr val="15543C"/>
-                </a:solidFill>
-                <a:latin typeface="Noto Serif KR Black" pitchFamily="34" charset="0"/>
-                <a:ea typeface="Noto Serif KR Black" pitchFamily="34" charset="-127"/>
-                <a:cs typeface="Noto Serif KR Black" pitchFamily="34" charset="-120"/>
-              </a:rPr>
-              <a:t>학교가 먼저 고민해야 할 질문</a:t>
-            </a:r>
-            <a:endParaRPr lang="en-US" sz="1950" dirty="0"/>
-          </a:p>
-        </p:txBody>
-      </p:sp>
-      <p:sp>
-        <p:nvSpPr>
-          <p:cNvPr id="27" name="txt-2-7"/>
-          <p:cNvSpPr txBox="1"/>
-          <p:nvPr/>
-        </p:nvSpPr>
-        <p:spPr>
-          <a:xfrm>
-            <a:off x="381000" y="6837045"/>
-            <a:ext cx="7140956" cy="759460"/>
-          </a:xfrm>
-          <a:prstGeom prst="rect">
-            <a:avLst/>
-          </a:prstGeom>
-          <a:noFill/>
-          <a:ln/>
-        </p:spPr>
-        <p:txBody>
-          <a:bodyPr wrap="square" lIns="0" tIns="0" rIns="0" bIns="0" rtlCol="0" anchor="t"/>
-          <a:lstStyle/>
-          <a:p>
-            <a:pPr algn="l" indent="0" marL="0">
-              <a:lnSpc>
-                <a:spcPts val="2600"/>
-              </a:lnSpc>
-              <a:buNone/>
-            </a:pPr>
-            <a:r>
-              <a:rPr lang="ko-KR" altLang="en-US" sz="1800" dirty="0">
-                <a:solidFill>
-                  <a:srgbClr val="101D42"/>
-                </a:solidFill>
-                <a:latin typeface="Noto Sans KR" pitchFamily="34" charset="0"/>
-                <a:ea typeface="Noto Sans KR" pitchFamily="34" charset="-127"/>
-                <a:cs typeface="Noto Sans KR" pitchFamily="34" charset="-120"/>
-              </a:rPr>
-              <a:t>학생은 </a:t>
-            </a:r>
-            <a:pPr algn="l" indent="0" marL="0">
-              <a:lnSpc>
-                <a:spcPts val="2600"/>
-              </a:lnSpc>
-              <a:buNone/>
-            </a:pPr>
-            <a:r>
-              <a:rPr lang="ko-KR" altLang="en-US" sz="1800" b="1" dirty="0">
-                <a:solidFill>
-                  <a:srgbClr val="101D42"/>
-                </a:solidFill>
-                <a:highlight>
-                  <a:srgbClr val="FFF0AD"/>
-                </a:highlight>
-                <a:latin typeface="Noto Sans KR" pitchFamily="34" charset="0"/>
-                <a:ea typeface="Noto Sans KR" pitchFamily="34" charset="-127"/>
-                <a:cs typeface="Noto Sans KR" pitchFamily="34" charset="-120"/>
-              </a:rPr>
-              <a:t>무엇을 알고</a:t>
-            </a:r>
-            <a:pPr algn="l" indent="0" marL="0">
-              <a:lnSpc>
-                <a:spcPts val="2600"/>
-              </a:lnSpc>
-              <a:buNone/>
-            </a:pPr>
-            <a:r>
-              <a:rPr lang="ko-KR" altLang="en-US" sz="1800" dirty="0">
-                <a:solidFill>
-                  <a:srgbClr val="101D42"/>
-                </a:solidFill>
-                <a:latin typeface="Noto Sans KR" pitchFamily="34" charset="0"/>
-                <a:ea typeface="Noto Sans KR" pitchFamily="34" charset="-127"/>
-                <a:cs typeface="Noto Sans KR" pitchFamily="34" charset="-120"/>
-              </a:rPr>
-              <a:t>, </a:t>
-            </a:r>
-            <a:pPr algn="l" indent="0" marL="0">
-              <a:lnSpc>
-                <a:spcPts val="2600"/>
-              </a:lnSpc>
-              <a:buNone/>
-            </a:pPr>
-            <a:r>
-              <a:rPr lang="ko-KR" altLang="en-US" sz="1800" b="1" dirty="0">
-                <a:solidFill>
-                  <a:srgbClr val="101D42"/>
-                </a:solidFill>
-                <a:highlight>
-                  <a:srgbClr val="FFF0AD"/>
-                </a:highlight>
-                <a:latin typeface="Noto Sans KR" pitchFamily="34" charset="0"/>
-                <a:ea typeface="Noto Sans KR" pitchFamily="34" charset="-127"/>
-                <a:cs typeface="Noto Sans KR" pitchFamily="34" charset="-120"/>
-              </a:rPr>
-              <a:t>어떤 경험을 쌓고</a:t>
-            </a:r>
-            <a:pPr algn="l" indent="0" marL="0">
-              <a:lnSpc>
-                <a:spcPts val="2600"/>
-              </a:lnSpc>
-              <a:buNone/>
-            </a:pPr>
-            <a:r>
-              <a:rPr lang="ko-KR" altLang="en-US" sz="1800" dirty="0">
-                <a:solidFill>
-                  <a:srgbClr val="101D42"/>
-                </a:solidFill>
-                <a:latin typeface="Noto Sans KR" pitchFamily="34" charset="0"/>
-                <a:ea typeface="Noto Sans KR" pitchFamily="34" charset="-127"/>
-                <a:cs typeface="Noto Sans KR" pitchFamily="34" charset="-120"/>
-              </a:rPr>
-              <a:t>, </a:t>
-            </a:r>
-            <a:pPr algn="l" indent="0" marL="0">
-              <a:lnSpc>
-                <a:spcPts val="2600"/>
-              </a:lnSpc>
-              <a:buNone/>
-            </a:pPr>
-            <a:r>
-              <a:rPr lang="ko-KR" altLang="en-US" sz="1800" b="1" dirty="0">
-                <a:solidFill>
-                  <a:srgbClr val="101D42"/>
-                </a:solidFill>
-                <a:highlight>
-                  <a:srgbClr val="FFF0AD"/>
-                </a:highlight>
-                <a:latin typeface="Noto Sans KR" pitchFamily="34" charset="0"/>
-                <a:ea typeface="Noto Sans KR" pitchFamily="34" charset="-127"/>
-                <a:cs typeface="Noto Sans KR" pitchFamily="34" charset="-120"/>
-              </a:rPr>
-              <a:t>어떻게 생각하는 사람</a:t>
-            </a:r>
-            <a:pPr algn="l" indent="0" marL="0">
-              <a:lnSpc>
-                <a:spcPts val="2600"/>
-              </a:lnSpc>
-              <a:buNone/>
-            </a:pPr>
-            <a:r>
-              <a:rPr lang="ko-KR" altLang="en-US" sz="1800" dirty="0">
-                <a:solidFill>
-                  <a:srgbClr val="101D42"/>
-                </a:solidFill>
-                <a:latin typeface="Noto Sans KR" pitchFamily="34" charset="0"/>
-                <a:ea typeface="Noto Sans KR" pitchFamily="34" charset="-127"/>
-                <a:cs typeface="Noto Sans KR" pitchFamily="34" charset="-120"/>
-              </a:rPr>
-              <a:t>으로 자라야</a:t>
-            </a:r>
-            <a:endParaRPr lang="en-US" sz="1800" dirty="0"/>
-          </a:p>
-          <a:p>
-            <a:pPr algn="l" indent="0" marL="0">
-              <a:lnSpc>
-                <a:spcPts val="2600"/>
-              </a:lnSpc>
-              <a:buNone/>
-            </a:pPr>
-            <a:r>
-              <a:rPr lang="ko-KR" altLang="en-US" sz="1800" dirty="0">
-                <a:solidFill>
-                  <a:srgbClr val="101D42"/>
-                </a:solidFill>
-                <a:latin typeface="Noto Sans KR" pitchFamily="34" charset="0"/>
-                <a:ea typeface="Noto Sans KR" pitchFamily="34" charset="-127"/>
-                <a:cs typeface="Noto Sans KR" pitchFamily="34" charset="-120"/>
-              </a:rPr>
-              <a:t>할까요. 디지털 도구를 도입하는 일에도 이 질문이 먼저 놓여야 합니다.</a:t>
-            </a:r>
-            <a:endParaRPr lang="en-US" sz="1800" dirty="0"/>
-          </a:p>
-        </p:txBody>
-      </p:sp>
-      <p:sp>
-        <p:nvSpPr>
-          <p:cNvPr id="28" name="txt-2-8"/>
-          <p:cNvSpPr txBox="1"/>
-          <p:nvPr/>
-        </p:nvSpPr>
-        <p:spPr>
-          <a:xfrm>
-            <a:off x="381000" y="7637145"/>
-            <a:ext cx="6979285" cy="759460"/>
-          </a:xfrm>
-          <a:prstGeom prst="rect">
-            <a:avLst/>
-          </a:prstGeom>
-          <a:noFill/>
-          <a:ln/>
-        </p:spPr>
-        <p:txBody>
-          <a:bodyPr wrap="square" lIns="0" tIns="0" rIns="0" bIns="0" rtlCol="0" anchor="t"/>
-          <a:lstStyle/>
-          <a:p>
-            <a:pPr algn="l" indent="0" marL="0">
-              <a:lnSpc>
-                <a:spcPts val="2600"/>
-              </a:lnSpc>
-              <a:buNone/>
-            </a:pPr>
-            <a:r>
-              <a:rPr lang="ko-KR" altLang="en-US" sz="1800" b="1" dirty="0">
-                <a:solidFill>
-                  <a:srgbClr val="101D42"/>
-                </a:solidFill>
-                <a:highlight>
-                  <a:srgbClr val="FFF0AD"/>
-                </a:highlight>
-                <a:latin typeface="Noto Sans KR" pitchFamily="34" charset="0"/>
-                <a:ea typeface="Noto Sans KR" pitchFamily="34" charset="-127"/>
-                <a:cs typeface="Noto Sans KR" pitchFamily="34" charset="-120"/>
-              </a:rPr>
-              <a:t>스스로 읽고 이해하며</a:t>
-            </a:r>
-            <a:pPr algn="l" indent="0" marL="0">
-              <a:lnSpc>
-                <a:spcPts val="2600"/>
-              </a:lnSpc>
-              <a:buNone/>
-            </a:pPr>
-            <a:r>
-              <a:rPr lang="ko-KR" altLang="en-US" sz="1800" dirty="0">
-                <a:solidFill>
-                  <a:srgbClr val="101D42"/>
-                </a:solidFill>
-                <a:latin typeface="Noto Sans KR" pitchFamily="34" charset="0"/>
-                <a:ea typeface="Noto Sans KR" pitchFamily="34" charset="-127"/>
-                <a:cs typeface="Noto Sans KR" pitchFamily="34" charset="-120"/>
-              </a:rPr>
-              <a:t>, </a:t>
-            </a:r>
-            <a:pPr algn="l" indent="0" marL="0">
-              <a:lnSpc>
-                <a:spcPts val="2600"/>
-              </a:lnSpc>
-              <a:buNone/>
-            </a:pPr>
-            <a:r>
-              <a:rPr lang="ko-KR" altLang="en-US" sz="1800" b="1" dirty="0">
-                <a:solidFill>
-                  <a:srgbClr val="101D42"/>
-                </a:solidFill>
-                <a:highlight>
-                  <a:srgbClr val="FFF0AD"/>
-                </a:highlight>
-                <a:latin typeface="Noto Sans KR" pitchFamily="34" charset="0"/>
-                <a:ea typeface="Noto Sans KR" pitchFamily="34" charset="-127"/>
-                <a:cs typeface="Noto Sans KR" pitchFamily="34" charset="-120"/>
-              </a:rPr>
-              <a:t>근거를 들어 말하는 힘</a:t>
-            </a:r>
-            <a:pPr algn="l" indent="0" marL="0">
-              <a:lnSpc>
-                <a:spcPts val="2600"/>
-              </a:lnSpc>
-              <a:buNone/>
-            </a:pPr>
-            <a:r>
-              <a:rPr lang="ko-KR" altLang="en-US" sz="1800" dirty="0">
-                <a:solidFill>
-                  <a:srgbClr val="101D42"/>
-                </a:solidFill>
-                <a:latin typeface="Noto Sans KR" pitchFamily="34" charset="0"/>
-                <a:ea typeface="Noto Sans KR" pitchFamily="34" charset="-127"/>
-                <a:cs typeface="Noto Sans KR" pitchFamily="34" charset="-120"/>
-              </a:rPr>
-              <a:t>을 꾸준히 길러 주어야</a:t>
-            </a:r>
-            <a:endParaRPr lang="en-US" sz="1800" dirty="0"/>
-          </a:p>
-          <a:p>
-            <a:pPr algn="l" indent="0" marL="0">
-              <a:lnSpc>
-                <a:spcPts val="2600"/>
-              </a:lnSpc>
-              <a:buNone/>
-            </a:pPr>
-            <a:r>
-              <a:rPr lang="ko-KR" altLang="en-US" sz="1800" dirty="0">
-                <a:solidFill>
-                  <a:srgbClr val="101D42"/>
-                </a:solidFill>
-                <a:latin typeface="Noto Sans KR" pitchFamily="34" charset="0"/>
-                <a:ea typeface="Noto Sans KR" pitchFamily="34" charset="-127"/>
-                <a:cs typeface="Noto Sans KR" pitchFamily="34" charset="-120"/>
-              </a:rPr>
-              <a:t>합니다. 이 절실함에서 부기가 시작됐습니다.</a:t>
-            </a:r>
-            <a:endParaRPr lang="en-US" sz="1800" dirty="0"/>
-          </a:p>
-        </p:txBody>
-      </p:sp>
-      <p:sp>
-        <p:nvSpPr>
-          <p:cNvPr id="29" name="txt-2-9"/>
-          <p:cNvSpPr txBox="1"/>
-          <p:nvPr/>
-        </p:nvSpPr>
-        <p:spPr>
-          <a:xfrm>
-            <a:off x="963295" y="9322562"/>
-            <a:ext cx="5632323" cy="715645"/>
-          </a:xfrm>
-          <a:prstGeom prst="rect">
-            <a:avLst/>
-          </a:prstGeom>
-          <a:noFill/>
-          <a:ln/>
-        </p:spPr>
-        <p:txBody>
-          <a:bodyPr wrap="square" lIns="0" tIns="0" rIns="0" bIns="0" rtlCol="0" anchor="t"/>
-          <a:lstStyle/>
-          <a:p>
-            <a:pPr algn="ctr" indent="0" marL="0">
-              <a:lnSpc>
-                <a:spcPts val="2450"/>
-              </a:lnSpc>
-              <a:buNone/>
-            </a:pPr>
-            <a:r>
-              <a:rPr lang="ko-KR" altLang="en-US" sz="1750" dirty="0">
-                <a:solidFill>
-                  <a:srgbClr val="101D42"/>
-                </a:solidFill>
-                <a:latin typeface="Noto Serif KR Black" pitchFamily="34" charset="0"/>
-                <a:ea typeface="Noto Serif KR Black" pitchFamily="34" charset="-127"/>
-                <a:cs typeface="Noto Serif KR Black" pitchFamily="34" charset="-120"/>
-              </a:rPr>
-              <a:t>스마트폰 속 세상에 빠져 있는 아이들이</a:t>
-            </a:r>
-            <a:endParaRPr lang="en-US" sz="1750" dirty="0"/>
-          </a:p>
-          <a:p>
-            <a:pPr algn="ctr" indent="0" marL="0">
-              <a:lnSpc>
-                <a:spcPts val="2450"/>
-              </a:lnSpc>
-              <a:buNone/>
-            </a:pPr>
-            <a:r>
-              <a:rPr lang="ko-KR" altLang="en-US" sz="1750" dirty="0">
-                <a:solidFill>
-                  <a:srgbClr val="15543C"/>
-                </a:solidFill>
-                <a:latin typeface="Noto Serif KR Black" pitchFamily="34" charset="0"/>
-                <a:ea typeface="Noto Serif KR Black" pitchFamily="34" charset="-127"/>
-                <a:cs typeface="Noto Serif KR Black" pitchFamily="34" charset="-120"/>
-              </a:rPr>
-              <a:t>세상을 깊이있게 이해하는 아이로 자라고 있을까요?</a:t>
-            </a:r>
-            <a:endParaRPr lang="en-US" sz="1750" dirty="0"/>
-          </a:p>
-        </p:txBody>
-      </p:sp>
-      <p:sp>
-        <p:nvSpPr>
-          <p:cNvPr id="30" name="txt-2-10"/>
-          <p:cNvSpPr txBox="1"/>
-          <p:nvPr/>
-        </p:nvSpPr>
-        <p:spPr>
-          <a:xfrm>
-            <a:off x="3504565" y="10362692"/>
-            <a:ext cx="424815" cy="214630"/>
-          </a:xfrm>
-          <a:prstGeom prst="rect">
-            <a:avLst/>
-          </a:prstGeom>
-          <a:noFill/>
-          <a:ln/>
-        </p:spPr>
-        <p:txBody>
-          <a:bodyPr wrap="square" lIns="0" tIns="0" rIns="0" bIns="0" rtlCol="0" anchor="t"/>
-          <a:lstStyle/>
-          <a:p>
-            <a:pPr algn="l" indent="0" marL="0">
-              <a:lnSpc>
                 <a:spcPts val="1300"/>
               </a:lnSpc>
               <a:buNone/>
@@ -5969,7 +5653,7 @@
                   <a:srgbClr val="101D42"/>
                 </a:solidFill>
                 <a:latin typeface="Noto Sans KR" pitchFamily="34" charset="0"/>
-                <a:ea typeface="Noto Sans KR" pitchFamily="34" charset="-127"/>
+                <a:ea typeface="Noto Sans KR" pitchFamily="34" charset="-122"/>
                 <a:cs typeface="Noto Sans KR" pitchFamily="34" charset="-120"/>
               </a:rPr>
               <a:t>1 / 4</a:t>
@@ -6864,7 +6548,7 @@
                   <a:srgbClr val="101D42"/>
                 </a:solidFill>
                 <a:latin typeface="Noto Serif KR Black" pitchFamily="34" charset="0"/>
-                <a:ea typeface="Noto Serif KR Black" pitchFamily="34" charset="-127"/>
+                <a:ea typeface="Noto Serif KR Black" pitchFamily="34" charset="-122"/>
                 <a:cs typeface="Noto Serif KR Black" pitchFamily="34" charset="-120"/>
               </a:rPr>
               <a:t>독서가 만드는 이해의 바탕</a:t>
@@ -6906,7 +6590,7 @@
                   <a:srgbClr val="101D42"/>
                 </a:solidFill>
                 <a:latin typeface="Noto Serif KR Black" pitchFamily="34" charset="0"/>
-                <a:ea typeface="Noto Serif KR Black" pitchFamily="34" charset="-127"/>
+                <a:ea typeface="Noto Serif KR Black" pitchFamily="34" charset="-122"/>
                 <a:cs typeface="Noto Serif KR Black" pitchFamily="34" charset="-120"/>
               </a:rPr>
               <a:t>아는 것이 쌓여야,</a:t>
@@ -6926,7 +6610,7 @@
                   <a:srgbClr val="15543C"/>
                 </a:solidFill>
                 <a:latin typeface="Noto Serif KR Black" pitchFamily="34" charset="0"/>
-                <a:ea typeface="Noto Serif KR Black" pitchFamily="34" charset="-127"/>
+                <a:ea typeface="Noto Serif KR Black" pitchFamily="34" charset="-122"/>
                 <a:cs typeface="Noto Serif KR Black" pitchFamily="34" charset="-120"/>
               </a:rPr>
               <a:t>새 지식이 연결됩니다.</a:t>
@@ -6968,7 +6652,7 @@
                   <a:srgbClr val="15543C"/>
                 </a:solidFill>
                 <a:latin typeface="Noto Serif KR Black" pitchFamily="34" charset="0"/>
-                <a:ea typeface="Noto Serif KR Black" pitchFamily="34" charset="-127"/>
+                <a:ea typeface="Noto Serif KR Black" pitchFamily="34" charset="-122"/>
                 <a:cs typeface="Noto Serif KR Black" pitchFamily="34" charset="-120"/>
               </a:rPr>
               <a:t>어휘와 간접 경험이 이해의 바탕을 넓힙니다</a:t>
@@ -7010,7 +6694,7 @@
                   <a:srgbClr val="101D42"/>
                 </a:solidFill>
                 <a:latin typeface="Noto Sans KR" pitchFamily="34" charset="0"/>
-                <a:ea typeface="Noto Sans KR" pitchFamily="34" charset="-127"/>
+                <a:ea typeface="Noto Sans KR" pitchFamily="34" charset="-122"/>
                 <a:cs typeface="Noto Sans KR" pitchFamily="34" charset="-120"/>
               </a:rPr>
               <a:t>이야기에서는 </a:t>
@@ -7030,7 +6714,7 @@
                   <a:srgbClr val="FFF0AD"/>
                 </a:highlight>
                 <a:latin typeface="Noto Sans KR" pitchFamily="34" charset="0"/>
-                <a:ea typeface="Noto Sans KR" pitchFamily="34" charset="-127"/>
+                <a:ea typeface="Noto Sans KR" pitchFamily="34" charset="-122"/>
                 <a:cs typeface="Noto Sans KR" pitchFamily="34" charset="-120"/>
               </a:rPr>
               <a:t>다른 삶과 선택</a:t>
@@ -7047,7 +6731,7 @@
                   <a:srgbClr val="101D42"/>
                 </a:solidFill>
                 <a:latin typeface="Noto Sans KR" pitchFamily="34" charset="0"/>
-                <a:ea typeface="Noto Sans KR" pitchFamily="34" charset="-127"/>
+                <a:ea typeface="Noto Sans KR" pitchFamily="34" charset="-122"/>
                 <a:cs typeface="Noto Sans KR" pitchFamily="34" charset="-120"/>
               </a:rPr>
               <a:t>을, 설명하는 글에서는 세상의 원리를,</a:t>
@@ -7067,7 +6751,7 @@
                   <a:srgbClr val="101D42"/>
                 </a:solidFill>
                 <a:latin typeface="Noto Sans KR" pitchFamily="34" charset="0"/>
-                <a:ea typeface="Noto Sans KR" pitchFamily="34" charset="-127"/>
+                <a:ea typeface="Noto Sans KR" pitchFamily="34" charset="-122"/>
                 <a:cs typeface="Noto Sans KR" pitchFamily="34" charset="-120"/>
               </a:rPr>
               <a:t>에세이에서는 </a:t>
@@ -7087,7 +6771,7 @@
                   <a:srgbClr val="FFF0AD"/>
                 </a:highlight>
                 <a:latin typeface="Noto Sans KR" pitchFamily="34" charset="0"/>
-                <a:ea typeface="Noto Sans KR" pitchFamily="34" charset="-127"/>
+                <a:ea typeface="Noto Sans KR" pitchFamily="34" charset="-122"/>
                 <a:cs typeface="Noto Sans KR" pitchFamily="34" charset="-120"/>
               </a:rPr>
               <a:t>다른 사람의 생각</a:t>
@@ -7104,7 +6788,7 @@
                   <a:srgbClr val="101D42"/>
                 </a:solidFill>
                 <a:latin typeface="Noto Sans KR" pitchFamily="34" charset="0"/>
-                <a:ea typeface="Noto Sans KR" pitchFamily="34" charset="-127"/>
+                <a:ea typeface="Noto Sans KR" pitchFamily="34" charset="-122"/>
                 <a:cs typeface="Noto Sans KR" pitchFamily="34" charset="-120"/>
               </a:rPr>
               <a:t>을 만납니다. 문맥 속에서 </a:t>
@@ -7124,7 +6808,7 @@
                   <a:srgbClr val="FFF0AD"/>
                 </a:highlight>
                 <a:latin typeface="Noto Sans KR" pitchFamily="34" charset="0"/>
-                <a:ea typeface="Noto Sans KR" pitchFamily="34" charset="-127"/>
+                <a:ea typeface="Noto Sans KR" pitchFamily="34" charset="-122"/>
                 <a:cs typeface="Noto Sans KR" pitchFamily="34" charset="-120"/>
               </a:rPr>
               <a:t>낱말</a:t>
@@ -7141,7 +6825,7 @@
                   <a:srgbClr val="101D42"/>
                 </a:solidFill>
                 <a:latin typeface="Noto Sans KR" pitchFamily="34" charset="0"/>
-                <a:ea typeface="Noto Sans KR" pitchFamily="34" charset="-127"/>
+                <a:ea typeface="Noto Sans KR" pitchFamily="34" charset="-122"/>
                 <a:cs typeface="Noto Sans KR" pitchFamily="34" charset="-120"/>
               </a:rPr>
               <a:t>을 익히고,</a:t>
@@ -7161,7 +6845,7 @@
                   <a:srgbClr val="101D42"/>
                 </a:solidFill>
                 <a:latin typeface="Noto Sans KR" pitchFamily="34" charset="0"/>
-                <a:ea typeface="Noto Sans KR" pitchFamily="34" charset="-127"/>
+                <a:ea typeface="Noto Sans KR" pitchFamily="34" charset="-122"/>
                 <a:cs typeface="Noto Sans KR" pitchFamily="34" charset="-120"/>
               </a:rPr>
               <a:t>다른 생각을 따라 읽으며 </a:t>
@@ -7181,7 +6865,7 @@
                   <a:srgbClr val="FFF0AD"/>
                 </a:highlight>
                 <a:latin typeface="Noto Sans KR" pitchFamily="34" charset="0"/>
-                <a:ea typeface="Noto Sans KR" pitchFamily="34" charset="-127"/>
+                <a:ea typeface="Noto Sans KR" pitchFamily="34" charset="-122"/>
                 <a:cs typeface="Noto Sans KR" pitchFamily="34" charset="-120"/>
               </a:rPr>
               <a:t>자기 경험</a:t>
@@ -7198,7 +6882,7 @@
                   <a:srgbClr val="101D42"/>
                 </a:solidFill>
                 <a:latin typeface="Noto Sans KR" pitchFamily="34" charset="0"/>
-                <a:ea typeface="Noto Sans KR" pitchFamily="34" charset="-127"/>
+                <a:ea typeface="Noto Sans KR" pitchFamily="34" charset="-122"/>
                 <a:cs typeface="Noto Sans KR" pitchFamily="34" charset="-120"/>
               </a:rPr>
               <a:t>과 비교합니다.</a:t>
@@ -7240,7 +6924,7 @@
                   <a:srgbClr val="15543C"/>
                 </a:solidFill>
                 <a:latin typeface="Noto Serif KR Black" pitchFamily="34" charset="0"/>
-                <a:ea typeface="Noto Serif KR Black" pitchFamily="34" charset="-127"/>
+                <a:ea typeface="Noto Serif KR Black" pitchFamily="34" charset="-122"/>
                 <a:cs typeface="Noto Serif KR Black" pitchFamily="34" charset="-120"/>
               </a:rPr>
               <a:t>스키마는 경험과 지식이 조직된 ‘이해의 틀’입니다</a:t>
@@ -7282,7 +6966,7 @@
                   <a:srgbClr val="101D42"/>
                 </a:solidFill>
                 <a:latin typeface="Noto Sans KR" pitchFamily="34" charset="0"/>
-                <a:ea typeface="Noto Sans KR" pitchFamily="34" charset="-127"/>
+                <a:ea typeface="Noto Sans KR" pitchFamily="34" charset="-122"/>
                 <a:cs typeface="Noto Sans KR" pitchFamily="34" charset="-120"/>
               </a:rPr>
               <a:t>새로운 내용은 </a:t>
@@ -7302,7 +6986,7 @@
                   <a:srgbClr val="FFF0AD"/>
                 </a:highlight>
                 <a:latin typeface="Noto Sans KR" pitchFamily="34" charset="0"/>
-                <a:ea typeface="Noto Sans KR" pitchFamily="34" charset="-127"/>
+                <a:ea typeface="Noto Sans KR" pitchFamily="34" charset="-122"/>
                 <a:cs typeface="Noto Sans KR" pitchFamily="34" charset="-120"/>
               </a:rPr>
               <a:t>이미 알고 있는 개념과 경험</a:t>
@@ -7319,7 +7003,7 @@
                   <a:srgbClr val="101D42"/>
                 </a:solidFill>
                 <a:latin typeface="Noto Sans KR" pitchFamily="34" charset="0"/>
-                <a:ea typeface="Noto Sans KR" pitchFamily="34" charset="-127"/>
+                <a:ea typeface="Noto Sans KR" pitchFamily="34" charset="-122"/>
                 <a:cs typeface="Noto Sans KR" pitchFamily="34" charset="-120"/>
               </a:rPr>
               <a:t>에 연결될 때 더 잘 이해할 수</a:t>
@@ -7339,7 +7023,7 @@
                   <a:srgbClr val="101D42"/>
                 </a:solidFill>
                 <a:latin typeface="Noto Sans KR" pitchFamily="34" charset="0"/>
-                <a:ea typeface="Noto Sans KR" pitchFamily="34" charset="-127"/>
+                <a:ea typeface="Noto Sans KR" pitchFamily="34" charset="-122"/>
                 <a:cs typeface="Noto Sans KR" pitchFamily="34" charset="-120"/>
               </a:rPr>
               <a:t>있습니다. </a:t>
@@ -7359,7 +7043,7 @@
                   <a:srgbClr val="FFF0AD"/>
                 </a:highlight>
                 <a:latin typeface="Noto Sans KR" pitchFamily="34" charset="0"/>
-                <a:ea typeface="Noto Sans KR" pitchFamily="34" charset="-127"/>
+                <a:ea typeface="Noto Sans KR" pitchFamily="34" charset="-122"/>
                 <a:cs typeface="Noto Sans KR" pitchFamily="34" charset="-120"/>
               </a:rPr>
               <a:t>관련 어휘와 배경지식</a:t>
@@ -7376,7 +7060,7 @@
                   <a:srgbClr val="101D42"/>
                 </a:solidFill>
                 <a:latin typeface="Noto Sans KR" pitchFamily="34" charset="0"/>
-                <a:ea typeface="Noto Sans KR" pitchFamily="34" charset="-127"/>
+                <a:ea typeface="Noto Sans KR" pitchFamily="34" charset="-122"/>
                 <a:cs typeface="Noto Sans KR" pitchFamily="34" charset="-120"/>
               </a:rPr>
               <a:t>이 부족하면 글자를 읽어도 </a:t>
@@ -7396,7 +7080,7 @@
                   <a:srgbClr val="FFF0AD"/>
                 </a:highlight>
                 <a:latin typeface="Noto Sans KR" pitchFamily="34" charset="0"/>
-                <a:ea typeface="Noto Sans KR" pitchFamily="34" charset="-127"/>
+                <a:ea typeface="Noto Sans KR" pitchFamily="34" charset="-122"/>
                 <a:cs typeface="Noto Sans KR" pitchFamily="34" charset="-120"/>
               </a:rPr>
               <a:t>맥락과 의미</a:t>
@@ -7413,7 +7097,7 @@
                   <a:srgbClr val="101D42"/>
                 </a:solidFill>
                 <a:latin typeface="Noto Sans KR" pitchFamily="34" charset="0"/>
-                <a:ea typeface="Noto Sans KR" pitchFamily="34" charset="-127"/>
+                <a:ea typeface="Noto Sans KR" pitchFamily="34" charset="-122"/>
                 <a:cs typeface="Noto Sans KR" pitchFamily="34" charset="-120"/>
               </a:rPr>
               <a:t>를</a:t>
@@ -7433,7 +7117,7 @@
                   <a:srgbClr val="101D42"/>
                 </a:solidFill>
                 <a:latin typeface="Noto Sans KR" pitchFamily="34" charset="0"/>
-                <a:ea typeface="Noto Sans KR" pitchFamily="34" charset="-127"/>
+                <a:ea typeface="Noto Sans KR" pitchFamily="34" charset="-122"/>
                 <a:cs typeface="Noto Sans KR" pitchFamily="34" charset="-120"/>
               </a:rPr>
               <a:t>연결하기 어렵습니다.</a:t>
@@ -7475,7 +7159,7 @@
                   <a:srgbClr val="101D42"/>
                 </a:solidFill>
                 <a:latin typeface="Noto Sans KR" pitchFamily="34" charset="0"/>
-                <a:ea typeface="Noto Sans KR" pitchFamily="34" charset="-127"/>
+                <a:ea typeface="Noto Sans KR" pitchFamily="34" charset="-122"/>
                 <a:cs typeface="Noto Sans KR" pitchFamily="34" charset="-120"/>
               </a:rPr>
               <a:t>그래서 읽기 전 필요한 </a:t>
@@ -7495,7 +7179,7 @@
                   <a:srgbClr val="FFF0AD"/>
                 </a:highlight>
                 <a:latin typeface="Noto Sans KR" pitchFamily="34" charset="0"/>
-                <a:ea typeface="Noto Sans KR" pitchFamily="34" charset="-127"/>
+                <a:ea typeface="Noto Sans KR" pitchFamily="34" charset="-122"/>
                 <a:cs typeface="Noto Sans KR" pitchFamily="34" charset="-120"/>
               </a:rPr>
               <a:t>배경을 짚고</a:t>
@@ -7512,7 +7196,7 @@
                   <a:srgbClr val="101D42"/>
                 </a:solidFill>
                 <a:latin typeface="Noto Sans KR" pitchFamily="34" charset="0"/>
-                <a:ea typeface="Noto Sans KR" pitchFamily="34" charset="-127"/>
+                <a:ea typeface="Noto Sans KR" pitchFamily="34" charset="-122"/>
                 <a:cs typeface="Noto Sans KR" pitchFamily="34" charset="-120"/>
               </a:rPr>
               <a:t>, 읽으며 </a:t>
@@ -7532,7 +7216,7 @@
                   <a:srgbClr val="FFF0AD"/>
                 </a:highlight>
                 <a:latin typeface="Noto Sans KR" pitchFamily="34" charset="0"/>
-                <a:ea typeface="Noto Sans KR" pitchFamily="34" charset="-127"/>
+                <a:ea typeface="Noto Sans KR" pitchFamily="34" charset="-122"/>
                 <a:cs typeface="Noto Sans KR" pitchFamily="34" charset="-120"/>
               </a:rPr>
               <a:t>어휘를 익히고</a:t>
@@ -7549,7 +7233,7 @@
                   <a:srgbClr val="101D42"/>
                 </a:solidFill>
                 <a:latin typeface="Noto Sans KR" pitchFamily="34" charset="0"/>
-                <a:ea typeface="Noto Sans KR" pitchFamily="34" charset="-127"/>
+                <a:ea typeface="Noto Sans KR" pitchFamily="34" charset="-122"/>
                 <a:cs typeface="Noto Sans KR" pitchFamily="34" charset="-120"/>
               </a:rPr>
               <a:t>, 새 내용으로</a:t>
@@ -7572,7 +7256,7 @@
                   <a:srgbClr val="FFF0AD"/>
                 </a:highlight>
                 <a:latin typeface="Noto Sans KR" pitchFamily="34" charset="0"/>
-                <a:ea typeface="Noto Sans KR" pitchFamily="34" charset="-127"/>
+                <a:ea typeface="Noto Sans KR" pitchFamily="34" charset="-122"/>
                 <a:cs typeface="Noto Sans KR" pitchFamily="34" charset="-120"/>
               </a:rPr>
               <a:t>기존 생각을 넓히거나 고치는</a:t>
@@ -7589,7 +7273,7 @@
                   <a:srgbClr val="101D42"/>
                 </a:solidFill>
                 <a:latin typeface="Noto Sans KR" pitchFamily="34" charset="0"/>
-                <a:ea typeface="Noto Sans KR" pitchFamily="34" charset="-127"/>
+                <a:ea typeface="Noto Sans KR" pitchFamily="34" charset="-122"/>
                 <a:cs typeface="Noto Sans KR" pitchFamily="34" charset="-120"/>
               </a:rPr>
               <a:t> 과정이 필요합니다.</a:t>
@@ -7631,7 +7315,7 @@
                   <a:srgbClr val="15543C"/>
                 </a:solidFill>
                 <a:latin typeface="Noto Sans KR" pitchFamily="34" charset="0"/>
-                <a:ea typeface="Noto Sans KR" pitchFamily="34" charset="-127"/>
+                <a:ea typeface="Noto Sans KR" pitchFamily="34" charset="-122"/>
                 <a:cs typeface="Noto Sans KR" pitchFamily="34" charset="-120"/>
               </a:rPr>
               <a:t>어휘 · 간접 경험</a:t>
@@ -7673,7 +7357,7 @@
                   <a:srgbClr val="15543C"/>
                 </a:solidFill>
                 <a:latin typeface="Noto Sans KR" pitchFamily="34" charset="0"/>
-                <a:ea typeface="Noto Sans KR" pitchFamily="34" charset="-127"/>
+                <a:ea typeface="Noto Sans KR" pitchFamily="34" charset="-122"/>
                 <a:cs typeface="Noto Sans KR" pitchFamily="34" charset="-120"/>
               </a:rPr>
               <a:t>배경지식 · 스키마</a:t>
@@ -7715,7 +7399,7 @@
                   <a:srgbClr val="15543C"/>
                 </a:solidFill>
                 <a:latin typeface="Noto Sans KR" pitchFamily="34" charset="0"/>
-                <a:ea typeface="Noto Sans KR" pitchFamily="34" charset="-127"/>
+                <a:ea typeface="Noto Sans KR" pitchFamily="34" charset="-122"/>
                 <a:cs typeface="Noto Sans KR" pitchFamily="34" charset="-120"/>
               </a:rPr>
               <a:t>이해 · 추론 · 연결</a:t>
@@ -7757,7 +7441,7 @@
                   <a:srgbClr val="D59B32"/>
                 </a:solidFill>
                 <a:latin typeface="Noto Sans KR" pitchFamily="34" charset="0"/>
-                <a:ea typeface="Noto Sans KR" pitchFamily="34" charset="-127"/>
+                <a:ea typeface="Noto Sans KR" pitchFamily="34" charset="-122"/>
                 <a:cs typeface="Noto Sans KR" pitchFamily="34" charset="-120"/>
               </a:rPr>
               <a:t>→</a:t>
@@ -7799,7 +7483,7 @@
                   <a:srgbClr val="D59B32"/>
                 </a:solidFill>
                 <a:latin typeface="Noto Sans KR" pitchFamily="34" charset="0"/>
-                <a:ea typeface="Noto Sans KR" pitchFamily="34" charset="-127"/>
+                <a:ea typeface="Noto Sans KR" pitchFamily="34" charset="-122"/>
                 <a:cs typeface="Noto Sans KR" pitchFamily="34" charset="-120"/>
               </a:rPr>
               <a:t>→</a:t>
@@ -7841,7 +7525,7 @@
                   <a:srgbClr val="101D42"/>
                 </a:solidFill>
                 <a:latin typeface="Noto Serif KR Black" pitchFamily="34" charset="0"/>
-                <a:ea typeface="Noto Serif KR Black" pitchFamily="34" charset="-127"/>
+                <a:ea typeface="Noto Serif KR Black" pitchFamily="34" charset="-122"/>
                 <a:cs typeface="Noto Serif KR Black" pitchFamily="34" charset="-120"/>
               </a:rPr>
               <a:t>읽고 받아들이는 경험이 쌓여,</a:t>
@@ -7861,7 +7545,7 @@
                   <a:srgbClr val="15543C"/>
                 </a:solidFill>
                 <a:latin typeface="Noto Serif KR Black" pitchFamily="34" charset="0"/>
-                <a:ea typeface="Noto Serif KR Black" pitchFamily="34" charset="-127"/>
+                <a:ea typeface="Noto Serif KR Black" pitchFamily="34" charset="-122"/>
                 <a:cs typeface="Noto Serif KR Black" pitchFamily="34" charset="-120"/>
               </a:rPr>
               <a:t>세상을 이해하는 생각의 바탕이 됩니다.</a:t>
@@ -7903,7 +7587,7 @@
                   <a:srgbClr val="43516A"/>
                 </a:solidFill>
                 <a:latin typeface="Noto Sans KR" pitchFamily="34" charset="0"/>
-                <a:ea typeface="Noto Sans KR" pitchFamily="34" charset="-127"/>
+                <a:ea typeface="Noto Sans KR" pitchFamily="34" charset="-122"/>
                 <a:cs typeface="Noto Sans KR" pitchFamily="34" charset="-120"/>
               </a:rPr>
               <a:t>배경지식의 영향은 지식의 정확성 · 글의 특성 등에 따라 달라집니다.</a:t>
@@ -7923,7 +7607,7 @@
                   <a:srgbClr val="43516A"/>
                 </a:solidFill>
                 <a:latin typeface="Noto Sans KR" pitchFamily="34" charset="0"/>
-                <a:ea typeface="Noto Sans KR" pitchFamily="34" charset="-127"/>
+                <a:ea typeface="Noto Sans KR" pitchFamily="34" charset="-122"/>
                 <a:cs typeface="Noto Sans KR" pitchFamily="34" charset="-120"/>
               </a:rPr>
               <a:t>출처: Smith et al. (2021) · Hattan et al. (2024)</a:t>
@@ -7965,7 +7649,7 @@
                   <a:srgbClr val="101D42"/>
                 </a:solidFill>
                 <a:latin typeface="Noto Sans KR" pitchFamily="34" charset="0"/>
-                <a:ea typeface="Noto Sans KR" pitchFamily="34" charset="-127"/>
+                <a:ea typeface="Noto Sans KR" pitchFamily="34" charset="-122"/>
                 <a:cs typeface="Noto Sans KR" pitchFamily="34" charset="-120"/>
               </a:rPr>
               <a:t>2 / 4</a:t>
@@ -8695,7 +8379,7 @@
                   <a:srgbClr val="101D42"/>
                 </a:solidFill>
                 <a:latin typeface="Noto Serif KR Black" pitchFamily="34" charset="0"/>
-                <a:ea typeface="Noto Serif KR Black" pitchFamily="34" charset="-127"/>
+                <a:ea typeface="Noto Serif KR Black" pitchFamily="34" charset="-122"/>
                 <a:cs typeface="Noto Serif KR Black" pitchFamily="34" charset="-120"/>
               </a:rPr>
               <a:t>단편적인 정보에서 깊이 있는 이해로</a:t>
@@ -8737,7 +8421,7 @@
                   <a:srgbClr val="101D42"/>
                 </a:solidFill>
                 <a:latin typeface="Noto Serif KR Black" pitchFamily="34" charset="0"/>
-                <a:ea typeface="Noto Serif KR Black" pitchFamily="34" charset="-127"/>
+                <a:ea typeface="Noto Serif KR Black" pitchFamily="34" charset="-122"/>
                 <a:cs typeface="Noto Serif KR Black" pitchFamily="34" charset="-120"/>
               </a:rPr>
               <a:t>‘본 적 있다’는 익숙함이</a:t>
@@ -8779,7 +8463,7 @@
                   <a:srgbClr val="15543C"/>
                 </a:solidFill>
                 <a:latin typeface="Noto Serif KR Black" pitchFamily="34" charset="0"/>
-                <a:ea typeface="Noto Serif KR Black" pitchFamily="34" charset="-127"/>
+                <a:ea typeface="Noto Serif KR Black" pitchFamily="34" charset="-122"/>
                 <a:cs typeface="Noto Serif KR Black" pitchFamily="34" charset="-120"/>
               </a:rPr>
               <a:t>‘안다’는 이해는 아닙니다.</a:t>
@@ -8821,7 +8505,7 @@
                   <a:srgbClr val="15543C"/>
                 </a:solidFill>
                 <a:latin typeface="Noto Serif KR Black" pitchFamily="34" charset="0"/>
-                <a:ea typeface="Noto Serif KR Black" pitchFamily="34" charset="-127"/>
+                <a:ea typeface="Noto Serif KR Black" pitchFamily="34" charset="-122"/>
                 <a:cs typeface="Noto Serif KR Black" pitchFamily="34" charset="-120"/>
               </a:rPr>
               <a:t>단편적인 정보가 생각의 전부가 될까 걱정됩니다</a:t>
@@ -8863,10 +8547,10 @@
                   <a:srgbClr val="101D42"/>
                 </a:solidFill>
                 <a:latin typeface="Noto Sans KR" pitchFamily="34" charset="0"/>
-                <a:ea typeface="Noto Sans KR" pitchFamily="34" charset="-127"/>
-                <a:cs typeface="Noto Sans KR" pitchFamily="34" charset="-120"/>
-              </a:rPr>
-              <a:t>SNS와 짧은 영상은 정보를 빠르게 접하게 합니다. 그러나 이런 접촉만</a:t>
+                <a:ea typeface="Noto Sans KR" pitchFamily="34" charset="-122"/>
+                <a:cs typeface="Noto Sans KR" pitchFamily="34" charset="-120"/>
+              </a:rPr>
+              <a:t>AI가 만든 답을 읽었다고 학습까지 끝나는 것은 아닙니다.</a:t>
             </a:r>
             <a:endParaRPr lang="en-US" sz="1800" dirty="0"/>
           </a:p>
@@ -8883,10 +8567,176 @@
                   <a:srgbClr val="101D42"/>
                 </a:solidFill>
                 <a:latin typeface="Noto Sans KR" pitchFamily="34" charset="0"/>
-                <a:ea typeface="Noto Sans KR" pitchFamily="34" charset="-127"/>
-                <a:cs typeface="Noto Sans KR" pitchFamily="34" charset="-120"/>
-              </a:rPr>
-              <a:t>이어지면 </a:t>
+                <a:ea typeface="Noto Sans KR" pitchFamily="34" charset="-122"/>
+                <a:cs typeface="Noto Sans KR" pitchFamily="34" charset="-120"/>
+              </a:rPr>
+              <a:t>중등학생 읽기 실험에서는 LLM만 쓴 조건보다 직접 필기한 조건이</a:t>
+            </a:r>
+            <a:endParaRPr lang="en-US" sz="1800" dirty="0"/>
+          </a:p>
+          <a:p>
+            <a:pPr algn="l" indent="0" marL="0">
+              <a:lnSpc>
+                <a:spcPts val="2600"/>
+              </a:lnSpc>
+              <a:buNone/>
+            </a:pPr>
+            <a:r>
+              <a:rPr lang="ko-KR" altLang="en-US" sz="1800" dirty="0">
+                <a:solidFill>
+                  <a:srgbClr val="101D42"/>
+                </a:solidFill>
+                <a:latin typeface="Noto Sans KR" pitchFamily="34" charset="0"/>
+                <a:ea typeface="Noto Sans KR" pitchFamily="34" charset="-122"/>
+                <a:cs typeface="Noto Sans KR" pitchFamily="34" charset="-120"/>
+              </a:rPr>
+              <a:t>학습 3일 뒤 이해 평가에서 더 높은 점수를 받았습니다.</a:t>
+            </a:r>
+            <a:endParaRPr lang="en-US" sz="1800" dirty="0"/>
+          </a:p>
+        </p:txBody>
+      </p:sp>
+      <p:sp>
+        <p:nvSpPr>
+          <p:cNvPr id="28" name="txt-4-5"/>
+          <p:cNvSpPr txBox="1"/>
+          <p:nvPr/>
+        </p:nvSpPr>
+        <p:spPr>
+          <a:xfrm>
+            <a:off x="863346" y="4292346"/>
+            <a:ext cx="5427472" cy="429260"/>
+          </a:xfrm>
+          <a:prstGeom prst="rect">
+            <a:avLst/>
+          </a:prstGeom>
+          <a:noFill/>
+          <a:ln/>
+        </p:spPr>
+        <p:txBody>
+          <a:bodyPr wrap="square" lIns="0" tIns="0" rIns="0" bIns="0" rtlCol="0" anchor="t"/>
+          <a:lstStyle/>
+          <a:p>
+            <a:pPr algn="l" indent="0" marL="0">
+              <a:lnSpc>
+                <a:spcPts val="2600"/>
+              </a:lnSpc>
+              <a:buNone/>
+            </a:pPr>
+            <a:r>
+              <a:rPr lang="ko-KR" altLang="en-US" sz="2000" dirty="0">
+                <a:solidFill>
+                  <a:srgbClr val="15543C"/>
+                </a:solidFill>
+                <a:latin typeface="Noto Serif KR Black" pitchFamily="34" charset="0"/>
+                <a:ea typeface="Noto Serif KR Black" pitchFamily="34" charset="-122"/>
+                <a:cs typeface="Noto Serif KR Black" pitchFamily="34" charset="-120"/>
+              </a:rPr>
+              <a:t>‘안다는 착각’을 넘어서는 연습이 필요합니다</a:t>
+            </a:r>
+            <a:endParaRPr lang="en-US" sz="2000" dirty="0"/>
+          </a:p>
+        </p:txBody>
+      </p:sp>
+      <p:sp>
+        <p:nvSpPr>
+          <p:cNvPr id="29" name="txt-4-6"/>
+          <p:cNvSpPr txBox="1"/>
+          <p:nvPr/>
+        </p:nvSpPr>
+        <p:spPr>
+          <a:xfrm>
+            <a:off x="381000" y="4780026"/>
+            <a:ext cx="7140956" cy="759460"/>
+          </a:xfrm>
+          <a:prstGeom prst="rect">
+            <a:avLst/>
+          </a:prstGeom>
+          <a:noFill/>
+          <a:ln/>
+        </p:spPr>
+        <p:txBody>
+          <a:bodyPr wrap="square" lIns="0" tIns="0" rIns="0" bIns="0" rtlCol="0" anchor="t"/>
+          <a:lstStyle/>
+          <a:p>
+            <a:pPr algn="l" indent="0" marL="0">
+              <a:lnSpc>
+                <a:spcPts val="2600"/>
+              </a:lnSpc>
+              <a:buNone/>
+            </a:pPr>
+            <a:r>
+              <a:rPr lang="ko-KR" altLang="en-US" sz="1800" dirty="0">
+                <a:solidFill>
+                  <a:srgbClr val="101D42"/>
+                </a:solidFill>
+                <a:latin typeface="Noto Sans KR" pitchFamily="34" charset="0"/>
+                <a:ea typeface="Noto Sans KR" pitchFamily="34" charset="-122"/>
+                <a:cs typeface="Noto Sans KR" pitchFamily="34" charset="-120"/>
+              </a:rPr>
+              <a:t>12점 만점의 이해 점수는 LLM 조건 4.00점, 필기 조건 4.89점이었습니다.</a:t>
+            </a:r>
+            <a:endParaRPr lang="en-US" sz="1800" dirty="0"/>
+          </a:p>
+          <a:p>
+            <a:pPr algn="l" indent="0" marL="0">
+              <a:lnSpc>
+                <a:spcPts val="2600"/>
+              </a:lnSpc>
+              <a:buNone/>
+            </a:pPr>
+            <a:r>
+              <a:rPr lang="ko-KR" altLang="en-US" sz="1800" dirty="0">
+                <a:solidFill>
+                  <a:srgbClr val="101D42"/>
+                </a:solidFill>
+                <a:latin typeface="Noto Sans KR" pitchFamily="34" charset="0"/>
+                <a:ea typeface="Noto Sans KR" pitchFamily="34" charset="-122"/>
+                <a:cs typeface="Noto Sans KR" pitchFamily="34" charset="-120"/>
+              </a:rPr>
+              <a:t>학생이 직접 읽고 정리하는 과정을 남기는 데 주목했습니다.</a:t>
+            </a:r>
+            <a:endParaRPr lang="en-US" sz="1800" dirty="0"/>
+          </a:p>
+        </p:txBody>
+      </p:sp>
+      <p:sp>
+        <p:nvSpPr>
+          <p:cNvPr id="30" name="txt-4-7"/>
+          <p:cNvSpPr txBox="1"/>
+          <p:nvPr/>
+        </p:nvSpPr>
+        <p:spPr>
+          <a:xfrm>
+            <a:off x="381000" y="5567426"/>
+            <a:ext cx="7140956" cy="759460"/>
+          </a:xfrm>
+          <a:prstGeom prst="rect">
+            <a:avLst/>
+          </a:prstGeom>
+          <a:noFill/>
+          <a:ln/>
+        </p:spPr>
+        <p:txBody>
+          <a:bodyPr wrap="square" lIns="0" tIns="0" rIns="0" bIns="0" rtlCol="0" anchor="t"/>
+          <a:lstStyle/>
+          <a:p>
+            <a:pPr algn="l" indent="0" marL="0">
+              <a:lnSpc>
+                <a:spcPts val="2600"/>
+              </a:lnSpc>
+              <a:buNone/>
+            </a:pPr>
+            <a:r>
+              <a:rPr lang="ko-KR" altLang="en-US" sz="1800" dirty="0">
+                <a:solidFill>
+                  <a:srgbClr val="101D42"/>
+                </a:solidFill>
+                <a:latin typeface="Noto Sans KR" pitchFamily="34" charset="0"/>
+                <a:ea typeface="Noto Sans KR" pitchFamily="34" charset="-122"/>
+                <a:cs typeface="Noto Sans KR" pitchFamily="34" charset="-120"/>
+              </a:rPr>
+              <a:t>학생이 </a:t>
             </a:r>
             <a:pPr algn="l" indent="0" marL="0">
               <a:lnSpc>
@@ -8903,10 +8753,10 @@
                   <a:srgbClr val="FFF0AD"/>
                 </a:highlight>
                 <a:latin typeface="Noto Sans KR" pitchFamily="34" charset="0"/>
-                <a:ea typeface="Noto Sans KR" pitchFamily="34" charset="-127"/>
-                <a:cs typeface="Noto Sans KR" pitchFamily="34" charset="-120"/>
-              </a:rPr>
-              <a:t>원인과 맥락</a:t>
+                <a:ea typeface="Noto Sans KR" pitchFamily="34" charset="-122"/>
+                <a:cs typeface="Noto Sans KR" pitchFamily="34" charset="-120"/>
+              </a:rPr>
+              <a:t>자기 말로 설명</a:t>
             </a:r>
             <a:pPr algn="l" indent="0" marL="0">
               <a:lnSpc>
@@ -8920,10 +8770,10 @@
                   <a:srgbClr val="101D42"/>
                 </a:solidFill>
                 <a:latin typeface="Noto Sans KR" pitchFamily="34" charset="0"/>
-                <a:ea typeface="Noto Sans KR" pitchFamily="34" charset="-127"/>
-                <a:cs typeface="Noto Sans KR" pitchFamily="34" charset="-120"/>
-              </a:rPr>
-              <a:t>, </a:t>
+                <a:ea typeface="Noto Sans KR" pitchFamily="34" charset="-122"/>
+                <a:cs typeface="Noto Sans KR" pitchFamily="34" charset="-120"/>
+              </a:rPr>
+              <a:t>하고, </a:t>
             </a:r>
             <a:pPr algn="l" indent="0" marL="0">
               <a:lnSpc>
@@ -8940,10 +8790,10 @@
                   <a:srgbClr val="FFF0AD"/>
                 </a:highlight>
                 <a:latin typeface="Noto Sans KR" pitchFamily="34" charset="0"/>
-                <a:ea typeface="Noto Sans KR" pitchFamily="34" charset="-127"/>
-                <a:cs typeface="Noto Sans KR" pitchFamily="34" charset="-120"/>
-              </a:rPr>
-              <a:t>다른 관점과 반대 근거</a:t>
+                <a:ea typeface="Noto Sans KR" pitchFamily="34" charset="-122"/>
+                <a:cs typeface="Noto Sans KR" pitchFamily="34" charset="-120"/>
+              </a:rPr>
+              <a:t>책에서 근거를 찾고</a:t>
             </a:r>
             <a:pPr algn="l" indent="0" marL="0">
               <a:lnSpc>
@@ -8957,10 +8807,47 @@
                   <a:srgbClr val="101D42"/>
                 </a:solidFill>
                 <a:latin typeface="Noto Sans KR" pitchFamily="34" charset="0"/>
-                <a:ea typeface="Noto Sans KR" pitchFamily="34" charset="-127"/>
-                <a:cs typeface="Noto Sans KR" pitchFamily="34" charset="-120"/>
-              </a:rPr>
-              <a:t>를 따져 볼 시간은 부족해질</a:t>
+                <a:ea typeface="Noto Sans KR" pitchFamily="34" charset="-122"/>
+                <a:cs typeface="Noto Sans KR" pitchFamily="34" charset="-120"/>
+              </a:rPr>
+              <a:t>, </a:t>
+            </a:r>
+            <a:pPr algn="l" indent="0" marL="0">
+              <a:lnSpc>
+                <a:spcPts val="2600"/>
+              </a:lnSpc>
+              <a:buNone/>
+            </a:pPr>
+            <a:r>
+              <a:rPr lang="ko-KR" altLang="en-US" sz="1800" b="1" dirty="0">
+                <a:solidFill>
+                  <a:srgbClr val="101D42"/>
+                </a:solidFill>
+                <a:highlight>
+                  <a:srgbClr val="FFF0AD"/>
+                </a:highlight>
+                <a:latin typeface="Noto Sans KR" pitchFamily="34" charset="0"/>
+                <a:ea typeface="Noto Sans KR" pitchFamily="34" charset="-122"/>
+                <a:cs typeface="Noto Sans KR" pitchFamily="34" charset="-120"/>
+              </a:rPr>
+              <a:t>다른 상황에 적용</a:t>
+            </a:r>
+            <a:pPr algn="l" indent="0" marL="0">
+              <a:lnSpc>
+                <a:spcPts val="2600"/>
+              </a:lnSpc>
+              <a:buNone/>
+            </a:pPr>
+            <a:r>
+              <a:rPr lang="ko-KR" altLang="en-US" sz="1800" dirty="0">
+                <a:solidFill>
+                  <a:srgbClr val="101D42"/>
+                </a:solidFill>
+                <a:latin typeface="Noto Sans KR" pitchFamily="34" charset="0"/>
+                <a:ea typeface="Noto Sans KR" pitchFamily="34" charset="-122"/>
+                <a:cs typeface="Noto Sans KR" pitchFamily="34" charset="-120"/>
+              </a:rPr>
+              <a:t>해 보는</a:t>
             </a:r>
             <a:endParaRPr lang="en-US" sz="1800" dirty="0"/>
           </a:p>
@@ -8977,10 +8864,10 @@
                   <a:srgbClr val="101D42"/>
                 </a:solidFill>
                 <a:latin typeface="Noto Sans KR" pitchFamily="34" charset="0"/>
-                <a:ea typeface="Noto Sans KR" pitchFamily="34" charset="-127"/>
-                <a:cs typeface="Noto Sans KR" pitchFamily="34" charset="-120"/>
-              </a:rPr>
-              <a:t>수 있습니다.</a:t>
+                <a:ea typeface="Noto Sans KR" pitchFamily="34" charset="-122"/>
+                <a:cs typeface="Noto Sans KR" pitchFamily="34" charset="-120"/>
+              </a:rPr>
+              <a:t>활동이 필요합니다.</a:t>
             </a:r>
             <a:endParaRPr lang="en-US" sz="1800" dirty="0"/>
           </a:p>
@@ -8988,14 +8875,14 @@
       </p:sp>
       <p:sp>
         <p:nvSpPr>
-          <p:cNvPr id="28" name="txt-4-5"/>
+          <p:cNvPr id="31" name="txt-4-8"/>
           <p:cNvSpPr txBox="1"/>
           <p:nvPr/>
         </p:nvSpPr>
         <p:spPr>
           <a:xfrm>
-            <a:off x="863346" y="4292346"/>
-            <a:ext cx="5427472" cy="429260"/>
+            <a:off x="863346" y="7060057"/>
+            <a:ext cx="6186678" cy="407797"/>
           </a:xfrm>
           <a:prstGeom prst="rect">
             <a:avLst/>
@@ -9009,35 +8896,35 @@
           <a:p>
             <a:pPr algn="l" indent="0" marL="0">
               <a:lnSpc>
-                <a:spcPts val="2600"/>
-              </a:lnSpc>
-              <a:buNone/>
-            </a:pPr>
-            <a:r>
-              <a:rPr lang="ko-KR" altLang="en-US" sz="2000" dirty="0">
+                <a:spcPts val="2470"/>
+              </a:lnSpc>
+              <a:buNone/>
+            </a:pPr>
+            <a:r>
+              <a:rPr lang="ko-KR" altLang="en-US" sz="1900" dirty="0">
                 <a:solidFill>
                   <a:srgbClr val="15543C"/>
                 </a:solidFill>
                 <a:latin typeface="Noto Serif KR Black" pitchFamily="34" charset="0"/>
-                <a:ea typeface="Noto Serif KR Black" pitchFamily="34" charset="-127"/>
+                <a:ea typeface="Noto Serif KR Black" pitchFamily="34" charset="-122"/>
                 <a:cs typeface="Noto Serif KR Black" pitchFamily="34" charset="-120"/>
               </a:rPr>
-              <a:t>‘안다는 착각’을 넘어서는 연습이 필요합니다</a:t>
-            </a:r>
-            <a:endParaRPr lang="en-US" sz="2000" dirty="0"/>
+              <a:t>디지털 교육의 중심에도 학생의 사고가 있어야 합니다</a:t>
+            </a:r>
+            <a:endParaRPr lang="en-US" sz="1900" dirty="0"/>
           </a:p>
         </p:txBody>
       </p:sp>
       <p:sp>
         <p:nvSpPr>
-          <p:cNvPr id="29" name="txt-4-6"/>
+          <p:cNvPr id="32" name="txt-4-9"/>
           <p:cNvSpPr txBox="1"/>
           <p:nvPr/>
         </p:nvSpPr>
         <p:spPr>
           <a:xfrm>
-            <a:off x="381000" y="4780026"/>
-            <a:ext cx="7140956" cy="759460"/>
+            <a:off x="381000" y="7565136"/>
+            <a:ext cx="7140956" cy="1047750"/>
           </a:xfrm>
           <a:prstGeom prst="rect">
             <a:avLst/>
@@ -9051,29 +8938,29 @@
           <a:p>
             <a:pPr algn="l" indent="0" marL="0">
               <a:lnSpc>
-                <a:spcPts val="2600"/>
-              </a:lnSpc>
-              <a:buNone/>
-            </a:pPr>
-            <a:r>
-              <a:rPr lang="ko-KR" altLang="en-US" sz="1800" dirty="0">
-                <a:solidFill>
-                  <a:srgbClr val="101D42"/>
-                </a:solidFill>
-                <a:latin typeface="Noto Sans KR" pitchFamily="34" charset="0"/>
-                <a:ea typeface="Noto Sans KR" pitchFamily="34" charset="-127"/>
-                <a:cs typeface="Noto Sans KR" pitchFamily="34" charset="-120"/>
-              </a:rPr>
-              <a:t>인터넷 검색 실험에서는 찾은 정보를 </a:t>
-            </a:r>
-            <a:pPr algn="l" indent="0" marL="0">
-              <a:lnSpc>
-                <a:spcPts val="2600"/>
-              </a:lnSpc>
-              <a:buNone/>
-            </a:pPr>
-            <a:r>
-              <a:rPr lang="ko-KR" altLang="en-US" sz="1800" b="1" dirty="0">
+                <a:spcPts val="2500"/>
+              </a:lnSpc>
+              <a:buNone/>
+            </a:pPr>
+            <a:r>
+              <a:rPr lang="ko-KR" altLang="en-US" sz="1750" dirty="0">
+                <a:solidFill>
+                  <a:srgbClr val="101D42"/>
+                </a:solidFill>
+                <a:latin typeface="Noto Sans KR" pitchFamily="34" charset="0"/>
+                <a:ea typeface="Noto Sans KR" pitchFamily="34" charset="-122"/>
+                <a:cs typeface="Noto Sans KR" pitchFamily="34" charset="-120"/>
+              </a:rPr>
+              <a:t>AI가 빠르게 답을 제시해도, 그 </a:t>
+            </a:r>
+            <a:pPr algn="l" indent="0" marL="0">
+              <a:lnSpc>
+                <a:spcPts val="2500"/>
+              </a:lnSpc>
+              <a:buNone/>
+            </a:pPr>
+            <a:r>
+              <a:rPr lang="ko-KR" altLang="en-US" sz="1750" b="1" dirty="0">
                 <a:solidFill>
                   <a:srgbClr val="101D42"/>
                 </a:solidFill>
@@ -9081,56 +8968,56 @@
                   <a:srgbClr val="FFF0AD"/>
                 </a:highlight>
                 <a:latin typeface="Noto Sans KR" pitchFamily="34" charset="0"/>
-                <a:ea typeface="Noto Sans KR" pitchFamily="34" charset="-127"/>
-                <a:cs typeface="Noto Sans KR" pitchFamily="34" charset="-120"/>
-              </a:rPr>
-              <a:t>자신의 지식으로 혼동</a:t>
-            </a:r>
-            <a:pPr algn="l" indent="0" marL="0">
-              <a:lnSpc>
-                <a:spcPts val="2600"/>
-              </a:lnSpc>
-              <a:buNone/>
-            </a:pPr>
-            <a:r>
-              <a:rPr lang="ko-KR" altLang="en-US" sz="1800" dirty="0">
-                <a:solidFill>
-                  <a:srgbClr val="101D42"/>
-                </a:solidFill>
-                <a:latin typeface="Noto Sans KR" pitchFamily="34" charset="0"/>
-                <a:ea typeface="Noto Sans KR" pitchFamily="34" charset="-127"/>
-                <a:cs typeface="Noto Sans KR" pitchFamily="34" charset="-120"/>
-              </a:rPr>
-              <a:t>하고, 아는</a:t>
-            </a:r>
-            <a:endParaRPr lang="en-US" sz="1800" dirty="0"/>
-          </a:p>
-          <a:p>
-            <a:pPr algn="l" indent="0" marL="0">
-              <a:lnSpc>
-                <a:spcPts val="2600"/>
-              </a:lnSpc>
-              <a:buNone/>
-            </a:pPr>
-            <a:r>
-              <a:rPr lang="ko-KR" altLang="en-US" sz="1800" dirty="0">
-                <a:solidFill>
-                  <a:srgbClr val="101D42"/>
-                </a:solidFill>
-                <a:latin typeface="Noto Sans KR" pitchFamily="34" charset="0"/>
-                <a:ea typeface="Noto Sans KR" pitchFamily="34" charset="-127"/>
-                <a:cs typeface="Noto Sans KR" pitchFamily="34" charset="-120"/>
-              </a:rPr>
-              <a:t>정도를 </a:t>
-            </a:r>
-            <a:pPr algn="l" indent="0" marL="0">
-              <a:lnSpc>
-                <a:spcPts val="2600"/>
-              </a:lnSpc>
-              <a:buNone/>
-            </a:pPr>
-            <a:r>
-              <a:rPr lang="ko-KR" altLang="en-US" sz="1800" b="1" dirty="0">
+                <a:ea typeface="Noto Sans KR" pitchFamily="34" charset="-122"/>
+                <a:cs typeface="Noto Sans KR" pitchFamily="34" charset="-120"/>
+              </a:rPr>
+              <a:t>뜻과 근거를 판단하는 힘</a:t>
+            </a:r>
+            <a:pPr algn="l" indent="0" marL="0">
+              <a:lnSpc>
+                <a:spcPts val="2500"/>
+              </a:lnSpc>
+              <a:buNone/>
+            </a:pPr>
+            <a:r>
+              <a:rPr lang="ko-KR" altLang="en-US" sz="1750" dirty="0">
+                <a:solidFill>
+                  <a:srgbClr val="101D42"/>
+                </a:solidFill>
+                <a:latin typeface="Noto Sans KR" pitchFamily="34" charset="0"/>
+                <a:ea typeface="Noto Sans KR" pitchFamily="34" charset="-122"/>
+                <a:cs typeface="Noto Sans KR" pitchFamily="34" charset="-120"/>
+              </a:rPr>
+              <a:t>은 학생 안에 있어야</a:t>
+            </a:r>
+            <a:endParaRPr lang="en-US" sz="1750" dirty="0"/>
+          </a:p>
+          <a:p>
+            <a:pPr algn="l" indent="0" marL="0">
+              <a:lnSpc>
+                <a:spcPts val="2500"/>
+              </a:lnSpc>
+              <a:buNone/>
+            </a:pPr>
+            <a:r>
+              <a:rPr lang="ko-KR" altLang="en-US" sz="1750" dirty="0">
+                <a:solidFill>
+                  <a:srgbClr val="101D42"/>
+                </a:solidFill>
+                <a:latin typeface="Noto Sans KR" pitchFamily="34" charset="0"/>
+                <a:ea typeface="Noto Sans KR" pitchFamily="34" charset="-122"/>
+                <a:cs typeface="Noto Sans KR" pitchFamily="34" charset="-120"/>
+              </a:rPr>
+              <a:t>합니다. 기술은 읽기와 표현을 돕고, 학생에게 </a:t>
+            </a:r>
+            <a:pPr algn="l" indent="0" marL="0">
+              <a:lnSpc>
+                <a:spcPts val="2500"/>
+              </a:lnSpc>
+              <a:buNone/>
+            </a:pPr>
+            <a:r>
+              <a:rPr lang="ko-KR" altLang="en-US" sz="1750" b="1" dirty="0">
                 <a:solidFill>
                   <a:srgbClr val="101D42"/>
                 </a:solidFill>
@@ -9138,42 +9025,62 @@
                   <a:srgbClr val="FFF0AD"/>
                 </a:highlight>
                 <a:latin typeface="Noto Sans KR" pitchFamily="34" charset="0"/>
-                <a:ea typeface="Noto Sans KR" pitchFamily="34" charset="-127"/>
-                <a:cs typeface="Noto Sans KR" pitchFamily="34" charset="-120"/>
-              </a:rPr>
-              <a:t>과대평가</a:t>
-            </a:r>
-            <a:pPr algn="l" indent="0" marL="0">
-              <a:lnSpc>
-                <a:spcPts val="2600"/>
-              </a:lnSpc>
-              <a:buNone/>
-            </a:pPr>
-            <a:r>
-              <a:rPr lang="ko-KR" altLang="en-US" sz="1800" dirty="0">
-                <a:solidFill>
-                  <a:srgbClr val="101D42"/>
-                </a:solidFill>
-                <a:latin typeface="Noto Sans KR" pitchFamily="34" charset="0"/>
-                <a:ea typeface="Noto Sans KR" pitchFamily="34" charset="-127"/>
-                <a:cs typeface="Noto Sans KR" pitchFamily="34" charset="-120"/>
-              </a:rPr>
-              <a:t>하는 현상이 관찰됐습니다.</a:t>
-            </a:r>
-            <a:endParaRPr lang="en-US" sz="1800" dirty="0"/>
+                <a:ea typeface="Noto Sans KR" pitchFamily="34" charset="-122"/>
+                <a:cs typeface="Noto Sans KR" pitchFamily="34" charset="-120"/>
+              </a:rPr>
+              <a:t>충분히 생각할 시간</a:t>
+            </a:r>
+            <a:pPr algn="l" indent="0" marL="0">
+              <a:lnSpc>
+                <a:spcPts val="2500"/>
+              </a:lnSpc>
+              <a:buNone/>
+            </a:pPr>
+            <a:r>
+              <a:rPr lang="ko-KR" altLang="en-US" sz="1750" dirty="0">
+                <a:solidFill>
+                  <a:srgbClr val="101D42"/>
+                </a:solidFill>
+                <a:latin typeface="Noto Sans KR" pitchFamily="34" charset="0"/>
+                <a:ea typeface="Noto Sans KR" pitchFamily="34" charset="-122"/>
+                <a:cs typeface="Noto Sans KR" pitchFamily="34" charset="-120"/>
+              </a:rPr>
+              <a:t>을 주는</a:t>
+            </a:r>
+            <a:endParaRPr lang="en-US" sz="1750" dirty="0"/>
+          </a:p>
+          <a:p>
+            <a:pPr algn="l" indent="0" marL="0">
+              <a:lnSpc>
+                <a:spcPts val="2500"/>
+              </a:lnSpc>
+              <a:buNone/>
+            </a:pPr>
+            <a:r>
+              <a:rPr lang="ko-KR" altLang="en-US" sz="1750" dirty="0">
+                <a:solidFill>
+                  <a:srgbClr val="101D42"/>
+                </a:solidFill>
+                <a:latin typeface="Noto Sans KR" pitchFamily="34" charset="0"/>
+                <a:ea typeface="Noto Sans KR" pitchFamily="34" charset="-122"/>
+                <a:cs typeface="Noto Sans KR" pitchFamily="34" charset="-120"/>
+              </a:rPr>
+              <a:t>방향으로 써야 합니다.</a:t>
+            </a:r>
+            <a:endParaRPr lang="en-US" sz="1750" dirty="0"/>
           </a:p>
         </p:txBody>
       </p:sp>
       <p:sp>
         <p:nvSpPr>
-          <p:cNvPr id="30" name="txt-4-7"/>
+          <p:cNvPr id="33" name="txt-4-10"/>
           <p:cNvSpPr txBox="1"/>
           <p:nvPr/>
         </p:nvSpPr>
         <p:spPr>
           <a:xfrm>
-            <a:off x="381000" y="5567426"/>
-            <a:ext cx="7140956" cy="759460"/>
+            <a:off x="545973" y="8965946"/>
+            <a:ext cx="224155" cy="214630"/>
           </a:xfrm>
           <a:prstGeom prst="rect">
             <a:avLst/>
@@ -9187,166 +9094,35 @@
           <a:p>
             <a:pPr algn="l" indent="0" marL="0">
               <a:lnSpc>
-                <a:spcPts val="2600"/>
-              </a:lnSpc>
-              <a:buNone/>
-            </a:pPr>
-            <a:r>
-              <a:rPr lang="ko-KR" altLang="en-US" sz="1800" dirty="0">
-                <a:solidFill>
-                  <a:srgbClr val="101D42"/>
-                </a:solidFill>
-                <a:latin typeface="Noto Sans KR" pitchFamily="34" charset="0"/>
-                <a:ea typeface="Noto Sans KR" pitchFamily="34" charset="-127"/>
-                <a:cs typeface="Noto Sans KR" pitchFamily="34" charset="-120"/>
-              </a:rPr>
-              <a:t>학생이 </a:t>
-            </a:r>
-            <a:pPr algn="l" indent="0" marL="0">
-              <a:lnSpc>
-                <a:spcPts val="2600"/>
-              </a:lnSpc>
-              <a:buNone/>
-            </a:pPr>
-            <a:r>
-              <a:rPr lang="ko-KR" altLang="en-US" sz="1800" b="1" dirty="0">
-                <a:solidFill>
-                  <a:srgbClr val="101D42"/>
-                </a:solidFill>
-                <a:highlight>
-                  <a:srgbClr val="FFF0AD"/>
-                </a:highlight>
-                <a:latin typeface="Noto Sans KR" pitchFamily="34" charset="0"/>
-                <a:ea typeface="Noto Sans KR" pitchFamily="34" charset="-127"/>
-                <a:cs typeface="Noto Sans KR" pitchFamily="34" charset="-120"/>
-              </a:rPr>
-              <a:t>자기 말로 설명</a:t>
-            </a:r>
-            <a:pPr algn="l" indent="0" marL="0">
-              <a:lnSpc>
-                <a:spcPts val="2600"/>
-              </a:lnSpc>
-              <a:buNone/>
-            </a:pPr>
-            <a:r>
-              <a:rPr lang="ko-KR" altLang="en-US" sz="1800" dirty="0">
-                <a:solidFill>
-                  <a:srgbClr val="101D42"/>
-                </a:solidFill>
-                <a:latin typeface="Noto Sans KR" pitchFamily="34" charset="0"/>
-                <a:ea typeface="Noto Sans KR" pitchFamily="34" charset="-127"/>
-                <a:cs typeface="Noto Sans KR" pitchFamily="34" charset="-120"/>
-              </a:rPr>
-              <a:t>하고, </a:t>
-            </a:r>
-            <a:pPr algn="l" indent="0" marL="0">
-              <a:lnSpc>
-                <a:spcPts val="2600"/>
-              </a:lnSpc>
-              <a:buNone/>
-            </a:pPr>
-            <a:r>
-              <a:rPr lang="ko-KR" altLang="en-US" sz="1800" b="1" dirty="0">
-                <a:solidFill>
-                  <a:srgbClr val="101D42"/>
-                </a:solidFill>
-                <a:highlight>
-                  <a:srgbClr val="FFF0AD"/>
-                </a:highlight>
-                <a:latin typeface="Noto Sans KR" pitchFamily="34" charset="0"/>
-                <a:ea typeface="Noto Sans KR" pitchFamily="34" charset="-127"/>
-                <a:cs typeface="Noto Sans KR" pitchFamily="34" charset="-120"/>
-              </a:rPr>
-              <a:t>책에서 근거를 찾고</a:t>
-            </a:r>
-            <a:pPr algn="l" indent="0" marL="0">
-              <a:lnSpc>
-                <a:spcPts val="2600"/>
-              </a:lnSpc>
-              <a:buNone/>
-            </a:pPr>
-            <a:r>
-              <a:rPr lang="ko-KR" altLang="en-US" sz="1800" dirty="0">
-                <a:solidFill>
-                  <a:srgbClr val="101D42"/>
-                </a:solidFill>
-                <a:latin typeface="Noto Sans KR" pitchFamily="34" charset="0"/>
-                <a:ea typeface="Noto Sans KR" pitchFamily="34" charset="-127"/>
-                <a:cs typeface="Noto Sans KR" pitchFamily="34" charset="-120"/>
-              </a:rPr>
-              <a:t>, </a:t>
-            </a:r>
-            <a:pPr algn="l" indent="0" marL="0">
-              <a:lnSpc>
-                <a:spcPts val="2600"/>
-              </a:lnSpc>
-              <a:buNone/>
-            </a:pPr>
-            <a:r>
-              <a:rPr lang="ko-KR" altLang="en-US" sz="1800" b="1" dirty="0">
-                <a:solidFill>
-                  <a:srgbClr val="101D42"/>
-                </a:solidFill>
-                <a:highlight>
-                  <a:srgbClr val="FFF0AD"/>
-                </a:highlight>
-                <a:latin typeface="Noto Sans KR" pitchFamily="34" charset="0"/>
-                <a:ea typeface="Noto Sans KR" pitchFamily="34" charset="-127"/>
-                <a:cs typeface="Noto Sans KR" pitchFamily="34" charset="-120"/>
-              </a:rPr>
-              <a:t>다른 상황에 적용</a:t>
-            </a:r>
-            <a:pPr algn="l" indent="0" marL="0">
-              <a:lnSpc>
-                <a:spcPts val="2600"/>
-              </a:lnSpc>
-              <a:buNone/>
-            </a:pPr>
-            <a:r>
-              <a:rPr lang="ko-KR" altLang="en-US" sz="1800" dirty="0">
-                <a:solidFill>
-                  <a:srgbClr val="101D42"/>
-                </a:solidFill>
-                <a:latin typeface="Noto Sans KR" pitchFamily="34" charset="0"/>
-                <a:ea typeface="Noto Sans KR" pitchFamily="34" charset="-127"/>
-                <a:cs typeface="Noto Sans KR" pitchFamily="34" charset="-120"/>
-              </a:rPr>
-              <a:t>해 보는</a:t>
-            </a:r>
-            <a:endParaRPr lang="en-US" sz="1800" dirty="0"/>
-          </a:p>
-          <a:p>
-            <a:pPr algn="l" indent="0" marL="0">
-              <a:lnSpc>
-                <a:spcPts val="2600"/>
-              </a:lnSpc>
-              <a:buNone/>
-            </a:pPr>
-            <a:r>
-              <a:rPr lang="ko-KR" altLang="en-US" sz="1800" dirty="0">
-                <a:solidFill>
-                  <a:srgbClr val="101D42"/>
-                </a:solidFill>
-                <a:latin typeface="Noto Sans KR" pitchFamily="34" charset="0"/>
-                <a:ea typeface="Noto Sans KR" pitchFamily="34" charset="-127"/>
-                <a:cs typeface="Noto Sans KR" pitchFamily="34" charset="-120"/>
-              </a:rPr>
-              <a:t>활동이 필요합니다.</a:t>
-            </a:r>
-            <a:endParaRPr lang="en-US" sz="1800" dirty="0"/>
+                <a:spcPts val="1300"/>
+              </a:lnSpc>
+              <a:buNone/>
+            </a:pPr>
+            <a:r>
+              <a:rPr lang="ko-KR" altLang="en-US" sz="1000" b="1" dirty="0">
+                <a:solidFill>
+                  <a:srgbClr val="FFFFFF"/>
+                </a:solidFill>
+                <a:latin typeface="Noto Sans KR" pitchFamily="34" charset="0"/>
+                <a:ea typeface="Noto Sans KR" pitchFamily="34" charset="-122"/>
+                <a:cs typeface="Noto Sans KR" pitchFamily="34" charset="-120"/>
+              </a:rPr>
+              <a:t>?</a:t>
+            </a:r>
+            <a:endParaRPr lang="en-US" sz="1000" dirty="0"/>
           </a:p>
         </p:txBody>
       </p:sp>
       <p:sp>
         <p:nvSpPr>
-          <p:cNvPr id="31" name="txt-4-8"/>
+          <p:cNvPr id="34" name="txt-4-11"/>
           <p:cNvSpPr txBox="1"/>
           <p:nvPr/>
         </p:nvSpPr>
         <p:spPr>
           <a:xfrm>
-            <a:off x="863346" y="7060057"/>
-            <a:ext cx="6186678" cy="407797"/>
+            <a:off x="812673" y="8910447"/>
+            <a:ext cx="2582672" cy="880110"/>
           </a:xfrm>
           <a:prstGeom prst="rect">
             <a:avLst/>
@@ -9360,35 +9136,75 @@
           <a:p>
             <a:pPr algn="l" indent="0" marL="0">
               <a:lnSpc>
-                <a:spcPts val="2470"/>
-              </a:lnSpc>
-              <a:buNone/>
-            </a:pPr>
-            <a:r>
-              <a:rPr lang="ko-KR" altLang="en-US" sz="1900" dirty="0">
+                <a:spcPts val="2100"/>
+              </a:lnSpc>
+              <a:buNone/>
+            </a:pPr>
+            <a:r>
+              <a:rPr lang="ko-KR" altLang="en-US" sz="1300" b="1" dirty="0">
                 <a:solidFill>
                   <a:srgbClr val="15543C"/>
                 </a:solidFill>
-                <a:latin typeface="Noto Serif KR Black" pitchFamily="34" charset="0"/>
-                <a:ea typeface="Noto Serif KR Black" pitchFamily="34" charset="-127"/>
-                <a:cs typeface="Noto Serif KR Black" pitchFamily="34" charset="-120"/>
-              </a:rPr>
-              <a:t>디지털 교육의 중심에도 학생의 사고가 있어야 합니다</a:t>
-            </a:r>
-            <a:endParaRPr lang="en-US" sz="1900" dirty="0"/>
+                <a:latin typeface="Noto Sans KR" pitchFamily="34" charset="0"/>
+                <a:ea typeface="Noto Sans KR" pitchFamily="34" charset="-122"/>
+                <a:cs typeface="Noto Sans KR" pitchFamily="34" charset="-120"/>
+              </a:rPr>
+              <a:t>내 말로 설명할 수 있는가?</a:t>
+            </a:r>
+            <a:endParaRPr lang="en-US" sz="1300" dirty="0"/>
+          </a:p>
+          <a:p>
+            <a:pPr algn="l" indent="0" marL="0">
+              <a:lnSpc>
+                <a:spcPts val="2100"/>
+              </a:lnSpc>
+              <a:buNone/>
+            </a:pPr>
+            <a:r>
+              <a:rPr lang="ko-KR" altLang="en-US" sz="1300" b="1" dirty="0">
+                <a:solidFill>
+                  <a:srgbClr val="15543C"/>
+                </a:solidFill>
+                <a:latin typeface="Noto Sans KR" pitchFamily="34" charset="0"/>
+                <a:ea typeface="Noto Sans KR" pitchFamily="34" charset="-122"/>
+                <a:cs typeface="Noto Sans KR" pitchFamily="34" charset="-120"/>
+              </a:rPr>
+              <a:t>그렇게 생각한 근거는 무엇인가?</a:t>
+            </a:r>
+            <a:endParaRPr lang="en-US" sz="1300" dirty="0"/>
+          </a:p>
+          <a:p>
+            <a:pPr algn="l" indent="0" marL="0">
+              <a:lnSpc>
+                <a:spcPts val="2100"/>
+              </a:lnSpc>
+              <a:buNone/>
+            </a:pPr>
+            <a:r>
+              <a:rPr lang="ko-KR" altLang="en-US" sz="1300" b="1" dirty="0">
+                <a:solidFill>
+                  <a:srgbClr val="15543C"/>
+                </a:solidFill>
+                <a:latin typeface="Noto Sans KR" pitchFamily="34" charset="0"/>
+                <a:ea typeface="Noto Sans KR" pitchFamily="34" charset="-122"/>
+                <a:cs typeface="Noto Sans KR" pitchFamily="34" charset="-120"/>
+              </a:rPr>
+              <a:t>다른 상황에도 적용할 수 있는가?</a:t>
+            </a:r>
+            <a:endParaRPr lang="en-US" sz="1300" dirty="0"/>
           </a:p>
         </p:txBody>
       </p:sp>
       <p:sp>
         <p:nvSpPr>
-          <p:cNvPr id="32" name="txt-4-9"/>
+          <p:cNvPr id="35" name="txt-4-12"/>
           <p:cNvSpPr txBox="1"/>
           <p:nvPr/>
         </p:nvSpPr>
         <p:spPr>
           <a:xfrm>
-            <a:off x="381000" y="7565136"/>
-            <a:ext cx="7140956" cy="1047750"/>
+            <a:off x="545973" y="9232646"/>
+            <a:ext cx="224155" cy="214630"/>
           </a:xfrm>
           <a:prstGeom prst="rect">
             <a:avLst/>
@@ -9402,148 +9218,34 @@
           <a:p>
             <a:pPr algn="l" indent="0" marL="0">
               <a:lnSpc>
-                <a:spcPts val="2500"/>
-              </a:lnSpc>
-              <a:buNone/>
-            </a:pPr>
-            <a:r>
-              <a:rPr lang="ko-KR" altLang="en-US" sz="1750" dirty="0">
-                <a:solidFill>
-                  <a:srgbClr val="101D42"/>
-                </a:solidFill>
-                <a:latin typeface="Noto Sans KR" pitchFamily="34" charset="0"/>
-                <a:ea typeface="Noto Sans KR" pitchFamily="34" charset="-127"/>
-                <a:cs typeface="Noto Sans KR" pitchFamily="34" charset="-120"/>
-              </a:rPr>
-              <a:t>AI가 빠르게 답을 제시해도, 그 </a:t>
-            </a:r>
-            <a:pPr algn="l" indent="0" marL="0">
-              <a:lnSpc>
-                <a:spcPts val="2500"/>
-              </a:lnSpc>
-              <a:buNone/>
-            </a:pPr>
-            <a:r>
-              <a:rPr lang="ko-KR" altLang="en-US" sz="1750" b="1" dirty="0">
-                <a:solidFill>
-                  <a:srgbClr val="101D42"/>
-                </a:solidFill>
-                <a:highlight>
-                  <a:srgbClr val="FFF0AD"/>
-                </a:highlight>
-                <a:latin typeface="Noto Sans KR" pitchFamily="34" charset="0"/>
-                <a:ea typeface="Noto Sans KR" pitchFamily="34" charset="-127"/>
-                <a:cs typeface="Noto Sans KR" pitchFamily="34" charset="-120"/>
-              </a:rPr>
-              <a:t>뜻과 근거를 판단하는 힘</a:t>
-            </a:r>
-            <a:pPr algn="l" indent="0" marL="0">
-              <a:lnSpc>
-                <a:spcPts val="2500"/>
-              </a:lnSpc>
-              <a:buNone/>
-            </a:pPr>
-            <a:r>
-              <a:rPr lang="ko-KR" altLang="en-US" sz="1750" dirty="0">
-                <a:solidFill>
-                  <a:srgbClr val="101D42"/>
-                </a:solidFill>
-                <a:latin typeface="Noto Sans KR" pitchFamily="34" charset="0"/>
-                <a:ea typeface="Noto Sans KR" pitchFamily="34" charset="-127"/>
-                <a:cs typeface="Noto Sans KR" pitchFamily="34" charset="-120"/>
-              </a:rPr>
-              <a:t>은 학생 안에 있어야</a:t>
-            </a:r>
-            <a:endParaRPr lang="en-US" sz="1750" dirty="0"/>
-          </a:p>
-          <a:p>
-            <a:pPr algn="l" indent="0" marL="0">
-              <a:lnSpc>
-                <a:spcPts val="2500"/>
-              </a:lnSpc>
-              <a:buNone/>
-            </a:pPr>
-            <a:r>
-              <a:rPr lang="ko-KR" altLang="en-US" sz="1750" dirty="0">
-                <a:solidFill>
-                  <a:srgbClr val="101D42"/>
-                </a:solidFill>
-                <a:latin typeface="Noto Sans KR" pitchFamily="34" charset="0"/>
-                <a:ea typeface="Noto Sans KR" pitchFamily="34" charset="-127"/>
-                <a:cs typeface="Noto Sans KR" pitchFamily="34" charset="-120"/>
-              </a:rPr>
-              <a:t>합니다. 기술은 읽기와 표현을 돕고, 학생에게 </a:t>
-            </a:r>
-            <a:pPr algn="l" indent="0" marL="0">
-              <a:lnSpc>
-                <a:spcPts val="2500"/>
-              </a:lnSpc>
-              <a:buNone/>
-            </a:pPr>
-            <a:r>
-              <a:rPr lang="ko-KR" altLang="en-US" sz="1750" b="1" dirty="0">
-                <a:solidFill>
-                  <a:srgbClr val="101D42"/>
-                </a:solidFill>
-                <a:highlight>
-                  <a:srgbClr val="FFF0AD"/>
-                </a:highlight>
-                <a:latin typeface="Noto Sans KR" pitchFamily="34" charset="0"/>
-                <a:ea typeface="Noto Sans KR" pitchFamily="34" charset="-127"/>
-                <a:cs typeface="Noto Sans KR" pitchFamily="34" charset="-120"/>
-              </a:rPr>
-              <a:t>충분히 생각할 시간</a:t>
-            </a:r>
-            <a:pPr algn="l" indent="0" marL="0">
-              <a:lnSpc>
-                <a:spcPts val="2500"/>
-              </a:lnSpc>
-              <a:buNone/>
-            </a:pPr>
-            <a:r>
-              <a:rPr lang="ko-KR" altLang="en-US" sz="1750" dirty="0">
-                <a:solidFill>
-                  <a:srgbClr val="101D42"/>
-                </a:solidFill>
-                <a:latin typeface="Noto Sans KR" pitchFamily="34" charset="0"/>
-                <a:ea typeface="Noto Sans KR" pitchFamily="34" charset="-127"/>
-                <a:cs typeface="Noto Sans KR" pitchFamily="34" charset="-120"/>
-              </a:rPr>
-              <a:t>을 주는</a:t>
-            </a:r>
-            <a:endParaRPr lang="en-US" sz="1750" dirty="0"/>
-          </a:p>
-          <a:p>
-            <a:pPr algn="l" indent="0" marL="0">
-              <a:lnSpc>
-                <a:spcPts val="2500"/>
-              </a:lnSpc>
-              <a:buNone/>
-            </a:pPr>
-            <a:r>
-              <a:rPr lang="ko-KR" altLang="en-US" sz="1750" dirty="0">
-                <a:solidFill>
-                  <a:srgbClr val="101D42"/>
-                </a:solidFill>
-                <a:latin typeface="Noto Sans KR" pitchFamily="34" charset="0"/>
-                <a:ea typeface="Noto Sans KR" pitchFamily="34" charset="-127"/>
-                <a:cs typeface="Noto Sans KR" pitchFamily="34" charset="-120"/>
-              </a:rPr>
-              <a:t>방향으로 써야 합니다.</a:t>
-            </a:r>
-            <a:endParaRPr lang="en-US" sz="1750" dirty="0"/>
+                <a:spcPts val="1300"/>
+              </a:lnSpc>
+              <a:buNone/>
+            </a:pPr>
+            <a:r>
+              <a:rPr lang="ko-KR" altLang="en-US" sz="1000" b="1" dirty="0">
+                <a:solidFill>
+                  <a:srgbClr val="FFFFFF"/>
+                </a:solidFill>
+                <a:latin typeface="Noto Sans KR" pitchFamily="34" charset="0"/>
+                <a:ea typeface="Noto Sans KR" pitchFamily="34" charset="-122"/>
+                <a:cs typeface="Noto Sans KR" pitchFamily="34" charset="-120"/>
+              </a:rPr>
+              <a:t>?</a:t>
+            </a:r>
+            <a:endParaRPr lang="en-US" sz="1000" dirty="0"/>
           </a:p>
         </p:txBody>
       </p:sp>
       <p:sp>
         <p:nvSpPr>
-          <p:cNvPr id="33" name="txt-4-10"/>
+          <p:cNvPr id="36" name="txt-4-13"/>
           <p:cNvSpPr txBox="1"/>
           <p:nvPr/>
         </p:nvSpPr>
         <p:spPr>
           <a:xfrm>
-            <a:off x="545973" y="8965946"/>
+            <a:off x="545973" y="9499346"/>
             <a:ext cx="224155" cy="214630"/>
           </a:xfrm>
           <a:prstGeom prst="rect">
@@ -9568,7 +9270,7 @@
                   <a:srgbClr val="FFFFFF"/>
                 </a:solidFill>
                 <a:latin typeface="Noto Sans KR" pitchFamily="34" charset="0"/>
-                <a:ea typeface="Noto Sans KR" pitchFamily="34" charset="-127"/>
+                <a:ea typeface="Noto Sans KR" pitchFamily="34" charset="-122"/>
                 <a:cs typeface="Noto Sans KR" pitchFamily="34" charset="-120"/>
               </a:rPr>
               <a:t>?</a:t>
@@ -9579,14 +9281,14 @@
       </p:sp>
       <p:sp>
         <p:nvSpPr>
-          <p:cNvPr id="34" name="txt-4-11"/>
+          <p:cNvPr id="37" name="txt-4-14"/>
           <p:cNvSpPr txBox="1"/>
           <p:nvPr/>
         </p:nvSpPr>
         <p:spPr>
           <a:xfrm>
-            <a:off x="812673" y="8910447"/>
-            <a:ext cx="2582672" cy="880110"/>
+            <a:off x="381000" y="9901301"/>
+            <a:ext cx="6350000" cy="408940"/>
           </a:xfrm>
           <a:prstGeom prst="rect">
             <a:avLst/>
@@ -9600,75 +9302,55 @@
           <a:p>
             <a:pPr algn="l" indent="0" marL="0">
               <a:lnSpc>
-                <a:spcPts val="2100"/>
-              </a:lnSpc>
-              <a:buNone/>
-            </a:pPr>
-            <a:r>
-              <a:rPr lang="ko-KR" altLang="en-US" sz="1300" b="1" dirty="0">
-                <a:solidFill>
-                  <a:srgbClr val="15543C"/>
-                </a:solidFill>
-                <a:latin typeface="Noto Sans KR" pitchFamily="34" charset="0"/>
-                <a:ea typeface="Noto Sans KR" pitchFamily="34" charset="-127"/>
-                <a:cs typeface="Noto Sans KR" pitchFamily="34" charset="-120"/>
-              </a:rPr>
-              <a:t>내 말로 설명할 수 있는가?</a:t>
-            </a:r>
-            <a:endParaRPr lang="en-US" sz="1300" dirty="0"/>
-          </a:p>
-          <a:p>
-            <a:pPr algn="l" indent="0" marL="0">
-              <a:lnSpc>
-                <a:spcPts val="2100"/>
-              </a:lnSpc>
-              <a:buNone/>
-            </a:pPr>
-            <a:r>
-              <a:rPr lang="ko-KR" altLang="en-US" sz="1300" b="1" dirty="0">
-                <a:solidFill>
-                  <a:srgbClr val="15543C"/>
-                </a:solidFill>
-                <a:latin typeface="Noto Sans KR" pitchFamily="34" charset="0"/>
-                <a:ea typeface="Noto Sans KR" pitchFamily="34" charset="-127"/>
-                <a:cs typeface="Noto Sans KR" pitchFamily="34" charset="-120"/>
-              </a:rPr>
-              <a:t>그렇게 생각한 근거는 무엇인가?</a:t>
-            </a:r>
-            <a:endParaRPr lang="en-US" sz="1300" dirty="0"/>
-          </a:p>
-          <a:p>
-            <a:pPr algn="l" indent="0" marL="0">
-              <a:lnSpc>
-                <a:spcPts val="2100"/>
-              </a:lnSpc>
-              <a:buNone/>
-            </a:pPr>
-            <a:r>
-              <a:rPr lang="ko-KR" altLang="en-US" sz="1300" b="1" dirty="0">
-                <a:solidFill>
-                  <a:srgbClr val="15543C"/>
-                </a:solidFill>
-                <a:latin typeface="Noto Sans KR" pitchFamily="34" charset="0"/>
-                <a:ea typeface="Noto Sans KR" pitchFamily="34" charset="-127"/>
-                <a:cs typeface="Noto Sans KR" pitchFamily="34" charset="-120"/>
-              </a:rPr>
-              <a:t>다른 상황에도 적용할 수 있는가?</a:t>
-            </a:r>
-            <a:endParaRPr lang="en-US" sz="1300" dirty="0"/>
+                <a:spcPts val="1400"/>
+              </a:lnSpc>
+              <a:buNone/>
+            </a:pPr>
+            <a:r>
+              <a:rPr lang="ko-KR" altLang="en-US" sz="830" dirty="0">
+                <a:solidFill>
+                  <a:srgbClr val="43516A"/>
+                </a:solidFill>
+                <a:latin typeface="Noto Sans KR" pitchFamily="34" charset="0"/>
+                <a:ea typeface="Noto Sans KR" pitchFamily="34" charset="-122"/>
+                <a:cs typeface="Noto Sans KR" pitchFamily="34" charset="-120"/>
+              </a:rPr>
+              <a:t>Kreijkes 외(2026), Computers &amp; Education 243, 105514.</a:t>
+            </a:r>
+            <a:endParaRPr lang="en-US" sz="830" dirty="0"/>
+          </a:p>
+          <a:p>
+            <a:pPr algn="l" indent="0" marL="0">
+              <a:lnSpc>
+                <a:spcPts val="1400"/>
+              </a:lnSpc>
+              <a:buNone/>
+            </a:pPr>
+            <a:r>
+              <a:rPr lang="ko-KR" altLang="en-US" sz="830" dirty="0">
+                <a:solidFill>
+                  <a:srgbClr val="43516A"/>
+                </a:solidFill>
+                <a:latin typeface="Noto Sans KR" pitchFamily="34" charset="0"/>
+                <a:ea typeface="Noto Sans KR" pitchFamily="34" charset="-122"/>
+                <a:cs typeface="Noto Sans KR" pitchFamily="34" charset="-120"/>
+              </a:rPr>
+              <a:t>14~15세 중등학생 연구이며, 초등학생이나 부기의 효과를 직접 검증한 결과는 아닙니다.</a:t>
+            </a:r>
+            <a:endParaRPr lang="en-US" sz="830" dirty="0"/>
           </a:p>
         </p:txBody>
       </p:sp>
       <p:sp>
         <p:nvSpPr>
-          <p:cNvPr id="35" name="txt-4-12"/>
+          <p:cNvPr id="38" name="txt-4-15"/>
           <p:cNvSpPr txBox="1"/>
           <p:nvPr/>
         </p:nvSpPr>
         <p:spPr>
           <a:xfrm>
-            <a:off x="545973" y="9232646"/>
-            <a:ext cx="224155" cy="214630"/>
+            <a:off x="3504565" y="10362692"/>
+            <a:ext cx="424815" cy="214630"/>
           </a:xfrm>
           <a:prstGeom prst="rect">
             <a:avLst/>
@@ -9687,158 +9369,12 @@
               <a:buNone/>
             </a:pPr>
             <a:r>
-              <a:rPr lang="ko-KR" altLang="en-US" sz="1000" b="1" dirty="0">
-                <a:solidFill>
-                  <a:srgbClr val="FFFFFF"/>
-                </a:solidFill>
-                <a:latin typeface="Noto Sans KR" pitchFamily="34" charset="0"/>
-                <a:ea typeface="Noto Sans KR" pitchFamily="34" charset="-127"/>
-                <a:cs typeface="Noto Sans KR" pitchFamily="34" charset="-120"/>
-              </a:rPr>
-              <a:t>?</a:t>
-            </a:r>
-            <a:endParaRPr lang="en-US" sz="1000" dirty="0"/>
-          </a:p>
-        </p:txBody>
-      </p:sp>
-      <p:sp>
-        <p:nvSpPr>
-          <p:cNvPr id="36" name="txt-4-13"/>
-          <p:cNvSpPr txBox="1"/>
-          <p:nvPr/>
-        </p:nvSpPr>
-        <p:spPr>
-          <a:xfrm>
-            <a:off x="545973" y="9499346"/>
-            <a:ext cx="224155" cy="214630"/>
-          </a:xfrm>
-          <a:prstGeom prst="rect">
-            <a:avLst/>
-          </a:prstGeom>
-          <a:noFill/>
-          <a:ln/>
-        </p:spPr>
-        <p:txBody>
-          <a:bodyPr wrap="square" lIns="0" tIns="0" rIns="0" bIns="0" rtlCol="0" anchor="t"/>
-          <a:lstStyle/>
-          <a:p>
-            <a:pPr algn="l" indent="0" marL="0">
-              <a:lnSpc>
-                <a:spcPts val="1300"/>
-              </a:lnSpc>
-              <a:buNone/>
-            </a:pPr>
-            <a:r>
-              <a:rPr lang="ko-KR" altLang="en-US" sz="1000" b="1" dirty="0">
-                <a:solidFill>
-                  <a:srgbClr val="FFFFFF"/>
-                </a:solidFill>
-                <a:latin typeface="Noto Sans KR" pitchFamily="34" charset="0"/>
-                <a:ea typeface="Noto Sans KR" pitchFamily="34" charset="-127"/>
-                <a:cs typeface="Noto Sans KR" pitchFamily="34" charset="-120"/>
-              </a:rPr>
-              <a:t>?</a:t>
-            </a:r>
-            <a:endParaRPr lang="en-US" sz="1000" dirty="0"/>
-          </a:p>
-        </p:txBody>
-      </p:sp>
-      <p:sp>
-        <p:nvSpPr>
-          <p:cNvPr id="37" name="txt-4-14"/>
-          <p:cNvSpPr txBox="1"/>
-          <p:nvPr/>
-        </p:nvSpPr>
-        <p:spPr>
-          <a:xfrm>
-            <a:off x="381000" y="9901301"/>
-            <a:ext cx="4458208" cy="408940"/>
-          </a:xfrm>
-          <a:prstGeom prst="rect">
-            <a:avLst/>
-          </a:prstGeom>
-          <a:noFill/>
-          <a:ln/>
-        </p:spPr>
-        <p:txBody>
-          <a:bodyPr wrap="square" lIns="0" tIns="0" rIns="0" bIns="0" rtlCol="0" anchor="t"/>
-          <a:lstStyle/>
-          <a:p>
-            <a:pPr algn="l" indent="0" marL="0">
-              <a:lnSpc>
-                <a:spcPts val="1400"/>
-              </a:lnSpc>
-              <a:buNone/>
-            </a:pPr>
-            <a:r>
-              <a:rPr lang="ko-KR" altLang="en-US" sz="830" dirty="0">
-                <a:solidFill>
-                  <a:srgbClr val="43516A"/>
-                </a:solidFill>
-                <a:latin typeface="Noto Sans KR" pitchFamily="34" charset="0"/>
-                <a:ea typeface="Noto Sans KR" pitchFamily="34" charset="-127"/>
-                <a:cs typeface="Noto Sans KR" pitchFamily="34" charset="-120"/>
-              </a:rPr>
-              <a:t>연구는 성인의 인터넷 검색 실험이며, 초등학생의 SNS 효과를 직접 검증한 결과는 아닙니다.</a:t>
-            </a:r>
-            <a:endParaRPr lang="en-US" sz="830" dirty="0"/>
-          </a:p>
-          <a:p>
-            <a:pPr algn="l" indent="0" marL="0">
-              <a:lnSpc>
-                <a:spcPts val="1400"/>
-              </a:lnSpc>
-              <a:buNone/>
-            </a:pPr>
-            <a:r>
-              <a:rPr lang="ko-KR" altLang="en-US" sz="830" dirty="0">
-                <a:solidFill>
-                  <a:srgbClr val="43516A"/>
-                </a:solidFill>
-                <a:latin typeface="Noto Sans KR" pitchFamily="34" charset="0"/>
-                <a:ea typeface="Noto Sans KR" pitchFamily="34" charset="-127"/>
-                <a:cs typeface="Noto Sans KR" pitchFamily="34" charset="-120"/>
-              </a:rPr>
-              <a:t>출처: Fisher et al. (2015) · Ward (2021)</a:t>
-            </a:r>
-            <a:endParaRPr lang="en-US" sz="830" dirty="0"/>
-          </a:p>
-        </p:txBody>
-      </p:sp>
-      <p:sp>
-        <p:nvSpPr>
-          <p:cNvPr id="38" name="txt-4-15"/>
-          <p:cNvSpPr txBox="1"/>
-          <p:nvPr/>
-        </p:nvSpPr>
-        <p:spPr>
-          <a:xfrm>
-            <a:off x="3504565" y="10362692"/>
-            <a:ext cx="424815" cy="214630"/>
-          </a:xfrm>
-          <a:prstGeom prst="rect">
-            <a:avLst/>
-          </a:prstGeom>
-          <a:noFill/>
-          <a:ln/>
-        </p:spPr>
-        <p:txBody>
-          <a:bodyPr wrap="square" lIns="0" tIns="0" rIns="0" bIns="0" rtlCol="0" anchor="t"/>
-          <a:lstStyle/>
-          <a:p>
-            <a:pPr algn="l" indent="0" marL="0">
-              <a:lnSpc>
-                <a:spcPts val="1300"/>
-              </a:lnSpc>
-              <a:buNone/>
-            </a:pPr>
-            <a:r>
               <a:rPr lang="ko-KR" altLang="en-US" sz="1000" dirty="0">
                 <a:solidFill>
                   <a:srgbClr val="101D42"/>
                 </a:solidFill>
                 <a:latin typeface="Noto Sans KR" pitchFamily="34" charset="0"/>
-                <a:ea typeface="Noto Sans KR" pitchFamily="34" charset="-127"/>
+                <a:ea typeface="Noto Sans KR" pitchFamily="34" charset="-122"/>
                 <a:cs typeface="Noto Sans KR" pitchFamily="34" charset="-120"/>
               </a:rPr>
               <a:t>3 / 4</a:t>
@@ -10970,7 +10506,7 @@
                   <a:srgbClr val="101D42"/>
                 </a:solidFill>
                 <a:latin typeface="Noto Serif KR Black" pitchFamily="34" charset="0"/>
-                <a:ea typeface="Noto Serif KR Black" pitchFamily="34" charset="-127"/>
+                <a:ea typeface="Noto Serif KR Black" pitchFamily="34" charset="-122"/>
                 <a:cs typeface="Noto Serif KR Black" pitchFamily="34" charset="-120"/>
               </a:rPr>
               <a:t>교실의 문제에서 출발한 부기</a:t>
@@ -11012,7 +10548,7 @@
                   <a:srgbClr val="101D42"/>
                 </a:solidFill>
                 <a:latin typeface="Noto Serif KR Black" pitchFamily="34" charset="0"/>
-                <a:ea typeface="Noto Serif KR Black" pitchFamily="34" charset="-127"/>
+                <a:ea typeface="Noto Serif KR Black" pitchFamily="34" charset="-122"/>
                 <a:cs typeface="Noto Serif KR Black" pitchFamily="34" charset="-120"/>
               </a:rPr>
               <a:t>지금 학교 현장에는</a:t>
@@ -11032,7 +10568,7 @@
                   <a:srgbClr val="15543C"/>
                 </a:solidFill>
                 <a:latin typeface="Noto Serif KR Black" pitchFamily="34" charset="0"/>
-                <a:ea typeface="Noto Serif KR Black" pitchFamily="34" charset="-127"/>
+                <a:ea typeface="Noto Serif KR Black" pitchFamily="34" charset="-122"/>
                 <a:cs typeface="Noto Serif KR Black" pitchFamily="34" charset="-120"/>
               </a:rPr>
               <a:t>독서가 절실합니다.</a:t>
@@ -11074,7 +10610,7 @@
                   <a:srgbClr val="15543C"/>
                 </a:solidFill>
                 <a:latin typeface="Noto Serif KR Black" pitchFamily="34" charset="0"/>
-                <a:ea typeface="Noto Serif KR Black" pitchFamily="34" charset="-127"/>
+                <a:ea typeface="Noto Serif KR Black" pitchFamily="34" charset="-122"/>
                 <a:cs typeface="Noto Serif KR Black" pitchFamily="34" charset="-120"/>
               </a:rPr>
               <a:t>고전의 지혜에서 시작하고자 합니다</a:t>
@@ -11116,7 +10652,7 @@
                   <a:srgbClr val="101D42"/>
                 </a:solidFill>
                 <a:latin typeface="Noto Sans KR" pitchFamily="34" charset="0"/>
-                <a:ea typeface="Noto Sans KR" pitchFamily="34" charset="-127"/>
+                <a:ea typeface="Noto Sans KR" pitchFamily="34" charset="-122"/>
                 <a:cs typeface="Noto Sans KR" pitchFamily="34" charset="-120"/>
               </a:rPr>
               <a:t>사람과 세상을 이해하고 </a:t>
@@ -11136,7 +10672,7 @@
                   <a:srgbClr val="FFF0AD"/>
                 </a:highlight>
                 <a:latin typeface="Noto Sans KR" pitchFamily="34" charset="0"/>
-                <a:ea typeface="Noto Sans KR" pitchFamily="34" charset="-127"/>
+                <a:ea typeface="Noto Sans KR" pitchFamily="34" charset="-122"/>
                 <a:cs typeface="Noto Sans KR" pitchFamily="34" charset="-120"/>
               </a:rPr>
               <a:t>스스로 생각할 힘</a:t>
@@ -11153,7 +10689,7 @@
                   <a:srgbClr val="101D42"/>
                 </a:solidFill>
                 <a:latin typeface="Noto Sans KR" pitchFamily="34" charset="0"/>
-                <a:ea typeface="Noto Sans KR" pitchFamily="34" charset="-127"/>
+                <a:ea typeface="Noto Sans KR" pitchFamily="34" charset="-122"/>
                 <a:cs typeface="Noto Sans KR" pitchFamily="34" charset="-120"/>
               </a:rPr>
               <a:t>을 기르기 위해, </a:t>
@@ -11173,7 +10709,7 @@
                   <a:srgbClr val="FFF0AD"/>
                 </a:highlight>
                 <a:latin typeface="Noto Sans KR" pitchFamily="34" charset="0"/>
-                <a:ea typeface="Noto Sans KR" pitchFamily="34" charset="-127"/>
+                <a:ea typeface="Noto Sans KR" pitchFamily="34" charset="-122"/>
                 <a:cs typeface="Noto Sans KR" pitchFamily="34" charset="-120"/>
               </a:rPr>
               <a:t>고전의 지혜</a:t>
@@ -11190,7 +10726,7 @@
                   <a:srgbClr val="101D42"/>
                 </a:solidFill>
                 <a:latin typeface="Noto Sans KR" pitchFamily="34" charset="0"/>
-                <a:ea typeface="Noto Sans KR" pitchFamily="34" charset="-127"/>
+                <a:ea typeface="Noto Sans KR" pitchFamily="34" charset="-122"/>
                 <a:cs typeface="Noto Sans KR" pitchFamily="34" charset="-120"/>
               </a:rPr>
               <a:t>를</a:t>
@@ -11210,7 +10746,7 @@
                   <a:srgbClr val="101D42"/>
                 </a:solidFill>
                 <a:latin typeface="Noto Sans KR" pitchFamily="34" charset="0"/>
-                <a:ea typeface="Noto Sans KR" pitchFamily="34" charset="-127"/>
+                <a:ea typeface="Noto Sans KR" pitchFamily="34" charset="-122"/>
                 <a:cs typeface="Noto Sans KR" pitchFamily="34" charset="-120"/>
               </a:rPr>
               <a:t>빌리고자 했습니다. </a:t>
@@ -11230,7 +10766,7 @@
                   <a:srgbClr val="FFF0AD"/>
                 </a:highlight>
                 <a:latin typeface="Noto Sans KR" pitchFamily="34" charset="0"/>
-                <a:ea typeface="Noto Sans KR" pitchFamily="34" charset="-127"/>
+                <a:ea typeface="Noto Sans KR" pitchFamily="34" charset="-122"/>
                 <a:cs typeface="Noto Sans KR" pitchFamily="34" charset="-120"/>
               </a:rPr>
               <a:t>우정과 책임</a:t>
@@ -11247,7 +10783,7 @@
                   <a:srgbClr val="101D42"/>
                 </a:solidFill>
                 <a:latin typeface="Noto Sans KR" pitchFamily="34" charset="0"/>
-                <a:ea typeface="Noto Sans KR" pitchFamily="34" charset="-127"/>
+                <a:ea typeface="Noto Sans KR" pitchFamily="34" charset="-122"/>
                 <a:cs typeface="Noto Sans KR" pitchFamily="34" charset="-120"/>
               </a:rPr>
               <a:t>, </a:t>
@@ -11267,7 +10803,7 @@
                   <a:srgbClr val="FFF0AD"/>
                 </a:highlight>
                 <a:latin typeface="Noto Sans KR" pitchFamily="34" charset="0"/>
-                <a:ea typeface="Noto Sans KR" pitchFamily="34" charset="-127"/>
+                <a:ea typeface="Noto Sans KR" pitchFamily="34" charset="-122"/>
                 <a:cs typeface="Noto Sans KR" pitchFamily="34" charset="-120"/>
               </a:rPr>
               <a:t>공정과 나눔</a:t>
@@ -11284,7 +10820,7 @@
                   <a:srgbClr val="101D42"/>
                 </a:solidFill>
                 <a:latin typeface="Noto Sans KR" pitchFamily="34" charset="0"/>
-                <a:ea typeface="Noto Sans KR" pitchFamily="34" charset="-127"/>
+                <a:ea typeface="Noto Sans KR" pitchFamily="34" charset="-122"/>
                 <a:cs typeface="Noto Sans KR" pitchFamily="34" charset="-120"/>
               </a:rPr>
               <a:t>을 읽으며 ‘왜 그런 선택을 했을까’,</a:t>
@@ -11304,7 +10840,7 @@
                   <a:srgbClr val="101D42"/>
                 </a:solidFill>
                 <a:latin typeface="Noto Sans KR" pitchFamily="34" charset="0"/>
-                <a:ea typeface="Noto Sans KR" pitchFamily="34" charset="-127"/>
+                <a:ea typeface="Noto Sans KR" pitchFamily="34" charset="-122"/>
                 <a:cs typeface="Noto Sans KR" pitchFamily="34" charset="-120"/>
               </a:rPr>
               <a:t>‘나라면 어떻게 했을까’를 함께 묻습니다.</a:t>
@@ -11346,7 +10882,7 @@
                   <a:srgbClr val="15543C"/>
                 </a:solidFill>
                 <a:latin typeface="Noto Serif KR Black" pitchFamily="34" charset="0"/>
-                <a:ea typeface="Noto Serif KR Black" pitchFamily="34" charset="-127"/>
+                <a:ea typeface="Noto Serif KR Black" pitchFamily="34" charset="-122"/>
                 <a:cs typeface="Noto Serif KR Black" pitchFamily="34" charset="-120"/>
               </a:rPr>
               <a:t>초등교사들이 뜻을 모아 만들었습니다</a:t>
@@ -11388,11 +10924,14 @@
                   <a:srgbClr val="101D42"/>
                 </a:solidFill>
                 <a:latin typeface="Noto Sans KR" pitchFamily="34" charset="0"/>
-                <a:ea typeface="Noto Sans KR" pitchFamily="34" charset="-127"/>
-                <a:cs typeface="Noto Sans KR" pitchFamily="34" charset="-120"/>
-              </a:rPr>
-              <a:t>교실의 읽기 어려움을 풀고자 </a:t>
-            </a:r>
+                <a:ea typeface="Noto Sans KR" pitchFamily="34" charset="-122"/>
+                <a:cs typeface="Noto Sans KR" pitchFamily="34" charset="-120"/>
+              </a:rPr>
+              <a:t>책을 제공해도 모르는 낱말에서 멈추면 읽기의 재미를 느끼기 어렵습니다.</a:t>
+            </a:r>
+            <a:endParaRPr lang="en-US" sz="1650" dirty="0"/>
+          </a:p>
+          <a:p>
             <a:pPr algn="l" indent="0" marL="0">
               <a:lnSpc>
                 <a:spcPts val="2400"/>
@@ -11400,19 +10939,19 @@
               <a:buNone/>
             </a:pPr>
             <a:r>
-              <a:rPr lang="ko-KR" altLang="en-US" sz="1650" b="1" dirty="0">
-                <a:solidFill>
-                  <a:srgbClr val="101D42"/>
-                </a:solidFill>
-                <a:highlight>
-                  <a:srgbClr val="FFF0AD"/>
-                </a:highlight>
-                <a:latin typeface="Noto Sans KR" pitchFamily="34" charset="0"/>
-                <a:ea typeface="Noto Sans KR" pitchFamily="34" charset="-127"/>
-                <a:cs typeface="Noto Sans KR" pitchFamily="34" charset="-120"/>
-              </a:rPr>
-              <a:t>교사들이 기획</a:t>
-            </a:r>
+              <a:rPr lang="ko-KR" altLang="en-US" sz="1650" dirty="0">
+                <a:solidFill>
+                  <a:srgbClr val="101D42"/>
+                </a:solidFill>
+                <a:latin typeface="Noto Sans KR" pitchFamily="34" charset="0"/>
+                <a:ea typeface="Noto Sans KR" pitchFamily="34" charset="-122"/>
+                <a:cs typeface="Noto Sans KR" pitchFamily="34" charset="-120"/>
+              </a:rPr>
+              <a:t>읽던 자리의 뜻풀이와 교사의 질문을 연결해 이해를 돕고,</a:t>
+            </a:r>
+            <a:endParaRPr lang="en-US" sz="1650" dirty="0"/>
+          </a:p>
+          <a:p>
             <a:pPr algn="l" indent="0" marL="0">
               <a:lnSpc>
                 <a:spcPts val="2400"/>
@@ -11425,161 +10964,10 @@
                   <a:srgbClr val="101D42"/>
                 </a:solidFill>
                 <a:latin typeface="Noto Sans KR" pitchFamily="34" charset="0"/>
-                <a:ea typeface="Noto Sans KR" pitchFamily="34" charset="-127"/>
-                <a:cs typeface="Noto Sans KR" pitchFamily="34" charset="-120"/>
-              </a:rPr>
-              <a:t>하고, </a:t>
-            </a:r>
-            <a:pPr algn="l" indent="0" marL="0">
-              <a:lnSpc>
-                <a:spcPts val="2400"/>
-              </a:lnSpc>
-              <a:buNone/>
-            </a:pPr>
-            <a:r>
-              <a:rPr lang="ko-KR" altLang="en-US" sz="1650" b="1" dirty="0">
-                <a:solidFill>
-                  <a:srgbClr val="101D42"/>
-                </a:solidFill>
-                <a:highlight>
-                  <a:srgbClr val="FFF0AD"/>
-                </a:highlight>
-                <a:latin typeface="Noto Sans KR" pitchFamily="34" charset="0"/>
-                <a:ea typeface="Noto Sans KR" pitchFamily="34" charset="-127"/>
-                <a:cs typeface="Noto Sans KR" pitchFamily="34" charset="-120"/>
-              </a:rPr>
-              <a:t>기업의 지원</a:t>
-            </a:r>
-            <a:pPr algn="l" indent="0" marL="0">
-              <a:lnSpc>
-                <a:spcPts val="2400"/>
-              </a:lnSpc>
-              <a:buNone/>
-            </a:pPr>
-            <a:r>
-              <a:rPr lang="ko-KR" altLang="en-US" sz="1650" dirty="0">
-                <a:solidFill>
-                  <a:srgbClr val="101D42"/>
-                </a:solidFill>
-                <a:latin typeface="Noto Sans KR" pitchFamily="34" charset="0"/>
-                <a:ea typeface="Noto Sans KR" pitchFamily="34" charset="-127"/>
-                <a:cs typeface="Noto Sans KR" pitchFamily="34" charset="-120"/>
-              </a:rPr>
-              <a:t>을 더해 학교에</a:t>
-            </a:r>
-            <a:endParaRPr lang="en-US" sz="1650" dirty="0"/>
-          </a:p>
-          <a:p>
-            <a:pPr algn="l" indent="0" marL="0">
-              <a:lnSpc>
-                <a:spcPts val="2400"/>
-              </a:lnSpc>
-              <a:buNone/>
-            </a:pPr>
-            <a:r>
-              <a:rPr lang="ko-KR" altLang="en-US" sz="1650" dirty="0">
-                <a:solidFill>
-                  <a:srgbClr val="101D42"/>
-                </a:solidFill>
-                <a:latin typeface="Noto Sans KR" pitchFamily="34" charset="0"/>
-                <a:ea typeface="Noto Sans KR" pitchFamily="34" charset="-127"/>
-                <a:cs typeface="Noto Sans KR" pitchFamily="34" charset="-120"/>
-              </a:rPr>
-              <a:t>적용했습니다. 학교에서 </a:t>
-            </a:r>
-            <a:pPr algn="l" indent="0" marL="0">
-              <a:lnSpc>
-                <a:spcPts val="2400"/>
-              </a:lnSpc>
-              <a:buNone/>
-            </a:pPr>
-            <a:r>
-              <a:rPr lang="ko-KR" altLang="en-US" sz="1650" b="1" dirty="0">
-                <a:solidFill>
-                  <a:srgbClr val="101D42"/>
-                </a:solidFill>
-                <a:highlight>
-                  <a:srgbClr val="FFF0AD"/>
-                </a:highlight>
-                <a:latin typeface="Noto Sans KR" pitchFamily="34" charset="0"/>
-                <a:ea typeface="Noto Sans KR" pitchFamily="34" charset="-127"/>
-                <a:cs typeface="Noto Sans KR" pitchFamily="34" charset="-120"/>
-              </a:rPr>
-              <a:t>시범 사용</a:t>
-            </a:r>
-            <a:pPr algn="l" indent="0" marL="0">
-              <a:lnSpc>
-                <a:spcPts val="2400"/>
-              </a:lnSpc>
-              <a:buNone/>
-            </a:pPr>
-            <a:r>
-              <a:rPr lang="ko-KR" altLang="en-US" sz="1650" dirty="0">
-                <a:solidFill>
-                  <a:srgbClr val="101D42"/>
-                </a:solidFill>
-                <a:latin typeface="Noto Sans KR" pitchFamily="34" charset="0"/>
-                <a:ea typeface="Noto Sans KR" pitchFamily="34" charset="-127"/>
-                <a:cs typeface="Noto Sans KR" pitchFamily="34" charset="-120"/>
-              </a:rPr>
-              <a:t>을 통해 </a:t>
-            </a:r>
-            <a:pPr algn="l" indent="0" marL="0">
-              <a:lnSpc>
-                <a:spcPts val="2400"/>
-              </a:lnSpc>
-              <a:buNone/>
-            </a:pPr>
-            <a:r>
-              <a:rPr lang="ko-KR" altLang="en-US" sz="1650" b="1" dirty="0">
-                <a:solidFill>
-                  <a:srgbClr val="101D42"/>
-                </a:solidFill>
-                <a:highlight>
-                  <a:srgbClr val="FFF0AD"/>
-                </a:highlight>
-                <a:latin typeface="Noto Sans KR" pitchFamily="34" charset="0"/>
-                <a:ea typeface="Noto Sans KR" pitchFamily="34" charset="-127"/>
-                <a:cs typeface="Noto Sans KR" pitchFamily="34" charset="-120"/>
-              </a:rPr>
-              <a:t>계속 개선하고 발전</a:t>
-            </a:r>
-            <a:pPr algn="l" indent="0" marL="0">
-              <a:lnSpc>
-                <a:spcPts val="2400"/>
-              </a:lnSpc>
-              <a:buNone/>
-            </a:pPr>
-            <a:r>
-              <a:rPr lang="ko-KR" altLang="en-US" sz="1650" dirty="0">
-                <a:solidFill>
-                  <a:srgbClr val="101D42"/>
-                </a:solidFill>
-                <a:latin typeface="Noto Sans KR" pitchFamily="34" charset="0"/>
-                <a:ea typeface="Noto Sans KR" pitchFamily="34" charset="-127"/>
-                <a:cs typeface="Noto Sans KR" pitchFamily="34" charset="-120"/>
-              </a:rPr>
-              <a:t>시켜 나가고</a:t>
-            </a:r>
-            <a:endParaRPr lang="en-US" sz="1650" dirty="0"/>
-          </a:p>
-          <a:p>
-            <a:pPr algn="l" indent="0" marL="0">
-              <a:lnSpc>
-                <a:spcPts val="2400"/>
-              </a:lnSpc>
-              <a:buNone/>
-            </a:pPr>
-            <a:r>
-              <a:rPr lang="ko-KR" altLang="en-US" sz="1650" dirty="0">
-                <a:solidFill>
-                  <a:srgbClr val="101D42"/>
-                </a:solidFill>
-                <a:latin typeface="Noto Sans KR" pitchFamily="34" charset="0"/>
-                <a:ea typeface="Noto Sans KR" pitchFamily="34" charset="-127"/>
-                <a:cs typeface="Noto Sans KR" pitchFamily="34" charset="-120"/>
-              </a:rPr>
-              <a:t>있습니다.</a:t>
+                <a:ea typeface="Noto Sans KR" pitchFamily="34" charset="-122"/>
+                <a:cs typeface="Noto Sans KR" pitchFamily="34" charset="-120"/>
+              </a:rPr>
+              <a:t>한 권을 읽은 경험이 다음 책으로 이어지도록 구성했습니다.</a:t>
             </a:r>
             <a:endParaRPr lang="en-US" sz="1650" dirty="0"/>
           </a:p>
@@ -11618,7 +11006,7 @@
                   <a:srgbClr val="101D42"/>
                 </a:solidFill>
                 <a:latin typeface="Noto Sans KR" pitchFamily="34" charset="0"/>
-                <a:ea typeface="Noto Sans KR" pitchFamily="34" charset="-127"/>
+                <a:ea typeface="Noto Sans KR" pitchFamily="34" charset="-122"/>
                 <a:cs typeface="Noto Sans KR" pitchFamily="34" charset="-120"/>
               </a:rPr>
               <a:t>낱말 뜻 · 능동적 그림 읽기 · 다국어 지원</a:t>
@@ -11660,7 +11048,7 @@
                   <a:srgbClr val="15543C"/>
                 </a:solidFill>
                 <a:latin typeface="Noto Serif KR Black" pitchFamily="34" charset="0"/>
-                <a:ea typeface="Noto Serif KR Black" pitchFamily="34" charset="-127"/>
+                <a:ea typeface="Noto Serif KR Black" pitchFamily="34" charset="-122"/>
                 <a:cs typeface="Noto Serif KR Black" pitchFamily="34" charset="-120"/>
               </a:rPr>
               <a:t>읽기 지원</a:t>
@@ -11702,7 +11090,7 @@
                   <a:srgbClr val="101D42"/>
                 </a:solidFill>
                 <a:latin typeface="Noto Sans KR" pitchFamily="34" charset="0"/>
-                <a:ea typeface="Noto Sans KR" pitchFamily="34" charset="-127"/>
+                <a:ea typeface="Noto Sans KR" pitchFamily="34" charset="-122"/>
                 <a:cs typeface="Noto Sans KR" pitchFamily="34" charset="-120"/>
               </a:rPr>
               <a:t>캐릭터와의 대화 · 다양한 독후활동</a:t>
@@ -11744,7 +11132,7 @@
                   <a:srgbClr val="15543C"/>
                 </a:solidFill>
                 <a:latin typeface="Noto Serif KR Black" pitchFamily="34" charset="0"/>
-                <a:ea typeface="Noto Serif KR Black" pitchFamily="34" charset="-127"/>
+                <a:ea typeface="Noto Serif KR Black" pitchFamily="34" charset="-122"/>
                 <a:cs typeface="Noto Serif KR Black" pitchFamily="34" charset="-120"/>
               </a:rPr>
               <a:t>생각과 표현</a:t>
@@ -11786,7 +11174,7 @@
                   <a:srgbClr val="101D42"/>
                 </a:solidFill>
                 <a:latin typeface="Noto Sans KR" pitchFamily="34" charset="0"/>
-                <a:ea typeface="Noto Sans KR" pitchFamily="34" charset="-127"/>
+                <a:ea typeface="Noto Sans KR" pitchFamily="34" charset="-122"/>
                 <a:cs typeface="Noto Sans KR" pitchFamily="34" charset="-120"/>
               </a:rPr>
               <a:t>독서 기록 자산 · 수업 자료 · 학생 기록</a:t>
@@ -11828,7 +11216,7 @@
                   <a:srgbClr val="15543C"/>
                 </a:solidFill>
                 <a:latin typeface="Noto Serif KR Black" pitchFamily="34" charset="0"/>
-                <a:ea typeface="Noto Serif KR Black" pitchFamily="34" charset="-127"/>
+                <a:ea typeface="Noto Serif KR Black" pitchFamily="34" charset="-122"/>
                 <a:cs typeface="Noto Serif KR Black" pitchFamily="34" charset="-120"/>
               </a:rPr>
               <a:t>기록과 지도</a:t>
@@ -11870,10 +11258,10 @@
                   <a:srgbClr val="15543C"/>
                 </a:solidFill>
                 <a:latin typeface="Noto Serif KR Black" pitchFamily="34" charset="0"/>
-                <a:ea typeface="Noto Serif KR Black" pitchFamily="34" charset="-127"/>
+                <a:ea typeface="Noto Serif KR Black" pitchFamily="34" charset="-122"/>
                 <a:cs typeface="Noto Serif KR Black" pitchFamily="34" charset="-120"/>
               </a:rPr>
-              <a:t>모두가 차별 없이 함께 읽을 수 있도록</a:t>
+              <a:t>온라인과 오프라인에서 같은 수업을</a:t>
             </a:r>
             <a:endParaRPr lang="en-US" sz="2050" dirty="0"/>
           </a:p>
@@ -11912,11 +11300,14 @@
                   <a:srgbClr val="101D42"/>
                 </a:solidFill>
                 <a:latin typeface="Noto Sans KR" pitchFamily="34" charset="0"/>
-                <a:ea typeface="Noto Sans KR" pitchFamily="34" charset="-127"/>
-                <a:cs typeface="Noto Sans KR" pitchFamily="34" charset="-120"/>
-              </a:rPr>
-              <a:t>어려운 어휘는 </a:t>
-            </a:r>
+                <a:ea typeface="Noto Sans KR" pitchFamily="34" charset="-122"/>
+                <a:cs typeface="Noto Sans KR" pitchFamily="34" charset="-120"/>
+              </a:rPr>
+              <a:t>온라인에서는 화면에 답하고 포트폴리오에 기록합니다. 오프라인에서는 같은</a:t>
+            </a:r>
+            <a:endParaRPr lang="en-US" sz="1500" dirty="0"/>
+          </a:p>
+          <a:p>
             <a:pPr algn="l" indent="0" marL="0">
               <a:lnSpc>
                 <a:spcPts val="2100"/>
@@ -11924,169 +11315,15 @@
               <a:buNone/>
             </a:pPr>
             <a:r>
-              <a:rPr lang="ko-KR" altLang="en-US" sz="1500" b="1" dirty="0">
-                <a:solidFill>
-                  <a:srgbClr val="101D42"/>
-                </a:solidFill>
-                <a:highlight>
-                  <a:srgbClr val="FFF0AD"/>
-                </a:highlight>
-                <a:latin typeface="Noto Sans KR" pitchFamily="34" charset="0"/>
-                <a:ea typeface="Noto Sans KR" pitchFamily="34" charset="-127"/>
-                <a:cs typeface="Noto Sans KR" pitchFamily="34" charset="-120"/>
-              </a:rPr>
-              <a:t>디지털 도움</a:t>
-            </a:r>
-            <a:pPr algn="l" indent="0" marL="0">
-              <a:lnSpc>
-                <a:spcPts val="2100"/>
-              </a:lnSpc>
-              <a:buNone/>
-            </a:pPr>
-            <a:r>
               <a:rPr lang="ko-KR" altLang="en-US" sz="1500" dirty="0">
                 <a:solidFill>
                   <a:srgbClr val="101D42"/>
                 </a:solidFill>
                 <a:latin typeface="Noto Sans KR" pitchFamily="34" charset="0"/>
-                <a:ea typeface="Noto Sans KR" pitchFamily="34" charset="-127"/>
-                <a:cs typeface="Noto Sans KR" pitchFamily="34" charset="-120"/>
-              </a:rPr>
-              <a:t>으로, 언어의 차이는 </a:t>
-            </a:r>
-            <a:pPr algn="l" indent="0" marL="0">
-              <a:lnSpc>
-                <a:spcPts val="2100"/>
-              </a:lnSpc>
-              <a:buNone/>
-            </a:pPr>
-            <a:r>
-              <a:rPr lang="ko-KR" altLang="en-US" sz="1500" b="1" dirty="0">
-                <a:solidFill>
-                  <a:srgbClr val="101D42"/>
-                </a:solidFill>
-                <a:highlight>
-                  <a:srgbClr val="FFF0AD"/>
-                </a:highlight>
-                <a:latin typeface="Noto Sans KR" pitchFamily="34" charset="0"/>
-                <a:ea typeface="Noto Sans KR" pitchFamily="34" charset="-127"/>
-                <a:cs typeface="Noto Sans KR" pitchFamily="34" charset="-120"/>
-              </a:rPr>
-              <a:t>다국어 번역</a:t>
-            </a:r>
-            <a:pPr algn="l" indent="0" marL="0">
-              <a:lnSpc>
-                <a:spcPts val="2100"/>
-              </a:lnSpc>
-              <a:buNone/>
-            </a:pPr>
-            <a:r>
-              <a:rPr lang="ko-KR" altLang="en-US" sz="1500" dirty="0">
-                <a:solidFill>
-                  <a:srgbClr val="101D42"/>
-                </a:solidFill>
-                <a:latin typeface="Noto Sans KR" pitchFamily="34" charset="0"/>
-                <a:ea typeface="Noto Sans KR" pitchFamily="34" charset="-127"/>
-                <a:cs typeface="Noto Sans KR" pitchFamily="34" charset="-120"/>
-              </a:rPr>
-              <a:t>으로 지원합니다. </a:t>
-            </a:r>
-            <a:pPr algn="l" indent="0" marL="0">
-              <a:lnSpc>
-                <a:spcPts val="2100"/>
-              </a:lnSpc>
-              <a:buNone/>
-            </a:pPr>
-            <a:r>
-              <a:rPr lang="ko-KR" altLang="en-US" sz="1500" b="1" dirty="0">
-                <a:solidFill>
-                  <a:srgbClr val="101D42"/>
-                </a:solidFill>
-                <a:highlight>
-                  <a:srgbClr val="FFF0AD"/>
-                </a:highlight>
-                <a:latin typeface="Noto Sans KR" pitchFamily="34" charset="0"/>
-                <a:ea typeface="Noto Sans KR" pitchFamily="34" charset="-127"/>
-                <a:cs typeface="Noto Sans KR" pitchFamily="34" charset="-120"/>
-              </a:rPr>
-              <a:t>다문화</a:t>
-            </a:r>
-            <a:endParaRPr lang="en-US" sz="1500" dirty="0"/>
-          </a:p>
-          <a:p>
-            <a:pPr algn="l" indent="0" marL="0">
-              <a:lnSpc>
-                <a:spcPts val="2100"/>
-              </a:lnSpc>
-              <a:buNone/>
-            </a:pPr>
-            <a:r>
-              <a:rPr lang="ko-KR" altLang="en-US" sz="1500" b="1" dirty="0">
-                <a:solidFill>
-                  <a:srgbClr val="101D42"/>
-                </a:solidFill>
-                <a:highlight>
-                  <a:srgbClr val="FFF0AD"/>
-                </a:highlight>
-                <a:latin typeface="Noto Sans KR" pitchFamily="34" charset="0"/>
-                <a:ea typeface="Noto Sans KR" pitchFamily="34" charset="-127"/>
-                <a:cs typeface="Noto Sans KR" pitchFamily="34" charset="-120"/>
-              </a:rPr>
-              <a:t>학생</a:t>
-            </a:r>
-            <a:pPr algn="l" indent="0" marL="0">
-              <a:lnSpc>
-                <a:spcPts val="2100"/>
-              </a:lnSpc>
-              <a:buNone/>
-            </a:pPr>
-            <a:r>
-              <a:rPr lang="ko-KR" altLang="en-US" sz="1500" dirty="0">
-                <a:solidFill>
-                  <a:srgbClr val="101D42"/>
-                </a:solidFill>
-                <a:latin typeface="Noto Sans KR" pitchFamily="34" charset="0"/>
-                <a:ea typeface="Noto Sans KR" pitchFamily="34" charset="-127"/>
-                <a:cs typeface="Noto Sans KR" pitchFamily="34" charset="-120"/>
-              </a:rPr>
-              <a:t>을 포함한 </a:t>
-            </a:r>
-            <a:pPr algn="l" indent="0" marL="0">
-              <a:lnSpc>
-                <a:spcPts val="2100"/>
-              </a:lnSpc>
-              <a:buNone/>
-            </a:pPr>
-            <a:r>
-              <a:rPr lang="ko-KR" altLang="en-US" sz="1500" b="1" dirty="0">
-                <a:solidFill>
-                  <a:srgbClr val="101D42"/>
-                </a:solidFill>
-                <a:highlight>
-                  <a:srgbClr val="FFF0AD"/>
-                </a:highlight>
-                <a:latin typeface="Noto Sans KR" pitchFamily="34" charset="0"/>
-                <a:ea typeface="Noto Sans KR" pitchFamily="34" charset="-127"/>
-                <a:cs typeface="Noto Sans KR" pitchFamily="34" charset="-120"/>
-              </a:rPr>
-              <a:t>모두가 차별 없이 함께 읽는 가치</a:t>
-            </a:r>
-            <a:pPr algn="l" indent="0" marL="0">
-              <a:lnSpc>
-                <a:spcPts val="2100"/>
-              </a:lnSpc>
-              <a:buNone/>
-            </a:pPr>
-            <a:r>
-              <a:rPr lang="ko-KR" altLang="en-US" sz="1500" dirty="0">
-                <a:solidFill>
-                  <a:srgbClr val="101D42"/>
-                </a:solidFill>
-                <a:latin typeface="Noto Sans KR" pitchFamily="34" charset="0"/>
-                <a:ea typeface="Noto Sans KR" pitchFamily="34" charset="-127"/>
-                <a:cs typeface="Noto Sans KR" pitchFamily="34" charset="-120"/>
-              </a:rPr>
-              <a:t>를 확산하고자 합니다.</a:t>
+                <a:ea typeface="Noto Sans KR" pitchFamily="34" charset="-122"/>
+                <a:cs typeface="Noto Sans KR" pitchFamily="34" charset="-120"/>
+              </a:rPr>
+              <a:t>활동지를 인쇄해 손글씨, 그림, 역할극으로 읽은 내용을 표현합니다.</a:t>
             </a:r>
             <a:endParaRPr lang="en-US" sz="1500" dirty="0"/>
           </a:p>
@@ -12125,11 +11362,14 @@
                   <a:srgbClr val="101D42"/>
                 </a:solidFill>
                 <a:latin typeface="Noto Sans KR" pitchFamily="34" charset="0"/>
-                <a:ea typeface="Noto Sans KR" pitchFamily="34" charset="-127"/>
-                <a:cs typeface="Noto Sans KR" pitchFamily="34" charset="-120"/>
-              </a:rPr>
-              <a:t>학생에게는 </a:t>
-            </a:r>
+                <a:ea typeface="Noto Sans KR" pitchFamily="34" charset="-122"/>
+                <a:cs typeface="Noto Sans KR" pitchFamily="34" charset="-120"/>
+              </a:rPr>
+              <a:t>교사는 우리 반의 고민에 맞는 책과 질문을 고르고, 학생의 답을 보며</a:t>
+            </a:r>
+            <a:endParaRPr lang="en-US" sz="1500" dirty="0"/>
+          </a:p>
+          <a:p>
             <a:pPr algn="l" indent="0" marL="0">
               <a:lnSpc>
                 <a:spcPts val="2100"/>
@@ -12137,92 +11377,15 @@
               <a:buNone/>
             </a:pPr>
             <a:r>
-              <a:rPr lang="ko-KR" altLang="en-US" sz="1500" b="1" dirty="0">
-                <a:solidFill>
-                  <a:srgbClr val="101D42"/>
-                </a:solidFill>
-                <a:highlight>
-                  <a:srgbClr val="FFF0AD"/>
-                </a:highlight>
-                <a:latin typeface="Noto Sans KR" pitchFamily="34" charset="0"/>
-                <a:ea typeface="Noto Sans KR" pitchFamily="34" charset="-127"/>
-                <a:cs typeface="Noto Sans KR" pitchFamily="34" charset="-120"/>
-              </a:rPr>
-              <a:t>충분히 읽고 생각할 시간</a:t>
-            </a:r>
-            <a:pPr algn="l" indent="0" marL="0">
-              <a:lnSpc>
-                <a:spcPts val="2100"/>
-              </a:lnSpc>
-              <a:buNone/>
-            </a:pPr>
-            <a:r>
               <a:rPr lang="ko-KR" altLang="en-US" sz="1500" dirty="0">
                 <a:solidFill>
                   <a:srgbClr val="101D42"/>
                 </a:solidFill>
                 <a:latin typeface="Noto Sans KR" pitchFamily="34" charset="0"/>
-                <a:ea typeface="Noto Sans KR" pitchFamily="34" charset="-127"/>
-                <a:cs typeface="Noto Sans KR" pitchFamily="34" charset="-120"/>
-              </a:rPr>
-              <a:t>을, 교사에게는 </a:t>
-            </a:r>
-            <a:pPr algn="l" indent="0" marL="0">
-              <a:lnSpc>
-                <a:spcPts val="2100"/>
-              </a:lnSpc>
-              <a:buNone/>
-            </a:pPr>
-            <a:r>
-              <a:rPr lang="ko-KR" altLang="en-US" sz="1500" b="1" dirty="0">
-                <a:solidFill>
-                  <a:srgbClr val="101D42"/>
-                </a:solidFill>
-                <a:highlight>
-                  <a:srgbClr val="FFF0AD"/>
-                </a:highlight>
-                <a:latin typeface="Noto Sans KR" pitchFamily="34" charset="0"/>
-                <a:ea typeface="Noto Sans KR" pitchFamily="34" charset="-127"/>
-                <a:cs typeface="Noto Sans KR" pitchFamily="34" charset="-120"/>
-              </a:rPr>
-              <a:t>수업 준비와 개별 지도</a:t>
-            </a:r>
-            <a:pPr algn="l" indent="0" marL="0">
-              <a:lnSpc>
-                <a:spcPts val="2100"/>
-              </a:lnSpc>
-              <a:buNone/>
-            </a:pPr>
-            <a:r>
-              <a:rPr lang="ko-KR" altLang="en-US" sz="1500" dirty="0">
-                <a:solidFill>
-                  <a:srgbClr val="101D42"/>
-                </a:solidFill>
-                <a:latin typeface="Noto Sans KR" pitchFamily="34" charset="0"/>
-                <a:ea typeface="Noto Sans KR" pitchFamily="34" charset="-127"/>
-                <a:cs typeface="Noto Sans KR" pitchFamily="34" charset="-120"/>
-              </a:rPr>
-              <a:t>를 위한</a:t>
-            </a:r>
-            <a:endParaRPr lang="en-US" sz="1500" dirty="0"/>
-          </a:p>
-          <a:p>
-            <a:pPr algn="l" indent="0" marL="0">
-              <a:lnSpc>
-                <a:spcPts val="2100"/>
-              </a:lnSpc>
-              <a:buNone/>
-            </a:pPr>
-            <a:r>
-              <a:rPr lang="ko-KR" altLang="en-US" sz="1500" dirty="0">
-                <a:solidFill>
-                  <a:srgbClr val="101D42"/>
-                </a:solidFill>
-                <a:latin typeface="Noto Sans KR" pitchFamily="34" charset="0"/>
-                <a:ea typeface="Noto Sans KR" pitchFamily="34" charset="-127"/>
-                <a:cs typeface="Noto Sans KR" pitchFamily="34" charset="-120"/>
-              </a:rPr>
-              <a:t>지원을 요청드립니다.</a:t>
+                <a:ea typeface="Noto Sans KR" pitchFamily="34" charset="-122"/>
+                <a:cs typeface="Noto Sans KR" pitchFamily="34" charset="-120"/>
+              </a:rPr>
+              <a:t>다음 질문과 피드백을 정합니다. 읽기와 학급 생활을 함께 잇는 수업입니다.</a:t>
             </a:r>
             <a:endParaRPr lang="en-US" sz="1500" dirty="0"/>
           </a:p>
@@ -12261,7 +11424,7 @@
                   <a:srgbClr val="101D42"/>
                 </a:solidFill>
                 <a:latin typeface="Noto Serif KR Black" pitchFamily="34" charset="0"/>
-                <a:ea typeface="Noto Serif KR Black" pitchFamily="34" charset="-127"/>
+                <a:ea typeface="Noto Serif KR Black" pitchFamily="34" charset="-122"/>
                 <a:cs typeface="Noto Serif KR Black" pitchFamily="34" charset="-120"/>
               </a:rPr>
               <a:t>경남의 아이들이 스스로 이해하고 판단하는 사람으로 자라도록,</a:t>
@@ -12281,7 +11444,7 @@
                   <a:srgbClr val="15543C"/>
                 </a:solidFill>
                 <a:latin typeface="Noto Serif KR Black" pitchFamily="34" charset="0"/>
-                <a:ea typeface="Noto Serif KR Black" pitchFamily="34" charset="-127"/>
+                <a:ea typeface="Noto Serif KR Black" pitchFamily="34" charset="-122"/>
                 <a:cs typeface="Noto Serif KR Black" pitchFamily="34" charset="-120"/>
               </a:rPr>
               <a:t>기본 독서교육을 함께 지켜 주십시오.</a:t>
@@ -12323,7 +11486,7 @@
                   <a:srgbClr val="101D42"/>
                 </a:solidFill>
                 <a:latin typeface="Noto Sans KR" pitchFamily="34" charset="0"/>
-                <a:ea typeface="Noto Sans KR" pitchFamily="34" charset="-127"/>
+                <a:ea typeface="Noto Sans KR" pitchFamily="34" charset="-122"/>
                 <a:cs typeface="Noto Sans KR" pitchFamily="34" charset="-120"/>
               </a:rPr>
               <a:t>4 / 4</a:t>

--- a/promo/dl/brochure/bookie-complete-5p-edit.pptx
+++ b/promo/dl/brochure/bookie-complete-5p-edit.pptx
@@ -3975,7 +3975,7 @@
                 <a:ea typeface="Noto Sans KR" pitchFamily="34" charset="-122"/>
                 <a:cs typeface="Noto Sans KR" pitchFamily="34" charset="-120"/>
               </a:rPr>
-              <a:t>26,924건</a:t>
+              <a:t>26,924권</a:t>
             </a:r>
             <a:endParaRPr lang="en-US" sz="2400" dirty="0"/>
           </a:p>
@@ -4331,7 +4331,7 @@
                 <a:ea typeface="Noto Sans KR" pitchFamily="34" charset="-122"/>
                 <a:cs typeface="Noto Sans KR" pitchFamily="34" charset="-120"/>
               </a:rPr>
-              <a:t>* Kreijkes 외(2026), Computers &amp; Education 243, 105514. 중등학생 연구.</a:t>
+              <a:t>* Kreijkes 외(2026), Computers &amp; Education 243, 105514.</a:t>
             </a:r>
             <a:endParaRPr lang="en-US" sz="650" dirty="0"/>
           </a:p>
@@ -5054,7 +5054,7 @@
                 <a:ea typeface="Noto Sans KR" pitchFamily="34" charset="-122"/>
                 <a:cs typeface="Noto Sans KR" pitchFamily="34" charset="-120"/>
               </a:rPr>
-              <a:t>GPT가 요약과 답안을 대신 만드는 동안 학생은 무엇을 직접 읽고 생각할까요.</a:t>
+              <a:t>AI가 요약과 답안을 대신 만드는 동안 학생은 무엇을 직접 읽고 생각할까요.</a:t>
             </a:r>
             <a:endParaRPr lang="en-US" sz="1800" dirty="0"/>
           </a:p>
@@ -9335,7 +9335,7 @@
                 <a:ea typeface="Noto Sans KR" pitchFamily="34" charset="-122"/>
                 <a:cs typeface="Noto Sans KR" pitchFamily="34" charset="-120"/>
               </a:rPr>
-              <a:t>14~15세 중등학생 연구이며, 초등학생이나 부기의 효과를 직접 검증한 결과는 아닙니다.</a:t>
+              <a:t/>
             </a:r>
             <a:endParaRPr lang="en-US" sz="830" dirty="0"/>
           </a:p>
